--- a/presentations/isekai-opencode-overview.pptx
+++ b/presentations/isekai-opencode-overview.pptx
@@ -953,7 +953,7 @@
           <a:p>
             <a:r>
               <a:rPr lang="en-US" dirty="0"/>
-              <a:t>The four ranks. Rimuru is the only rank excluded from race-color branding — it's model-agnostic by rule ('the throne does not choose its horse').</a:t>
+              <a:t>The four ranks, shown with their official portraits from .isekai/portraits/. Rimuru is the only rank excluded from model branding — it's model-agnostic by rule ('the throne does not choose its horse').</a:t>
             </a:r>
             <a:endParaRPr lang="en-US" dirty="0"/>
           </a:p>
@@ -4191,7 +4191,7 @@
       </p:sp>
       <p:pic>
         <p:nvPicPr>
-          <p:cNvPr id="4" name="Image 0" descr="/home/monta/convention-jura/.isekai/tmp/pptx-build/icons/crown.png">    </p:cNvPr>
+          <p:cNvPr id="4" name="Image 0" descr="/home/monta/convention-jura/.isekai/tmp/pptx-build/icons/portraits/rimuru.png">    </p:cNvPr>
           <p:cNvPicPr>
             <a:picLocks noChangeAspect="1"/>
           </p:cNvPicPr>
@@ -4205,8 +4205,8 @@
         </p:blipFill>
         <p:spPr>
           <a:xfrm>
-            <a:off x="896112" y="2103120"/>
-            <a:ext cx="777240" cy="777240"/>
+            <a:off x="896112" y="2167128"/>
+            <a:ext cx="960120" cy="960120"/>
           </a:xfrm>
           <a:prstGeom prst="rect">
             <a:avLst/>
@@ -4221,8 +4221,8 @@
         </p:nvSpPr>
         <p:spPr>
           <a:xfrm>
-            <a:off x="1874520" y="2057400"/>
-            <a:ext cx="3790188" cy="365760"/>
+            <a:off x="2057400" y="2057400"/>
+            <a:ext cx="3625596" cy="411480"/>
           </a:xfrm>
           <a:prstGeom prst="rect">
             <a:avLst/>
@@ -4238,7 +4238,7 @@
               <a:buNone/>
             </a:pPr>
             <a:r>
-              <a:rPr lang="en-US" sz="1500" b="1" dirty="0">
+              <a:rPr lang="en-US" sz="1450" b="1" dirty="0">
                 <a:solidFill>
                   <a:srgbClr val="12182A"/>
                 </a:solidFill>
@@ -4248,7 +4248,7 @@
               </a:rPr>
               <a:t>Rimuru — the session agent</a:t>
             </a:r>
-            <a:endParaRPr lang="en-US" sz="1500" dirty="0"/>
+            <a:endParaRPr lang="en-US" sz="1450" dirty="0"/>
           </a:p>
         </p:txBody>
       </p:sp>
@@ -4260,8 +4260,8 @@
         </p:nvSpPr>
         <p:spPr>
           <a:xfrm>
-            <a:off x="1874520" y="2423160"/>
-            <a:ext cx="3790188" cy="502920"/>
+            <a:off x="2057400" y="2441448"/>
+            <a:ext cx="3625596" cy="1005840"/>
           </a:xfrm>
           <a:prstGeom prst="rect">
             <a:avLst/>
@@ -4280,7 +4280,7 @@
               <a:buNone/>
             </a:pPr>
             <a:r>
-              <a:rPr lang="en-US" sz="1100" dirty="0">
+              <a:rPr lang="en-US" sz="1050" dirty="0">
                 <a:solidFill>
                   <a:srgbClr val="6B7A90"/>
                 </a:solidFill>
@@ -4290,7 +4290,7 @@
               </a:rPr>
               <a:t>Thinks, decides, orders. A machine-global throne body: one agent, installed once per machine, ruling whichever world it stands in. Works through the Elf by default.</a:t>
             </a:r>
-            <a:endParaRPr lang="en-US" sz="1100" dirty="0"/>
+            <a:endParaRPr lang="en-US" sz="1050" dirty="0"/>
           </a:p>
         </p:txBody>
       </p:sp>
@@ -4330,7 +4330,7 @@
       </p:sp>
       <p:pic>
         <p:nvPicPr>
-          <p:cNvPr id="8" name="Image 1" descr="/home/monta/convention-jura/.isekai/tmp/pptx-build/icons/comments.png">    </p:cNvPr>
+          <p:cNvPr id="8" name="Image 1" descr="/home/monta/convention-jura/.isekai/tmp/pptx-build/icons/portraits/elf.png">    </p:cNvPr>
           <p:cNvPicPr>
             <a:picLocks noChangeAspect="1"/>
           </p:cNvPicPr>
@@ -4344,8 +4344,8 @@
         </p:blipFill>
         <p:spPr>
           <a:xfrm>
-            <a:off x="6579108" y="2103120"/>
-            <a:ext cx="777240" cy="777240"/>
+            <a:off x="6579108" y="2167128"/>
+            <a:ext cx="960120" cy="960120"/>
           </a:xfrm>
           <a:prstGeom prst="rect">
             <a:avLst/>
@@ -4360,8 +4360,8 @@
         </p:nvSpPr>
         <p:spPr>
           <a:xfrm>
-            <a:off x="7557516" y="2057400"/>
-            <a:ext cx="3790188" cy="365760"/>
+            <a:off x="7740396" y="2057400"/>
+            <a:ext cx="3625596" cy="411480"/>
           </a:xfrm>
           <a:prstGeom prst="rect">
             <a:avLst/>
@@ -4377,7 +4377,7 @@
               <a:buNone/>
             </a:pPr>
             <a:r>
-              <a:rPr lang="en-US" sz="1500" b="1" dirty="0">
+              <a:rPr lang="en-US" sz="1450" b="1" dirty="0">
                 <a:solidFill>
                   <a:srgbClr val="12182A"/>
                 </a:solidFill>
@@ -4387,7 +4387,7 @@
               </a:rPr>
               <a:t>Elf — the shared mind &amp; voice</a:t>
             </a:r>
-            <a:endParaRPr lang="en-US" sz="1500" dirty="0"/>
+            <a:endParaRPr lang="en-US" sz="1450" dirty="0"/>
           </a:p>
         </p:txBody>
       </p:sp>
@@ -4399,8 +4399,8 @@
         </p:nvSpPr>
         <p:spPr>
           <a:xfrm>
-            <a:off x="7557516" y="2423160"/>
-            <a:ext cx="3790188" cy="502920"/>
+            <a:off x="7740396" y="2441448"/>
+            <a:ext cx="3625596" cy="1005840"/>
           </a:xfrm>
           <a:prstGeom prst="rect">
             <a:avLst/>
@@ -4419,7 +4419,7 @@
               <a:buNone/>
             </a:pPr>
             <a:r>
-              <a:rPr lang="en-US" sz="1100" dirty="0">
+              <a:rPr lang="en-US" sz="1050" dirty="0">
                 <a:solidFill>
                   <a:srgbClr val="6B7A90"/>
                 </a:solidFill>
@@ -4429,7 +4429,7 @@
               </a:rPr>
               <a:t>Thinks across domains, routes work to Orcs, and is the one who speaks back up to the human. Every world gets at least one.</a:t>
             </a:r>
-            <a:endParaRPr lang="en-US" sz="1100" dirty="0"/>
+            <a:endParaRPr lang="en-US" sz="1050" dirty="0"/>
           </a:p>
         </p:txBody>
       </p:sp>
@@ -4469,7 +4469,7 @@
       </p:sp>
       <p:pic>
         <p:nvPicPr>
-          <p:cNvPr id="12" name="Image 2" descr="/home/monta/convention-jura/.isekai/tmp/pptx-build/icons/shield.png">    </p:cNvPr>
+          <p:cNvPr id="12" name="Image 2" descr="/home/monta/convention-jura/.isekai/tmp/pptx-build/icons/portraits/orc.png">    </p:cNvPr>
           <p:cNvPicPr>
             <a:picLocks noChangeAspect="1"/>
           </p:cNvPicPr>
@@ -4483,8 +4483,8 @@
         </p:blipFill>
         <p:spPr>
           <a:xfrm>
-            <a:off x="896112" y="4069080"/>
-            <a:ext cx="777240" cy="777240"/>
+            <a:off x="896112" y="4133088"/>
+            <a:ext cx="960120" cy="960120"/>
           </a:xfrm>
           <a:prstGeom prst="rect">
             <a:avLst/>
@@ -4499,8 +4499,8 @@
         </p:nvSpPr>
         <p:spPr>
           <a:xfrm>
-            <a:off x="1874520" y="4023360"/>
-            <a:ext cx="3790188" cy="365760"/>
+            <a:off x="2057400" y="4023360"/>
+            <a:ext cx="3625596" cy="411480"/>
           </a:xfrm>
           <a:prstGeom prst="rect">
             <a:avLst/>
@@ -4516,7 +4516,7 @@
               <a:buNone/>
             </a:pPr>
             <a:r>
-              <a:rPr lang="en-US" sz="1500" b="1" dirty="0">
+              <a:rPr lang="en-US" sz="1450" b="1" dirty="0">
                 <a:solidFill>
                   <a:srgbClr val="12182A"/>
                 </a:solidFill>
@@ -4526,7 +4526,7 @@
               </a:rPr>
               <a:t>Orc — the domain ruler</a:t>
             </a:r>
-            <a:endParaRPr lang="en-US" sz="1500" dirty="0"/>
+            <a:endParaRPr lang="en-US" sz="1450" dirty="0"/>
           </a:p>
         </p:txBody>
       </p:sp>
@@ -4538,8 +4538,8 @@
         </p:nvSpPr>
         <p:spPr>
           <a:xfrm>
-            <a:off x="1874520" y="4389120"/>
-            <a:ext cx="3790188" cy="502920"/>
+            <a:off x="2057400" y="4407408"/>
+            <a:ext cx="3625596" cy="1005840"/>
           </a:xfrm>
           <a:prstGeom prst="rect">
             <a:avLst/>
@@ -4558,7 +4558,7 @@
               <a:buNone/>
             </a:pPr>
             <a:r>
-              <a:rPr lang="en-US" sz="1100" dirty="0">
+              <a:rPr lang="en-US" sz="1050" dirty="0">
                 <a:solidFill>
                   <a:srgbClr val="6B7A90"/>
                 </a:solidFill>
@@ -4568,7 +4568,7 @@
               </a:rPr>
               <a:t>Rules one domain and holds the gate: verifies the right Slime authored, traits hold, duties done, doc truthful. Nothing lands without its pass.</a:t>
             </a:r>
-            <a:endParaRPr lang="en-US" sz="1100" dirty="0"/>
+            <a:endParaRPr lang="en-US" sz="1050" dirty="0"/>
           </a:p>
         </p:txBody>
       </p:sp>
@@ -4608,7 +4608,7 @@
       </p:sp>
       <p:pic>
         <p:nvPicPr>
-          <p:cNvPr id="16" name="Image 3" descr="/home/monta/convention-jura/.isekai/tmp/pptx-build/icons/database.png">    </p:cNvPr>
+          <p:cNvPr id="16" name="Image 3" descr="/home/monta/convention-jura/.isekai/tmp/pptx-build/icons/portraits/slime.png">    </p:cNvPr>
           <p:cNvPicPr>
             <a:picLocks noChangeAspect="1"/>
           </p:cNvPicPr>
@@ -4622,8 +4622,8 @@
         </p:blipFill>
         <p:spPr>
           <a:xfrm>
-            <a:off x="6579108" y="4069080"/>
-            <a:ext cx="777240" cy="777240"/>
+            <a:off x="6579108" y="4133088"/>
+            <a:ext cx="960120" cy="960120"/>
           </a:xfrm>
           <a:prstGeom prst="rect">
             <a:avLst/>
@@ -4638,8 +4638,8 @@
         </p:nvSpPr>
         <p:spPr>
           <a:xfrm>
-            <a:off x="7557516" y="4023360"/>
-            <a:ext cx="3790188" cy="365760"/>
+            <a:off x="7740396" y="4023360"/>
+            <a:ext cx="3625596" cy="411480"/>
           </a:xfrm>
           <a:prstGeom prst="rect">
             <a:avLst/>
@@ -4655,7 +4655,7 @@
               <a:buNone/>
             </a:pPr>
             <a:r>
-              <a:rPr lang="en-US" sz="1500" b="1" dirty="0">
+              <a:rPr lang="en-US" sz="1450" b="1" dirty="0">
                 <a:solidFill>
                   <a:srgbClr val="12182A"/>
                 </a:solidFill>
@@ -4665,7 +4665,7 @@
               </a:rPr>
               <a:t>Slime — the ground truth</a:t>
             </a:r>
-            <a:endParaRPr lang="en-US" sz="1500" dirty="0"/>
+            <a:endParaRPr lang="en-US" sz="1450" dirty="0"/>
           </a:p>
         </p:txBody>
       </p:sp>
@@ -4677,8 +4677,8 @@
         </p:nvSpPr>
         <p:spPr>
           <a:xfrm>
-            <a:off x="7557516" y="4389120"/>
-            <a:ext cx="3790188" cy="502920"/>
+            <a:off x="7740396" y="4407408"/>
+            <a:ext cx="3625596" cy="1005840"/>
           </a:xfrm>
           <a:prstGeom prst="rect">
             <a:avLst/>
@@ -4697,7 +4697,7 @@
               <a:buNone/>
             </a:pPr>
             <a:r>
-              <a:rPr lang="en-US" sz="1100" dirty="0">
+              <a:rPr lang="en-US" sz="1050" dirty="0">
                 <a:solidFill>
                   <a:srgbClr val="6B7A90"/>
                 </a:solidFill>
@@ -4707,7 +4707,7 @@
               </a:rPr>
               <a:t>One narrow zone, held deeply. Authors changes there directly — its doc is the one fact anyone trusts about that zone.</a:t>
             </a:r>
-            <a:endParaRPr lang="en-US" sz="1100" dirty="0"/>
+            <a:endParaRPr lang="en-US" sz="1050" dirty="0"/>
           </a:p>
         </p:txBody>
       </p:sp>

--- a/presentations/isekai-opencode-overview.pptx
+++ b/presentations/isekai-opencode-overview.pptx
@@ -1481,7 +1481,7 @@
           <a:p>
             <a:r>
               <a:rPr lang="en-US" dirty="0"/>
-              <a:t>Rimuru is deliberately excluded — the throne's mount is the human's choice, never hardcoded. This table is reference guidance today, not yet wired into /mint's actual minting flow.</a:t>
+              <a:t>Rimuru is deliberately excluded — the throne's mount is the human's choice, never hardcoded. Tuned by what each task actually demands, not by rank prestige: narrow scope (Slime) is not the same as low judgment, since a Slime authors real changes — retuned from Haiku to Sonnet 5 default accordingly. This table is reference guidance today, not yet wired into /mint's actual minting flow.</a:t>
             </a:r>
             <a:endParaRPr lang="en-US" dirty="0"/>
           </a:p>
@@ -9590,7 +9590,7 @@
                           <a:ea typeface="Calibri" pitchFamily="34" charset="-122"/>
                           <a:cs typeface="Calibri" pitchFamily="34" charset="-120"/>
                         </a:rPr>
-                        <a:t>Haiku 4.5</a:t>
+                        <a:t>Sonnet 5</a:t>
                       </a:r>
                       <a:endParaRPr lang="en-US" sz="1150" dirty="0">
                         <a:latin typeface="Calibri" charset="0"/>
@@ -9658,7 +9658,7 @@
                           <a:ea typeface="Calibri" pitchFamily="34" charset="-122"/>
                           <a:cs typeface="Calibri" pitchFamily="34" charset="-120"/>
                         </a:rPr>
-                        <a:t>Narrow, well-defined zones — cost efficiency at volume.</a:t>
+                        <a:t>Authors real changes — narrow scope, not low judgment. Haiku only for mechanical zones.</a:t>
                       </a:r>
                       <a:endParaRPr lang="en-US" sz="1150" dirty="0">
                         <a:latin typeface="Calibri" charset="0"/>
@@ -9864,7 +9864,7 @@
                           <a:ea typeface="Calibri" pitchFamily="34" charset="-122"/>
                           <a:cs typeface="Calibri" pitchFamily="34" charset="-120"/>
                         </a:rPr>
-                        <a:t>Rare, human-declared, long-lived — scarcity outweighs cost.</a:t>
+                        <a:t>Cross-session judgment over an archive, or the last systemic check — task-driven, not just rarity.</a:t>
                       </a:r>
                       <a:endParaRPr lang="en-US" sz="1150" dirty="0">
                         <a:latin typeface="Calibri" charset="0"/>

--- a/presentations/isekai-opencode-overview.pptx
+++ b/presentations/isekai-opencode-overview.pptx
@@ -1481,7 +1481,7 @@
           <a:p>
             <a:r>
               <a:rPr lang="en-US" dirty="0"/>
-              <a:t>Rimuru is deliberately excluded — the throne's mount is the human's choice, never hardcoded. Tuned by what each task actually demands, not by rank prestige: narrow scope (Slime) is not the same as low judgment, since a Slime authors real changes — retuned from Haiku to Sonnet 5 default accordingly. This table is reference guidance today, not yet wired into /mint's actual minting flow.</a:t>
+              <a:t>Rimuru is deliberately excluded — the throne's mount is the human's choice, never hardcoded. Tuned by what each task actually demands, not by rank prestige: narrow scope (Slime) is not the same as low judgment, since a Slime authors real changes — retuned from Haiku to Sonnet 5 default accordingly. Ciel was the only office with no Opus escalation path at all; added one for heavy-synthesis pieces (a session report weaving many threads), kept separate from the Fable axis (voice-consistency specifically). This table is reference guidance today, not yet wired into /mint's actual minting flow.</a:t>
             </a:r>
             <a:endParaRPr lang="en-US" dirty="0"/>
           </a:p>
@@ -9178,7 +9178,7 @@
                           <a:ea typeface="Calibri" pitchFamily="34" charset="-122"/>
                           <a:cs typeface="Calibri" pitchFamily="34" charset="-120"/>
                         </a:rPr>
-                        <a:t>Sonnet 5 · Fable 5.1</a:t>
+                        <a:t>Sonnet 5 · Opus 5 · Fable 5.1</a:t>
                       </a:r>
                       <a:endParaRPr lang="en-US" sz="1150" dirty="0">
                         <a:latin typeface="Calibri" charset="0"/>
@@ -9246,7 +9246,7 @@
                           <a:ea typeface="Calibri" pitchFamily="34" charset="-122"/>
                           <a:cs typeface="Calibri" pitchFamily="34" charset="-120"/>
                         </a:rPr>
-                        <a:t>Default prose; Fable specifically when voice is the point.</a:t>
+                        <a:t>Default prose; Opus for heavy synthesis; Fable when voice is the point.</a:t>
                       </a:r>
                       <a:endParaRPr lang="en-US" sz="1150" dirty="0">
                         <a:latin typeface="Calibri" charset="0"/>

--- a/presentations/isekai-opencode-overview.pptx
+++ b/presentations/isekai-opencode-overview.pptx
@@ -17,9 +17,10 @@
     <p:sldId id="265" r:id="rId11"/>
     <p:sldId id="266" r:id="rId12"/>
     <p:sldId id="267" r:id="rId13"/>
+    <p:sldId id="268" r:id="rId14"/>
   </p:sldIdLst>
   <p:notesMasterIdLst>
-    <p:notesMasterId r:id="rId14"/>
+    <p:notesMasterId r:id="rId15"/>
   </p:notesMasterIdLst>
   <p:sldSz cx="12192000" cy="6858000"/>
   <p:notesSz cx="6858000" cy="12192000"/>
@@ -689,7 +690,7 @@
           <a:p>
             <a:r>
               <a:rPr lang="en-US" dirty="0"/>
-              <a:t>Appendix, distinctly styled (slate background) to mark it as supplementary to the OpenCode-perspective main deck. The advantage: adopting Isekai isn't a bet on one ecosystem.</a:t>
+              <a:t>The full sequence, grounded in a real fix from this session rather than a hypothetical. Context flows down (Rimuru -&gt; Elf -&gt; Orc -&gt; Slime); the gate (Orc + Raphael) is what stands between a Slime's change and it landing. Ciel's journaling step runs on Sonnet 5, its own floor -- the deterministic-script principle still applies, but only to inputs mechanical enough to bypass the Ciel office entirely (a raw field append with no prose); the moment Ciel itself is actually dispatched, its tier never drops below Raphael's, per the canon's own Great Sage -&gt; Raphael -&gt; Ciel evolutionary ordering.</a:t>
             </a:r>
             <a:endParaRPr lang="en-US" dirty="0"/>
           </a:p>
@@ -777,7 +778,7 @@
           <a:p>
             <a:r>
               <a:rPr lang="en-US" dirty="0"/>
-              <a:t>Closing slide. Quote lifted directly from isekai.md's own opening.</a:t>
+              <a:t>Appendix, distinctly styled (slate background) to mark it as supplementary to the OpenCode-perspective main deck. The advantage: adopting Isekai isn't a bet on one ecosystem.</a:t>
             </a:r>
             <a:endParaRPr lang="en-US" dirty="0"/>
           </a:p>
@@ -801,6 +802,94 @@
             <a:fld id="{F7021451-1387-4CA6-816F-3879F97B5CBC}" type="slidenum">
               <a:rPr lang="en-US"/>
               <a:t>12</a:t>
+            </a:fld>
+            <a:endParaRPr lang="en-US"/>
+          </a:p>
+        </p:txBody>
+      </p:sp>
+    </p:spTree>
+    <p:extLst>
+      <p:ext uri="{BB962C8B-B14F-4D97-AF65-F5344CB8AC3E}">
+        <p14:creationId xmlns:p14="http://schemas.microsoft.com/office/powerpoint/2010/main" val="1024086991"/>
+      </p:ext>
+    </p:extLst>
+  </p:cSld>
+  <p:clrMapOvr>
+    <a:masterClrMapping/>
+  </p:clrMapOvr>
+</p:notes>
+</file>
+
+<file path=ppt/notesSlides/notesSlide13.xml><?xml version="1.0" encoding="utf-8"?>
+<p:notes xmlns:a="http://schemas.openxmlformats.org/drawingml/2006/main" xmlns:r="http://schemas.openxmlformats.org/officeDocument/2006/relationships" xmlns:p="http://schemas.openxmlformats.org/presentationml/2006/main">
+  <p:cSld>
+    <p:spTree>
+      <p:nvGrpSpPr>
+        <p:cNvPr id="1" name=""/>
+        <p:cNvGrpSpPr/>
+        <p:nvPr/>
+      </p:nvGrpSpPr>
+      <p:grpSpPr>
+        <a:xfrm>
+          <a:off x="0" y="0"/>
+          <a:ext cx="0" cy="0"/>
+          <a:chOff x="0" y="0"/>
+          <a:chExt cx="0" cy="0"/>
+        </a:xfrm>
+      </p:grpSpPr>
+      <p:sp>
+        <p:nvSpPr>
+          <p:cNvPr id="2" name="Slide Image Placeholder 1"/>
+          <p:cNvSpPr>
+            <a:spLocks noGrp="1" noRot="1" noChangeAspect="1"/>
+          </p:cNvSpPr>
+          <p:nvPr>
+            <p:ph type="sldImg"/>
+          </p:nvPr>
+        </p:nvSpPr>
+        <p:spPr/>
+      </p:sp>
+      <p:sp>
+        <p:nvSpPr>
+          <p:cNvPr id="3" name="Notes Placeholder 2"/>
+          <p:cNvSpPr>
+            <a:spLocks noGrp="1"/>
+          </p:cNvSpPr>
+          <p:nvPr>
+            <p:ph type="body" idx="1"/>
+          </p:nvPr>
+        </p:nvSpPr>
+        <p:spPr/>
+        <p:txBody>
+          <a:bodyPr/>
+          <a:lstStyle/>
+          <a:p>
+            <a:r>
+              <a:rPr lang="en-US" dirty="0"/>
+              <a:t>Closing slide. Quote lifted directly from isekai.md's own opening.</a:t>
+            </a:r>
+            <a:endParaRPr lang="en-US" dirty="0"/>
+          </a:p>
+        </p:txBody>
+      </p:sp>
+      <p:sp>
+        <p:nvSpPr>
+          <p:cNvPr id="4" name="Slide Number Placeholder 3"/>
+          <p:cNvSpPr>
+            <a:spLocks noGrp="1"/>
+          </p:cNvSpPr>
+          <p:nvPr>
+            <p:ph type="sldNum" sz="quarter" idx="10"/>
+          </p:nvPr>
+        </p:nvSpPr>
+        <p:spPr/>
+        <p:txBody>
+          <a:bodyPr/>
+          <a:lstStyle/>
+          <a:p>
+            <a:fld id="{F7021451-1387-4CA6-816F-3879F97B5CBC}" type="slidenum">
+              <a:rPr lang="en-US"/>
+              <a:t>13</a:t>
             </a:fld>
             <a:endParaRPr lang="en-US"/>
           </a:p>
@@ -2806,6 +2895,1417 @@
 <file path=ppt/slides/slide11.xml><?xml version="1.0" encoding="utf-8"?>
 <p:sld xmlns:a="http://schemas.openxmlformats.org/drawingml/2006/main" xmlns:r="http://schemas.openxmlformats.org/officeDocument/2006/relationships" xmlns:p="http://schemas.openxmlformats.org/presentationml/2006/main">
   <p:cSld name="Slide 11">
+    <p:spTree>
+      <p:nvGrpSpPr>
+        <p:cNvPr id="1" name=""/>
+        <p:cNvGrpSpPr/>
+        <p:nvPr/>
+      </p:nvGrpSpPr>
+      <p:grpSpPr>
+        <a:xfrm>
+          <a:off x="0" y="0"/>
+          <a:ext cx="0" cy="0"/>
+          <a:chOff x="0" y="0"/>
+          <a:chExt cx="0" cy="0"/>
+        </a:xfrm>
+      </p:grpSpPr>
+      <p:sp>
+        <p:nvSpPr>
+          <p:cNvPr id="2" name="Text 0"/>
+          <p:cNvSpPr txBox="1"/>
+          <p:nvPr/>
+        </p:nvSpPr>
+        <p:spPr>
+          <a:xfrm>
+            <a:off x="640080" y="502920"/>
+            <a:ext cx="10908792" cy="822960"/>
+          </a:xfrm>
+          <a:prstGeom prst="rect">
+            <a:avLst/>
+          </a:prstGeom>
+          <a:noFill/>
+          <a:ln/>
+        </p:spPr>
+        <p:txBody>
+          <a:bodyPr wrap="square" lIns="0" tIns="0" rIns="0" bIns="0" rtlCol="0" anchor="ctr"/>
+          <a:lstStyle/>
+          <a:p>
+            <a:pPr indent="0" marL="0">
+              <a:buNone/>
+            </a:pPr>
+            <a:r>
+              <a:rPr lang="en-US" sz="3000" b="1" dirty="0">
+                <a:solidFill>
+                  <a:srgbClr val="12182A"/>
+                </a:solidFill>
+                <a:latin typeface="Cambria" pitchFamily="34" charset="0"/>
+                <a:ea typeface="Cambria" pitchFamily="34" charset="-122"/>
+                <a:cs typeface="Cambria" pitchFamily="34" charset="-120"/>
+              </a:rPr>
+              <a:t>One fix, start to finish</a:t>
+            </a:r>
+            <a:endParaRPr lang="en-US" sz="3000" dirty="0"/>
+          </a:p>
+        </p:txBody>
+      </p:sp>
+      <p:sp>
+        <p:nvSpPr>
+          <p:cNvPr id="3" name="Text 1"/>
+          <p:cNvSpPr txBox="1"/>
+          <p:nvPr/>
+        </p:nvSpPr>
+        <p:spPr>
+          <a:xfrm>
+            <a:off x="640080" y="1143000"/>
+            <a:ext cx="10908792" cy="502920"/>
+          </a:xfrm>
+          <a:prstGeom prst="rect">
+            <a:avLst/>
+          </a:prstGeom>
+          <a:noFill/>
+          <a:ln/>
+        </p:spPr>
+        <p:txBody>
+          <a:bodyPr wrap="square" lIns="0" tIns="0" rIns="0" bIns="0" rtlCol="0" anchor="ctr"/>
+          <a:lstStyle/>
+          <a:p>
+            <a:pPr indent="0" marL="0">
+              <a:buNone/>
+            </a:pPr>
+            <a:r>
+              <a:rPr lang="en-US" sz="1150" dirty="0">
+                <a:solidFill>
+                  <a:srgbClr val="6B7A90"/>
+                </a:solidFill>
+                <a:latin typeface="Calibri" pitchFamily="34" charset="0"/>
+                <a:ea typeface="Calibri" pitchFamily="34" charset="-122"/>
+                <a:cs typeface="Calibri" pitchFamily="34" charset="-120"/>
+              </a:rPr>
+              <a:t>Not hypothetical — this is how </a:t>
+            </a:r>
+            <a:pPr indent="0" marL="0">
+              <a:buNone/>
+            </a:pPr>
+            <a:r>
+              <a:rPr lang="en-US" sz="1150" dirty="0">
+                <a:solidFill>
+                  <a:srgbClr val="2695BD"/>
+                </a:solidFill>
+                <a:latin typeface="Courier New" pitchFamily="34" charset="0"/>
+                <a:ea typeface="Courier New" pitchFamily="34" charset="-122"/>
+                <a:cs typeface="Courier New" pitchFamily="34" charset="-120"/>
+              </a:rPr>
+              <a:t>slime-db-role</a:t>
+            </a:r>
+            <a:pPr indent="0" marL="0">
+              <a:buNone/>
+            </a:pPr>
+            <a:r>
+              <a:rPr lang="en-US" sz="1150" dirty="0">
+                <a:solidFill>
+                  <a:srgbClr val="6B7A90"/>
+                </a:solidFill>
+                <a:latin typeface="Calibri" pitchFamily="34" charset="0"/>
+                <a:ea typeface="Calibri" pitchFamily="34" charset="-122"/>
+                <a:cs typeface="Calibri" pitchFamily="34" charset="-120"/>
+              </a:rPr>
+              <a:t>'s </a:t>
+            </a:r>
+            <a:pPr indent="0" marL="0">
+              <a:buNone/>
+            </a:pPr>
+            <a:r>
+              <a:rPr lang="en-US" sz="1150" dirty="0">
+                <a:solidFill>
+                  <a:srgbClr val="2695BD"/>
+                </a:solidFill>
+                <a:latin typeface="Courier New" pitchFamily="34" charset="0"/>
+                <a:ea typeface="Courier New" pitchFamily="34" charset="-122"/>
+                <a:cs typeface="Courier New" pitchFamily="34" charset="-120"/>
+              </a:rPr>
+              <a:t>Update</a:t>
+            </a:r>
+            <a:pPr indent="0" marL="0">
+              <a:buNone/>
+            </a:pPr>
+            <a:r>
+              <a:rPr lang="en-US" sz="1150" dirty="0">
+                <a:solidFill>
+                  <a:srgbClr val="6B7A90"/>
+                </a:solidFill>
+                <a:latin typeface="Calibri" pitchFamily="34" charset="0"/>
+                <a:ea typeface="Calibri" pitchFamily="34" charset="-122"/>
+                <a:cs typeface="Calibri" pitchFamily="34" charset="-120"/>
+              </a:rPr>
+              <a:t> path — a raw collection delete where every sibling used the proper </a:t>
+            </a:r>
+            <a:pPr indent="0" marL="0">
+              <a:buNone/>
+            </a:pPr>
+            <a:r>
+              <a:rPr lang="en-US" sz="1150" dirty="0">
+                <a:solidFill>
+                  <a:srgbClr val="2695BD"/>
+                </a:solidFill>
+                <a:latin typeface="Courier New" pitchFamily="34" charset="0"/>
+                <a:ea typeface="Courier New" pitchFamily="34" charset="-122"/>
+                <a:cs typeface="Courier New" pitchFamily="34" charset="-120"/>
+              </a:rPr>
+              <a:t>dropRole</a:t>
+            </a:r>
+            <a:pPr indent="0" marL="0">
+              <a:buNone/>
+            </a:pPr>
+            <a:r>
+              <a:rPr lang="en-US" sz="1150" dirty="0">
+                <a:solidFill>
+                  <a:srgbClr val="6B7A90"/>
+                </a:solidFill>
+                <a:latin typeface="Calibri" pitchFamily="34" charset="0"/>
+                <a:ea typeface="Calibri" pitchFamily="34" charset="-122"/>
+                <a:cs typeface="Calibri" pitchFamily="34" charset="-120"/>
+              </a:rPr>
+              <a:t> command — actually got fixed, found by </a:t>
+            </a:r>
+            <a:pPr indent="0" marL="0">
+              <a:buNone/>
+            </a:pPr>
+            <a:r>
+              <a:rPr lang="en-US" sz="1150" dirty="0">
+                <a:solidFill>
+                  <a:srgbClr val="BD8C24"/>
+                </a:solidFill>
+                <a:latin typeface="Courier New" pitchFamily="34" charset="0"/>
+                <a:ea typeface="Courier New" pitchFamily="34" charset="-122"/>
+                <a:cs typeface="Courier New" pitchFamily="34" charset="-120"/>
+              </a:rPr>
+              <a:t>/genesis --depth deep</a:t>
+            </a:r>
+            <a:pPr indent="0" marL="0">
+              <a:buNone/>
+            </a:pPr>
+            <a:r>
+              <a:rPr lang="en-US" sz="1150" dirty="0">
+                <a:solidFill>
+                  <a:srgbClr val="6B7A90"/>
+                </a:solidFill>
+                <a:latin typeface="Calibri" pitchFamily="34" charset="0"/>
+                <a:ea typeface="Calibri" pitchFamily="34" charset="-122"/>
+                <a:cs typeface="Calibri" pitchFamily="34" charset="-120"/>
+              </a:rPr>
+              <a:t>'s git archaeology.</a:t>
+            </a:r>
+            <a:endParaRPr lang="en-US" sz="1150" dirty="0"/>
+          </a:p>
+        </p:txBody>
+      </p:sp>
+      <p:sp>
+        <p:nvSpPr>
+          <p:cNvPr id="4" name="Shape 2"/>
+          <p:cNvSpPr/>
+          <p:nvPr/>
+        </p:nvSpPr>
+        <p:spPr>
+          <a:xfrm>
+            <a:off x="822960" y="2240280"/>
+            <a:ext cx="0" cy="260604"/>
+          </a:xfrm>
+          <a:prstGeom prst="line">
+            <a:avLst/>
+          </a:prstGeom>
+          <a:noFill/>
+          <a:ln w="19050">
+            <a:solidFill>
+              <a:srgbClr val="D7DEE9"/>
+            </a:solidFill>
+            <a:prstDash val="solid"/>
+          </a:ln>
+        </p:spPr>
+      </p:sp>
+      <p:sp>
+        <p:nvSpPr>
+          <p:cNvPr id="5" name="Shape 3"/>
+          <p:cNvSpPr/>
+          <p:nvPr/>
+        </p:nvSpPr>
+        <p:spPr>
+          <a:xfrm>
+            <a:off x="640080" y="1874520"/>
+            <a:ext cx="365760" cy="365760"/>
+          </a:xfrm>
+          <a:prstGeom prst="ellipse">
+            <a:avLst/>
+          </a:prstGeom>
+          <a:solidFill>
+            <a:srgbClr val="3A4250"/>
+          </a:solidFill>
+          <a:ln/>
+        </p:spPr>
+      </p:sp>
+      <p:sp>
+        <p:nvSpPr>
+          <p:cNvPr id="6" name="Text 4"/>
+          <p:cNvSpPr txBox="1"/>
+          <p:nvPr/>
+        </p:nvSpPr>
+        <p:spPr>
+          <a:xfrm>
+            <a:off x="640080" y="1874520"/>
+            <a:ext cx="365760" cy="365760"/>
+          </a:xfrm>
+          <a:prstGeom prst="rect">
+            <a:avLst/>
+          </a:prstGeom>
+          <a:noFill/>
+          <a:ln/>
+        </p:spPr>
+        <p:txBody>
+          <a:bodyPr wrap="square" lIns="0" tIns="0" rIns="0" bIns="0" rtlCol="0" anchor="ctr"/>
+          <a:lstStyle/>
+          <a:p>
+            <a:pPr algn="ctr" indent="0" marL="0">
+              <a:buNone/>
+            </a:pPr>
+            <a:r>
+              <a:rPr lang="en-US" sz="1500" b="1" dirty="0">
+                <a:solidFill>
+                  <a:srgbClr val="FFFFFF"/>
+                </a:solidFill>
+                <a:latin typeface="Cambria" pitchFamily="34" charset="0"/>
+                <a:ea typeface="Cambria" pitchFamily="34" charset="-122"/>
+                <a:cs typeface="Cambria" pitchFamily="34" charset="-120"/>
+              </a:rPr>
+              <a:t>1</a:t>
+            </a:r>
+            <a:endParaRPr lang="en-US" sz="1500" dirty="0"/>
+          </a:p>
+        </p:txBody>
+      </p:sp>
+      <p:sp>
+        <p:nvSpPr>
+          <p:cNvPr id="7" name="Text 5"/>
+          <p:cNvSpPr txBox="1"/>
+          <p:nvPr/>
+        </p:nvSpPr>
+        <p:spPr>
+          <a:xfrm>
+            <a:off x="1234440" y="1819656"/>
+            <a:ext cx="1417320" cy="457200"/>
+          </a:xfrm>
+          <a:prstGeom prst="rect">
+            <a:avLst/>
+          </a:prstGeom>
+          <a:noFill/>
+          <a:ln/>
+        </p:spPr>
+        <p:txBody>
+          <a:bodyPr wrap="square" lIns="0" tIns="0" rIns="0" bIns="0" rtlCol="0" anchor="t"/>
+          <a:lstStyle/>
+          <a:p>
+            <a:pPr indent="0" marL="0">
+              <a:buNone/>
+            </a:pPr>
+            <a:r>
+              <a:rPr lang="en-US" sz="1300" b="1" dirty="0">
+                <a:solidFill>
+                  <a:srgbClr val="12182A"/>
+                </a:solidFill>
+                <a:latin typeface="Cambria" pitchFamily="34" charset="0"/>
+                <a:ea typeface="Cambria" pitchFamily="34" charset="-122"/>
+                <a:cs typeface="Cambria" pitchFamily="34" charset="-120"/>
+              </a:rPr>
+              <a:t>Rimuru</a:t>
+            </a:r>
+            <a:endParaRPr lang="en-US" sz="1300" dirty="0"/>
+          </a:p>
+        </p:txBody>
+      </p:sp>
+      <p:sp>
+        <p:nvSpPr>
+          <p:cNvPr id="8" name="Text 6"/>
+          <p:cNvSpPr txBox="1"/>
+          <p:nvPr/>
+        </p:nvSpPr>
+        <p:spPr>
+          <a:xfrm>
+            <a:off x="2606040" y="1810512"/>
+            <a:ext cx="8942832" cy="626364"/>
+          </a:xfrm>
+          <a:prstGeom prst="rect">
+            <a:avLst/>
+          </a:prstGeom>
+          <a:noFill/>
+          <a:ln/>
+        </p:spPr>
+        <p:txBody>
+          <a:bodyPr wrap="square" lIns="0" tIns="0" rIns="0" bIns="0" rtlCol="0" anchor="t"/>
+          <a:lstStyle/>
+          <a:p>
+            <a:pPr indent="0" marL="0">
+              <a:lnSpc>
+                <a:spcPct val="108000"/>
+              </a:lnSpc>
+              <a:buNone/>
+            </a:pPr>
+            <a:r>
+              <a:rPr lang="en-US" sz="1080" dirty="0">
+                <a:solidFill>
+                  <a:srgbClr val="6B7A90"/>
+                </a:solidFill>
+                <a:latin typeface="Calibri" pitchFamily="34" charset="0"/>
+                <a:ea typeface="Calibri" pitchFamily="34" charset="-122"/>
+                <a:cs typeface="Calibri" pitchFamily="34" charset="-120"/>
+              </a:rPr>
+              <a:t>Confirms scope with the human, routes the fix down.</a:t>
+            </a:r>
+            <a:endParaRPr lang="en-US" sz="1080" dirty="0"/>
+          </a:p>
+        </p:txBody>
+      </p:sp>
+      <p:sp>
+        <p:nvSpPr>
+          <p:cNvPr id="9" name="Shape 7"/>
+          <p:cNvSpPr/>
+          <p:nvPr/>
+        </p:nvSpPr>
+        <p:spPr>
+          <a:xfrm>
+            <a:off x="822960" y="2866644"/>
+            <a:ext cx="0" cy="260604"/>
+          </a:xfrm>
+          <a:prstGeom prst="line">
+            <a:avLst/>
+          </a:prstGeom>
+          <a:noFill/>
+          <a:ln w="19050">
+            <a:solidFill>
+              <a:srgbClr val="D7DEE9"/>
+            </a:solidFill>
+            <a:prstDash val="solid"/>
+          </a:ln>
+        </p:spPr>
+      </p:sp>
+      <p:sp>
+        <p:nvSpPr>
+          <p:cNvPr id="10" name="Shape 8"/>
+          <p:cNvSpPr/>
+          <p:nvPr/>
+        </p:nvSpPr>
+        <p:spPr>
+          <a:xfrm>
+            <a:off x="640080" y="2500884"/>
+            <a:ext cx="365760" cy="365760"/>
+          </a:xfrm>
+          <a:prstGeom prst="ellipse">
+            <a:avLst/>
+          </a:prstGeom>
+          <a:solidFill>
+            <a:srgbClr val="BD8C24"/>
+          </a:solidFill>
+          <a:ln/>
+        </p:spPr>
+      </p:sp>
+      <p:sp>
+        <p:nvSpPr>
+          <p:cNvPr id="11" name="Text 9"/>
+          <p:cNvSpPr txBox="1"/>
+          <p:nvPr/>
+        </p:nvSpPr>
+        <p:spPr>
+          <a:xfrm>
+            <a:off x="640080" y="2500884"/>
+            <a:ext cx="365760" cy="365760"/>
+          </a:xfrm>
+          <a:prstGeom prst="rect">
+            <a:avLst/>
+          </a:prstGeom>
+          <a:noFill/>
+          <a:ln/>
+        </p:spPr>
+        <p:txBody>
+          <a:bodyPr wrap="square" lIns="0" tIns="0" rIns="0" bIns="0" rtlCol="0" anchor="ctr"/>
+          <a:lstStyle/>
+          <a:p>
+            <a:pPr algn="ctr" indent="0" marL="0">
+              <a:buNone/>
+            </a:pPr>
+            <a:r>
+              <a:rPr lang="en-US" sz="1500" b="1" dirty="0">
+                <a:solidFill>
+                  <a:srgbClr val="FFFFFF"/>
+                </a:solidFill>
+                <a:latin typeface="Cambria" pitchFamily="34" charset="0"/>
+                <a:ea typeface="Cambria" pitchFamily="34" charset="-122"/>
+                <a:cs typeface="Cambria" pitchFamily="34" charset="-120"/>
+              </a:rPr>
+              <a:t>2</a:t>
+            </a:r>
+            <a:endParaRPr lang="en-US" sz="1500" dirty="0"/>
+          </a:p>
+        </p:txBody>
+      </p:sp>
+      <p:sp>
+        <p:nvSpPr>
+          <p:cNvPr id="12" name="Text 10"/>
+          <p:cNvSpPr txBox="1"/>
+          <p:nvPr/>
+        </p:nvSpPr>
+        <p:spPr>
+          <a:xfrm>
+            <a:off x="1234440" y="2446020"/>
+            <a:ext cx="1417320" cy="457200"/>
+          </a:xfrm>
+          <a:prstGeom prst="rect">
+            <a:avLst/>
+          </a:prstGeom>
+          <a:noFill/>
+          <a:ln/>
+        </p:spPr>
+        <p:txBody>
+          <a:bodyPr wrap="square" lIns="0" tIns="0" rIns="0" bIns="0" rtlCol="0" anchor="t"/>
+          <a:lstStyle/>
+          <a:p>
+            <a:pPr indent="0" marL="0">
+              <a:buNone/>
+            </a:pPr>
+            <a:r>
+              <a:rPr lang="en-US" sz="1300" b="1" dirty="0">
+                <a:solidFill>
+                  <a:srgbClr val="12182A"/>
+                </a:solidFill>
+                <a:latin typeface="Cambria" pitchFamily="34" charset="0"/>
+                <a:ea typeface="Cambria" pitchFamily="34" charset="-122"/>
+                <a:cs typeface="Cambria" pitchFamily="34" charset="-120"/>
+              </a:rPr>
+              <a:t>Elf</a:t>
+            </a:r>
+            <a:endParaRPr lang="en-US" sz="1300" dirty="0"/>
+          </a:p>
+        </p:txBody>
+      </p:sp>
+      <p:sp>
+        <p:nvSpPr>
+          <p:cNvPr id="13" name="Text 11"/>
+          <p:cNvSpPr txBox="1"/>
+          <p:nvPr/>
+        </p:nvSpPr>
+        <p:spPr>
+          <a:xfrm>
+            <a:off x="2606040" y="2436876"/>
+            <a:ext cx="8942832" cy="626364"/>
+          </a:xfrm>
+          <a:prstGeom prst="rect">
+            <a:avLst/>
+          </a:prstGeom>
+          <a:noFill/>
+          <a:ln/>
+        </p:spPr>
+        <p:txBody>
+          <a:bodyPr wrap="square" lIns="0" tIns="0" rIns="0" bIns="0" rtlCol="0" anchor="t"/>
+          <a:lstStyle/>
+          <a:p>
+            <a:pPr indent="0" marL="0">
+              <a:lnSpc>
+                <a:spcPct val="108000"/>
+              </a:lnSpc>
+              <a:buNone/>
+            </a:pPr>
+            <a:r>
+              <a:rPr lang="en-US" sz="1080" dirty="0">
+                <a:solidFill>
+                  <a:srgbClr val="6B7A90"/>
+                </a:solidFill>
+                <a:latin typeface="Calibri" pitchFamily="34" charset="0"/>
+                <a:ea typeface="Calibri" pitchFamily="34" charset="-122"/>
+                <a:cs typeface="Calibri" pitchFamily="34" charset="-120"/>
+              </a:rPr>
+              <a:t>One domain, nothing to arbitrate — routes straight to the Orc.</a:t>
+            </a:r>
+            <a:endParaRPr lang="en-US" sz="1080" dirty="0"/>
+          </a:p>
+        </p:txBody>
+      </p:sp>
+      <p:sp>
+        <p:nvSpPr>
+          <p:cNvPr id="14" name="Shape 12"/>
+          <p:cNvSpPr/>
+          <p:nvPr/>
+        </p:nvSpPr>
+        <p:spPr>
+          <a:xfrm>
+            <a:off x="822960" y="3493008"/>
+            <a:ext cx="0" cy="260604"/>
+          </a:xfrm>
+          <a:prstGeom prst="line">
+            <a:avLst/>
+          </a:prstGeom>
+          <a:noFill/>
+          <a:ln w="19050">
+            <a:solidFill>
+              <a:srgbClr val="D7DEE9"/>
+            </a:solidFill>
+            <a:prstDash val="solid"/>
+          </a:ln>
+        </p:spPr>
+      </p:sp>
+      <p:sp>
+        <p:nvSpPr>
+          <p:cNvPr id="15" name="Shape 13"/>
+          <p:cNvSpPr/>
+          <p:nvPr/>
+        </p:nvSpPr>
+        <p:spPr>
+          <a:xfrm>
+            <a:off x="640080" y="3127248"/>
+            <a:ext cx="365760" cy="365760"/>
+          </a:xfrm>
+          <a:prstGeom prst="ellipse">
+            <a:avLst/>
+          </a:prstGeom>
+          <a:solidFill>
+            <a:srgbClr val="7C5CD6"/>
+          </a:solidFill>
+          <a:ln/>
+        </p:spPr>
+      </p:sp>
+      <p:sp>
+        <p:nvSpPr>
+          <p:cNvPr id="16" name="Text 14"/>
+          <p:cNvSpPr txBox="1"/>
+          <p:nvPr/>
+        </p:nvSpPr>
+        <p:spPr>
+          <a:xfrm>
+            <a:off x="640080" y="3127248"/>
+            <a:ext cx="365760" cy="365760"/>
+          </a:xfrm>
+          <a:prstGeom prst="rect">
+            <a:avLst/>
+          </a:prstGeom>
+          <a:noFill/>
+          <a:ln/>
+        </p:spPr>
+        <p:txBody>
+          <a:bodyPr wrap="square" lIns="0" tIns="0" rIns="0" bIns="0" rtlCol="0" anchor="ctr"/>
+          <a:lstStyle/>
+          <a:p>
+            <a:pPr algn="ctr" indent="0" marL="0">
+              <a:buNone/>
+            </a:pPr>
+            <a:r>
+              <a:rPr lang="en-US" sz="1500" b="1" dirty="0">
+                <a:solidFill>
+                  <a:srgbClr val="FFFFFF"/>
+                </a:solidFill>
+                <a:latin typeface="Cambria" pitchFamily="34" charset="0"/>
+                <a:ea typeface="Cambria" pitchFamily="34" charset="-122"/>
+                <a:cs typeface="Cambria" pitchFamily="34" charset="-120"/>
+              </a:rPr>
+              <a:t>3</a:t>
+            </a:r>
+            <a:endParaRPr lang="en-US" sz="1500" dirty="0"/>
+          </a:p>
+        </p:txBody>
+      </p:sp>
+      <p:sp>
+        <p:nvSpPr>
+          <p:cNvPr id="17" name="Text 15"/>
+          <p:cNvSpPr txBox="1"/>
+          <p:nvPr/>
+        </p:nvSpPr>
+        <p:spPr>
+          <a:xfrm>
+            <a:off x="1234440" y="3072384"/>
+            <a:ext cx="1417320" cy="457200"/>
+          </a:xfrm>
+          <a:prstGeom prst="rect">
+            <a:avLst/>
+          </a:prstGeom>
+          <a:noFill/>
+          <a:ln/>
+        </p:spPr>
+        <p:txBody>
+          <a:bodyPr wrap="square" lIns="0" tIns="0" rIns="0" bIns="0" rtlCol="0" anchor="t"/>
+          <a:lstStyle/>
+          <a:p>
+            <a:pPr indent="0" marL="0">
+              <a:buNone/>
+            </a:pPr>
+            <a:r>
+              <a:rPr lang="en-US" sz="1300" b="1" dirty="0">
+                <a:solidFill>
+                  <a:srgbClr val="12182A"/>
+                </a:solidFill>
+                <a:latin typeface="Cambria" pitchFamily="34" charset="0"/>
+                <a:ea typeface="Cambria" pitchFamily="34" charset="-122"/>
+                <a:cs typeface="Cambria" pitchFamily="34" charset="-120"/>
+              </a:rPr>
+              <a:t>Orc</a:t>
+            </a:r>
+            <a:endParaRPr lang="en-US" sz="1300" dirty="0"/>
+          </a:p>
+        </p:txBody>
+      </p:sp>
+      <p:sp>
+        <p:nvSpPr>
+          <p:cNvPr id="18" name="Text 16"/>
+          <p:cNvSpPr txBox="1"/>
+          <p:nvPr/>
+        </p:nvSpPr>
+        <p:spPr>
+          <a:xfrm>
+            <a:off x="2606040" y="3063240"/>
+            <a:ext cx="8942832" cy="626364"/>
+          </a:xfrm>
+          <a:prstGeom prst="rect">
+            <a:avLst/>
+          </a:prstGeom>
+          <a:noFill/>
+          <a:ln/>
+        </p:spPr>
+        <p:txBody>
+          <a:bodyPr wrap="square" lIns="0" tIns="0" rIns="0" bIns="0" rtlCol="0" anchor="t"/>
+          <a:lstStyle/>
+          <a:p>
+            <a:pPr indent="0" marL="0">
+              <a:lnSpc>
+                <a:spcPct val="108000"/>
+              </a:lnSpc>
+              <a:buNone/>
+            </a:pPr>
+            <a:r>
+              <a:rPr lang="en-US" sz="1080" dirty="0">
+                <a:solidFill>
+                  <a:srgbClr val="6B7A90"/>
+                </a:solidFill>
+                <a:latin typeface="Calibri" pitchFamily="34" charset="0"/>
+                <a:ea typeface="Calibri" pitchFamily="34" charset="-122"/>
+                <a:cs typeface="Calibri" pitchFamily="34" charset="-120"/>
+              </a:rPr>
+              <a:t>Dispatches Great Sage for recon (read-wide, terse facts: every raw-delete / dropRole site), then the owning Slime.</a:t>
+            </a:r>
+            <a:endParaRPr lang="en-US" sz="1080" dirty="0"/>
+          </a:p>
+        </p:txBody>
+      </p:sp>
+      <p:sp>
+        <p:nvSpPr>
+          <p:cNvPr id="19" name="Shape 17"/>
+          <p:cNvSpPr/>
+          <p:nvPr/>
+        </p:nvSpPr>
+        <p:spPr>
+          <a:xfrm>
+            <a:off x="822960" y="4119372"/>
+            <a:ext cx="0" cy="260604"/>
+          </a:xfrm>
+          <a:prstGeom prst="line">
+            <a:avLst/>
+          </a:prstGeom>
+          <a:noFill/>
+          <a:ln w="19050">
+            <a:solidFill>
+              <a:srgbClr val="D7DEE9"/>
+            </a:solidFill>
+            <a:prstDash val="solid"/>
+          </a:ln>
+        </p:spPr>
+      </p:sp>
+      <p:sp>
+        <p:nvSpPr>
+          <p:cNvPr id="20" name="Shape 18"/>
+          <p:cNvSpPr/>
+          <p:nvPr/>
+        </p:nvSpPr>
+        <p:spPr>
+          <a:xfrm>
+            <a:off x="640080" y="3753612"/>
+            <a:ext cx="365760" cy="365760"/>
+          </a:xfrm>
+          <a:prstGeom prst="ellipse">
+            <a:avLst/>
+          </a:prstGeom>
+          <a:solidFill>
+            <a:srgbClr val="2695BD"/>
+          </a:solidFill>
+          <a:ln/>
+        </p:spPr>
+      </p:sp>
+      <p:sp>
+        <p:nvSpPr>
+          <p:cNvPr id="21" name="Text 19"/>
+          <p:cNvSpPr txBox="1"/>
+          <p:nvPr/>
+        </p:nvSpPr>
+        <p:spPr>
+          <a:xfrm>
+            <a:off x="640080" y="3753612"/>
+            <a:ext cx="365760" cy="365760"/>
+          </a:xfrm>
+          <a:prstGeom prst="rect">
+            <a:avLst/>
+          </a:prstGeom>
+          <a:noFill/>
+          <a:ln/>
+        </p:spPr>
+        <p:txBody>
+          <a:bodyPr wrap="square" lIns="0" tIns="0" rIns="0" bIns="0" rtlCol="0" anchor="ctr"/>
+          <a:lstStyle/>
+          <a:p>
+            <a:pPr algn="ctr" indent="0" marL="0">
+              <a:buNone/>
+            </a:pPr>
+            <a:r>
+              <a:rPr lang="en-US" sz="1500" b="1" dirty="0">
+                <a:solidFill>
+                  <a:srgbClr val="FFFFFF"/>
+                </a:solidFill>
+                <a:latin typeface="Cambria" pitchFamily="34" charset="0"/>
+                <a:ea typeface="Cambria" pitchFamily="34" charset="-122"/>
+                <a:cs typeface="Cambria" pitchFamily="34" charset="-120"/>
+              </a:rPr>
+              <a:t>4</a:t>
+            </a:r>
+            <a:endParaRPr lang="en-US" sz="1500" dirty="0"/>
+          </a:p>
+        </p:txBody>
+      </p:sp>
+      <p:sp>
+        <p:nvSpPr>
+          <p:cNvPr id="22" name="Text 20"/>
+          <p:cNvSpPr txBox="1"/>
+          <p:nvPr/>
+        </p:nvSpPr>
+        <p:spPr>
+          <a:xfrm>
+            <a:off x="1234440" y="3698748"/>
+            <a:ext cx="1417320" cy="457200"/>
+          </a:xfrm>
+          <a:prstGeom prst="rect">
+            <a:avLst/>
+          </a:prstGeom>
+          <a:noFill/>
+          <a:ln/>
+        </p:spPr>
+        <p:txBody>
+          <a:bodyPr wrap="square" lIns="0" tIns="0" rIns="0" bIns="0" rtlCol="0" anchor="t"/>
+          <a:lstStyle/>
+          <a:p>
+            <a:pPr indent="0" marL="0">
+              <a:buNone/>
+            </a:pPr>
+            <a:r>
+              <a:rPr lang="en-US" sz="1300" b="1" dirty="0">
+                <a:solidFill>
+                  <a:srgbClr val="12182A"/>
+                </a:solidFill>
+                <a:latin typeface="Cambria" pitchFamily="34" charset="0"/>
+                <a:ea typeface="Cambria" pitchFamily="34" charset="-122"/>
+                <a:cs typeface="Cambria" pitchFamily="34" charset="-120"/>
+              </a:rPr>
+              <a:t>Slime</a:t>
+            </a:r>
+            <a:endParaRPr lang="en-US" sz="1300" dirty="0"/>
+          </a:p>
+        </p:txBody>
+      </p:sp>
+      <p:sp>
+        <p:nvSpPr>
+          <p:cNvPr id="23" name="Text 21"/>
+          <p:cNvSpPr txBox="1"/>
+          <p:nvPr/>
+        </p:nvSpPr>
+        <p:spPr>
+          <a:xfrm>
+            <a:off x="2606040" y="3689604"/>
+            <a:ext cx="8942832" cy="626364"/>
+          </a:xfrm>
+          <a:prstGeom prst="rect">
+            <a:avLst/>
+          </a:prstGeom>
+          <a:noFill/>
+          <a:ln/>
+        </p:spPr>
+        <p:txBody>
+          <a:bodyPr wrap="square" lIns="0" tIns="0" rIns="0" bIns="0" rtlCol="0" anchor="t"/>
+          <a:lstStyle/>
+          <a:p>
+            <a:pPr indent="0" marL="0">
+              <a:lnSpc>
+                <a:spcPct val="108000"/>
+              </a:lnSpc>
+              <a:buNone/>
+            </a:pPr>
+            <a:r>
+              <a:rPr lang="en-US" sz="1080" dirty="0">
+                <a:solidFill>
+                  <a:srgbClr val="6B7A90"/>
+                </a:solidFill>
+                <a:latin typeface="Calibri" pitchFamily="34" charset="0"/>
+                <a:ea typeface="Calibri" pitchFamily="34" charset="-122"/>
+                <a:cs typeface="Calibri" pitchFamily="34" charset="-120"/>
+              </a:rPr>
+              <a:t>Reads its own territory, mirrors dropRole the way Delete and the sibling resource already do — updates its own doc's Traits in the same change.</a:t>
+            </a:r>
+            <a:endParaRPr lang="en-US" sz="1080" dirty="0"/>
+          </a:p>
+        </p:txBody>
+      </p:sp>
+      <p:sp>
+        <p:nvSpPr>
+          <p:cNvPr id="24" name="Shape 22"/>
+          <p:cNvSpPr/>
+          <p:nvPr/>
+        </p:nvSpPr>
+        <p:spPr>
+          <a:xfrm>
+            <a:off x="822960" y="4745736"/>
+            <a:ext cx="0" cy="260604"/>
+          </a:xfrm>
+          <a:prstGeom prst="line">
+            <a:avLst/>
+          </a:prstGeom>
+          <a:noFill/>
+          <a:ln w="19050">
+            <a:solidFill>
+              <a:srgbClr val="D7DEE9"/>
+            </a:solidFill>
+            <a:prstDash val="solid"/>
+          </a:ln>
+        </p:spPr>
+      </p:sp>
+      <p:sp>
+        <p:nvSpPr>
+          <p:cNvPr id="25" name="Shape 23"/>
+          <p:cNvSpPr/>
+          <p:nvPr/>
+        </p:nvSpPr>
+        <p:spPr>
+          <a:xfrm>
+            <a:off x="640080" y="4379976"/>
+            <a:ext cx="365760" cy="365760"/>
+          </a:xfrm>
+          <a:prstGeom prst="ellipse">
+            <a:avLst/>
+          </a:prstGeom>
+          <a:solidFill>
+            <a:srgbClr val="7C5CD6"/>
+          </a:solidFill>
+          <a:ln/>
+        </p:spPr>
+      </p:sp>
+      <p:sp>
+        <p:nvSpPr>
+          <p:cNvPr id="26" name="Text 24"/>
+          <p:cNvSpPr txBox="1"/>
+          <p:nvPr/>
+        </p:nvSpPr>
+        <p:spPr>
+          <a:xfrm>
+            <a:off x="640080" y="4379976"/>
+            <a:ext cx="365760" cy="365760"/>
+          </a:xfrm>
+          <a:prstGeom prst="rect">
+            <a:avLst/>
+          </a:prstGeom>
+          <a:noFill/>
+          <a:ln/>
+        </p:spPr>
+        <p:txBody>
+          <a:bodyPr wrap="square" lIns="0" tIns="0" rIns="0" bIns="0" rtlCol="0" anchor="ctr"/>
+          <a:lstStyle/>
+          <a:p>
+            <a:pPr algn="ctr" indent="0" marL="0">
+              <a:buNone/>
+            </a:pPr>
+            <a:r>
+              <a:rPr lang="en-US" sz="1500" b="1" dirty="0">
+                <a:solidFill>
+                  <a:srgbClr val="FFFFFF"/>
+                </a:solidFill>
+                <a:latin typeface="Cambria" pitchFamily="34" charset="0"/>
+                <a:ea typeface="Cambria" pitchFamily="34" charset="-122"/>
+                <a:cs typeface="Cambria" pitchFamily="34" charset="-120"/>
+              </a:rPr>
+              <a:t>5</a:t>
+            </a:r>
+            <a:endParaRPr lang="en-US" sz="1500" dirty="0"/>
+          </a:p>
+        </p:txBody>
+      </p:sp>
+      <p:sp>
+        <p:nvSpPr>
+          <p:cNvPr id="27" name="Text 25"/>
+          <p:cNvSpPr txBox="1"/>
+          <p:nvPr/>
+        </p:nvSpPr>
+        <p:spPr>
+          <a:xfrm>
+            <a:off x="1234440" y="4325112"/>
+            <a:ext cx="1417320" cy="457200"/>
+          </a:xfrm>
+          <a:prstGeom prst="rect">
+            <a:avLst/>
+          </a:prstGeom>
+          <a:noFill/>
+          <a:ln/>
+        </p:spPr>
+        <p:txBody>
+          <a:bodyPr wrap="square" lIns="0" tIns="0" rIns="0" bIns="0" rtlCol="0" anchor="t"/>
+          <a:lstStyle/>
+          <a:p>
+            <a:pPr indent="0" marL="0">
+              <a:buNone/>
+            </a:pPr>
+            <a:r>
+              <a:rPr lang="en-US" sz="1300" b="1" dirty="0">
+                <a:solidFill>
+                  <a:srgbClr val="12182A"/>
+                </a:solidFill>
+                <a:latin typeface="Cambria" pitchFamily="34" charset="0"/>
+                <a:ea typeface="Cambria" pitchFamily="34" charset="-122"/>
+                <a:cs typeface="Cambria" pitchFamily="34" charset="-120"/>
+              </a:rPr>
+              <a:t>Orc</a:t>
+            </a:r>
+            <a:endParaRPr lang="en-US" sz="1300" dirty="0"/>
+          </a:p>
+        </p:txBody>
+      </p:sp>
+      <p:sp>
+        <p:nvSpPr>
+          <p:cNvPr id="28" name="Text 26"/>
+          <p:cNvSpPr txBox="1"/>
+          <p:nvPr/>
+        </p:nvSpPr>
+        <p:spPr>
+          <a:xfrm>
+            <a:off x="2606040" y="4315968"/>
+            <a:ext cx="8942832" cy="626364"/>
+          </a:xfrm>
+          <a:prstGeom prst="rect">
+            <a:avLst/>
+          </a:prstGeom>
+          <a:noFill/>
+          <a:ln/>
+        </p:spPr>
+        <p:txBody>
+          <a:bodyPr wrap="square" lIns="0" tIns="0" rIns="0" bIns="0" rtlCol="0" anchor="t"/>
+          <a:lstStyle/>
+          <a:p>
+            <a:pPr indent="0" marL="0">
+              <a:lnSpc>
+                <a:spcPct val="108000"/>
+              </a:lnSpc>
+              <a:buNone/>
+            </a:pPr>
+            <a:r>
+              <a:rPr lang="en-US" sz="1080" dirty="0">
+                <a:solidFill>
+                  <a:srgbClr val="6B7A90"/>
+                </a:solidFill>
+                <a:latin typeface="Calibri" pitchFamily="34" charset="0"/>
+                <a:ea typeface="Calibri" pitchFamily="34" charset="-122"/>
+                <a:cs typeface="Calibri" pitchFamily="34" charset="-120"/>
+              </a:rPr>
+              <a:t>Dispatches Raphael for the gate verdict: file:line evidence, right Slime authored, traits hold, doc truthful.</a:t>
+            </a:r>
+            <a:endParaRPr lang="en-US" sz="1080" dirty="0"/>
+          </a:p>
+        </p:txBody>
+      </p:sp>
+      <p:sp>
+        <p:nvSpPr>
+          <p:cNvPr id="29" name="Shape 27"/>
+          <p:cNvSpPr/>
+          <p:nvPr/>
+        </p:nvSpPr>
+        <p:spPr>
+          <a:xfrm>
+            <a:off x="822960" y="5372100"/>
+            <a:ext cx="0" cy="260604"/>
+          </a:xfrm>
+          <a:prstGeom prst="line">
+            <a:avLst/>
+          </a:prstGeom>
+          <a:noFill/>
+          <a:ln w="19050">
+            <a:solidFill>
+              <a:srgbClr val="D7DEE9"/>
+            </a:solidFill>
+            <a:prstDash val="solid"/>
+          </a:ln>
+        </p:spPr>
+      </p:sp>
+      <p:sp>
+        <p:nvSpPr>
+          <p:cNvPr id="30" name="Shape 28"/>
+          <p:cNvSpPr/>
+          <p:nvPr/>
+        </p:nvSpPr>
+        <p:spPr>
+          <a:xfrm>
+            <a:off x="640080" y="5006340"/>
+            <a:ext cx="365760" cy="365760"/>
+          </a:xfrm>
+          <a:prstGeom prst="ellipse">
+            <a:avLst/>
+          </a:prstGeom>
+          <a:solidFill>
+            <a:srgbClr val="7C5CD6"/>
+          </a:solidFill>
+          <a:ln/>
+        </p:spPr>
+      </p:sp>
+      <p:sp>
+        <p:nvSpPr>
+          <p:cNvPr id="31" name="Text 29"/>
+          <p:cNvSpPr txBox="1"/>
+          <p:nvPr/>
+        </p:nvSpPr>
+        <p:spPr>
+          <a:xfrm>
+            <a:off x="640080" y="5006340"/>
+            <a:ext cx="365760" cy="365760"/>
+          </a:xfrm>
+          <a:prstGeom prst="rect">
+            <a:avLst/>
+          </a:prstGeom>
+          <a:noFill/>
+          <a:ln/>
+        </p:spPr>
+        <p:txBody>
+          <a:bodyPr wrap="square" lIns="0" tIns="0" rIns="0" bIns="0" rtlCol="0" anchor="ctr"/>
+          <a:lstStyle/>
+          <a:p>
+            <a:pPr algn="ctr" indent="0" marL="0">
+              <a:buNone/>
+            </a:pPr>
+            <a:r>
+              <a:rPr lang="en-US" sz="1500" b="1" dirty="0">
+                <a:solidFill>
+                  <a:srgbClr val="FFFFFF"/>
+                </a:solidFill>
+                <a:latin typeface="Cambria" pitchFamily="34" charset="0"/>
+                <a:ea typeface="Cambria" pitchFamily="34" charset="-122"/>
+                <a:cs typeface="Cambria" pitchFamily="34" charset="-120"/>
+              </a:rPr>
+              <a:t>6</a:t>
+            </a:r>
+            <a:endParaRPr lang="en-US" sz="1500" dirty="0"/>
+          </a:p>
+        </p:txBody>
+      </p:sp>
+      <p:sp>
+        <p:nvSpPr>
+          <p:cNvPr id="32" name="Text 30"/>
+          <p:cNvSpPr txBox="1"/>
+          <p:nvPr/>
+        </p:nvSpPr>
+        <p:spPr>
+          <a:xfrm>
+            <a:off x="1234440" y="4951476"/>
+            <a:ext cx="1417320" cy="457200"/>
+          </a:xfrm>
+          <a:prstGeom prst="rect">
+            <a:avLst/>
+          </a:prstGeom>
+          <a:noFill/>
+          <a:ln/>
+        </p:spPr>
+        <p:txBody>
+          <a:bodyPr wrap="square" lIns="0" tIns="0" rIns="0" bIns="0" rtlCol="0" anchor="t"/>
+          <a:lstStyle/>
+          <a:p>
+            <a:pPr indent="0" marL="0">
+              <a:buNone/>
+            </a:pPr>
+            <a:r>
+              <a:rPr lang="en-US" sz="1300" b="1" dirty="0">
+                <a:solidFill>
+                  <a:srgbClr val="12182A"/>
+                </a:solidFill>
+                <a:latin typeface="Cambria" pitchFamily="34" charset="0"/>
+                <a:ea typeface="Cambria" pitchFamily="34" charset="-122"/>
+                <a:cs typeface="Cambria" pitchFamily="34" charset="-120"/>
+              </a:rPr>
+              <a:t>Orc</a:t>
+            </a:r>
+            <a:endParaRPr lang="en-US" sz="1300" dirty="0"/>
+          </a:p>
+        </p:txBody>
+      </p:sp>
+      <p:sp>
+        <p:nvSpPr>
+          <p:cNvPr id="33" name="Text 31"/>
+          <p:cNvSpPr txBox="1"/>
+          <p:nvPr/>
+        </p:nvSpPr>
+        <p:spPr>
+          <a:xfrm>
+            <a:off x="2606040" y="4942332"/>
+            <a:ext cx="8942832" cy="626364"/>
+          </a:xfrm>
+          <a:prstGeom prst="rect">
+            <a:avLst/>
+          </a:prstGeom>
+          <a:noFill/>
+          <a:ln/>
+        </p:spPr>
+        <p:txBody>
+          <a:bodyPr wrap="square" lIns="0" tIns="0" rIns="0" bIns="0" rtlCol="0" anchor="t"/>
+          <a:lstStyle/>
+          <a:p>
+            <a:pPr indent="0" marL="0">
+              <a:lnSpc>
+                <a:spcPct val="108000"/>
+              </a:lnSpc>
+              <a:buNone/>
+            </a:pPr>
+            <a:r>
+              <a:rPr lang="en-US" sz="1080" dirty="0">
+                <a:solidFill>
+                  <a:srgbClr val="6B7A90"/>
+                </a:solidFill>
+                <a:latin typeface="Calibri" pitchFamily="34" charset="0"/>
+                <a:ea typeface="Calibri" pitchFamily="34" charset="-122"/>
+                <a:cs typeface="Calibri" pitchFamily="34" charset="-120"/>
+              </a:rPr>
+              <a:t>Raphael PASSes with evidence — lands the change, records the verdict.</a:t>
+            </a:r>
+            <a:endParaRPr lang="en-US" sz="1080" dirty="0"/>
+          </a:p>
+        </p:txBody>
+      </p:sp>
+      <p:sp>
+        <p:nvSpPr>
+          <p:cNvPr id="34" name="Shape 32"/>
+          <p:cNvSpPr/>
+          <p:nvPr/>
+        </p:nvSpPr>
+        <p:spPr>
+          <a:xfrm>
+            <a:off x="640080" y="5632704"/>
+            <a:ext cx="365760" cy="365760"/>
+          </a:xfrm>
+          <a:prstGeom prst="ellipse">
+            <a:avLst/>
+          </a:prstGeom>
+          <a:solidFill>
+            <a:srgbClr val="BD8C24"/>
+          </a:solidFill>
+          <a:ln/>
+        </p:spPr>
+      </p:sp>
+      <p:sp>
+        <p:nvSpPr>
+          <p:cNvPr id="35" name="Text 33"/>
+          <p:cNvSpPr txBox="1"/>
+          <p:nvPr/>
+        </p:nvSpPr>
+        <p:spPr>
+          <a:xfrm>
+            <a:off x="640080" y="5632704"/>
+            <a:ext cx="365760" cy="365760"/>
+          </a:xfrm>
+          <a:prstGeom prst="rect">
+            <a:avLst/>
+          </a:prstGeom>
+          <a:noFill/>
+          <a:ln/>
+        </p:spPr>
+        <p:txBody>
+          <a:bodyPr wrap="square" lIns="0" tIns="0" rIns="0" bIns="0" rtlCol="0" anchor="ctr"/>
+          <a:lstStyle/>
+          <a:p>
+            <a:pPr algn="ctr" indent="0" marL="0">
+              <a:buNone/>
+            </a:pPr>
+            <a:r>
+              <a:rPr lang="en-US" sz="1500" b="1" dirty="0">
+                <a:solidFill>
+                  <a:srgbClr val="FFFFFF"/>
+                </a:solidFill>
+                <a:latin typeface="Cambria" pitchFamily="34" charset="0"/>
+                <a:ea typeface="Cambria" pitchFamily="34" charset="-122"/>
+                <a:cs typeface="Cambria" pitchFamily="34" charset="-120"/>
+              </a:rPr>
+              <a:t>7</a:t>
+            </a:r>
+            <a:endParaRPr lang="en-US" sz="1500" dirty="0"/>
+          </a:p>
+        </p:txBody>
+      </p:sp>
+      <p:sp>
+        <p:nvSpPr>
+          <p:cNvPr id="36" name="Text 34"/>
+          <p:cNvSpPr txBox="1"/>
+          <p:nvPr/>
+        </p:nvSpPr>
+        <p:spPr>
+          <a:xfrm>
+            <a:off x="1234440" y="5577840"/>
+            <a:ext cx="1417320" cy="457200"/>
+          </a:xfrm>
+          <a:prstGeom prst="rect">
+            <a:avLst/>
+          </a:prstGeom>
+          <a:noFill/>
+          <a:ln/>
+        </p:spPr>
+        <p:txBody>
+          <a:bodyPr wrap="square" lIns="0" tIns="0" rIns="0" bIns="0" rtlCol="0" anchor="t"/>
+          <a:lstStyle/>
+          <a:p>
+            <a:pPr indent="0" marL="0">
+              <a:buNone/>
+            </a:pPr>
+            <a:r>
+              <a:rPr lang="en-US" sz="1300" b="1" dirty="0">
+                <a:solidFill>
+                  <a:srgbClr val="12182A"/>
+                </a:solidFill>
+                <a:latin typeface="Cambria" pitchFamily="34" charset="0"/>
+                <a:ea typeface="Cambria" pitchFamily="34" charset="-122"/>
+                <a:cs typeface="Cambria" pitchFamily="34" charset="-120"/>
+              </a:rPr>
+              <a:t>Ciel + Elf</a:t>
+            </a:r>
+            <a:endParaRPr lang="en-US" sz="1300" dirty="0"/>
+          </a:p>
+        </p:txBody>
+      </p:sp>
+      <p:sp>
+        <p:nvSpPr>
+          <p:cNvPr id="37" name="Text 35"/>
+          <p:cNvSpPr txBox="1"/>
+          <p:nvPr/>
+        </p:nvSpPr>
+        <p:spPr>
+          <a:xfrm>
+            <a:off x="2606040" y="5568696"/>
+            <a:ext cx="8942832" cy="626364"/>
+          </a:xfrm>
+          <a:prstGeom prst="rect">
+            <a:avLst/>
+          </a:prstGeom>
+          <a:noFill/>
+          <a:ln/>
+        </p:spPr>
+        <p:txBody>
+          <a:bodyPr wrap="square" lIns="0" tIns="0" rIns="0" bIns="0" rtlCol="0" anchor="t"/>
+          <a:lstStyle/>
+          <a:p>
+            <a:pPr indent="0" marL="0">
+              <a:lnSpc>
+                <a:spcPct val="108000"/>
+              </a:lnSpc>
+              <a:buNone/>
+            </a:pPr>
+            <a:r>
+              <a:rPr lang="en-US" sz="1080" dirty="0">
+                <a:solidFill>
+                  <a:srgbClr val="6B7A90"/>
+                </a:solidFill>
+                <a:latin typeface="Calibri" pitchFamily="34" charset="0"/>
+                <a:ea typeface="Calibri" pitchFamily="34" charset="-122"/>
+                <a:cs typeface="Calibri" pitchFamily="34" charset="-120"/>
+              </a:rPr>
+              <a:t>Ciel journals it in log.md — Sonnet 5, its own floor: turning facts into house-format prose is voice work, never below Raphael's tier. Elf reports back to the human, one line, full courtesy.</a:t>
+            </a:r>
+            <a:endParaRPr lang="en-US" sz="1080" dirty="0"/>
+          </a:p>
+        </p:txBody>
+      </p:sp>
+      <p:sp>
+        <p:nvSpPr>
+          <p:cNvPr id="38" name="Text 36"/>
+          <p:cNvSpPr txBox="1"/>
+          <p:nvPr/>
+        </p:nvSpPr>
+        <p:spPr>
+          <a:xfrm>
+            <a:off x="457200" y="6400800"/>
+            <a:ext cx="7315200" cy="274320"/>
+          </a:xfrm>
+          <a:prstGeom prst="rect">
+            <a:avLst/>
+          </a:prstGeom>
+          <a:noFill/>
+          <a:ln/>
+        </p:spPr>
+        <p:txBody>
+          <a:bodyPr wrap="square" lIns="0" tIns="0" rIns="0" bIns="0" rtlCol="0" anchor="ctr"/>
+          <a:lstStyle/>
+          <a:p>
+            <a:pPr indent="0" marL="0">
+              <a:buNone/>
+            </a:pPr>
+            <a:r>
+              <a:rPr lang="en-US" sz="900" spc="100" kern="0" dirty="0">
+                <a:solidFill>
+                  <a:srgbClr val="6B7A90"/>
+                </a:solidFill>
+                <a:latin typeface="Calibri" pitchFamily="34" charset="0"/>
+                <a:ea typeface="Calibri" pitchFamily="34" charset="-122"/>
+                <a:cs typeface="Calibri" pitchFamily="34" charset="-120"/>
+              </a:rPr>
+              <a:t>ISEKAI ⋄ A CONVENTION FOR LIVING WORLDS</a:t>
+            </a:r>
+            <a:endParaRPr lang="en-US" sz="900" dirty="0"/>
+          </a:p>
+        </p:txBody>
+      </p:sp>
+      <p:sp>
+        <p:nvSpPr>
+          <p:cNvPr id="39" name="Text 37"/>
+          <p:cNvSpPr txBox="1"/>
+          <p:nvPr/>
+        </p:nvSpPr>
+        <p:spPr>
+          <a:xfrm>
+            <a:off x="11274552" y="6400800"/>
+            <a:ext cx="457200" cy="274320"/>
+          </a:xfrm>
+          <a:prstGeom prst="rect">
+            <a:avLst/>
+          </a:prstGeom>
+          <a:noFill/>
+          <a:ln/>
+        </p:spPr>
+        <p:txBody>
+          <a:bodyPr wrap="square" lIns="0" tIns="0" rIns="0" bIns="0" rtlCol="0" anchor="ctr"/>
+          <a:lstStyle/>
+          <a:p>
+            <a:pPr algn="r" indent="0" marL="0">
+              <a:buNone/>
+            </a:pPr>
+            <a:r>
+              <a:rPr lang="en-US" sz="900" dirty="0">
+                <a:solidFill>
+                  <a:srgbClr val="6B7A90"/>
+                </a:solidFill>
+                <a:latin typeface="Calibri" pitchFamily="34" charset="0"/>
+                <a:ea typeface="Calibri" pitchFamily="34" charset="-122"/>
+                <a:cs typeface="Calibri" pitchFamily="34" charset="-120"/>
+              </a:rPr>
+              <a:t>11</a:t>
+            </a:r>
+            <a:endParaRPr lang="en-US" sz="900" dirty="0"/>
+          </a:p>
+        </p:txBody>
+      </p:sp>
+    </p:spTree>
+  </p:cSld>
+  <p:clrMapOvr>
+    <a:masterClrMapping/>
+  </p:clrMapOvr>
+</p:sld>
+</file>
+
+<file path=ppt/slides/slide12.xml><?xml version="1.0" encoding="utf-8"?>
+<p:sld xmlns:a="http://schemas.openxmlformats.org/drawingml/2006/main" xmlns:r="http://schemas.openxmlformats.org/officeDocument/2006/relationships" xmlns:p="http://schemas.openxmlformats.org/presentationml/2006/main">
+  <p:cSld name="Slide 12">
     <p:bg>
       <p:bgPr>
         <a:solidFill>
@@ -3448,7 +4948,7 @@
                 <a:ea typeface="Calibri" pitchFamily="34" charset="-122"/>
                 <a:cs typeface="Calibri" pitchFamily="34" charset="-120"/>
               </a:rPr>
-              <a:t>11</a:t>
+              <a:t>12</a:t>
             </a:r>
             <a:endParaRPr lang="en-US" sz="900" dirty="0"/>
           </a:p>
@@ -3462,9 +4962,9 @@
 </p:sld>
 </file>
 
-<file path=ppt/slides/slide12.xml><?xml version="1.0" encoding="utf-8"?>
+<file path=ppt/slides/slide13.xml><?xml version="1.0" encoding="utf-8"?>
 <p:sld xmlns:a="http://schemas.openxmlformats.org/drawingml/2006/main" xmlns:r="http://schemas.openxmlformats.org/officeDocument/2006/relationships" xmlns:p="http://schemas.openxmlformats.org/presentationml/2006/main">
-  <p:cSld name="Slide 12">
+  <p:cSld name="Slide 13">
     <p:bg>
       <p:bgPr>
         <a:solidFill>
@@ -3722,7 +5222,7 @@
                 <a:ea typeface="Calibri" pitchFamily="34" charset="-122"/>
                 <a:cs typeface="Calibri" pitchFamily="34" charset="-120"/>
               </a:rPr>
-              <a:t>12</a:t>
+              <a:t>13</a:t>
             </a:r>
             <a:endParaRPr lang="en-US" sz="900" dirty="0"/>
           </a:p>
@@ -9316,7 +10816,419 @@
                           <a:ea typeface="Calibri" pitchFamily="34" charset="-122"/>
                           <a:cs typeface="Calibri" pitchFamily="34" charset="-120"/>
                         </a:rPr>
-                        <a:t>Elf / Orc</a:t>
+                        <a:t>Elf</a:t>
+                      </a:r>
+                      <a:endParaRPr lang="en-US" sz="1150" dirty="0">
+                        <a:latin typeface="Calibri" charset="0"/>
+                        <a:ea typeface="Calibri" charset="0"/>
+                        <a:cs typeface="Calibri" charset="0"/>
+                      </a:endParaRPr>
+                    </a:p>
+                  </a:txBody>
+                  <a:tcPr marL="91440" marR="91440" marT="45720" marB="45720" anchor="ctr">
+                    <a:lnL w="6350" cap="flat" cmpd="sng" algn="ctr">
+                      <a:solidFill>
+                        <a:srgbClr val="E3E8F0"/>
+                      </a:solidFill>
+                      <a:prstDash val="solid"/>
+                      <a:round/>
+                      <a:headEnd type="none" w="med" len="med"/>
+                      <a:tailEnd type="none" w="med" len="med"/>
+                    </a:lnL>
+                    <a:lnR w="6350" cap="flat" cmpd="sng" algn="ctr">
+                      <a:solidFill>
+                        <a:srgbClr val="E3E8F0"/>
+                      </a:solidFill>
+                      <a:prstDash val="solid"/>
+                      <a:round/>
+                      <a:headEnd type="none" w="med" len="med"/>
+                      <a:tailEnd type="none" w="med" len="med"/>
+                    </a:lnR>
+                    <a:lnT w="6350" cap="flat" cmpd="sng" algn="ctr">
+                      <a:solidFill>
+                        <a:srgbClr val="E3E8F0"/>
+                      </a:solidFill>
+                      <a:prstDash val="solid"/>
+                      <a:round/>
+                      <a:headEnd type="none" w="med" len="med"/>
+                      <a:tailEnd type="none" w="med" len="med"/>
+                    </a:lnT>
+                    <a:lnB w="6350" cap="flat" cmpd="sng" algn="ctr">
+                      <a:solidFill>
+                        <a:srgbClr val="E3E8F0"/>
+                      </a:solidFill>
+                      <a:prstDash val="solid"/>
+                      <a:round/>
+                      <a:headEnd type="none" w="med" len="med"/>
+                      <a:tailEnd type="none" w="med" len="med"/>
+                    </a:lnB>
+                    <a:solidFill>
+                      <a:srgbClr val="FFFFFF"/>
+                    </a:solidFill>
+                  </a:tcPr>
+                </a:tc>
+                <a:tc>
+                  <a:txBody>
+                    <a:bodyPr/>
+                    <a:lstStyle/>
+                    <a:p>
+                      <a:pPr algn="l" indent="0" marL="0">
+                        <a:buNone/>
+                      </a:pPr>
+                      <a:r>
+                        <a:rPr lang="en-US" sz="1150" dirty="0">
+                          <a:solidFill>
+                            <a:srgbClr val="2695BD"/>
+                          </a:solidFill>
+                          <a:latin typeface="Calibri" pitchFamily="34" charset="0"/>
+                          <a:ea typeface="Calibri" pitchFamily="34" charset="-122"/>
+                          <a:cs typeface="Calibri" pitchFamily="34" charset="-120"/>
+                        </a:rPr>
+                        <a:t>Sonnet 5 · Opus 5 · Fable 5.1</a:t>
+                      </a:r>
+                      <a:endParaRPr lang="en-US" sz="1150" dirty="0">
+                        <a:latin typeface="Calibri" charset="0"/>
+                        <a:ea typeface="Calibri" charset="0"/>
+                        <a:cs typeface="Calibri" charset="0"/>
+                      </a:endParaRPr>
+                    </a:p>
+                  </a:txBody>
+                  <a:tcPr marL="91440" marR="91440" marT="45720" marB="45720" anchor="ctr">
+                    <a:lnL w="6350" cap="flat" cmpd="sng" algn="ctr">
+                      <a:solidFill>
+                        <a:srgbClr val="E3E8F0"/>
+                      </a:solidFill>
+                      <a:prstDash val="solid"/>
+                      <a:round/>
+                      <a:headEnd type="none" w="med" len="med"/>
+                      <a:tailEnd type="none" w="med" len="med"/>
+                    </a:lnL>
+                    <a:lnR w="6350" cap="flat" cmpd="sng" algn="ctr">
+                      <a:solidFill>
+                        <a:srgbClr val="E3E8F0"/>
+                      </a:solidFill>
+                      <a:prstDash val="solid"/>
+                      <a:round/>
+                      <a:headEnd type="none" w="med" len="med"/>
+                      <a:tailEnd type="none" w="med" len="med"/>
+                    </a:lnR>
+                    <a:lnT w="6350" cap="flat" cmpd="sng" algn="ctr">
+                      <a:solidFill>
+                        <a:srgbClr val="E3E8F0"/>
+                      </a:solidFill>
+                      <a:prstDash val="solid"/>
+                      <a:round/>
+                      <a:headEnd type="none" w="med" len="med"/>
+                      <a:tailEnd type="none" w="med" len="med"/>
+                    </a:lnT>
+                    <a:lnB w="6350" cap="flat" cmpd="sng" algn="ctr">
+                      <a:solidFill>
+                        <a:srgbClr val="E3E8F0"/>
+                      </a:solidFill>
+                      <a:prstDash val="solid"/>
+                      <a:round/>
+                      <a:headEnd type="none" w="med" len="med"/>
+                      <a:tailEnd type="none" w="med" len="med"/>
+                    </a:lnB>
+                    <a:solidFill>
+                      <a:srgbClr val="FFFFFF"/>
+                    </a:solidFill>
+                  </a:tcPr>
+                </a:tc>
+                <a:tc>
+                  <a:txBody>
+                    <a:bodyPr/>
+                    <a:lstStyle/>
+                    <a:p>
+                      <a:pPr algn="l" indent="0" marL="0">
+                        <a:buNone/>
+                      </a:pPr>
+                      <a:r>
+                        <a:rPr lang="en-US" sz="1150" dirty="0">
+                          <a:solidFill>
+                            <a:srgbClr val="12182A"/>
+                          </a:solidFill>
+                          <a:latin typeface="Calibri" pitchFamily="34" charset="0"/>
+                          <a:ea typeface="Calibri" pitchFamily="34" charset="-122"/>
+                          <a:cs typeface="Calibri" pitchFamily="34" charset="-120"/>
+                        </a:rPr>
+                        <a:t>Coordination default; Opus for conflict; Fable for the outward voice itself.</a:t>
+                      </a:r>
+                      <a:endParaRPr lang="en-US" sz="1150" dirty="0">
+                        <a:latin typeface="Calibri" charset="0"/>
+                        <a:ea typeface="Calibri" charset="0"/>
+                        <a:cs typeface="Calibri" charset="0"/>
+                      </a:endParaRPr>
+                    </a:p>
+                  </a:txBody>
+                  <a:tcPr marL="91440" marR="91440" marT="45720" marB="45720" anchor="ctr">
+                    <a:lnL w="6350" cap="flat" cmpd="sng" algn="ctr">
+                      <a:solidFill>
+                        <a:srgbClr val="E3E8F0"/>
+                      </a:solidFill>
+                      <a:prstDash val="solid"/>
+                      <a:round/>
+                      <a:headEnd type="none" w="med" len="med"/>
+                      <a:tailEnd type="none" w="med" len="med"/>
+                    </a:lnL>
+                    <a:lnR w="6350" cap="flat" cmpd="sng" algn="ctr">
+                      <a:solidFill>
+                        <a:srgbClr val="E3E8F0"/>
+                      </a:solidFill>
+                      <a:prstDash val="solid"/>
+                      <a:round/>
+                      <a:headEnd type="none" w="med" len="med"/>
+                      <a:tailEnd type="none" w="med" len="med"/>
+                    </a:lnR>
+                    <a:lnT w="6350" cap="flat" cmpd="sng" algn="ctr">
+                      <a:solidFill>
+                        <a:srgbClr val="E3E8F0"/>
+                      </a:solidFill>
+                      <a:prstDash val="solid"/>
+                      <a:round/>
+                      <a:headEnd type="none" w="med" len="med"/>
+                      <a:tailEnd type="none" w="med" len="med"/>
+                    </a:lnT>
+                    <a:lnB w="6350" cap="flat" cmpd="sng" algn="ctr">
+                      <a:solidFill>
+                        <a:srgbClr val="E3E8F0"/>
+                      </a:solidFill>
+                      <a:prstDash val="solid"/>
+                      <a:round/>
+                      <a:headEnd type="none" w="med" len="med"/>
+                      <a:tailEnd type="none" w="med" len="med"/>
+                    </a:lnB>
+                    <a:solidFill>
+                      <a:srgbClr val="FFFFFF"/>
+                    </a:solidFill>
+                  </a:tcPr>
+                </a:tc>
+              </a:tr>
+              <a:tr h="512064">
+                <a:tc>
+                  <a:txBody>
+                    <a:bodyPr/>
+                    <a:lstStyle/>
+                    <a:p>
+                      <a:pPr algn="l" indent="0" marL="0">
+                        <a:buNone/>
+                      </a:pPr>
+                      <a:r>
+                        <a:rPr lang="en-US" sz="1150" b="1" dirty="0">
+                          <a:solidFill>
+                            <a:srgbClr val="12182A"/>
+                          </a:solidFill>
+                          <a:latin typeface="Calibri" pitchFamily="34" charset="0"/>
+                          <a:ea typeface="Calibri" pitchFamily="34" charset="-122"/>
+                          <a:cs typeface="Calibri" pitchFamily="34" charset="-120"/>
+                        </a:rPr>
+                        <a:t>Orc</a:t>
+                      </a:r>
+                      <a:endParaRPr lang="en-US" sz="1150" dirty="0">
+                        <a:latin typeface="Calibri" charset="0"/>
+                        <a:ea typeface="Calibri" charset="0"/>
+                        <a:cs typeface="Calibri" charset="0"/>
+                      </a:endParaRPr>
+                    </a:p>
+                  </a:txBody>
+                  <a:tcPr marL="91440" marR="91440" marT="45720" marB="45720" anchor="ctr">
+                    <a:lnL w="6350" cap="flat" cmpd="sng" algn="ctr">
+                      <a:solidFill>
+                        <a:srgbClr val="E3E8F0"/>
+                      </a:solidFill>
+                      <a:prstDash val="solid"/>
+                      <a:round/>
+                      <a:headEnd type="none" w="med" len="med"/>
+                      <a:tailEnd type="none" w="med" len="med"/>
+                    </a:lnL>
+                    <a:lnR w="6350" cap="flat" cmpd="sng" algn="ctr">
+                      <a:solidFill>
+                        <a:srgbClr val="E3E8F0"/>
+                      </a:solidFill>
+                      <a:prstDash val="solid"/>
+                      <a:round/>
+                      <a:headEnd type="none" w="med" len="med"/>
+                      <a:tailEnd type="none" w="med" len="med"/>
+                    </a:lnR>
+                    <a:lnT w="6350" cap="flat" cmpd="sng" algn="ctr">
+                      <a:solidFill>
+                        <a:srgbClr val="E3E8F0"/>
+                      </a:solidFill>
+                      <a:prstDash val="solid"/>
+                      <a:round/>
+                      <a:headEnd type="none" w="med" len="med"/>
+                      <a:tailEnd type="none" w="med" len="med"/>
+                    </a:lnT>
+                    <a:lnB w="6350" cap="flat" cmpd="sng" algn="ctr">
+                      <a:solidFill>
+                        <a:srgbClr val="E3E8F0"/>
+                      </a:solidFill>
+                      <a:prstDash val="solid"/>
+                      <a:round/>
+                      <a:headEnd type="none" w="med" len="med"/>
+                      <a:tailEnd type="none" w="med" len="med"/>
+                    </a:lnB>
+                    <a:solidFill>
+                      <a:srgbClr val="F0F3F9"/>
+                    </a:solidFill>
+                  </a:tcPr>
+                </a:tc>
+                <a:tc>
+                  <a:txBody>
+                    <a:bodyPr/>
+                    <a:lstStyle/>
+                    <a:p>
+                      <a:pPr algn="l" indent="0" marL="0">
+                        <a:buNone/>
+                      </a:pPr>
+                      <a:r>
+                        <a:rPr lang="en-US" sz="1150" dirty="0">
+                          <a:solidFill>
+                            <a:srgbClr val="2695BD"/>
+                          </a:solidFill>
+                          <a:latin typeface="Calibri" pitchFamily="34" charset="0"/>
+                          <a:ea typeface="Calibri" pitchFamily="34" charset="-122"/>
+                          <a:cs typeface="Calibri" pitchFamily="34" charset="-120"/>
+                        </a:rPr>
+                        <a:t>Sonnet 5</a:t>
+                      </a:r>
+                      <a:endParaRPr lang="en-US" sz="1150" dirty="0">
+                        <a:latin typeface="Calibri" charset="0"/>
+                        <a:ea typeface="Calibri" charset="0"/>
+                        <a:cs typeface="Calibri" charset="0"/>
+                      </a:endParaRPr>
+                    </a:p>
+                  </a:txBody>
+                  <a:tcPr marL="91440" marR="91440" marT="45720" marB="45720" anchor="ctr">
+                    <a:lnL w="6350" cap="flat" cmpd="sng" algn="ctr">
+                      <a:solidFill>
+                        <a:srgbClr val="E3E8F0"/>
+                      </a:solidFill>
+                      <a:prstDash val="solid"/>
+                      <a:round/>
+                      <a:headEnd type="none" w="med" len="med"/>
+                      <a:tailEnd type="none" w="med" len="med"/>
+                    </a:lnL>
+                    <a:lnR w="6350" cap="flat" cmpd="sng" algn="ctr">
+                      <a:solidFill>
+                        <a:srgbClr val="E3E8F0"/>
+                      </a:solidFill>
+                      <a:prstDash val="solid"/>
+                      <a:round/>
+                      <a:headEnd type="none" w="med" len="med"/>
+                      <a:tailEnd type="none" w="med" len="med"/>
+                    </a:lnR>
+                    <a:lnT w="6350" cap="flat" cmpd="sng" algn="ctr">
+                      <a:solidFill>
+                        <a:srgbClr val="E3E8F0"/>
+                      </a:solidFill>
+                      <a:prstDash val="solid"/>
+                      <a:round/>
+                      <a:headEnd type="none" w="med" len="med"/>
+                      <a:tailEnd type="none" w="med" len="med"/>
+                    </a:lnT>
+                    <a:lnB w="6350" cap="flat" cmpd="sng" algn="ctr">
+                      <a:solidFill>
+                        <a:srgbClr val="E3E8F0"/>
+                      </a:solidFill>
+                      <a:prstDash val="solid"/>
+                      <a:round/>
+                      <a:headEnd type="none" w="med" len="med"/>
+                      <a:tailEnd type="none" w="med" len="med"/>
+                    </a:lnB>
+                    <a:solidFill>
+                      <a:srgbClr val="F0F3F9"/>
+                    </a:solidFill>
+                  </a:tcPr>
+                </a:tc>
+                <a:tc>
+                  <a:txBody>
+                    <a:bodyPr/>
+                    <a:lstStyle/>
+                    <a:p>
+                      <a:pPr algn="l" indent="0" marL="0">
+                        <a:buNone/>
+                      </a:pPr>
+                      <a:r>
+                        <a:rPr lang="en-US" sz="1150" dirty="0">
+                          <a:solidFill>
+                            <a:srgbClr val="12182A"/>
+                          </a:solidFill>
+                          <a:latin typeface="Calibri" pitchFamily="34" charset="0"/>
+                          <a:ea typeface="Calibri" pitchFamily="34" charset="-122"/>
+                          <a:cs typeface="Calibri" pitchFamily="34" charset="-120"/>
+                        </a:rPr>
+                        <a:t>Reasoning-critical gate work — Opus for high-stakes domains.</a:t>
+                      </a:r>
+                      <a:endParaRPr lang="en-US" sz="1150" dirty="0">
+                        <a:latin typeface="Calibri" charset="0"/>
+                        <a:ea typeface="Calibri" charset="0"/>
+                        <a:cs typeface="Calibri" charset="0"/>
+                      </a:endParaRPr>
+                    </a:p>
+                  </a:txBody>
+                  <a:tcPr marL="91440" marR="91440" marT="45720" marB="45720" anchor="ctr">
+                    <a:lnL w="6350" cap="flat" cmpd="sng" algn="ctr">
+                      <a:solidFill>
+                        <a:srgbClr val="E3E8F0"/>
+                      </a:solidFill>
+                      <a:prstDash val="solid"/>
+                      <a:round/>
+                      <a:headEnd type="none" w="med" len="med"/>
+                      <a:tailEnd type="none" w="med" len="med"/>
+                    </a:lnL>
+                    <a:lnR w="6350" cap="flat" cmpd="sng" algn="ctr">
+                      <a:solidFill>
+                        <a:srgbClr val="E3E8F0"/>
+                      </a:solidFill>
+                      <a:prstDash val="solid"/>
+                      <a:round/>
+                      <a:headEnd type="none" w="med" len="med"/>
+                      <a:tailEnd type="none" w="med" len="med"/>
+                    </a:lnR>
+                    <a:lnT w="6350" cap="flat" cmpd="sng" algn="ctr">
+                      <a:solidFill>
+                        <a:srgbClr val="E3E8F0"/>
+                      </a:solidFill>
+                      <a:prstDash val="solid"/>
+                      <a:round/>
+                      <a:headEnd type="none" w="med" len="med"/>
+                      <a:tailEnd type="none" w="med" len="med"/>
+                    </a:lnT>
+                    <a:lnB w="6350" cap="flat" cmpd="sng" algn="ctr">
+                      <a:solidFill>
+                        <a:srgbClr val="E3E8F0"/>
+                      </a:solidFill>
+                      <a:prstDash val="solid"/>
+                      <a:round/>
+                      <a:headEnd type="none" w="med" len="med"/>
+                      <a:tailEnd type="none" w="med" len="med"/>
+                    </a:lnB>
+                    <a:solidFill>
+                      <a:srgbClr val="F0F3F9"/>
+                    </a:solidFill>
+                  </a:tcPr>
+                </a:tc>
+              </a:tr>
+              <a:tr h="512064">
+                <a:tc>
+                  <a:txBody>
+                    <a:bodyPr/>
+                    <a:lstStyle/>
+                    <a:p>
+                      <a:pPr algn="l" indent="0" marL="0">
+                        <a:buNone/>
+                      </a:pPr>
+                      <a:r>
+                        <a:rPr lang="en-US" sz="1150" b="1" dirty="0">
+                          <a:solidFill>
+                            <a:srgbClr val="12182A"/>
+                          </a:solidFill>
+                          <a:latin typeface="Calibri" pitchFamily="34" charset="0"/>
+                          <a:ea typeface="Calibri" pitchFamily="34" charset="-122"/>
+                          <a:cs typeface="Calibri" pitchFamily="34" charset="-120"/>
+                        </a:rPr>
+                        <a:t>Slime</a:t>
                       </a:r>
                       <a:endParaRPr lang="en-US" sz="1150" dirty="0">
                         <a:latin typeface="Calibri" charset="0"/>
@@ -9452,7 +11364,7 @@
                           <a:ea typeface="Calibri" pitchFamily="34" charset="-122"/>
                           <a:cs typeface="Calibri" pitchFamily="34" charset="-120"/>
                         </a:rPr>
-                        <a:t>Reasoning-critical gate/coordination work — Opus at scale.</a:t>
+                        <a:t>Authors real changes — narrow scope, not low judgment. Haiku only for mechanical zones.</a:t>
                       </a:r>
                       <a:endParaRPr lang="en-US" sz="1150" dirty="0">
                         <a:latin typeface="Calibri" charset="0"/>
@@ -9522,7 +11434,7 @@
                           <a:ea typeface="Calibri" pitchFamily="34" charset="-122"/>
                           <a:cs typeface="Calibri" pitchFamily="34" charset="-120"/>
                         </a:rPr>
-                        <a:t>Slime</a:t>
+                        <a:t>Ascended ranks</a:t>
                       </a:r>
                       <a:endParaRPr lang="en-US" sz="1150" dirty="0">
                         <a:latin typeface="Calibri" charset="0"/>
@@ -9590,7 +11502,7 @@
                           <a:ea typeface="Calibri" pitchFamily="34" charset="-122"/>
                           <a:cs typeface="Calibri" pitchFamily="34" charset="-120"/>
                         </a:rPr>
-                        <a:t>Sonnet 5</a:t>
+                        <a:t>Opus 5</a:t>
                       </a:r>
                       <a:endParaRPr lang="en-US" sz="1150" dirty="0">
                         <a:latin typeface="Calibri" charset="0"/>
@@ -9658,7 +11570,7 @@
                           <a:ea typeface="Calibri" pitchFamily="34" charset="-122"/>
                           <a:cs typeface="Calibri" pitchFamily="34" charset="-120"/>
                         </a:rPr>
-                        <a:t>Authors real changes — narrow scope, not low judgment. Haiku only for mechanical zones.</a:t>
+                        <a:t>Cross-session judgment over an archive, or the last systemic check — task-driven, not just rarity.</a:t>
                       </a:r>
                       <a:endParaRPr lang="en-US" sz="1150" dirty="0">
                         <a:latin typeface="Calibri" charset="0"/>
@@ -9706,212 +11618,6 @@
                     </a:lnB>
                     <a:solidFill>
                       <a:srgbClr val="F0F3F9"/>
-                    </a:solidFill>
-                  </a:tcPr>
-                </a:tc>
-              </a:tr>
-              <a:tr h="512064">
-                <a:tc>
-                  <a:txBody>
-                    <a:bodyPr/>
-                    <a:lstStyle/>
-                    <a:p>
-                      <a:pPr algn="l" indent="0" marL="0">
-                        <a:buNone/>
-                      </a:pPr>
-                      <a:r>
-                        <a:rPr lang="en-US" sz="1150" b="1" dirty="0">
-                          <a:solidFill>
-                            <a:srgbClr val="12182A"/>
-                          </a:solidFill>
-                          <a:latin typeface="Calibri" pitchFamily="34" charset="0"/>
-                          <a:ea typeface="Calibri" pitchFamily="34" charset="-122"/>
-                          <a:cs typeface="Calibri" pitchFamily="34" charset="-120"/>
-                        </a:rPr>
-                        <a:t>Ascended ranks</a:t>
-                      </a:r>
-                      <a:endParaRPr lang="en-US" sz="1150" dirty="0">
-                        <a:latin typeface="Calibri" charset="0"/>
-                        <a:ea typeface="Calibri" charset="0"/>
-                        <a:cs typeface="Calibri" charset="0"/>
-                      </a:endParaRPr>
-                    </a:p>
-                  </a:txBody>
-                  <a:tcPr marL="91440" marR="91440" marT="45720" marB="45720" anchor="ctr">
-                    <a:lnL w="6350" cap="flat" cmpd="sng" algn="ctr">
-                      <a:solidFill>
-                        <a:srgbClr val="E3E8F0"/>
-                      </a:solidFill>
-                      <a:prstDash val="solid"/>
-                      <a:round/>
-                      <a:headEnd type="none" w="med" len="med"/>
-                      <a:tailEnd type="none" w="med" len="med"/>
-                    </a:lnL>
-                    <a:lnR w="6350" cap="flat" cmpd="sng" algn="ctr">
-                      <a:solidFill>
-                        <a:srgbClr val="E3E8F0"/>
-                      </a:solidFill>
-                      <a:prstDash val="solid"/>
-                      <a:round/>
-                      <a:headEnd type="none" w="med" len="med"/>
-                      <a:tailEnd type="none" w="med" len="med"/>
-                    </a:lnR>
-                    <a:lnT w="6350" cap="flat" cmpd="sng" algn="ctr">
-                      <a:solidFill>
-                        <a:srgbClr val="E3E8F0"/>
-                      </a:solidFill>
-                      <a:prstDash val="solid"/>
-                      <a:round/>
-                      <a:headEnd type="none" w="med" len="med"/>
-                      <a:tailEnd type="none" w="med" len="med"/>
-                    </a:lnT>
-                    <a:lnB w="6350" cap="flat" cmpd="sng" algn="ctr">
-                      <a:solidFill>
-                        <a:srgbClr val="E3E8F0"/>
-                      </a:solidFill>
-                      <a:prstDash val="solid"/>
-                      <a:round/>
-                      <a:headEnd type="none" w="med" len="med"/>
-                      <a:tailEnd type="none" w="med" len="med"/>
-                    </a:lnB>
-                    <a:solidFill>
-                      <a:srgbClr val="FFFFFF"/>
-                    </a:solidFill>
-                  </a:tcPr>
-                </a:tc>
-                <a:tc>
-                  <a:txBody>
-                    <a:bodyPr/>
-                    <a:lstStyle/>
-                    <a:p>
-                      <a:pPr algn="l" indent="0" marL="0">
-                        <a:buNone/>
-                      </a:pPr>
-                      <a:r>
-                        <a:rPr lang="en-US" sz="1150" dirty="0">
-                          <a:solidFill>
-                            <a:srgbClr val="2695BD"/>
-                          </a:solidFill>
-                          <a:latin typeface="Calibri" pitchFamily="34" charset="0"/>
-                          <a:ea typeface="Calibri" pitchFamily="34" charset="-122"/>
-                          <a:cs typeface="Calibri" pitchFamily="34" charset="-120"/>
-                        </a:rPr>
-                        <a:t>Opus 5</a:t>
-                      </a:r>
-                      <a:endParaRPr lang="en-US" sz="1150" dirty="0">
-                        <a:latin typeface="Calibri" charset="0"/>
-                        <a:ea typeface="Calibri" charset="0"/>
-                        <a:cs typeface="Calibri" charset="0"/>
-                      </a:endParaRPr>
-                    </a:p>
-                  </a:txBody>
-                  <a:tcPr marL="91440" marR="91440" marT="45720" marB="45720" anchor="ctr">
-                    <a:lnL w="6350" cap="flat" cmpd="sng" algn="ctr">
-                      <a:solidFill>
-                        <a:srgbClr val="E3E8F0"/>
-                      </a:solidFill>
-                      <a:prstDash val="solid"/>
-                      <a:round/>
-                      <a:headEnd type="none" w="med" len="med"/>
-                      <a:tailEnd type="none" w="med" len="med"/>
-                    </a:lnL>
-                    <a:lnR w="6350" cap="flat" cmpd="sng" algn="ctr">
-                      <a:solidFill>
-                        <a:srgbClr val="E3E8F0"/>
-                      </a:solidFill>
-                      <a:prstDash val="solid"/>
-                      <a:round/>
-                      <a:headEnd type="none" w="med" len="med"/>
-                      <a:tailEnd type="none" w="med" len="med"/>
-                    </a:lnR>
-                    <a:lnT w="6350" cap="flat" cmpd="sng" algn="ctr">
-                      <a:solidFill>
-                        <a:srgbClr val="E3E8F0"/>
-                      </a:solidFill>
-                      <a:prstDash val="solid"/>
-                      <a:round/>
-                      <a:headEnd type="none" w="med" len="med"/>
-                      <a:tailEnd type="none" w="med" len="med"/>
-                    </a:lnT>
-                    <a:lnB w="6350" cap="flat" cmpd="sng" algn="ctr">
-                      <a:solidFill>
-                        <a:srgbClr val="E3E8F0"/>
-                      </a:solidFill>
-                      <a:prstDash val="solid"/>
-                      <a:round/>
-                      <a:headEnd type="none" w="med" len="med"/>
-                      <a:tailEnd type="none" w="med" len="med"/>
-                    </a:lnB>
-                    <a:solidFill>
-                      <a:srgbClr val="FFFFFF"/>
-                    </a:solidFill>
-                  </a:tcPr>
-                </a:tc>
-                <a:tc>
-                  <a:txBody>
-                    <a:bodyPr/>
-                    <a:lstStyle/>
-                    <a:p>
-                      <a:pPr algn="l" indent="0" marL="0">
-                        <a:buNone/>
-                      </a:pPr>
-                      <a:r>
-                        <a:rPr lang="en-US" sz="1150" dirty="0">
-                          <a:solidFill>
-                            <a:srgbClr val="12182A"/>
-                          </a:solidFill>
-                          <a:latin typeface="Calibri" pitchFamily="34" charset="0"/>
-                          <a:ea typeface="Calibri" pitchFamily="34" charset="-122"/>
-                          <a:cs typeface="Calibri" pitchFamily="34" charset="-120"/>
-                        </a:rPr>
-                        <a:t>Cross-session judgment over an archive, or the last systemic check — task-driven, not just rarity.</a:t>
-                      </a:r>
-                      <a:endParaRPr lang="en-US" sz="1150" dirty="0">
-                        <a:latin typeface="Calibri" charset="0"/>
-                        <a:ea typeface="Calibri" charset="0"/>
-                        <a:cs typeface="Calibri" charset="0"/>
-                      </a:endParaRPr>
-                    </a:p>
-                  </a:txBody>
-                  <a:tcPr marL="91440" marR="91440" marT="45720" marB="45720" anchor="ctr">
-                    <a:lnL w="6350" cap="flat" cmpd="sng" algn="ctr">
-                      <a:solidFill>
-                        <a:srgbClr val="E3E8F0"/>
-                      </a:solidFill>
-                      <a:prstDash val="solid"/>
-                      <a:round/>
-                      <a:headEnd type="none" w="med" len="med"/>
-                      <a:tailEnd type="none" w="med" len="med"/>
-                    </a:lnL>
-                    <a:lnR w="6350" cap="flat" cmpd="sng" algn="ctr">
-                      <a:solidFill>
-                        <a:srgbClr val="E3E8F0"/>
-                      </a:solidFill>
-                      <a:prstDash val="solid"/>
-                      <a:round/>
-                      <a:headEnd type="none" w="med" len="med"/>
-                      <a:tailEnd type="none" w="med" len="med"/>
-                    </a:lnR>
-                    <a:lnT w="6350" cap="flat" cmpd="sng" algn="ctr">
-                      <a:solidFill>
-                        <a:srgbClr val="E3E8F0"/>
-                      </a:solidFill>
-                      <a:prstDash val="solid"/>
-                      <a:round/>
-                      <a:headEnd type="none" w="med" len="med"/>
-                      <a:tailEnd type="none" w="med" len="med"/>
-                    </a:lnT>
-                    <a:lnB w="6350" cap="flat" cmpd="sng" algn="ctr">
-                      <a:solidFill>
-                        <a:srgbClr val="E3E8F0"/>
-                      </a:solidFill>
-                      <a:prstDash val="solid"/>
-                      <a:round/>
-                      <a:headEnd type="none" w="med" len="med"/>
-                      <a:tailEnd type="none" w="med" len="med"/>
-                    </a:lnB>
-                    <a:solidFill>
-                      <a:srgbClr val="FFFFFF"/>
                     </a:solidFill>
                   </a:tcPr>
                 </a:tc>

--- a/presentations/isekai-opencode-overview.pptx
+++ b/presentations/isekai-opencode-overview.pptx
@@ -1482,7 +1482,7 @@
           <a:p>
             <a:r>
               <a:rPr lang="en-US" dirty="0"/>
-              <a:t>Instruments are perception, not memory — what the world can check about itself right now, versus what a document claims.</a:t>
+              <a:t>Instruments are perception, not memory — what the world can check about itself right now, versus what a document claims. The bottom row is field-tested, not illustrative: OpenCode was actually installed and run on the machine this deck was built on, the 842M figure is the real, corrected total after fixing a Claude Code input-token undercount, and the 3 bugs (Claude cache-token undercount, a silent node:sqlite failure, and an OpenCode cache-token undercount) were each caught by an actual deterministic test script (.isekai/tools/test-opencode-integration.js), not by inspection.</a:t>
             </a:r>
             <a:endParaRPr lang="en-US" dirty="0"/>
           </a:p>
@@ -2149,7 +2149,7 @@
                 <a:ea typeface="Calibri" pitchFamily="34" charset="-122"/>
                 <a:cs typeface="Calibri" pitchFamily="34" charset="-120"/>
               </a:rPr>
-              <a:t>AN OPENCODE-NATIVE CONVENTION</a:t>
+              <a:t>A CROSS-HARNESS CONVENTION</a:t>
             </a:r>
             <a:endParaRPr lang="en-US" sz="1200" dirty="0"/>
           </a:p>
@@ -2761,7 +2761,7 @@
                 <a:ea typeface="Cambria" pitchFamily="34" charset="-122"/>
                 <a:cs typeface="Cambria" pitchFamily="34" charset="-120"/>
               </a:rPr>
-              <a:t>Portable across ecosystems</a:t>
+              <a:t>Harness-agnostic by design</a:t>
             </a:r>
             <a:endParaRPr lang="en-US" sz="1500" dirty="0"/>
           </a:p>
@@ -2800,7 +2800,7 @@
                 <a:ea typeface="Calibri" pitchFamily="34" charset="-122"/>
                 <a:cs typeface="Calibri" pitchFamily="34" charset="-120"/>
               </a:rPr>
-              <a:t>Minds and Bodies cross from OpenCode into Claude Code and back — one convention, two mouths.</a:t>
+              <a:t>Minds and Bodies cross from OpenCode into Claude Code and back — one convention, any coding harness, not a plugin bound to one vendor.</a:t>
             </a:r>
             <a:endParaRPr lang="en-US" sz="1200" dirty="0"/>
           </a:p>
@@ -9774,8 +9774,8 @@
         </p:nvSpPr>
         <p:spPr>
           <a:xfrm>
-            <a:off x="1463040" y="4754880"/>
-            <a:ext cx="9262872" cy="1005840"/>
+            <a:off x="1463040" y="4709160"/>
+            <a:ext cx="9262872" cy="777240"/>
           </a:xfrm>
           <a:prstGeom prst="rect">
             <a:avLst/>
@@ -9807,30 +9807,95 @@
       </p:sp>
       <p:sp>
         <p:nvSpPr>
-          <p:cNvPr id="11" name="Text 8"/>
-          <p:cNvSpPr txBox="1"/>
-          <p:nvPr/>
-        </p:nvSpPr>
-        <p:spPr>
-          <a:xfrm>
-            <a:off x="457200" y="6400800"/>
-            <a:ext cx="7315200" cy="274320"/>
-          </a:xfrm>
-          <a:prstGeom prst="rect">
-            <a:avLst/>
-          </a:prstGeom>
-          <a:noFill/>
-          <a:ln/>
-        </p:spPr>
-        <p:txBody>
-          <a:bodyPr wrap="square" lIns="0" tIns="0" rIns="0" bIns="0" rtlCol="0" anchor="ctr"/>
-          <a:lstStyle/>
-          <a:p>
-            <a:pPr indent="0" marL="0">
-              <a:buNone/>
-            </a:pPr>
-            <a:r>
-              <a:rPr lang="en-US" sz="900" spc="100" kern="0" dirty="0">
+          <p:cNvPr id="11" name="Shape 8"/>
+          <p:cNvSpPr/>
+          <p:nvPr/>
+        </p:nvSpPr>
+        <p:spPr>
+          <a:xfrm>
+            <a:off x="2194560" y="5532120"/>
+            <a:ext cx="7799832" cy="0"/>
+          </a:xfrm>
+          <a:prstGeom prst="line">
+            <a:avLst/>
+          </a:prstGeom>
+          <a:noFill/>
+          <a:ln w="12700">
+            <a:solidFill>
+              <a:srgbClr val="1A2436"/>
+            </a:solidFill>
+            <a:prstDash val="solid"/>
+          </a:ln>
+        </p:spPr>
+      </p:sp>
+      <p:sp>
+        <p:nvSpPr>
+          <p:cNvPr id="12" name="Text 9"/>
+          <p:cNvSpPr txBox="1"/>
+          <p:nvPr/>
+        </p:nvSpPr>
+        <p:spPr>
+          <a:xfrm>
+            <a:off x="640080" y="5669280"/>
+            <a:ext cx="3636264" cy="411480"/>
+          </a:xfrm>
+          <a:prstGeom prst="rect">
+            <a:avLst/>
+          </a:prstGeom>
+          <a:noFill/>
+          <a:ln/>
+        </p:spPr>
+        <p:txBody>
+          <a:bodyPr wrap="square" lIns="0" tIns="0" rIns="0" bIns="0" rtlCol="0" anchor="ctr"/>
+          <a:lstStyle/>
+          <a:p>
+            <a:pPr algn="ctr" indent="0" marL="0">
+              <a:buNone/>
+            </a:pPr>
+            <a:r>
+              <a:rPr lang="en-US" sz="2000" b="1" dirty="0">
+                <a:solidFill>
+                  <a:srgbClr val="2695BD"/>
+                </a:solidFill>
+                <a:latin typeface="Cambria" pitchFamily="34" charset="0"/>
+                <a:ea typeface="Cambria" pitchFamily="34" charset="-122"/>
+                <a:cs typeface="Cambria" pitchFamily="34" charset="-120"/>
+              </a:rPr>
+              <a:t>1.18.31</a:t>
+            </a:r>
+            <a:endParaRPr lang="en-US" sz="2000" dirty="0"/>
+          </a:p>
+        </p:txBody>
+      </p:sp>
+      <p:sp>
+        <p:nvSpPr>
+          <p:cNvPr id="13" name="Text 10"/>
+          <p:cNvSpPr txBox="1"/>
+          <p:nvPr/>
+        </p:nvSpPr>
+        <p:spPr>
+          <a:xfrm>
+            <a:off x="868680" y="6053328"/>
+            <a:ext cx="3179064" cy="502920"/>
+          </a:xfrm>
+          <a:prstGeom prst="rect">
+            <a:avLst/>
+          </a:prstGeom>
+          <a:noFill/>
+          <a:ln/>
+        </p:spPr>
+        <p:txBody>
+          <a:bodyPr wrap="square" lIns="0" tIns="0" rIns="0" bIns="0" rtlCol="0" anchor="ctr"/>
+          <a:lstStyle/>
+          <a:p>
+            <a:pPr algn="ctr" indent="0" marL="0">
+              <a:lnSpc>
+                <a:spcPct val="105000"/>
+              </a:lnSpc>
+              <a:buNone/>
+            </a:pPr>
+            <a:r>
+              <a:rPr lang="en-US" sz="950" dirty="0">
                 <a:solidFill>
                   <a:srgbClr val="9FB3CC"/>
                 </a:solidFill>
@@ -9838,6 +9903,207 @@
                 <a:ea typeface="Calibri" pitchFamily="34" charset="-122"/>
                 <a:cs typeface="Calibri" pitchFamily="34" charset="-120"/>
               </a:rPr>
+              <a:t>OpenCode installed + run live here</a:t>
+            </a:r>
+            <a:endParaRPr lang="en-US" sz="950" dirty="0"/>
+          </a:p>
+        </p:txBody>
+      </p:sp>
+      <p:sp>
+        <p:nvSpPr>
+          <p:cNvPr id="14" name="Text 11"/>
+          <p:cNvSpPr txBox="1"/>
+          <p:nvPr/>
+        </p:nvSpPr>
+        <p:spPr>
+          <a:xfrm>
+            <a:off x="4276344" y="5669280"/>
+            <a:ext cx="3636264" cy="411480"/>
+          </a:xfrm>
+          <a:prstGeom prst="rect">
+            <a:avLst/>
+          </a:prstGeom>
+          <a:noFill/>
+          <a:ln/>
+        </p:spPr>
+        <p:txBody>
+          <a:bodyPr wrap="square" lIns="0" tIns="0" rIns="0" bIns="0" rtlCol="0" anchor="ctr"/>
+          <a:lstStyle/>
+          <a:p>
+            <a:pPr algn="ctr" indent="0" marL="0">
+              <a:buNone/>
+            </a:pPr>
+            <a:r>
+              <a:rPr lang="en-US" sz="2000" b="1" dirty="0">
+                <a:solidFill>
+                  <a:srgbClr val="BD8C24"/>
+                </a:solidFill>
+                <a:latin typeface="Cambria" pitchFamily="34" charset="0"/>
+                <a:ea typeface="Cambria" pitchFamily="34" charset="-122"/>
+                <a:cs typeface="Cambria" pitchFamily="34" charset="-120"/>
+              </a:rPr>
+              <a:t>842M</a:t>
+            </a:r>
+            <a:endParaRPr lang="en-US" sz="2000" dirty="0"/>
+          </a:p>
+        </p:txBody>
+      </p:sp>
+      <p:sp>
+        <p:nvSpPr>
+          <p:cNvPr id="15" name="Text 12"/>
+          <p:cNvSpPr txBox="1"/>
+          <p:nvPr/>
+        </p:nvSpPr>
+        <p:spPr>
+          <a:xfrm>
+            <a:off x="4504944" y="6053328"/>
+            <a:ext cx="3179064" cy="502920"/>
+          </a:xfrm>
+          <a:prstGeom prst="rect">
+            <a:avLst/>
+          </a:prstGeom>
+          <a:noFill/>
+          <a:ln/>
+        </p:spPr>
+        <p:txBody>
+          <a:bodyPr wrap="square" lIns="0" tIns="0" rIns="0" bIns="0" rtlCol="0" anchor="ctr"/>
+          <a:lstStyle/>
+          <a:p>
+            <a:pPr algn="ctr" indent="0" marL="0">
+              <a:lnSpc>
+                <a:spcPct val="105000"/>
+              </a:lnSpc>
+              <a:buNone/>
+            </a:pPr>
+            <a:r>
+              <a:rPr lang="en-US" sz="950" dirty="0">
+                <a:solidFill>
+                  <a:srgbClr val="9FB3CC"/>
+                </a:solidFill>
+                <a:latin typeface="Calibri" pitchFamily="34" charset="0"/>
+                <a:ea typeface="Calibri" pitchFamily="34" charset="-122"/>
+                <a:cs typeface="Calibri" pitchFamily="34" charset="-120"/>
+              </a:rPr>
+              <a:t>real input tokens correctly counted (was 0.0M — undercount found by testing)</a:t>
+            </a:r>
+            <a:endParaRPr lang="en-US" sz="950" dirty="0"/>
+          </a:p>
+        </p:txBody>
+      </p:sp>
+      <p:sp>
+        <p:nvSpPr>
+          <p:cNvPr id="16" name="Text 13"/>
+          <p:cNvSpPr txBox="1"/>
+          <p:nvPr/>
+        </p:nvSpPr>
+        <p:spPr>
+          <a:xfrm>
+            <a:off x="7912608" y="5669280"/>
+            <a:ext cx="3636264" cy="411480"/>
+          </a:xfrm>
+          <a:prstGeom prst="rect">
+            <a:avLst/>
+          </a:prstGeom>
+          <a:noFill/>
+          <a:ln/>
+        </p:spPr>
+        <p:txBody>
+          <a:bodyPr wrap="square" lIns="0" tIns="0" rIns="0" bIns="0" rtlCol="0" anchor="ctr"/>
+          <a:lstStyle/>
+          <a:p>
+            <a:pPr algn="ctr" indent="0" marL="0">
+              <a:buNone/>
+            </a:pPr>
+            <a:r>
+              <a:rPr lang="en-US" sz="2000" b="1" dirty="0">
+                <a:solidFill>
+                  <a:srgbClr val="7C5CD6"/>
+                </a:solidFill>
+                <a:latin typeface="Cambria" pitchFamily="34" charset="0"/>
+                <a:ea typeface="Cambria" pitchFamily="34" charset="-122"/>
+                <a:cs typeface="Cambria" pitchFamily="34" charset="-120"/>
+              </a:rPr>
+              <a:t>3</a:t>
+            </a:r>
+            <a:endParaRPr lang="en-US" sz="2000" dirty="0"/>
+          </a:p>
+        </p:txBody>
+      </p:sp>
+      <p:sp>
+        <p:nvSpPr>
+          <p:cNvPr id="17" name="Text 14"/>
+          <p:cNvSpPr txBox="1"/>
+          <p:nvPr/>
+        </p:nvSpPr>
+        <p:spPr>
+          <a:xfrm>
+            <a:off x="8141208" y="6053328"/>
+            <a:ext cx="3179064" cy="502920"/>
+          </a:xfrm>
+          <a:prstGeom prst="rect">
+            <a:avLst/>
+          </a:prstGeom>
+          <a:noFill/>
+          <a:ln/>
+        </p:spPr>
+        <p:txBody>
+          <a:bodyPr wrap="square" lIns="0" tIns="0" rIns="0" bIns="0" rtlCol="0" anchor="ctr"/>
+          <a:lstStyle/>
+          <a:p>
+            <a:pPr algn="ctr" indent="0" marL="0">
+              <a:lnSpc>
+                <a:spcPct val="105000"/>
+              </a:lnSpc>
+              <a:buNone/>
+            </a:pPr>
+            <a:r>
+              <a:rPr lang="en-US" sz="950" dirty="0">
+                <a:solidFill>
+                  <a:srgbClr val="9FB3CC"/>
+                </a:solidFill>
+                <a:latin typeface="Calibri" pitchFamily="34" charset="0"/>
+                <a:ea typeface="Calibri" pitchFamily="34" charset="-122"/>
+                <a:cs typeface="Calibri" pitchFamily="34" charset="-120"/>
+              </a:rPr>
+              <a:t>real bugs found and fixed by an actual test script, not assumed away</a:t>
+            </a:r>
+            <a:endParaRPr lang="en-US" sz="950" dirty="0"/>
+          </a:p>
+        </p:txBody>
+      </p:sp>
+      <p:sp>
+        <p:nvSpPr>
+          <p:cNvPr id="18" name="Text 15"/>
+          <p:cNvSpPr txBox="1"/>
+          <p:nvPr/>
+        </p:nvSpPr>
+        <p:spPr>
+          <a:xfrm>
+            <a:off x="457200" y="6400800"/>
+            <a:ext cx="7315200" cy="274320"/>
+          </a:xfrm>
+          <a:prstGeom prst="rect">
+            <a:avLst/>
+          </a:prstGeom>
+          <a:noFill/>
+          <a:ln/>
+        </p:spPr>
+        <p:txBody>
+          <a:bodyPr wrap="square" lIns="0" tIns="0" rIns="0" bIns="0" rtlCol="0" anchor="ctr"/>
+          <a:lstStyle/>
+          <a:p>
+            <a:pPr indent="0" marL="0">
+              <a:buNone/>
+            </a:pPr>
+            <a:r>
+              <a:rPr lang="en-US" sz="900" spc="100" kern="0" dirty="0">
+                <a:solidFill>
+                  <a:srgbClr val="9FB3CC"/>
+                </a:solidFill>
+                <a:latin typeface="Calibri" pitchFamily="34" charset="0"/>
+                <a:ea typeface="Calibri" pitchFamily="34" charset="-122"/>
+                <a:cs typeface="Calibri" pitchFamily="34" charset="-120"/>
+              </a:rPr>
               <a:t>ISEKAI ⋄ A CONVENTION FOR LIVING WORLDS</a:t>
             </a:r>
             <a:endParaRPr lang="en-US" sz="900" dirty="0"/>
@@ -9846,7 +10112,7 @@
       </p:sp>
       <p:sp>
         <p:nvSpPr>
-          <p:cNvPr id="12" name="Text 9"/>
+          <p:cNvPr id="19" name="Text 16"/>
           <p:cNvSpPr txBox="1"/>
           <p:nvPr/>
         </p:nvSpPr>

--- a/presentations/isekai-opencode-overview.pptx
+++ b/presentations/isekai-opencode-overview.pptx
@@ -18,9 +18,10 @@
     <p:sldId id="266" r:id="rId12"/>
     <p:sldId id="267" r:id="rId13"/>
     <p:sldId id="268" r:id="rId14"/>
+    <p:sldId id="269" r:id="rId15"/>
   </p:sldIdLst>
   <p:notesMasterIdLst>
-    <p:notesMasterId r:id="rId15"/>
+    <p:notesMasterId r:id="rId16"/>
   </p:notesMasterIdLst>
   <p:sldSz cx="12192000" cy="6858000"/>
   <p:notesSz cx="6858000" cy="12192000"/>
@@ -778,7 +779,7 @@
           <a:p>
             <a:r>
               <a:rPr lang="en-US" dirty="0"/>
-              <a:t>Appendix, distinctly styled (slate background) to mark it as supplementary to the OpenCode-perspective main deck. The advantage: adopting Isekai isn't a bet on one ecosystem.</a:t>
+              <a:t>Real, honest empirical test -- logged in .isekai/log.md 2026-09-20. Deliberately keeps the negative/mixed finding (cost went up, not down) rather than only reporting the correctness win, per this convention's own Nature 9 (Perception: compute it, don't eyeball it) and Nature 3 (Evolution: a finding that complicates the pitch still gets recorded, not filtered out).</a:t>
             </a:r>
             <a:endParaRPr lang="en-US" dirty="0"/>
           </a:p>
@@ -866,7 +867,7 @@
           <a:p>
             <a:r>
               <a:rPr lang="en-US" dirty="0"/>
-              <a:t>Closing slide. Quote lifted directly from isekai.md's own opening.</a:t>
+              <a:t>Appendix, distinctly styled (slate background) to mark it as supplementary to the OpenCode-perspective main deck. The advantage: adopting Isekai isn't a bet on one ecosystem.</a:t>
             </a:r>
             <a:endParaRPr lang="en-US" dirty="0"/>
           </a:p>
@@ -890,6 +891,94 @@
             <a:fld id="{F7021451-1387-4CA6-816F-3879F97B5CBC}" type="slidenum">
               <a:rPr lang="en-US"/>
               <a:t>13</a:t>
+            </a:fld>
+            <a:endParaRPr lang="en-US"/>
+          </a:p>
+        </p:txBody>
+      </p:sp>
+    </p:spTree>
+    <p:extLst>
+      <p:ext uri="{BB962C8B-B14F-4D97-AF65-F5344CB8AC3E}">
+        <p14:creationId xmlns:p14="http://schemas.microsoft.com/office/powerpoint/2010/main" val="1024086991"/>
+      </p:ext>
+    </p:extLst>
+  </p:cSld>
+  <p:clrMapOvr>
+    <a:masterClrMapping/>
+  </p:clrMapOvr>
+</p:notes>
+</file>
+
+<file path=ppt/notesSlides/notesSlide14.xml><?xml version="1.0" encoding="utf-8"?>
+<p:notes xmlns:a="http://schemas.openxmlformats.org/drawingml/2006/main" xmlns:r="http://schemas.openxmlformats.org/officeDocument/2006/relationships" xmlns:p="http://schemas.openxmlformats.org/presentationml/2006/main">
+  <p:cSld>
+    <p:spTree>
+      <p:nvGrpSpPr>
+        <p:cNvPr id="1" name=""/>
+        <p:cNvGrpSpPr/>
+        <p:nvPr/>
+      </p:nvGrpSpPr>
+      <p:grpSpPr>
+        <a:xfrm>
+          <a:off x="0" y="0"/>
+          <a:ext cx="0" cy="0"/>
+          <a:chOff x="0" y="0"/>
+          <a:chExt cx="0" cy="0"/>
+        </a:xfrm>
+      </p:grpSpPr>
+      <p:sp>
+        <p:nvSpPr>
+          <p:cNvPr id="2" name="Slide Image Placeholder 1"/>
+          <p:cNvSpPr>
+            <a:spLocks noGrp="1" noRot="1" noChangeAspect="1"/>
+          </p:cNvSpPr>
+          <p:nvPr>
+            <p:ph type="sldImg"/>
+          </p:nvPr>
+        </p:nvSpPr>
+        <p:spPr/>
+      </p:sp>
+      <p:sp>
+        <p:nvSpPr>
+          <p:cNvPr id="3" name="Notes Placeholder 2"/>
+          <p:cNvSpPr>
+            <a:spLocks noGrp="1"/>
+          </p:cNvSpPr>
+          <p:nvPr>
+            <p:ph type="body" idx="1"/>
+          </p:nvPr>
+        </p:nvSpPr>
+        <p:spPr/>
+        <p:txBody>
+          <a:bodyPr/>
+          <a:lstStyle/>
+          <a:p>
+            <a:r>
+              <a:rPr lang="en-US" dirty="0"/>
+              <a:t>Closing slide. Quote lifted directly from isekai.md's own opening.</a:t>
+            </a:r>
+            <a:endParaRPr lang="en-US" dirty="0"/>
+          </a:p>
+        </p:txBody>
+      </p:sp>
+      <p:sp>
+        <p:nvSpPr>
+          <p:cNvPr id="4" name="Slide Number Placeholder 3"/>
+          <p:cNvSpPr>
+            <a:spLocks noGrp="1"/>
+          </p:cNvSpPr>
+          <p:nvPr>
+            <p:ph type="sldNum" sz="quarter" idx="10"/>
+          </p:nvPr>
+        </p:nvSpPr>
+        <p:spPr/>
+        <p:txBody>
+          <a:bodyPr/>
+          <a:lstStyle/>
+          <a:p>
+            <a:fld id="{F7021451-1387-4CA6-816F-3879F97B5CBC}" type="slidenum">
+              <a:rPr lang="en-US"/>
+              <a:t>14</a:t>
             </a:fld>
             <a:endParaRPr lang="en-US"/>
           </a:p>
@@ -4306,6 +4395,720 @@
 <file path=ppt/slides/slide12.xml><?xml version="1.0" encoding="utf-8"?>
 <p:sld xmlns:a="http://schemas.openxmlformats.org/drawingml/2006/main" xmlns:r="http://schemas.openxmlformats.org/officeDocument/2006/relationships" xmlns:p="http://schemas.openxmlformats.org/presentationml/2006/main">
   <p:cSld name="Slide 12">
+    <p:spTree>
+      <p:nvGrpSpPr>
+        <p:cNvPr id="1" name=""/>
+        <p:cNvGrpSpPr/>
+        <p:nvPr/>
+      </p:nvGrpSpPr>
+      <p:grpSpPr>
+        <a:xfrm>
+          <a:off x="0" y="0"/>
+          <a:ext cx="0" cy="0"/>
+          <a:chOff x="0" y="0"/>
+          <a:chExt cx="0" cy="0"/>
+        </a:xfrm>
+      </p:grpSpPr>
+      <p:sp>
+        <p:nvSpPr>
+          <p:cNvPr id="2" name="Text 0"/>
+          <p:cNvSpPr txBox="1"/>
+          <p:nvPr/>
+        </p:nvSpPr>
+        <p:spPr>
+          <a:xfrm>
+            <a:off x="640080" y="502920"/>
+            <a:ext cx="10908792" cy="822960"/>
+          </a:xfrm>
+          <a:prstGeom prst="rect">
+            <a:avLst/>
+          </a:prstGeom>
+          <a:noFill/>
+          <a:ln/>
+        </p:spPr>
+        <p:txBody>
+          <a:bodyPr wrap="square" lIns="0" tIns="0" rIns="0" bIns="0" rtlCol="0" anchor="ctr"/>
+          <a:lstStyle/>
+          <a:p>
+            <a:pPr indent="0" marL="0">
+              <a:buNone/>
+            </a:pPr>
+            <a:r>
+              <a:rPr lang="en-US" sz="3000" b="1" dirty="0">
+                <a:solidFill>
+                  <a:srgbClr val="12182A"/>
+                </a:solidFill>
+                <a:latin typeface="Cambria" pitchFamily="34" charset="0"/>
+                <a:ea typeface="Cambria" pitchFamily="34" charset="-122"/>
+                <a:cs typeface="Cambria" pitchFamily="34" charset="-120"/>
+              </a:rPr>
+              <a:t>Does it actually help? We measured it.</a:t>
+            </a:r>
+            <a:endParaRPr lang="en-US" sz="3000" dirty="0"/>
+          </a:p>
+        </p:txBody>
+      </p:sp>
+      <p:sp>
+        <p:nvSpPr>
+          <p:cNvPr id="3" name="Text 1"/>
+          <p:cNvSpPr txBox="1"/>
+          <p:nvPr/>
+        </p:nvSpPr>
+        <p:spPr>
+          <a:xfrm>
+            <a:off x="640080" y="1234440"/>
+            <a:ext cx="10908792" cy="640080"/>
+          </a:xfrm>
+          <a:prstGeom prst="rect">
+            <a:avLst/>
+          </a:prstGeom>
+          <a:noFill/>
+          <a:ln/>
+        </p:spPr>
+        <p:txBody>
+          <a:bodyPr wrap="square" lIns="0" tIns="0" rIns="0" bIns="0" rtlCol="0" anchor="t"/>
+          <a:lstStyle/>
+          <a:p>
+            <a:pPr indent="0" marL="0">
+              <a:lnSpc>
+                <a:spcPct val="115000"/>
+              </a:lnSpc>
+              <a:buNone/>
+            </a:pPr>
+            <a:r>
+              <a:rPr lang="en-US" sz="1250" dirty="0">
+                <a:solidFill>
+                  <a:srgbClr val="6B7A90"/>
+                </a:solidFill>
+                <a:latin typeface="Calibri" pitchFamily="34" charset="0"/>
+                <a:ea typeface="Calibri" pitchFamily="34" charset="-122"/>
+                <a:cs typeface="Calibri" pitchFamily="34" charset="-120"/>
+              </a:rPr>
+              <a:t>6 isolated Claude Code sessions (Sonnet 5) fixed the same real, documented bug in terraform-provider-mongodb -- 3 with .isekai/ present, 3 with it stripped entirely. Not a pitch: a controlled comparison, graded against objective pass/fail criteria.</a:t>
+            </a:r>
+            <a:endParaRPr lang="en-US" sz="1250" dirty="0"/>
+          </a:p>
+        </p:txBody>
+      </p:sp>
+      <p:sp>
+        <p:nvSpPr>
+          <p:cNvPr id="4" name="Shape 2"/>
+          <p:cNvSpPr/>
+          <p:nvPr/>
+        </p:nvSpPr>
+        <p:spPr>
+          <a:xfrm>
+            <a:off x="640080" y="2148840"/>
+            <a:ext cx="3331464" cy="2880360"/>
+          </a:xfrm>
+          <a:prstGeom prst="roundRect">
+            <a:avLst>
+              <a:gd name="adj" fmla="val 3175"/>
+            </a:avLst>
+          </a:prstGeom>
+          <a:solidFill>
+            <a:srgbClr val="FFFFFF"/>
+          </a:solidFill>
+          <a:ln w="12700">
+            <a:solidFill>
+              <a:srgbClr val="E3E8F0"/>
+            </a:solidFill>
+            <a:prstDash val="solid"/>
+          </a:ln>
+          <a:effectLst>
+            <a:outerShdw sx="100000" sy="100000" kx="0" ky="0" algn="bl" rotWithShape="0" blurRad="101600" dist="38100" dir="5400000">
+              <a:srgbClr val="1B2333">
+                <a:alpha val="10000"/>
+              </a:srgbClr>
+            </a:outerShdw>
+          </a:effectLst>
+        </p:spPr>
+      </p:sp>
+      <p:sp>
+        <p:nvSpPr>
+          <p:cNvPr id="5" name="Text 3"/>
+          <p:cNvSpPr txBox="1"/>
+          <p:nvPr/>
+        </p:nvSpPr>
+        <p:spPr>
+          <a:xfrm>
+            <a:off x="868680" y="2377440"/>
+            <a:ext cx="2874264" cy="640080"/>
+          </a:xfrm>
+          <a:prstGeom prst="rect">
+            <a:avLst/>
+          </a:prstGeom>
+          <a:noFill/>
+          <a:ln/>
+        </p:spPr>
+        <p:txBody>
+          <a:bodyPr wrap="square" lIns="0" tIns="0" rIns="0" bIns="0" rtlCol="0" anchor="ctr"/>
+          <a:lstStyle/>
+          <a:p>
+            <a:pPr indent="0" marL="0">
+              <a:buNone/>
+            </a:pPr>
+            <a:r>
+              <a:rPr lang="en-US" sz="3000" b="1" dirty="0">
+                <a:solidFill>
+                  <a:srgbClr val="2695BD"/>
+                </a:solidFill>
+                <a:latin typeface="Cambria" pitchFamily="34" charset="0"/>
+                <a:ea typeface="Cambria" pitchFamily="34" charset="-122"/>
+                <a:cs typeface="Cambria" pitchFamily="34" charset="-120"/>
+              </a:rPr>
+              <a:t>3 / 3</a:t>
+            </a:r>
+            <a:endParaRPr lang="en-US" sz="3000" dirty="0"/>
+          </a:p>
+        </p:txBody>
+      </p:sp>
+      <p:sp>
+        <p:nvSpPr>
+          <p:cNvPr id="6" name="Text 4"/>
+          <p:cNvSpPr txBox="1"/>
+          <p:nvPr/>
+        </p:nvSpPr>
+        <p:spPr>
+          <a:xfrm>
+            <a:off x="868680" y="3017520"/>
+            <a:ext cx="2874264" cy="548640"/>
+          </a:xfrm>
+          <a:prstGeom prst="rect">
+            <a:avLst/>
+          </a:prstGeom>
+          <a:noFill/>
+          <a:ln/>
+        </p:spPr>
+        <p:txBody>
+          <a:bodyPr wrap="square" lIns="0" tIns="0" rIns="0" bIns="0" rtlCol="0" anchor="t"/>
+          <a:lstStyle/>
+          <a:p>
+            <a:pPr indent="0" marL="0">
+              <a:lnSpc>
+                <a:spcPct val="110000"/>
+              </a:lnSpc>
+              <a:buNone/>
+            </a:pPr>
+            <a:r>
+              <a:rPr lang="en-US" sz="1250" b="1" dirty="0">
+                <a:solidFill>
+                  <a:srgbClr val="12182A"/>
+                </a:solidFill>
+                <a:latin typeface="Cambria" pitchFamily="34" charset="0"/>
+                <a:ea typeface="Cambria" pitchFamily="34" charset="-122"/>
+                <a:cs typeface="Cambria" pitchFamily="34" charset="-120"/>
+              </a:rPr>
+              <a:t>adopted the codebase's own canonical fix</a:t>
+            </a:r>
+            <a:endParaRPr lang="en-US" sz="1250" dirty="0"/>
+          </a:p>
+        </p:txBody>
+      </p:sp>
+      <p:sp>
+        <p:nvSpPr>
+          <p:cNvPr id="7" name="Text 5"/>
+          <p:cNvSpPr txBox="1"/>
+          <p:nvPr/>
+        </p:nvSpPr>
+        <p:spPr>
+          <a:xfrm>
+            <a:off x="868680" y="3611880"/>
+            <a:ext cx="2874264" cy="1325880"/>
+          </a:xfrm>
+          <a:prstGeom prst="rect">
+            <a:avLst/>
+          </a:prstGeom>
+          <a:noFill/>
+          <a:ln/>
+        </p:spPr>
+        <p:txBody>
+          <a:bodyPr wrap="square" lIns="0" tIns="0" rIns="0" bIns="0" rtlCol="0" anchor="t"/>
+          <a:lstStyle/>
+          <a:p>
+            <a:pPr indent="0" marL="0">
+              <a:lnSpc>
+                <a:spcPct val="115000"/>
+              </a:lnSpc>
+              <a:buNone/>
+            </a:pPr>
+            <a:r>
+              <a:rPr lang="en-US" sz="1000" dirty="0">
+                <a:solidFill>
+                  <a:srgbClr val="6B7A90"/>
+                </a:solidFill>
+                <a:latin typeface="Calibri" pitchFamily="34" charset="0"/>
+                <a:ea typeface="Calibri" pitchFamily="34" charset="-122"/>
+                <a:cs typeface="Calibri" pitchFamily="34" charset="-120"/>
+              </a:rPr>
+              <a:t>vs. 0/3 without -- which all settled for a narrower, incomplete patch despite the correct pattern sitting 20 lines away in the same file.</a:t>
+            </a:r>
+            <a:endParaRPr lang="en-US" sz="1000" dirty="0"/>
+          </a:p>
+        </p:txBody>
+      </p:sp>
+      <p:sp>
+        <p:nvSpPr>
+          <p:cNvPr id="8" name="Shape 6"/>
+          <p:cNvSpPr/>
+          <p:nvPr/>
+        </p:nvSpPr>
+        <p:spPr>
+          <a:xfrm>
+            <a:off x="4428744" y="2148840"/>
+            <a:ext cx="3331464" cy="2880360"/>
+          </a:xfrm>
+          <a:prstGeom prst="roundRect">
+            <a:avLst>
+              <a:gd name="adj" fmla="val 3175"/>
+            </a:avLst>
+          </a:prstGeom>
+          <a:solidFill>
+            <a:srgbClr val="FFFFFF"/>
+          </a:solidFill>
+          <a:ln w="12700">
+            <a:solidFill>
+              <a:srgbClr val="E3E8F0"/>
+            </a:solidFill>
+            <a:prstDash val="solid"/>
+          </a:ln>
+          <a:effectLst>
+            <a:outerShdw sx="100000" sy="100000" kx="0" ky="0" algn="bl" rotWithShape="0" blurRad="101600" dist="38100" dir="5400000">
+              <a:srgbClr val="1B2333">
+                <a:alpha val="10000"/>
+              </a:srgbClr>
+            </a:outerShdw>
+          </a:effectLst>
+        </p:spPr>
+      </p:sp>
+      <p:sp>
+        <p:nvSpPr>
+          <p:cNvPr id="9" name="Text 7"/>
+          <p:cNvSpPr txBox="1"/>
+          <p:nvPr/>
+        </p:nvSpPr>
+        <p:spPr>
+          <a:xfrm>
+            <a:off x="4657344" y="2377440"/>
+            <a:ext cx="2874264" cy="640080"/>
+          </a:xfrm>
+          <a:prstGeom prst="rect">
+            <a:avLst/>
+          </a:prstGeom>
+          <a:noFill/>
+          <a:ln/>
+        </p:spPr>
+        <p:txBody>
+          <a:bodyPr wrap="square" lIns="0" tIns="0" rIns="0" bIns="0" rtlCol="0" anchor="ctr"/>
+          <a:lstStyle/>
+          <a:p>
+            <a:pPr indent="0" marL="0">
+              <a:buNone/>
+            </a:pPr>
+            <a:r>
+              <a:rPr lang="en-US" sz="3000" b="1" dirty="0">
+                <a:solidFill>
+                  <a:srgbClr val="BD8C24"/>
+                </a:solidFill>
+                <a:latin typeface="Cambria" pitchFamily="34" charset="0"/>
+                <a:ea typeface="Cambria" pitchFamily="34" charset="-122"/>
+                <a:cs typeface="Cambria" pitchFamily="34" charset="-120"/>
+              </a:rPr>
+              <a:t>~3x</a:t>
+            </a:r>
+            <a:endParaRPr lang="en-US" sz="3000" dirty="0"/>
+          </a:p>
+        </p:txBody>
+      </p:sp>
+      <p:sp>
+        <p:nvSpPr>
+          <p:cNvPr id="10" name="Text 8"/>
+          <p:cNvSpPr txBox="1"/>
+          <p:nvPr/>
+        </p:nvSpPr>
+        <p:spPr>
+          <a:xfrm>
+            <a:off x="4657344" y="3017520"/>
+            <a:ext cx="2874264" cy="548640"/>
+          </a:xfrm>
+          <a:prstGeom prst="rect">
+            <a:avLst/>
+          </a:prstGeom>
+          <a:noFill/>
+          <a:ln/>
+        </p:spPr>
+        <p:txBody>
+          <a:bodyPr wrap="square" lIns="0" tIns="0" rIns="0" bIns="0" rtlCol="0" anchor="t"/>
+          <a:lstStyle/>
+          <a:p>
+            <a:pPr indent="0" marL="0">
+              <a:lnSpc>
+                <a:spcPct val="110000"/>
+              </a:lnSpc>
+              <a:buNone/>
+            </a:pPr>
+            <a:r>
+              <a:rPr lang="en-US" sz="1250" b="1" dirty="0">
+                <a:solidFill>
+                  <a:srgbClr val="12182A"/>
+                </a:solidFill>
+                <a:latin typeface="Cambria" pitchFamily="34" charset="0"/>
+                <a:ea typeface="Cambria" pitchFamily="34" charset="-122"/>
+                <a:cs typeface="Cambria" pitchFamily="34" charset="-120"/>
+              </a:rPr>
+              <a:t>higher cost, not lower</a:t>
+            </a:r>
+            <a:endParaRPr lang="en-US" sz="1250" dirty="0"/>
+          </a:p>
+        </p:txBody>
+      </p:sp>
+      <p:sp>
+        <p:nvSpPr>
+          <p:cNvPr id="11" name="Text 9"/>
+          <p:cNvSpPr txBox="1"/>
+          <p:nvPr/>
+        </p:nvSpPr>
+        <p:spPr>
+          <a:xfrm>
+            <a:off x="4657344" y="3611880"/>
+            <a:ext cx="2874264" cy="1325880"/>
+          </a:xfrm>
+          <a:prstGeom prst="rect">
+            <a:avLst/>
+          </a:prstGeom>
+          <a:noFill/>
+          <a:ln/>
+        </p:spPr>
+        <p:txBody>
+          <a:bodyPr wrap="square" lIns="0" tIns="0" rIns="0" bIns="0" rtlCol="0" anchor="t"/>
+          <a:lstStyle/>
+          <a:p>
+            <a:pPr indent="0" marL="0">
+              <a:lnSpc>
+                <a:spcPct val="115000"/>
+              </a:lnSpc>
+              <a:buNone/>
+            </a:pPr>
+            <a:r>
+              <a:rPr lang="en-US" sz="1000" dirty="0">
+                <a:solidFill>
+                  <a:srgbClr val="6B7A90"/>
+                </a:solidFill>
+                <a:latin typeface="Calibri" pitchFamily="34" charset="0"/>
+                <a:ea typeface="Calibri" pitchFamily="34" charset="-122"/>
+                <a:cs typeface="Calibri" pitchFamily="34" charset="-120"/>
+              </a:rPr>
+              <a:t>$0.49 avg vs $0.17 avg per trial. The overhead is real: turns spent reading world docs, some irrelevant to the specific task.</a:t>
+            </a:r>
+            <a:endParaRPr lang="en-US" sz="1000" dirty="0"/>
+          </a:p>
+        </p:txBody>
+      </p:sp>
+      <p:sp>
+        <p:nvSpPr>
+          <p:cNvPr id="12" name="Shape 10"/>
+          <p:cNvSpPr/>
+          <p:nvPr/>
+        </p:nvSpPr>
+        <p:spPr>
+          <a:xfrm>
+            <a:off x="8217408" y="2148840"/>
+            <a:ext cx="3331464" cy="2880360"/>
+          </a:xfrm>
+          <a:prstGeom prst="roundRect">
+            <a:avLst>
+              <a:gd name="adj" fmla="val 3175"/>
+            </a:avLst>
+          </a:prstGeom>
+          <a:solidFill>
+            <a:srgbClr val="FFFFFF"/>
+          </a:solidFill>
+          <a:ln w="12700">
+            <a:solidFill>
+              <a:srgbClr val="E3E8F0"/>
+            </a:solidFill>
+            <a:prstDash val="solid"/>
+          </a:ln>
+          <a:effectLst>
+            <a:outerShdw sx="100000" sy="100000" kx="0" ky="0" algn="bl" rotWithShape="0" blurRad="101600" dist="38100" dir="5400000">
+              <a:srgbClr val="1B2333">
+                <a:alpha val="10000"/>
+              </a:srgbClr>
+            </a:outerShdw>
+          </a:effectLst>
+        </p:spPr>
+      </p:sp>
+      <p:sp>
+        <p:nvSpPr>
+          <p:cNvPr id="13" name="Text 11"/>
+          <p:cNvSpPr txBox="1"/>
+          <p:nvPr/>
+        </p:nvSpPr>
+        <p:spPr>
+          <a:xfrm>
+            <a:off x="8446008" y="2377440"/>
+            <a:ext cx="2874264" cy="640080"/>
+          </a:xfrm>
+          <a:prstGeom prst="rect">
+            <a:avLst/>
+          </a:prstGeom>
+          <a:noFill/>
+          <a:ln/>
+        </p:spPr>
+        <p:txBody>
+          <a:bodyPr wrap="square" lIns="0" tIns="0" rIns="0" bIns="0" rtlCol="0" anchor="ctr"/>
+          <a:lstStyle/>
+          <a:p>
+            <a:pPr indent="0" marL="0">
+              <a:buNone/>
+            </a:pPr>
+            <a:r>
+              <a:rPr lang="en-US" sz="3000" b="1" dirty="0">
+                <a:solidFill>
+                  <a:srgbClr val="7C5CD6"/>
+                </a:solidFill>
+                <a:latin typeface="Cambria" pitchFamily="34" charset="0"/>
+                <a:ea typeface="Cambria" pitchFamily="34" charset="-122"/>
+                <a:cs typeface="Cambria" pitchFamily="34" charset="-120"/>
+              </a:rPr>
+              <a:t>3.35x</a:t>
+            </a:r>
+            <a:endParaRPr lang="en-US" sz="3000" dirty="0"/>
+          </a:p>
+        </p:txBody>
+      </p:sp>
+      <p:sp>
+        <p:nvSpPr>
+          <p:cNvPr id="14" name="Text 12"/>
+          <p:cNvSpPr txBox="1"/>
+          <p:nvPr/>
+        </p:nvSpPr>
+        <p:spPr>
+          <a:xfrm>
+            <a:off x="8446008" y="3017520"/>
+            <a:ext cx="2874264" cy="548640"/>
+          </a:xfrm>
+          <a:prstGeom prst="rect">
+            <a:avLst/>
+          </a:prstGeom>
+          <a:noFill/>
+          <a:ln/>
+        </p:spPr>
+        <p:txBody>
+          <a:bodyPr wrap="square" lIns="0" tIns="0" rIns="0" bIns="0" rtlCol="0" anchor="t"/>
+          <a:lstStyle/>
+          <a:p>
+            <a:pPr indent="0" marL="0">
+              <a:lnSpc>
+                <a:spcPct val="110000"/>
+              </a:lnSpc>
+              <a:buNone/>
+            </a:pPr>
+            <a:r>
+              <a:rPr lang="en-US" sz="1250" b="1" dirty="0">
+                <a:solidFill>
+                  <a:srgbClr val="12182A"/>
+                </a:solidFill>
+                <a:latin typeface="Cambria" pitchFamily="34" charset="0"/>
+                <a:ea typeface="Cambria" pitchFamily="34" charset="-122"/>
+                <a:cs typeface="Cambria" pitchFamily="34" charset="-120"/>
+              </a:rPr>
+              <a:t>gap held across a 2nd chained task</a:t>
+            </a:r>
+            <a:endParaRPr lang="en-US" sz="1250" dirty="0"/>
+          </a:p>
+        </p:txBody>
+      </p:sp>
+      <p:sp>
+        <p:nvSpPr>
+          <p:cNvPr id="15" name="Text 13"/>
+          <p:cNvSpPr txBox="1"/>
+          <p:nvPr/>
+        </p:nvSpPr>
+        <p:spPr>
+          <a:xfrm>
+            <a:off x="8446008" y="3611880"/>
+            <a:ext cx="2874264" cy="1325880"/>
+          </a:xfrm>
+          <a:prstGeom prst="rect">
+            <a:avLst/>
+          </a:prstGeom>
+          <a:noFill/>
+          <a:ln/>
+        </p:spPr>
+        <p:txBody>
+          <a:bodyPr wrap="square" lIns="0" tIns="0" rIns="0" bIns="0" rtlCol="0" anchor="t"/>
+          <a:lstStyle/>
+          <a:p>
+            <a:pPr indent="0" marL="0">
+              <a:lnSpc>
+                <a:spcPct val="115000"/>
+              </a:lnSpc>
+              <a:buNone/>
+            </a:pPr>
+            <a:r>
+              <a:rPr lang="en-US" sz="1000" dirty="0">
+                <a:solidFill>
+                  <a:srgbClr val="6B7A90"/>
+                </a:solidFill>
+                <a:latin typeface="Calibri" pitchFamily="34" charset="0"/>
+                <a:ea typeface="Calibri" pitchFamily="34" charset="-122"/>
+                <a:cs typeface="Calibri" pitchFamily="34" charset="-120"/>
+              </a:rPr>
+              <a:t>Ran a second real task in the same sessions (claude -c). Caching cut everyone's marginal cost vs. a cold start -- but the with/without ratio didn't shrink.</a:t>
+            </a:r>
+            <a:endParaRPr lang="en-US" sz="1000" dirty="0"/>
+          </a:p>
+        </p:txBody>
+      </p:sp>
+      <p:sp>
+        <p:nvSpPr>
+          <p:cNvPr id="16" name="Text 14"/>
+          <p:cNvSpPr txBox="1"/>
+          <p:nvPr/>
+        </p:nvSpPr>
+        <p:spPr>
+          <a:xfrm>
+            <a:off x="640080" y="5257800"/>
+            <a:ext cx="10908792" cy="822960"/>
+          </a:xfrm>
+          <a:prstGeom prst="rect">
+            <a:avLst/>
+          </a:prstGeom>
+          <a:noFill/>
+          <a:ln/>
+        </p:spPr>
+        <p:txBody>
+          <a:bodyPr wrap="square" lIns="0" tIns="0" rIns="0" bIns="0" rtlCol="0" anchor="t"/>
+          <a:lstStyle/>
+          <a:p>
+            <a:pPr indent="0" marL="0">
+              <a:lnSpc>
+                <a:spcPct val="120000"/>
+              </a:lnSpc>
+              <a:buNone/>
+            </a:pPr>
+            <a:r>
+              <a:rPr lang="en-US" sz="1150" b="1" dirty="0">
+                <a:solidFill>
+                  <a:srgbClr val="12182A"/>
+                </a:solidFill>
+                <a:latin typeface="Calibri" pitchFamily="34" charset="0"/>
+                <a:ea typeface="Calibri" pitchFamily="34" charset="-122"/>
+                <a:cs typeface="Calibri" pitchFamily="34" charset="-120"/>
+              </a:rPr>
+              <a:t>Verdict: </a:t>
+            </a:r>
+            <a:pPr indent="0" marL="0">
+              <a:lnSpc>
+                <a:spcPct val="120000"/>
+              </a:lnSpc>
+              <a:buNone/>
+            </a:pPr>
+            <a:r>
+              <a:rPr lang="en-US" sz="1150" i="1" dirty="0">
+                <a:solidFill>
+                  <a:srgbClr val="6B7A90"/>
+                </a:solidFill>
+                <a:latin typeface="Calibri" pitchFamily="34" charset="0"/>
+                <a:ea typeface="Calibri" pitchFamily="34" charset="-122"/>
+                <a:cs typeface="Calibri" pitchFamily="34" charset="-120"/>
+              </a:rPr>
+              <a:t>better decisions, not cheaper ones -- at least not within one small session on an 862-line codebase. The savings case this convention actually makes (skipping expensive cold exploration) needs a larger codebase or separate sessions over time to show up; this test doesn't have either, and says so.</a:t>
+            </a:r>
+            <a:endParaRPr lang="en-US" sz="1150" dirty="0"/>
+          </a:p>
+        </p:txBody>
+      </p:sp>
+      <p:sp>
+        <p:nvSpPr>
+          <p:cNvPr id="17" name="Text 15"/>
+          <p:cNvSpPr txBox="1"/>
+          <p:nvPr/>
+        </p:nvSpPr>
+        <p:spPr>
+          <a:xfrm>
+            <a:off x="457200" y="6400800"/>
+            <a:ext cx="7315200" cy="274320"/>
+          </a:xfrm>
+          <a:prstGeom prst="rect">
+            <a:avLst/>
+          </a:prstGeom>
+          <a:noFill/>
+          <a:ln/>
+        </p:spPr>
+        <p:txBody>
+          <a:bodyPr wrap="square" lIns="0" tIns="0" rIns="0" bIns="0" rtlCol="0" anchor="ctr"/>
+          <a:lstStyle/>
+          <a:p>
+            <a:pPr indent="0" marL="0">
+              <a:buNone/>
+            </a:pPr>
+            <a:r>
+              <a:rPr lang="en-US" sz="900" spc="100" kern="0" dirty="0">
+                <a:solidFill>
+                  <a:srgbClr val="6B7A90"/>
+                </a:solidFill>
+                <a:latin typeface="Calibri" pitchFamily="34" charset="0"/>
+                <a:ea typeface="Calibri" pitchFamily="34" charset="-122"/>
+                <a:cs typeface="Calibri" pitchFamily="34" charset="-120"/>
+              </a:rPr>
+              <a:t>ISEKAI ⋄ A CONVENTION FOR LIVING WORLDS</a:t>
+            </a:r>
+            <a:endParaRPr lang="en-US" sz="900" dirty="0"/>
+          </a:p>
+        </p:txBody>
+      </p:sp>
+      <p:sp>
+        <p:nvSpPr>
+          <p:cNvPr id="18" name="Text 16"/>
+          <p:cNvSpPr txBox="1"/>
+          <p:nvPr/>
+        </p:nvSpPr>
+        <p:spPr>
+          <a:xfrm>
+            <a:off x="11274552" y="6400800"/>
+            <a:ext cx="457200" cy="274320"/>
+          </a:xfrm>
+          <a:prstGeom prst="rect">
+            <a:avLst/>
+          </a:prstGeom>
+          <a:noFill/>
+          <a:ln/>
+        </p:spPr>
+        <p:txBody>
+          <a:bodyPr wrap="square" lIns="0" tIns="0" rIns="0" bIns="0" rtlCol="0" anchor="ctr"/>
+          <a:lstStyle/>
+          <a:p>
+            <a:pPr algn="r" indent="0" marL="0">
+              <a:buNone/>
+            </a:pPr>
+            <a:r>
+              <a:rPr lang="en-US" sz="900" dirty="0">
+                <a:solidFill>
+                  <a:srgbClr val="6B7A90"/>
+                </a:solidFill>
+                <a:latin typeface="Calibri" pitchFamily="34" charset="0"/>
+                <a:ea typeface="Calibri" pitchFamily="34" charset="-122"/>
+                <a:cs typeface="Calibri" pitchFamily="34" charset="-120"/>
+              </a:rPr>
+              <a:t>12</a:t>
+            </a:r>
+            <a:endParaRPr lang="en-US" sz="900" dirty="0"/>
+          </a:p>
+        </p:txBody>
+      </p:sp>
+    </p:spTree>
+  </p:cSld>
+  <p:clrMapOvr>
+    <a:masterClrMapping/>
+  </p:clrMapOvr>
+</p:sld>
+</file>
+
+<file path=ppt/slides/slide13.xml><?xml version="1.0" encoding="utf-8"?>
+<p:sld xmlns:a="http://schemas.openxmlformats.org/drawingml/2006/main" xmlns:r="http://schemas.openxmlformats.org/officeDocument/2006/relationships" xmlns:p="http://schemas.openxmlformats.org/presentationml/2006/main">
+  <p:cSld name="Slide 13">
     <p:bg>
       <p:bgPr>
         <a:solidFill>
@@ -4948,7 +5751,7 @@
                 <a:ea typeface="Calibri" pitchFamily="34" charset="-122"/>
                 <a:cs typeface="Calibri" pitchFamily="34" charset="-120"/>
               </a:rPr>
-              <a:t>12</a:t>
+              <a:t>13</a:t>
             </a:r>
             <a:endParaRPr lang="en-US" sz="900" dirty="0"/>
           </a:p>
@@ -4962,9 +5765,9 @@
 </p:sld>
 </file>
 
-<file path=ppt/slides/slide13.xml><?xml version="1.0" encoding="utf-8"?>
+<file path=ppt/slides/slide14.xml><?xml version="1.0" encoding="utf-8"?>
 <p:sld xmlns:a="http://schemas.openxmlformats.org/drawingml/2006/main" xmlns:r="http://schemas.openxmlformats.org/officeDocument/2006/relationships" xmlns:p="http://schemas.openxmlformats.org/presentationml/2006/main">
-  <p:cSld name="Slide 13">
+  <p:cSld name="Slide 14">
     <p:bg>
       <p:bgPr>
         <a:solidFill>
@@ -5222,7 +6025,7 @@
                 <a:ea typeface="Calibri" pitchFamily="34" charset="-122"/>
                 <a:cs typeface="Calibri" pitchFamily="34" charset="-120"/>
               </a:rPr>
-              <a:t>13</a:t>
+              <a:t>14</a:t>
             </a:r>
             <a:endParaRPr lang="en-US" sz="900" dirty="0"/>
           </a:p>

--- a/presentations/isekai-opencode-overview.pptx
+++ b/presentations/isekai-opencode-overview.pptx
@@ -19,9 +19,10 @@
     <p:sldId id="267" r:id="rId13"/>
     <p:sldId id="268" r:id="rId14"/>
     <p:sldId id="269" r:id="rId15"/>
+    <p:sldId id="270" r:id="rId16"/>
   </p:sldIdLst>
   <p:notesMasterIdLst>
-    <p:notesMasterId r:id="rId16"/>
+    <p:notesMasterId r:id="rId17"/>
   </p:notesMasterIdLst>
   <p:sldSz cx="12192000" cy="6858000"/>
   <p:notesSz cx="6858000" cy="12192000"/>
@@ -779,7 +780,7 @@
           <a:p>
             <a:r>
               <a:rPr lang="en-US" dirty="0"/>
-              <a:t>Real, honest empirical test -- logged in .isekai/log.md 2026-09-20. Deliberately keeps the negative/mixed finding (cost went up, not down) rather than only reporting the correctness win, per this convention's own Nature 9 (Perception: compute it, don't eyeball it) and Nature 3 (Evolution: a finding that complicates the pitch still gets recorded, not filtered out).</a:t>
+              <a:t>Direct answer to: can a Slime escalate past its own ceiling? Yes -- Absolute Rule III, named 'Confirmation and Escalation'. Verified this section is actually present and correctly readable by testing it live: asked a free, non-Claude OpenCode model (nemotron-3.5-lightning-free) to read isekai.md's Rule III cold and explain the escalation chain -- it correctly answered 'asks its immediate parent, never skipping a rank' without prompting, confirming the doc itself is the mechanism, not something Claude-specific.</a:t>
             </a:r>
             <a:endParaRPr lang="en-US" dirty="0"/>
           </a:p>
@@ -867,7 +868,7 @@
           <a:p>
             <a:r>
               <a:rPr lang="en-US" dirty="0"/>
-              <a:t>Appendix, distinctly styled (slate background) to mark it as supplementary to the OpenCode-perspective main deck. The advantage: adopting Isekai isn't a bet on one ecosystem.</a:t>
+              <a:t>Real, honest empirical test -- logged in .isekai/log.md 2026-09-20. Deliberately keeps the negative/mixed finding (cost went up, not down) rather than only reporting the correctness win, per this convention's own Nature 9 (Perception: compute it, don't eyeball it) and Nature 3 (Evolution: a finding that complicates the pitch still gets recorded, not filtered out).</a:t>
             </a:r>
             <a:endParaRPr lang="en-US" dirty="0"/>
           </a:p>
@@ -955,7 +956,7 @@
           <a:p>
             <a:r>
               <a:rPr lang="en-US" dirty="0"/>
-              <a:t>Closing slide. Quote lifted directly from isekai.md's own opening.</a:t>
+              <a:t>Appendix, distinctly styled (slate background) to mark it as supplementary to the OpenCode-perspective main deck. The advantage: adopting Isekai isn't a bet on one ecosystem.</a:t>
             </a:r>
             <a:endParaRPr lang="en-US" dirty="0"/>
           </a:p>
@@ -979,6 +980,94 @@
             <a:fld id="{F7021451-1387-4CA6-816F-3879F97B5CBC}" type="slidenum">
               <a:rPr lang="en-US"/>
               <a:t>14</a:t>
+            </a:fld>
+            <a:endParaRPr lang="en-US"/>
+          </a:p>
+        </p:txBody>
+      </p:sp>
+    </p:spTree>
+    <p:extLst>
+      <p:ext uri="{BB962C8B-B14F-4D97-AF65-F5344CB8AC3E}">
+        <p14:creationId xmlns:p14="http://schemas.microsoft.com/office/powerpoint/2010/main" val="1024086991"/>
+      </p:ext>
+    </p:extLst>
+  </p:cSld>
+  <p:clrMapOvr>
+    <a:masterClrMapping/>
+  </p:clrMapOvr>
+</p:notes>
+</file>
+
+<file path=ppt/notesSlides/notesSlide15.xml><?xml version="1.0" encoding="utf-8"?>
+<p:notes xmlns:a="http://schemas.openxmlformats.org/drawingml/2006/main" xmlns:r="http://schemas.openxmlformats.org/officeDocument/2006/relationships" xmlns:p="http://schemas.openxmlformats.org/presentationml/2006/main">
+  <p:cSld>
+    <p:spTree>
+      <p:nvGrpSpPr>
+        <p:cNvPr id="1" name=""/>
+        <p:cNvGrpSpPr/>
+        <p:nvPr/>
+      </p:nvGrpSpPr>
+      <p:grpSpPr>
+        <a:xfrm>
+          <a:off x="0" y="0"/>
+          <a:ext cx="0" cy="0"/>
+          <a:chOff x="0" y="0"/>
+          <a:chExt cx="0" cy="0"/>
+        </a:xfrm>
+      </p:grpSpPr>
+      <p:sp>
+        <p:nvSpPr>
+          <p:cNvPr id="2" name="Slide Image Placeholder 1"/>
+          <p:cNvSpPr>
+            <a:spLocks noGrp="1" noRot="1" noChangeAspect="1"/>
+          </p:cNvSpPr>
+          <p:nvPr>
+            <p:ph type="sldImg"/>
+          </p:nvPr>
+        </p:nvSpPr>
+        <p:spPr/>
+      </p:sp>
+      <p:sp>
+        <p:nvSpPr>
+          <p:cNvPr id="3" name="Notes Placeholder 2"/>
+          <p:cNvSpPr>
+            <a:spLocks noGrp="1"/>
+          </p:cNvSpPr>
+          <p:nvPr>
+            <p:ph type="body" idx="1"/>
+          </p:nvPr>
+        </p:nvSpPr>
+        <p:spPr/>
+        <p:txBody>
+          <a:bodyPr/>
+          <a:lstStyle/>
+          <a:p>
+            <a:r>
+              <a:rPr lang="en-US" dirty="0"/>
+              <a:t>Closing slide. Quote lifted directly from isekai.md's own opening.</a:t>
+            </a:r>
+            <a:endParaRPr lang="en-US" dirty="0"/>
+          </a:p>
+        </p:txBody>
+      </p:sp>
+      <p:sp>
+        <p:nvSpPr>
+          <p:cNvPr id="4" name="Slide Number Placeholder 3"/>
+          <p:cNvSpPr>
+            <a:spLocks noGrp="1"/>
+          </p:cNvSpPr>
+          <p:nvPr>
+            <p:ph type="sldNum" sz="quarter" idx="10"/>
+          </p:nvPr>
+        </p:nvSpPr>
+        <p:spPr/>
+        <p:txBody>
+          <a:bodyPr/>
+          <a:lstStyle/>
+          <a:p>
+            <a:fld id="{F7021451-1387-4CA6-816F-3879F97B5CBC}" type="slidenum">
+              <a:rPr lang="en-US"/>
+              <a:t>15</a:t>
             </a:fld>
             <a:endParaRPr lang="en-US"/>
           </a:p>
@@ -4442,6 +4531,1066 @@
                 <a:ea typeface="Cambria" pitchFamily="34" charset="-122"/>
                 <a:cs typeface="Cambria" pitchFamily="34" charset="-120"/>
               </a:rPr>
+              <a:t>When a rank hits its ceiling: escalate, never guess</a:t>
+            </a:r>
+            <a:endParaRPr lang="en-US" sz="3000" dirty="0"/>
+          </a:p>
+        </p:txBody>
+      </p:sp>
+      <p:sp>
+        <p:nvSpPr>
+          <p:cNvPr id="3" name="Text 1"/>
+          <p:cNvSpPr txBox="1"/>
+          <p:nvPr/>
+        </p:nvSpPr>
+        <p:spPr>
+          <a:xfrm>
+            <a:off x="640080" y="1143000"/>
+            <a:ext cx="10908792" cy="502920"/>
+          </a:xfrm>
+          <a:prstGeom prst="rect">
+            <a:avLst/>
+          </a:prstGeom>
+          <a:noFill/>
+          <a:ln/>
+        </p:spPr>
+        <p:txBody>
+          <a:bodyPr wrap="square" lIns="0" tIns="0" rIns="0" bIns="0" rtlCol="0" anchor="ctr"/>
+          <a:lstStyle/>
+          <a:p>
+            <a:pPr indent="0" marL="0">
+              <a:buNone/>
+            </a:pPr>
+            <a:r>
+              <a:rPr lang="en-US" sz="1150" b="1" dirty="0">
+                <a:solidFill>
+                  <a:srgbClr val="12182A"/>
+                </a:solidFill>
+                <a:latin typeface="Calibri" pitchFamily="34" charset="0"/>
+                <a:ea typeface="Calibri" pitchFamily="34" charset="-122"/>
+                <a:cs typeface="Calibri" pitchFamily="34" charset="-120"/>
+              </a:rPr>
+              <a:t>Absolute Rule III — </a:t>
+            </a:r>
+            <a:pPr indent="0" marL="0">
+              <a:buNone/>
+            </a:pPr>
+            <a:r>
+              <a:rPr lang="en-US" sz="1150" dirty="0">
+                <a:solidFill>
+                  <a:srgbClr val="BD8C24"/>
+                </a:solidFill>
+                <a:latin typeface="Courier New" pitchFamily="34" charset="0"/>
+                <a:ea typeface="Courier New" pitchFamily="34" charset="-122"/>
+                <a:cs typeface="Courier New" pitchFamily="34" charset="-120"/>
+              </a:rPr>
+              <a:t>Confirmation and Escalation</a:t>
+            </a:r>
+            <a:pPr indent="0" marL="0">
+              <a:buNone/>
+            </a:pPr>
+            <a:r>
+              <a:rPr lang="en-US" sz="1150" dirty="0">
+                <a:solidFill>
+                  <a:srgbClr val="6B7A90"/>
+                </a:solidFill>
+                <a:latin typeface="Calibri" pitchFamily="34" charset="0"/>
+                <a:ea typeface="Calibri" pitchFamily="34" charset="-122"/>
+                <a:cs typeface="Calibri" pitchFamily="34" charset="-120"/>
+              </a:rPr>
+              <a:t>. Escalation moves by rank, one hop at a time — never skipping a level, never a handoff of the work itself, and it never guesses past confusion.</a:t>
+            </a:r>
+            <a:endParaRPr lang="en-US" sz="1150" dirty="0"/>
+          </a:p>
+        </p:txBody>
+      </p:sp>
+      <p:sp>
+        <p:nvSpPr>
+          <p:cNvPr id="4" name="Shape 2"/>
+          <p:cNvSpPr/>
+          <p:nvPr/>
+        </p:nvSpPr>
+        <p:spPr>
+          <a:xfrm>
+            <a:off x="832104" y="2304288"/>
+            <a:ext cx="0" cy="393192"/>
+          </a:xfrm>
+          <a:prstGeom prst="line">
+            <a:avLst/>
+          </a:prstGeom>
+          <a:noFill/>
+          <a:ln w="19050">
+            <a:solidFill>
+              <a:srgbClr val="D7DEE9"/>
+            </a:solidFill>
+            <a:prstDash val="solid"/>
+          </a:ln>
+        </p:spPr>
+      </p:sp>
+      <p:sp>
+        <p:nvSpPr>
+          <p:cNvPr id="5" name="Shape 3"/>
+          <p:cNvSpPr/>
+          <p:nvPr/>
+        </p:nvSpPr>
+        <p:spPr>
+          <a:xfrm>
+            <a:off x="640080" y="1920240"/>
+            <a:ext cx="384048" cy="384048"/>
+          </a:xfrm>
+          <a:prstGeom prst="ellipse">
+            <a:avLst/>
+          </a:prstGeom>
+          <a:solidFill>
+            <a:srgbClr val="2695BD"/>
+          </a:solidFill>
+          <a:ln/>
+        </p:spPr>
+      </p:sp>
+      <p:sp>
+        <p:nvSpPr>
+          <p:cNvPr id="6" name="Text 4"/>
+          <p:cNvSpPr txBox="1"/>
+          <p:nvPr/>
+        </p:nvSpPr>
+        <p:spPr>
+          <a:xfrm>
+            <a:off x="640080" y="1920240"/>
+            <a:ext cx="384048" cy="384048"/>
+          </a:xfrm>
+          <a:prstGeom prst="rect">
+            <a:avLst/>
+          </a:prstGeom>
+          <a:noFill/>
+          <a:ln/>
+        </p:spPr>
+        <p:txBody>
+          <a:bodyPr wrap="square" lIns="0" tIns="0" rIns="0" bIns="0" rtlCol="0" anchor="ctr"/>
+          <a:lstStyle/>
+          <a:p>
+            <a:pPr algn="ctr" indent="0" marL="0">
+              <a:buNone/>
+            </a:pPr>
+            <a:r>
+              <a:rPr lang="en-US" sz="1500" b="1" dirty="0">
+                <a:solidFill>
+                  <a:srgbClr val="FFFFFF"/>
+                </a:solidFill>
+                <a:latin typeface="Cambria" pitchFamily="34" charset="0"/>
+                <a:ea typeface="Cambria" pitchFamily="34" charset="-122"/>
+                <a:cs typeface="Cambria" pitchFamily="34" charset="-120"/>
+              </a:rPr>
+              <a:t>1</a:t>
+            </a:r>
+            <a:endParaRPr lang="en-US" sz="1500" dirty="0"/>
+          </a:p>
+        </p:txBody>
+      </p:sp>
+      <p:sp>
+        <p:nvSpPr>
+          <p:cNvPr id="7" name="Text 5"/>
+          <p:cNvSpPr txBox="1"/>
+          <p:nvPr/>
+        </p:nvSpPr>
+        <p:spPr>
+          <a:xfrm>
+            <a:off x="1280160" y="1865376"/>
+            <a:ext cx="1737360" cy="457200"/>
+          </a:xfrm>
+          <a:prstGeom prst="rect">
+            <a:avLst/>
+          </a:prstGeom>
+          <a:noFill/>
+          <a:ln/>
+        </p:spPr>
+        <p:txBody>
+          <a:bodyPr wrap="square" lIns="0" tIns="0" rIns="0" bIns="0" rtlCol="0" anchor="t"/>
+          <a:lstStyle/>
+          <a:p>
+            <a:pPr indent="0" marL="0">
+              <a:buNone/>
+            </a:pPr>
+            <a:r>
+              <a:rPr lang="en-US" sz="1300" b="1" dirty="0">
+                <a:solidFill>
+                  <a:srgbClr val="12182A"/>
+                </a:solidFill>
+                <a:latin typeface="Cambria" pitchFamily="34" charset="0"/>
+                <a:ea typeface="Cambria" pitchFamily="34" charset="-122"/>
+                <a:cs typeface="Cambria" pitchFamily="34" charset="-120"/>
+              </a:rPr>
+              <a:t>Slime</a:t>
+            </a:r>
+            <a:endParaRPr lang="en-US" sz="1300" dirty="0"/>
+          </a:p>
+        </p:txBody>
+      </p:sp>
+      <p:sp>
+        <p:nvSpPr>
+          <p:cNvPr id="8" name="Text 6"/>
+          <p:cNvSpPr txBox="1"/>
+          <p:nvPr/>
+        </p:nvSpPr>
+        <p:spPr>
+          <a:xfrm>
+            <a:off x="3017520" y="1847088"/>
+            <a:ext cx="8531352" cy="777240"/>
+          </a:xfrm>
+          <a:prstGeom prst="rect">
+            <a:avLst/>
+          </a:prstGeom>
+          <a:noFill/>
+          <a:ln/>
+        </p:spPr>
+        <p:txBody>
+          <a:bodyPr wrap="square" lIns="0" tIns="0" rIns="0" bIns="0" rtlCol="0" anchor="t"/>
+          <a:lstStyle/>
+          <a:p>
+            <a:pPr indent="0" marL="0">
+              <a:lnSpc>
+                <a:spcPct val="110000"/>
+              </a:lnSpc>
+              <a:buNone/>
+            </a:pPr>
+            <a:r>
+              <a:rPr lang="en-US" sz="1050" dirty="0">
+                <a:solidFill>
+                  <a:srgbClr val="6B7A90"/>
+                </a:solidFill>
+                <a:latin typeface="Calibri" pitchFamily="34" charset="0"/>
+                <a:ea typeface="Calibri" pitchFamily="34" charset="-122"/>
+                <a:cs typeface="Calibri" pitchFamily="34" charset="-120"/>
+              </a:rPr>
+              <a:t>Hits something it can't resolve at its own level: a request it can't parse, a doc that contradicts the code, an instrument reading it can't explain. Asks its immediate parent — never further up, never sideways.</a:t>
+            </a:r>
+            <a:endParaRPr lang="en-US" sz="1050" dirty="0"/>
+          </a:p>
+        </p:txBody>
+      </p:sp>
+      <p:sp>
+        <p:nvSpPr>
+          <p:cNvPr id="9" name="Shape 7"/>
+          <p:cNvSpPr/>
+          <p:nvPr/>
+        </p:nvSpPr>
+        <p:spPr>
+          <a:xfrm>
+            <a:off x="832104" y="3081528"/>
+            <a:ext cx="0" cy="393192"/>
+          </a:xfrm>
+          <a:prstGeom prst="line">
+            <a:avLst/>
+          </a:prstGeom>
+          <a:noFill/>
+          <a:ln w="19050">
+            <a:solidFill>
+              <a:srgbClr val="D7DEE9"/>
+            </a:solidFill>
+            <a:prstDash val="solid"/>
+          </a:ln>
+        </p:spPr>
+      </p:sp>
+      <p:sp>
+        <p:nvSpPr>
+          <p:cNvPr id="10" name="Shape 8"/>
+          <p:cNvSpPr/>
+          <p:nvPr/>
+        </p:nvSpPr>
+        <p:spPr>
+          <a:xfrm>
+            <a:off x="640080" y="2697480"/>
+            <a:ext cx="384048" cy="384048"/>
+          </a:xfrm>
+          <a:prstGeom prst="ellipse">
+            <a:avLst/>
+          </a:prstGeom>
+          <a:solidFill>
+            <a:srgbClr val="7C5CD6"/>
+          </a:solidFill>
+          <a:ln/>
+        </p:spPr>
+      </p:sp>
+      <p:sp>
+        <p:nvSpPr>
+          <p:cNvPr id="11" name="Text 9"/>
+          <p:cNvSpPr txBox="1"/>
+          <p:nvPr/>
+        </p:nvSpPr>
+        <p:spPr>
+          <a:xfrm>
+            <a:off x="640080" y="2697480"/>
+            <a:ext cx="384048" cy="384048"/>
+          </a:xfrm>
+          <a:prstGeom prst="rect">
+            <a:avLst/>
+          </a:prstGeom>
+          <a:noFill/>
+          <a:ln/>
+        </p:spPr>
+        <p:txBody>
+          <a:bodyPr wrap="square" lIns="0" tIns="0" rIns="0" bIns="0" rtlCol="0" anchor="ctr"/>
+          <a:lstStyle/>
+          <a:p>
+            <a:pPr algn="ctr" indent="0" marL="0">
+              <a:buNone/>
+            </a:pPr>
+            <a:r>
+              <a:rPr lang="en-US" sz="1500" b="1" dirty="0">
+                <a:solidFill>
+                  <a:srgbClr val="FFFFFF"/>
+                </a:solidFill>
+                <a:latin typeface="Cambria" pitchFamily="34" charset="0"/>
+                <a:ea typeface="Cambria" pitchFamily="34" charset="-122"/>
+                <a:cs typeface="Cambria" pitchFamily="34" charset="-120"/>
+              </a:rPr>
+              <a:t>2</a:t>
+            </a:r>
+            <a:endParaRPr lang="en-US" sz="1500" dirty="0"/>
+          </a:p>
+        </p:txBody>
+      </p:sp>
+      <p:sp>
+        <p:nvSpPr>
+          <p:cNvPr id="12" name="Text 10"/>
+          <p:cNvSpPr txBox="1"/>
+          <p:nvPr/>
+        </p:nvSpPr>
+        <p:spPr>
+          <a:xfrm>
+            <a:off x="1280160" y="2642616"/>
+            <a:ext cx="1737360" cy="457200"/>
+          </a:xfrm>
+          <a:prstGeom prst="rect">
+            <a:avLst/>
+          </a:prstGeom>
+          <a:noFill/>
+          <a:ln/>
+        </p:spPr>
+        <p:txBody>
+          <a:bodyPr wrap="square" lIns="0" tIns="0" rIns="0" bIns="0" rtlCol="0" anchor="t"/>
+          <a:lstStyle/>
+          <a:p>
+            <a:pPr indent="0" marL="0">
+              <a:buNone/>
+            </a:pPr>
+            <a:r>
+              <a:rPr lang="en-US" sz="1300" b="1" dirty="0">
+                <a:solidFill>
+                  <a:srgbClr val="12182A"/>
+                </a:solidFill>
+                <a:latin typeface="Cambria" pitchFamily="34" charset="0"/>
+                <a:ea typeface="Cambria" pitchFamily="34" charset="-122"/>
+                <a:cs typeface="Cambria" pitchFamily="34" charset="-120"/>
+              </a:rPr>
+              <a:t>Orc</a:t>
+            </a:r>
+            <a:endParaRPr lang="en-US" sz="1300" dirty="0"/>
+          </a:p>
+        </p:txBody>
+      </p:sp>
+      <p:sp>
+        <p:nvSpPr>
+          <p:cNvPr id="13" name="Text 11"/>
+          <p:cNvSpPr txBox="1"/>
+          <p:nvPr/>
+        </p:nvSpPr>
+        <p:spPr>
+          <a:xfrm>
+            <a:off x="3017520" y="2624328"/>
+            <a:ext cx="8531352" cy="777240"/>
+          </a:xfrm>
+          <a:prstGeom prst="rect">
+            <a:avLst/>
+          </a:prstGeom>
+          <a:noFill/>
+          <a:ln/>
+        </p:spPr>
+        <p:txBody>
+          <a:bodyPr wrap="square" lIns="0" tIns="0" rIns="0" bIns="0" rtlCol="0" anchor="t"/>
+          <a:lstStyle/>
+          <a:p>
+            <a:pPr indent="0" marL="0">
+              <a:lnSpc>
+                <a:spcPct val="110000"/>
+              </a:lnSpc>
+              <a:buNone/>
+            </a:pPr>
+            <a:r>
+              <a:rPr lang="en-US" sz="1050" dirty="0">
+                <a:solidFill>
+                  <a:srgbClr val="6B7A90"/>
+                </a:solidFill>
+                <a:latin typeface="Calibri" pitchFamily="34" charset="0"/>
+                <a:ea typeface="Calibri" pitchFamily="34" charset="-122"/>
+                <a:cs typeface="Calibri" pitchFamily="34" charset="-120"/>
+              </a:rPr>
+              <a:t>If the Orc is also stuck, it escalates again in turn — the same question, one hop further, not a rewrite of the problem.</a:t>
+            </a:r>
+            <a:endParaRPr lang="en-US" sz="1050" dirty="0"/>
+          </a:p>
+        </p:txBody>
+      </p:sp>
+      <p:sp>
+        <p:nvSpPr>
+          <p:cNvPr id="14" name="Shape 12"/>
+          <p:cNvSpPr/>
+          <p:nvPr/>
+        </p:nvSpPr>
+        <p:spPr>
+          <a:xfrm>
+            <a:off x="832104" y="3858768"/>
+            <a:ext cx="0" cy="393192"/>
+          </a:xfrm>
+          <a:prstGeom prst="line">
+            <a:avLst/>
+          </a:prstGeom>
+          <a:noFill/>
+          <a:ln w="19050">
+            <a:solidFill>
+              <a:srgbClr val="D7DEE9"/>
+            </a:solidFill>
+            <a:prstDash val="solid"/>
+          </a:ln>
+        </p:spPr>
+      </p:sp>
+      <p:sp>
+        <p:nvSpPr>
+          <p:cNvPr id="15" name="Shape 13"/>
+          <p:cNvSpPr/>
+          <p:nvPr/>
+        </p:nvSpPr>
+        <p:spPr>
+          <a:xfrm>
+            <a:off x="640080" y="3474720"/>
+            <a:ext cx="384048" cy="384048"/>
+          </a:xfrm>
+          <a:prstGeom prst="ellipse">
+            <a:avLst/>
+          </a:prstGeom>
+          <a:solidFill>
+            <a:srgbClr val="BD8C24"/>
+          </a:solidFill>
+          <a:ln/>
+        </p:spPr>
+      </p:sp>
+      <p:sp>
+        <p:nvSpPr>
+          <p:cNvPr id="16" name="Text 14"/>
+          <p:cNvSpPr txBox="1"/>
+          <p:nvPr/>
+        </p:nvSpPr>
+        <p:spPr>
+          <a:xfrm>
+            <a:off x="640080" y="3474720"/>
+            <a:ext cx="384048" cy="384048"/>
+          </a:xfrm>
+          <a:prstGeom prst="rect">
+            <a:avLst/>
+          </a:prstGeom>
+          <a:noFill/>
+          <a:ln/>
+        </p:spPr>
+        <p:txBody>
+          <a:bodyPr wrap="square" lIns="0" tIns="0" rIns="0" bIns="0" rtlCol="0" anchor="ctr"/>
+          <a:lstStyle/>
+          <a:p>
+            <a:pPr algn="ctr" indent="0" marL="0">
+              <a:buNone/>
+            </a:pPr>
+            <a:r>
+              <a:rPr lang="en-US" sz="1500" b="1" dirty="0">
+                <a:solidFill>
+                  <a:srgbClr val="FFFFFF"/>
+                </a:solidFill>
+                <a:latin typeface="Cambria" pitchFamily="34" charset="0"/>
+                <a:ea typeface="Cambria" pitchFamily="34" charset="-122"/>
+                <a:cs typeface="Cambria" pitchFamily="34" charset="-120"/>
+              </a:rPr>
+              <a:t>3</a:t>
+            </a:r>
+            <a:endParaRPr lang="en-US" sz="1500" dirty="0"/>
+          </a:p>
+        </p:txBody>
+      </p:sp>
+      <p:sp>
+        <p:nvSpPr>
+          <p:cNvPr id="17" name="Text 15"/>
+          <p:cNvSpPr txBox="1"/>
+          <p:nvPr/>
+        </p:nvSpPr>
+        <p:spPr>
+          <a:xfrm>
+            <a:off x="1280160" y="3419856"/>
+            <a:ext cx="1737360" cy="457200"/>
+          </a:xfrm>
+          <a:prstGeom prst="rect">
+            <a:avLst/>
+          </a:prstGeom>
+          <a:noFill/>
+          <a:ln/>
+        </p:spPr>
+        <p:txBody>
+          <a:bodyPr wrap="square" lIns="0" tIns="0" rIns="0" bIns="0" rtlCol="0" anchor="t"/>
+          <a:lstStyle/>
+          <a:p>
+            <a:pPr indent="0" marL="0">
+              <a:buNone/>
+            </a:pPr>
+            <a:r>
+              <a:rPr lang="en-US" sz="1300" b="1" dirty="0">
+                <a:solidFill>
+                  <a:srgbClr val="12182A"/>
+                </a:solidFill>
+                <a:latin typeface="Cambria" pitchFamily="34" charset="0"/>
+                <a:ea typeface="Cambria" pitchFamily="34" charset="-122"/>
+                <a:cs typeface="Cambria" pitchFamily="34" charset="-120"/>
+              </a:rPr>
+              <a:t>Elf</a:t>
+            </a:r>
+            <a:endParaRPr lang="en-US" sz="1300" dirty="0"/>
+          </a:p>
+        </p:txBody>
+      </p:sp>
+      <p:sp>
+        <p:nvSpPr>
+          <p:cNvPr id="18" name="Text 16"/>
+          <p:cNvSpPr txBox="1"/>
+          <p:nvPr/>
+        </p:nvSpPr>
+        <p:spPr>
+          <a:xfrm>
+            <a:off x="3017520" y="3401568"/>
+            <a:ext cx="8531352" cy="777240"/>
+          </a:xfrm>
+          <a:prstGeom prst="rect">
+            <a:avLst/>
+          </a:prstGeom>
+          <a:noFill/>
+          <a:ln/>
+        </p:spPr>
+        <p:txBody>
+          <a:bodyPr wrap="square" lIns="0" tIns="0" rIns="0" bIns="0" rtlCol="0" anchor="t"/>
+          <a:lstStyle/>
+          <a:p>
+            <a:pPr indent="0" marL="0">
+              <a:lnSpc>
+                <a:spcPct val="110000"/>
+              </a:lnSpc>
+              <a:buNone/>
+            </a:pPr>
+            <a:r>
+              <a:rPr lang="en-US" sz="1050" dirty="0">
+                <a:solidFill>
+                  <a:srgbClr val="6B7A90"/>
+                </a:solidFill>
+                <a:latin typeface="Calibri" pitchFamily="34" charset="0"/>
+                <a:ea typeface="Calibri" pitchFamily="34" charset="-122"/>
+                <a:cs typeface="Calibri" pitchFamily="34" charset="-120"/>
+              </a:rPr>
+              <a:t>Genuine cross-domain judgment lands here — per the model table, this is where Elf steps up to Opus 5 for real arbitration, not routine coordination.</a:t>
+            </a:r>
+            <a:endParaRPr lang="en-US" sz="1050" dirty="0"/>
+          </a:p>
+        </p:txBody>
+      </p:sp>
+      <p:sp>
+        <p:nvSpPr>
+          <p:cNvPr id="19" name="Shape 17"/>
+          <p:cNvSpPr/>
+          <p:nvPr/>
+        </p:nvSpPr>
+        <p:spPr>
+          <a:xfrm>
+            <a:off x="832104" y="4636008"/>
+            <a:ext cx="0" cy="393192"/>
+          </a:xfrm>
+          <a:prstGeom prst="line">
+            <a:avLst/>
+          </a:prstGeom>
+          <a:noFill/>
+          <a:ln w="19050">
+            <a:solidFill>
+              <a:srgbClr val="D7DEE9"/>
+            </a:solidFill>
+            <a:prstDash val="solid"/>
+          </a:ln>
+        </p:spPr>
+      </p:sp>
+      <p:sp>
+        <p:nvSpPr>
+          <p:cNvPr id="20" name="Shape 18"/>
+          <p:cNvSpPr/>
+          <p:nvPr/>
+        </p:nvSpPr>
+        <p:spPr>
+          <a:xfrm>
+            <a:off x="640080" y="4251960"/>
+            <a:ext cx="384048" cy="384048"/>
+          </a:xfrm>
+          <a:prstGeom prst="ellipse">
+            <a:avLst/>
+          </a:prstGeom>
+          <a:solidFill>
+            <a:srgbClr val="3A4250"/>
+          </a:solidFill>
+          <a:ln/>
+        </p:spPr>
+      </p:sp>
+      <p:sp>
+        <p:nvSpPr>
+          <p:cNvPr id="21" name="Text 19"/>
+          <p:cNvSpPr txBox="1"/>
+          <p:nvPr/>
+        </p:nvSpPr>
+        <p:spPr>
+          <a:xfrm>
+            <a:off x="640080" y="4251960"/>
+            <a:ext cx="384048" cy="384048"/>
+          </a:xfrm>
+          <a:prstGeom prst="rect">
+            <a:avLst/>
+          </a:prstGeom>
+          <a:noFill/>
+          <a:ln/>
+        </p:spPr>
+        <p:txBody>
+          <a:bodyPr wrap="square" lIns="0" tIns="0" rIns="0" bIns="0" rtlCol="0" anchor="ctr"/>
+          <a:lstStyle/>
+          <a:p>
+            <a:pPr algn="ctr" indent="0" marL="0">
+              <a:buNone/>
+            </a:pPr>
+            <a:r>
+              <a:rPr lang="en-US" sz="1500" b="1" dirty="0">
+                <a:solidFill>
+                  <a:srgbClr val="FFFFFF"/>
+                </a:solidFill>
+                <a:latin typeface="Cambria" pitchFamily="34" charset="0"/>
+                <a:ea typeface="Cambria" pitchFamily="34" charset="-122"/>
+                <a:cs typeface="Cambria" pitchFamily="34" charset="-120"/>
+              </a:rPr>
+              <a:t>4</a:t>
+            </a:r>
+            <a:endParaRPr lang="en-US" sz="1500" dirty="0"/>
+          </a:p>
+        </p:txBody>
+      </p:sp>
+      <p:sp>
+        <p:nvSpPr>
+          <p:cNvPr id="22" name="Text 20"/>
+          <p:cNvSpPr txBox="1"/>
+          <p:nvPr/>
+        </p:nvSpPr>
+        <p:spPr>
+          <a:xfrm>
+            <a:off x="1280160" y="4197096"/>
+            <a:ext cx="1737360" cy="457200"/>
+          </a:xfrm>
+          <a:prstGeom prst="rect">
+            <a:avLst/>
+          </a:prstGeom>
+          <a:noFill/>
+          <a:ln/>
+        </p:spPr>
+        <p:txBody>
+          <a:bodyPr wrap="square" lIns="0" tIns="0" rIns="0" bIns="0" rtlCol="0" anchor="t"/>
+          <a:lstStyle/>
+          <a:p>
+            <a:pPr indent="0" marL="0">
+              <a:buNone/>
+            </a:pPr>
+            <a:r>
+              <a:rPr lang="en-US" sz="1300" b="1" dirty="0">
+                <a:solidFill>
+                  <a:srgbClr val="12182A"/>
+                </a:solidFill>
+                <a:latin typeface="Cambria" pitchFamily="34" charset="0"/>
+                <a:ea typeface="Cambria" pitchFamily="34" charset="-122"/>
+                <a:cs typeface="Cambria" pitchFamily="34" charset="-120"/>
+              </a:rPr>
+              <a:t>Rimuru</a:t>
+            </a:r>
+            <a:endParaRPr lang="en-US" sz="1300" dirty="0"/>
+          </a:p>
+        </p:txBody>
+      </p:sp>
+      <p:sp>
+        <p:nvSpPr>
+          <p:cNvPr id="23" name="Text 21"/>
+          <p:cNvSpPr txBox="1"/>
+          <p:nvPr/>
+        </p:nvSpPr>
+        <p:spPr>
+          <a:xfrm>
+            <a:off x="3017520" y="4178808"/>
+            <a:ext cx="8531352" cy="777240"/>
+          </a:xfrm>
+          <a:prstGeom prst="rect">
+            <a:avLst/>
+          </a:prstGeom>
+          <a:noFill/>
+          <a:ln/>
+        </p:spPr>
+        <p:txBody>
+          <a:bodyPr wrap="square" lIns="0" tIns="0" rIns="0" bIns="0" rtlCol="0" anchor="t"/>
+          <a:lstStyle/>
+          <a:p>
+            <a:pPr indent="0" marL="0">
+              <a:lnSpc>
+                <a:spcPct val="110000"/>
+              </a:lnSpc>
+              <a:buNone/>
+            </a:pPr>
+            <a:r>
+              <a:rPr lang="en-US" sz="1050" dirty="0">
+                <a:solidFill>
+                  <a:srgbClr val="6B7A90"/>
+                </a:solidFill>
+                <a:latin typeface="Calibri" pitchFamily="34" charset="0"/>
+                <a:ea typeface="Calibri" pitchFamily="34" charset="-122"/>
+                <a:cs typeface="Calibri" pitchFamily="34" charset="-120"/>
+              </a:rPr>
+              <a:t>If even the Elf can't resolve it, Rimuru is asked to bring it to Veldora directly — the one siphon that never narrows, in full human courtesy.</a:t>
+            </a:r>
+            <a:endParaRPr lang="en-US" sz="1050" dirty="0"/>
+          </a:p>
+        </p:txBody>
+      </p:sp>
+      <p:sp>
+        <p:nvSpPr>
+          <p:cNvPr id="24" name="Shape 22"/>
+          <p:cNvSpPr/>
+          <p:nvPr/>
+        </p:nvSpPr>
+        <p:spPr>
+          <a:xfrm>
+            <a:off x="640080" y="5029200"/>
+            <a:ext cx="384048" cy="384048"/>
+          </a:xfrm>
+          <a:prstGeom prst="ellipse">
+            <a:avLst/>
+          </a:prstGeom>
+          <a:solidFill>
+            <a:srgbClr val="BD8C24"/>
+          </a:solidFill>
+          <a:ln/>
+        </p:spPr>
+      </p:sp>
+      <p:sp>
+        <p:nvSpPr>
+          <p:cNvPr id="25" name="Text 23"/>
+          <p:cNvSpPr txBox="1"/>
+          <p:nvPr/>
+        </p:nvSpPr>
+        <p:spPr>
+          <a:xfrm>
+            <a:off x="640080" y="5029200"/>
+            <a:ext cx="384048" cy="384048"/>
+          </a:xfrm>
+          <a:prstGeom prst="rect">
+            <a:avLst/>
+          </a:prstGeom>
+          <a:noFill/>
+          <a:ln/>
+        </p:spPr>
+        <p:txBody>
+          <a:bodyPr wrap="square" lIns="0" tIns="0" rIns="0" bIns="0" rtlCol="0" anchor="ctr"/>
+          <a:lstStyle/>
+          <a:p>
+            <a:pPr algn="ctr" indent="0" marL="0">
+              <a:buNone/>
+            </a:pPr>
+            <a:r>
+              <a:rPr lang="en-US" sz="1500" b="1" dirty="0">
+                <a:solidFill>
+                  <a:srgbClr val="FFFFFF"/>
+                </a:solidFill>
+                <a:latin typeface="Cambria" pitchFamily="34" charset="0"/>
+                <a:ea typeface="Cambria" pitchFamily="34" charset="-122"/>
+                <a:cs typeface="Cambria" pitchFamily="34" charset="-120"/>
+              </a:rPr>
+              <a:t>5</a:t>
+            </a:r>
+            <a:endParaRPr lang="en-US" sz="1500" dirty="0"/>
+          </a:p>
+        </p:txBody>
+      </p:sp>
+      <p:sp>
+        <p:nvSpPr>
+          <p:cNvPr id="26" name="Text 24"/>
+          <p:cNvSpPr txBox="1"/>
+          <p:nvPr/>
+        </p:nvSpPr>
+        <p:spPr>
+          <a:xfrm>
+            <a:off x="1280160" y="4974336"/>
+            <a:ext cx="1737360" cy="457200"/>
+          </a:xfrm>
+          <a:prstGeom prst="rect">
+            <a:avLst/>
+          </a:prstGeom>
+          <a:noFill/>
+          <a:ln/>
+        </p:spPr>
+        <p:txBody>
+          <a:bodyPr wrap="square" lIns="0" tIns="0" rIns="0" bIns="0" rtlCol="0" anchor="t"/>
+          <a:lstStyle/>
+          <a:p>
+            <a:pPr indent="0" marL="0">
+              <a:buNone/>
+            </a:pPr>
+            <a:r>
+              <a:rPr lang="en-US" sz="1300" b="1" dirty="0">
+                <a:solidFill>
+                  <a:srgbClr val="12182A"/>
+                </a:solidFill>
+                <a:latin typeface="Cambria" pitchFamily="34" charset="0"/>
+                <a:ea typeface="Cambria" pitchFamily="34" charset="-122"/>
+                <a:cs typeface="Cambria" pitchFamily="34" charset="-120"/>
+              </a:rPr>
+              <a:t>Veldora (the human)</a:t>
+            </a:r>
+            <a:endParaRPr lang="en-US" sz="1300" dirty="0"/>
+          </a:p>
+        </p:txBody>
+      </p:sp>
+      <p:sp>
+        <p:nvSpPr>
+          <p:cNvPr id="27" name="Text 25"/>
+          <p:cNvSpPr txBox="1"/>
+          <p:nvPr/>
+        </p:nvSpPr>
+        <p:spPr>
+          <a:xfrm>
+            <a:off x="3017520" y="4956048"/>
+            <a:ext cx="8531352" cy="777240"/>
+          </a:xfrm>
+          <a:prstGeom prst="rect">
+            <a:avLst/>
+          </a:prstGeom>
+          <a:noFill/>
+          <a:ln/>
+        </p:spPr>
+        <p:txBody>
+          <a:bodyPr wrap="square" lIns="0" tIns="0" rIns="0" bIns="0" rtlCol="0" anchor="t"/>
+          <a:lstStyle/>
+          <a:p>
+            <a:pPr indent="0" marL="0">
+              <a:lnSpc>
+                <a:spcPct val="110000"/>
+              </a:lnSpc>
+              <a:buNone/>
+            </a:pPr>
+            <a:r>
+              <a:rPr lang="en-US" sz="1050" dirty="0">
+                <a:solidFill>
+                  <a:srgbClr val="6B7A90"/>
+                </a:solidFill>
+                <a:latin typeface="Calibri" pitchFamily="34" charset="0"/>
+                <a:ea typeface="Calibri" pitchFamily="34" charset="-122"/>
+                <a:cs typeface="Calibri" pitchFamily="34" charset="-120"/>
+              </a:rPr>
+              <a:t>Confirms or clarifies. Rimuru carries the resolved answer back down the same chain it came up.</a:t>
+            </a:r>
+            <a:endParaRPr lang="en-US" sz="1050" dirty="0"/>
+          </a:p>
+        </p:txBody>
+      </p:sp>
+      <p:sp>
+        <p:nvSpPr>
+          <p:cNvPr id="28" name="Text 26"/>
+          <p:cNvSpPr txBox="1"/>
+          <p:nvPr/>
+        </p:nvSpPr>
+        <p:spPr>
+          <a:xfrm>
+            <a:off x="640080" y="5870448"/>
+            <a:ext cx="10908792" cy="411480"/>
+          </a:xfrm>
+          <a:prstGeom prst="rect">
+            <a:avLst/>
+          </a:prstGeom>
+          <a:noFill/>
+          <a:ln/>
+        </p:spPr>
+        <p:txBody>
+          <a:bodyPr wrap="square" lIns="0" tIns="0" rIns="0" bIns="0" rtlCol="0" anchor="t"/>
+          <a:lstStyle/>
+          <a:p>
+            <a:pPr indent="0" marL="0">
+              <a:lnSpc>
+                <a:spcPct val="115000"/>
+              </a:lnSpc>
+              <a:buNone/>
+            </a:pPr>
+            <a:r>
+              <a:rPr lang="en-US" sz="1000" b="1" dirty="0">
+                <a:solidFill>
+                  <a:srgbClr val="12182A"/>
+                </a:solidFill>
+                <a:latin typeface="Calibri" pitchFamily="34" charset="0"/>
+                <a:ea typeface="Calibri" pitchFamily="34" charset="-122"/>
+                <a:cs typeface="Calibri" pitchFamily="34" charset="-120"/>
+              </a:rPr>
+              <a:t>Note: </a:t>
+            </a:r>
+            <a:pPr indent="0" marL="0">
+              <a:lnSpc>
+                <a:spcPct val="115000"/>
+              </a:lnSpc>
+              <a:buNone/>
+            </a:pPr>
+            <a:r>
+              <a:rPr lang="en-US" sz="1000" i="1" dirty="0">
+                <a:solidFill>
+                  <a:srgbClr val="6B7A90"/>
+                </a:solidFill>
+                <a:latin typeface="Calibri" pitchFamily="34" charset="0"/>
+                <a:ea typeface="Calibri" pitchFamily="34" charset="-122"/>
+                <a:cs typeface="Calibri" pitchFamily="34" charset="-120"/>
+              </a:rPr>
+              <a:t>escalation is about rank, not model — Fable 5.1 is only the Elf/Ciel office's voice-drafting model choice (model table), not an escalation step of its own.</a:t>
+            </a:r>
+            <a:endParaRPr lang="en-US" sz="1000" dirty="0"/>
+          </a:p>
+        </p:txBody>
+      </p:sp>
+      <p:sp>
+        <p:nvSpPr>
+          <p:cNvPr id="29" name="Text 27"/>
+          <p:cNvSpPr txBox="1"/>
+          <p:nvPr/>
+        </p:nvSpPr>
+        <p:spPr>
+          <a:xfrm>
+            <a:off x="457200" y="6400800"/>
+            <a:ext cx="7315200" cy="274320"/>
+          </a:xfrm>
+          <a:prstGeom prst="rect">
+            <a:avLst/>
+          </a:prstGeom>
+          <a:noFill/>
+          <a:ln/>
+        </p:spPr>
+        <p:txBody>
+          <a:bodyPr wrap="square" lIns="0" tIns="0" rIns="0" bIns="0" rtlCol="0" anchor="ctr"/>
+          <a:lstStyle/>
+          <a:p>
+            <a:pPr indent="0" marL="0">
+              <a:buNone/>
+            </a:pPr>
+            <a:r>
+              <a:rPr lang="en-US" sz="900" spc="100" kern="0" dirty="0">
+                <a:solidFill>
+                  <a:srgbClr val="6B7A90"/>
+                </a:solidFill>
+                <a:latin typeface="Calibri" pitchFamily="34" charset="0"/>
+                <a:ea typeface="Calibri" pitchFamily="34" charset="-122"/>
+                <a:cs typeface="Calibri" pitchFamily="34" charset="-120"/>
+              </a:rPr>
+              <a:t>ISEKAI ⋄ A CONVENTION FOR LIVING WORLDS</a:t>
+            </a:r>
+            <a:endParaRPr lang="en-US" sz="900" dirty="0"/>
+          </a:p>
+        </p:txBody>
+      </p:sp>
+      <p:sp>
+        <p:nvSpPr>
+          <p:cNvPr id="30" name="Text 28"/>
+          <p:cNvSpPr txBox="1"/>
+          <p:nvPr/>
+        </p:nvSpPr>
+        <p:spPr>
+          <a:xfrm>
+            <a:off x="11274552" y="6400800"/>
+            <a:ext cx="457200" cy="274320"/>
+          </a:xfrm>
+          <a:prstGeom prst="rect">
+            <a:avLst/>
+          </a:prstGeom>
+          <a:noFill/>
+          <a:ln/>
+        </p:spPr>
+        <p:txBody>
+          <a:bodyPr wrap="square" lIns="0" tIns="0" rIns="0" bIns="0" rtlCol="0" anchor="ctr"/>
+          <a:lstStyle/>
+          <a:p>
+            <a:pPr algn="r" indent="0" marL="0">
+              <a:buNone/>
+            </a:pPr>
+            <a:r>
+              <a:rPr lang="en-US" sz="900" dirty="0">
+                <a:solidFill>
+                  <a:srgbClr val="6B7A90"/>
+                </a:solidFill>
+                <a:latin typeface="Calibri" pitchFamily="34" charset="0"/>
+                <a:ea typeface="Calibri" pitchFamily="34" charset="-122"/>
+                <a:cs typeface="Calibri" pitchFamily="34" charset="-120"/>
+              </a:rPr>
+              <a:t>12</a:t>
+            </a:r>
+            <a:endParaRPr lang="en-US" sz="900" dirty="0"/>
+          </a:p>
+        </p:txBody>
+      </p:sp>
+    </p:spTree>
+  </p:cSld>
+  <p:clrMapOvr>
+    <a:masterClrMapping/>
+  </p:clrMapOvr>
+</p:sld>
+</file>
+
+<file path=ppt/slides/slide13.xml><?xml version="1.0" encoding="utf-8"?>
+<p:sld xmlns:a="http://schemas.openxmlformats.org/drawingml/2006/main" xmlns:r="http://schemas.openxmlformats.org/officeDocument/2006/relationships" xmlns:p="http://schemas.openxmlformats.org/presentationml/2006/main">
+  <p:cSld name="Slide 13">
+    <p:spTree>
+      <p:nvGrpSpPr>
+        <p:cNvPr id="1" name=""/>
+        <p:cNvGrpSpPr/>
+        <p:nvPr/>
+      </p:nvGrpSpPr>
+      <p:grpSpPr>
+        <a:xfrm>
+          <a:off x="0" y="0"/>
+          <a:ext cx="0" cy="0"/>
+          <a:chOff x="0" y="0"/>
+          <a:chExt cx="0" cy="0"/>
+        </a:xfrm>
+      </p:grpSpPr>
+      <p:sp>
+        <p:nvSpPr>
+          <p:cNvPr id="2" name="Text 0"/>
+          <p:cNvSpPr txBox="1"/>
+          <p:nvPr/>
+        </p:nvSpPr>
+        <p:spPr>
+          <a:xfrm>
+            <a:off x="640080" y="502920"/>
+            <a:ext cx="10908792" cy="822960"/>
+          </a:xfrm>
+          <a:prstGeom prst="rect">
+            <a:avLst/>
+          </a:prstGeom>
+          <a:noFill/>
+          <a:ln/>
+        </p:spPr>
+        <p:txBody>
+          <a:bodyPr wrap="square" lIns="0" tIns="0" rIns="0" bIns="0" rtlCol="0" anchor="ctr"/>
+          <a:lstStyle/>
+          <a:p>
+            <a:pPr indent="0" marL="0">
+              <a:buNone/>
+            </a:pPr>
+            <a:r>
+              <a:rPr lang="en-US" sz="3000" b="1" dirty="0">
+                <a:solidFill>
+                  <a:srgbClr val="12182A"/>
+                </a:solidFill>
+                <a:latin typeface="Cambria" pitchFamily="34" charset="0"/>
+                <a:ea typeface="Cambria" pitchFamily="34" charset="-122"/>
+                <a:cs typeface="Cambria" pitchFamily="34" charset="-120"/>
+              </a:rPr>
               <a:t>Does it actually help? We measured it.</a:t>
             </a:r>
             <a:endParaRPr lang="en-US" sz="3000" dirty="0"/>
@@ -5092,7 +6241,7 @@
                 <a:ea typeface="Calibri" pitchFamily="34" charset="-122"/>
                 <a:cs typeface="Calibri" pitchFamily="34" charset="-120"/>
               </a:rPr>
-              <a:t>12</a:t>
+              <a:t>13</a:t>
             </a:r>
             <a:endParaRPr lang="en-US" sz="900" dirty="0"/>
           </a:p>
@@ -5106,9 +6255,9 @@
 </p:sld>
 </file>
 
-<file path=ppt/slides/slide13.xml><?xml version="1.0" encoding="utf-8"?>
+<file path=ppt/slides/slide14.xml><?xml version="1.0" encoding="utf-8"?>
 <p:sld xmlns:a="http://schemas.openxmlformats.org/drawingml/2006/main" xmlns:r="http://schemas.openxmlformats.org/officeDocument/2006/relationships" xmlns:p="http://schemas.openxmlformats.org/presentationml/2006/main">
-  <p:cSld name="Slide 13">
+  <p:cSld name="Slide 14">
     <p:bg>
       <p:bgPr>
         <a:solidFill>
@@ -5751,7 +6900,7 @@
                 <a:ea typeface="Calibri" pitchFamily="34" charset="-122"/>
                 <a:cs typeface="Calibri" pitchFamily="34" charset="-120"/>
               </a:rPr>
-              <a:t>13</a:t>
+              <a:t>14</a:t>
             </a:r>
             <a:endParaRPr lang="en-US" sz="900" dirty="0"/>
           </a:p>
@@ -5765,9 +6914,9 @@
 </p:sld>
 </file>
 
-<file path=ppt/slides/slide14.xml><?xml version="1.0" encoding="utf-8"?>
+<file path=ppt/slides/slide15.xml><?xml version="1.0" encoding="utf-8"?>
 <p:sld xmlns:a="http://schemas.openxmlformats.org/drawingml/2006/main" xmlns:r="http://schemas.openxmlformats.org/officeDocument/2006/relationships" xmlns:p="http://schemas.openxmlformats.org/presentationml/2006/main">
-  <p:cSld name="Slide 14">
+  <p:cSld name="Slide 15">
     <p:bg>
       <p:bgPr>
         <a:solidFill>
@@ -6025,7 +7174,7 @@
                 <a:ea typeface="Calibri" pitchFamily="34" charset="-122"/>
                 <a:cs typeface="Calibri" pitchFamily="34" charset="-120"/>
               </a:rPr>
-              <a:t>14</a:t>
+              <a:t>15</a:t>
             </a:r>
             <a:endParaRPr lang="en-US" sz="900" dirty="0"/>
           </a:p>

--- a/presentations/isekai-opencode-overview.pptx
+++ b/presentations/isekai-opencode-overview.pptx
@@ -21,9 +21,13 @@
     <p:sldId id="269" r:id="rId15"/>
     <p:sldId id="270" r:id="rId16"/>
     <p:sldId id="271" r:id="rId17"/>
+    <p:sldId id="272" r:id="rId18"/>
+    <p:sldId id="273" r:id="rId19"/>
+    <p:sldId id="274" r:id="rId20"/>
+    <p:sldId id="275" r:id="rId21"/>
   </p:sldIdLst>
   <p:notesMasterIdLst>
-    <p:notesMasterId r:id="rId18"/>
+    <p:notesMasterId r:id="rId22"/>
   </p:notesMasterIdLst>
   <p:sldSz cx="12192000" cy="6858000"/>
   <p:notesSz cx="6858000" cy="12192000"/>
@@ -605,7 +609,7 @@
           <a:p>
             <a:r>
               <a:rPr lang="en-US" dirty="0"/>
-              <a:t>Rimuru is deliberately excluded — the throne's mount is the human's choice, never hardcoded. Tuned by what each task actually demands, not by rank prestige: narrow scope (Slime) is not the same as low judgment, since a Slime authors real changes — retuned from Haiku to Sonnet 5 default accordingly. Ciel was the only office with no Opus escalation path at all; added one for heavy-synthesis pieces (a session report weaving many threads), kept separate from the Fable axis (voice-consistency specifically). This table is reference guidance today, not yet wired into /mint's actual minting flow.</a:t>
+              <a:t>Where it fits: the dispatch seam. Rimuru dispatching a Court Body is a loop run; the Elf's routing is the plan file; the Orc's gate is the verify beat plus the human gate above it for anything outward or destructive.</a:t>
             </a:r>
             <a:endParaRPr lang="en-US" dirty="0"/>
           </a:p>
@@ -693,7 +697,7 @@
           <a:p>
             <a:r>
               <a:rPr lang="en-US" dirty="0"/>
-              <a:t>The pitch slide. Four advantages, each tied to a Nature: Memory, The gate, Perception, and cross-ecosystem Minds &amp; Bodies.</a:t>
+              <a:t>This is the law's own sentence — 'loading is already two-tiered' — made an instrument and extended past Minds to commands, tools, Bodies and externals. In Claude Code level 2 is the Skill / ToolSearch by name; in OpenCode it is loading the skill; for a scripted Court Body it is toolbox.js load. The loop runs a pick before every step.</a:t>
             </a:r>
             <a:endParaRPr lang="en-US" dirty="0"/>
           </a:p>
@@ -781,7 +785,7 @@
           <a:p>
             <a:r>
               <a:rPr lang="en-US" dirty="0"/>
-              <a:t>The full sequence, grounded in a real fix from this session rather than a hypothetical. Context flows down (Rimuru -&gt; Elf -&gt; Orc -&gt; Slime); the gate (Orc + Raphael) is what stands between a Slime's change and it landing. Ciel's journaling step runs on Sonnet 5, its own floor -- the deterministic-script principle still applies, but only to inputs mechanical enough to bypass the Ciel office entirely (a raw field append with no prose); the moment Ciel itself is actually dispatched, its tier never drops below Raphael's, per the canon's own Great Sage -&gt; Raphael -&gt; Ciel evolutionary ordering.</a:t>
+              <a:t>/isekai and /genesis run identically in OpenCode and Claude Code. /don and /mint only make sense from the Claude Code side, since .opencode/ is already the native format.</a:t>
             </a:r>
             <a:endParaRPr lang="en-US" dirty="0"/>
           </a:p>
@@ -869,7 +873,7 @@
           <a:p>
             <a:r>
               <a:rPr lang="en-US" dirty="0"/>
-              <a:t>Direct answer to: can a Slime escalate past its own ceiling? Yes -- Absolute Rule III, named 'Confirmation and Escalation'. Verified this section is actually present and correctly readable by testing it live: asked a free, non-Claude OpenCode model (nemotron-3.5-lightning-free) to read isekai.md's Rule III cold and explain the escalation chain -- it correctly answered 'asks its immediate parent, never skipping a rank' without prompting, confirming the doc itself is the mechanism, not something Claude-specific.</a:t>
+              <a:t>Instruments are perception, not memory — what the world can check about itself right now, versus what a document claims. The bottom row is field-tested, not illustrative: OpenCode was actually installed and run on the machine this deck was built on, the 842M figure is the real, corrected total after fixing a Claude Code input-token undercount, and the 3 bugs (Claude cache-token undercount, a silent node:sqlite failure, and an OpenCode cache-token undercount) were each caught by an actual deterministic test script (.isekai/tools/test-opencode-integration.js), not by inspection.</a:t>
             </a:r>
             <a:endParaRPr lang="en-US" dirty="0"/>
           </a:p>
@@ -957,7 +961,7 @@
           <a:p>
             <a:r>
               <a:rPr lang="en-US" dirty="0"/>
-              <a:t>Real, honest empirical test -- logged in .isekai/log.md 2026-09-20. Deliberately keeps the negative/mixed finding (cost went up, not down) rather than only reporting the correctness win, per this convention's own Nature 9 (Perception: compute it, don't eyeball it) and Nature 3 (Evolution: a finding that complicates the pitch still gets recorded, not filtered out).</a:t>
+              <a:t>Rimuru is deliberately excluded — the throne's mount is the human's choice, never hardcoded. Tuned by what each task actually demands, not by rank prestige: narrow scope (Slime) is not the same as low judgment, since a Slime authors real changes — retuned from Haiku to Sonnet 5 default accordingly. Ciel was the only office with no Opus escalation path at all; added one for heavy-synthesis pieces (a session report weaving many threads), kept separate from the Fable axis (voice-consistency specifically). This table is reference guidance today, not yet wired into /mint's actual minting flow.</a:t>
             </a:r>
             <a:endParaRPr lang="en-US" dirty="0"/>
           </a:p>
@@ -1045,7 +1049,7 @@
           <a:p>
             <a:r>
               <a:rPr lang="en-US" dirty="0"/>
-              <a:t>Appendix, distinctly styled (slate background) to mark it as supplementary to the OpenCode-perspective main deck. The advantage: adopting Isekai isn't a bet on one ecosystem.</a:t>
+              <a:t>The pitch slide. Four advantages, each tied to a Nature: Memory, The gate, Perception, and cross-ecosystem Minds &amp; Bodies.</a:t>
             </a:r>
             <a:endParaRPr lang="en-US" dirty="0"/>
           </a:p>
@@ -1133,7 +1137,7 @@
           <a:p>
             <a:r>
               <a:rPr lang="en-US" dirty="0"/>
-              <a:t>Closing slide. Quote lifted directly from isekai.md's own opening.</a:t>
+              <a:t>The full sequence, grounded in a real fix from this session rather than a hypothetical. Context flows down (Rimuru -&gt; Elf -&gt; Orc -&gt; Slime); the gate (Orc + Raphael) is what stands between a Slime's change and it landing. Ciel's journaling step runs on Sonnet 5, its own floor -- the deterministic-script principle still applies, but only to inputs mechanical enough to bypass the Ciel office entirely (a raw field append with no prose); the moment Ciel itself is actually dispatched, its tier never drops below Raphael's, per the canon's own Great Sage -&gt; Raphael -&gt; Ciel evolutionary ordering.</a:t>
             </a:r>
             <a:endParaRPr lang="en-US" dirty="0"/>
           </a:p>
@@ -1157,6 +1161,270 @@
             <a:fld id="{F7021451-1387-4CA6-816F-3879F97B5CBC}" type="slidenum">
               <a:rPr lang="en-US"/>
               <a:t>16</a:t>
+            </a:fld>
+            <a:endParaRPr lang="en-US"/>
+          </a:p>
+        </p:txBody>
+      </p:sp>
+    </p:spTree>
+    <p:extLst>
+      <p:ext uri="{BB962C8B-B14F-4D97-AF65-F5344CB8AC3E}">
+        <p14:creationId xmlns:p14="http://schemas.microsoft.com/office/powerpoint/2010/main" val="1024086991"/>
+      </p:ext>
+    </p:extLst>
+  </p:cSld>
+  <p:clrMapOvr>
+    <a:masterClrMapping/>
+  </p:clrMapOvr>
+</p:notes>
+</file>
+
+<file path=ppt/notesSlides/notesSlide17.xml><?xml version="1.0" encoding="utf-8"?>
+<p:notes xmlns:a="http://schemas.openxmlformats.org/drawingml/2006/main" xmlns:r="http://schemas.openxmlformats.org/officeDocument/2006/relationships" xmlns:p="http://schemas.openxmlformats.org/presentationml/2006/main">
+  <p:cSld>
+    <p:spTree>
+      <p:nvGrpSpPr>
+        <p:cNvPr id="1" name=""/>
+        <p:cNvGrpSpPr/>
+        <p:nvPr/>
+      </p:nvGrpSpPr>
+      <p:grpSpPr>
+        <a:xfrm>
+          <a:off x="0" y="0"/>
+          <a:ext cx="0" cy="0"/>
+          <a:chOff x="0" y="0"/>
+          <a:chExt cx="0" cy="0"/>
+        </a:xfrm>
+      </p:grpSpPr>
+      <p:sp>
+        <p:nvSpPr>
+          <p:cNvPr id="2" name="Slide Image Placeholder 1"/>
+          <p:cNvSpPr>
+            <a:spLocks noGrp="1" noRot="1" noChangeAspect="1"/>
+          </p:cNvSpPr>
+          <p:nvPr>
+            <p:ph type="sldImg"/>
+          </p:nvPr>
+        </p:nvSpPr>
+        <p:spPr/>
+      </p:sp>
+      <p:sp>
+        <p:nvSpPr>
+          <p:cNvPr id="3" name="Notes Placeholder 2"/>
+          <p:cNvSpPr>
+            <a:spLocks noGrp="1"/>
+          </p:cNvSpPr>
+          <p:nvPr>
+            <p:ph type="body" idx="1"/>
+          </p:nvPr>
+        </p:nvSpPr>
+        <p:spPr/>
+        <p:txBody>
+          <a:bodyPr/>
+          <a:lstStyle/>
+          <a:p>
+            <a:r>
+              <a:rPr lang="en-US" dirty="0"/>
+              <a:t>Direct answer to: can a Slime escalate past its own ceiling? Yes -- Absolute Rule III, named 'Confirmation and Escalation'. Verified this section is actually present and correctly readable by testing it live: asked a free, non-Claude OpenCode model (nemotron-3.5-lightning-free) to read isekai.md's Rule III cold and explain the escalation chain -- it correctly answered 'asks its immediate parent, never skipping a rank' without prompting, confirming the doc itself is the mechanism, not something Claude-specific.</a:t>
+            </a:r>
+            <a:endParaRPr lang="en-US" dirty="0"/>
+          </a:p>
+        </p:txBody>
+      </p:sp>
+      <p:sp>
+        <p:nvSpPr>
+          <p:cNvPr id="4" name="Slide Number Placeholder 3"/>
+          <p:cNvSpPr>
+            <a:spLocks noGrp="1"/>
+          </p:cNvSpPr>
+          <p:nvPr>
+            <p:ph type="sldNum" sz="quarter" idx="10"/>
+          </p:nvPr>
+        </p:nvSpPr>
+        <p:spPr/>
+        <p:txBody>
+          <a:bodyPr/>
+          <a:lstStyle/>
+          <a:p>
+            <a:fld id="{F7021451-1387-4CA6-816F-3879F97B5CBC}" type="slidenum">
+              <a:rPr lang="en-US"/>
+              <a:t>17</a:t>
+            </a:fld>
+            <a:endParaRPr lang="en-US"/>
+          </a:p>
+        </p:txBody>
+      </p:sp>
+    </p:spTree>
+    <p:extLst>
+      <p:ext uri="{BB962C8B-B14F-4D97-AF65-F5344CB8AC3E}">
+        <p14:creationId xmlns:p14="http://schemas.microsoft.com/office/powerpoint/2010/main" val="1024086991"/>
+      </p:ext>
+    </p:extLst>
+  </p:cSld>
+  <p:clrMapOvr>
+    <a:masterClrMapping/>
+  </p:clrMapOvr>
+</p:notes>
+</file>
+
+<file path=ppt/notesSlides/notesSlide18.xml><?xml version="1.0" encoding="utf-8"?>
+<p:notes xmlns:a="http://schemas.openxmlformats.org/drawingml/2006/main" xmlns:r="http://schemas.openxmlformats.org/officeDocument/2006/relationships" xmlns:p="http://schemas.openxmlformats.org/presentationml/2006/main">
+  <p:cSld>
+    <p:spTree>
+      <p:nvGrpSpPr>
+        <p:cNvPr id="1" name=""/>
+        <p:cNvGrpSpPr/>
+        <p:nvPr/>
+      </p:nvGrpSpPr>
+      <p:grpSpPr>
+        <a:xfrm>
+          <a:off x="0" y="0"/>
+          <a:ext cx="0" cy="0"/>
+          <a:chOff x="0" y="0"/>
+          <a:chExt cx="0" cy="0"/>
+        </a:xfrm>
+      </p:grpSpPr>
+      <p:sp>
+        <p:nvSpPr>
+          <p:cNvPr id="2" name="Slide Image Placeholder 1"/>
+          <p:cNvSpPr>
+            <a:spLocks noGrp="1" noRot="1" noChangeAspect="1"/>
+          </p:cNvSpPr>
+          <p:nvPr>
+            <p:ph type="sldImg"/>
+          </p:nvPr>
+        </p:nvSpPr>
+        <p:spPr/>
+      </p:sp>
+      <p:sp>
+        <p:nvSpPr>
+          <p:cNvPr id="3" name="Notes Placeholder 2"/>
+          <p:cNvSpPr>
+            <a:spLocks noGrp="1"/>
+          </p:cNvSpPr>
+          <p:nvPr>
+            <p:ph type="body" idx="1"/>
+          </p:nvPr>
+        </p:nvSpPr>
+        <p:spPr/>
+        <p:txBody>
+          <a:bodyPr/>
+          <a:lstStyle/>
+          <a:p>
+            <a:r>
+              <a:rPr lang="en-US" dirty="0"/>
+              <a:t>Real, honest empirical test -- logged in .isekai/log.md 2026-09-20. Deliberately keeps the negative/mixed finding (cost went up, not down) rather than only reporting the correctness win, per this convention's own Nature 9 (Perception: compute it, don't eyeball it) and Nature 3 (Evolution: a finding that complicates the pitch still gets recorded, not filtered out).</a:t>
+            </a:r>
+            <a:endParaRPr lang="en-US" dirty="0"/>
+          </a:p>
+        </p:txBody>
+      </p:sp>
+      <p:sp>
+        <p:nvSpPr>
+          <p:cNvPr id="4" name="Slide Number Placeholder 3"/>
+          <p:cNvSpPr>
+            <a:spLocks noGrp="1"/>
+          </p:cNvSpPr>
+          <p:nvPr>
+            <p:ph type="sldNum" sz="quarter" idx="10"/>
+          </p:nvPr>
+        </p:nvSpPr>
+        <p:spPr/>
+        <p:txBody>
+          <a:bodyPr/>
+          <a:lstStyle/>
+          <a:p>
+            <a:fld id="{F7021451-1387-4CA6-816F-3879F97B5CBC}" type="slidenum">
+              <a:rPr lang="en-US"/>
+              <a:t>18</a:t>
+            </a:fld>
+            <a:endParaRPr lang="en-US"/>
+          </a:p>
+        </p:txBody>
+      </p:sp>
+    </p:spTree>
+    <p:extLst>
+      <p:ext uri="{BB962C8B-B14F-4D97-AF65-F5344CB8AC3E}">
+        <p14:creationId xmlns:p14="http://schemas.microsoft.com/office/powerpoint/2010/main" val="1024086991"/>
+      </p:ext>
+    </p:extLst>
+  </p:cSld>
+  <p:clrMapOvr>
+    <a:masterClrMapping/>
+  </p:clrMapOvr>
+</p:notes>
+</file>
+
+<file path=ppt/notesSlides/notesSlide19.xml><?xml version="1.0" encoding="utf-8"?>
+<p:notes xmlns:a="http://schemas.openxmlformats.org/drawingml/2006/main" xmlns:r="http://schemas.openxmlformats.org/officeDocument/2006/relationships" xmlns:p="http://schemas.openxmlformats.org/presentationml/2006/main">
+  <p:cSld>
+    <p:spTree>
+      <p:nvGrpSpPr>
+        <p:cNvPr id="1" name=""/>
+        <p:cNvGrpSpPr/>
+        <p:nvPr/>
+      </p:nvGrpSpPr>
+      <p:grpSpPr>
+        <a:xfrm>
+          <a:off x="0" y="0"/>
+          <a:ext cx="0" cy="0"/>
+          <a:chOff x="0" y="0"/>
+          <a:chExt cx="0" cy="0"/>
+        </a:xfrm>
+      </p:grpSpPr>
+      <p:sp>
+        <p:nvSpPr>
+          <p:cNvPr id="2" name="Slide Image Placeholder 1"/>
+          <p:cNvSpPr>
+            <a:spLocks noGrp="1" noRot="1" noChangeAspect="1"/>
+          </p:cNvSpPr>
+          <p:nvPr>
+            <p:ph type="sldImg"/>
+          </p:nvPr>
+        </p:nvSpPr>
+        <p:spPr/>
+      </p:sp>
+      <p:sp>
+        <p:nvSpPr>
+          <p:cNvPr id="3" name="Notes Placeholder 2"/>
+          <p:cNvSpPr>
+            <a:spLocks noGrp="1"/>
+          </p:cNvSpPr>
+          <p:nvPr>
+            <p:ph type="body" idx="1"/>
+          </p:nvPr>
+        </p:nvSpPr>
+        <p:spPr/>
+        <p:txBody>
+          <a:bodyPr/>
+          <a:lstStyle/>
+          <a:p>
+            <a:r>
+              <a:rPr lang="en-US" dirty="0"/>
+              <a:t>Appendix, distinctly styled (slate background) to mark it as supplementary to the OpenCode-perspective main deck. The advantage: adopting Isekai isn't a bet on one ecosystem.</a:t>
+            </a:r>
+            <a:endParaRPr lang="en-US" dirty="0"/>
+          </a:p>
+        </p:txBody>
+      </p:sp>
+      <p:sp>
+        <p:nvSpPr>
+          <p:cNvPr id="4" name="Slide Number Placeholder 3"/>
+          <p:cNvSpPr>
+            <a:spLocks noGrp="1"/>
+          </p:cNvSpPr>
+          <p:nvPr>
+            <p:ph type="sldNum" sz="quarter" idx="10"/>
+          </p:nvPr>
+        </p:nvSpPr>
+        <p:spPr/>
+        <p:txBody>
+          <a:bodyPr/>
+          <a:lstStyle/>
+          <a:p>
+            <a:fld id="{F7021451-1387-4CA6-816F-3879F97B5CBC}" type="slidenum">
+              <a:rPr lang="en-US"/>
+              <a:t>19</a:t>
             </a:fld>
             <a:endParaRPr lang="en-US"/>
           </a:p>
@@ -1263,6 +1531,94 @@
 </p:notes>
 </file>
 
+<file path=ppt/notesSlides/notesSlide20.xml><?xml version="1.0" encoding="utf-8"?>
+<p:notes xmlns:a="http://schemas.openxmlformats.org/drawingml/2006/main" xmlns:r="http://schemas.openxmlformats.org/officeDocument/2006/relationships" xmlns:p="http://schemas.openxmlformats.org/presentationml/2006/main">
+  <p:cSld>
+    <p:spTree>
+      <p:nvGrpSpPr>
+        <p:cNvPr id="1" name=""/>
+        <p:cNvGrpSpPr/>
+        <p:nvPr/>
+      </p:nvGrpSpPr>
+      <p:grpSpPr>
+        <a:xfrm>
+          <a:off x="0" y="0"/>
+          <a:ext cx="0" cy="0"/>
+          <a:chOff x="0" y="0"/>
+          <a:chExt cx="0" cy="0"/>
+        </a:xfrm>
+      </p:grpSpPr>
+      <p:sp>
+        <p:nvSpPr>
+          <p:cNvPr id="2" name="Slide Image Placeholder 1"/>
+          <p:cNvSpPr>
+            <a:spLocks noGrp="1" noRot="1" noChangeAspect="1"/>
+          </p:cNvSpPr>
+          <p:nvPr>
+            <p:ph type="sldImg"/>
+          </p:nvPr>
+        </p:nvSpPr>
+        <p:spPr/>
+      </p:sp>
+      <p:sp>
+        <p:nvSpPr>
+          <p:cNvPr id="3" name="Notes Placeholder 2"/>
+          <p:cNvSpPr>
+            <a:spLocks noGrp="1"/>
+          </p:cNvSpPr>
+          <p:nvPr>
+            <p:ph type="body" idx="1"/>
+          </p:nvPr>
+        </p:nvSpPr>
+        <p:spPr/>
+        <p:txBody>
+          <a:bodyPr/>
+          <a:lstStyle/>
+          <a:p>
+            <a:r>
+              <a:rPr lang="en-US" dirty="0"/>
+              <a:t>Closing slide. Quote lifted directly from isekai.md's own opening.</a:t>
+            </a:r>
+            <a:endParaRPr lang="en-US" dirty="0"/>
+          </a:p>
+        </p:txBody>
+      </p:sp>
+      <p:sp>
+        <p:nvSpPr>
+          <p:cNvPr id="4" name="Slide Number Placeholder 3"/>
+          <p:cNvSpPr>
+            <a:spLocks noGrp="1"/>
+          </p:cNvSpPr>
+          <p:nvPr>
+            <p:ph type="sldNum" sz="quarter" idx="10"/>
+          </p:nvPr>
+        </p:nvSpPr>
+        <p:spPr/>
+        <p:txBody>
+          <a:bodyPr/>
+          <a:lstStyle/>
+          <a:p>
+            <a:fld id="{F7021451-1387-4CA6-816F-3879F97B5CBC}" type="slidenum">
+              <a:rPr lang="en-US"/>
+              <a:t>20</a:t>
+            </a:fld>
+            <a:endParaRPr lang="en-US"/>
+          </a:p>
+        </p:txBody>
+      </p:sp>
+    </p:spTree>
+    <p:extLst>
+      <p:ext uri="{BB962C8B-B14F-4D97-AF65-F5344CB8AC3E}">
+        <p14:creationId xmlns:p14="http://schemas.microsoft.com/office/powerpoint/2010/main" val="1024086991"/>
+      </p:ext>
+    </p:extLst>
+  </p:cSld>
+  <p:clrMapOvr>
+    <a:masterClrMapping/>
+  </p:clrMapOvr>
+</p:notes>
+</file>
+
 <file path=ppt/notesSlides/notesSlide3.xml><?xml version="1.0" encoding="utf-8"?>
 <p:notes xmlns:a="http://schemas.openxmlformats.org/drawingml/2006/main" xmlns:r="http://schemas.openxmlformats.org/officeDocument/2006/relationships" xmlns:p="http://schemas.openxmlformats.org/presentationml/2006/main">
   <p:cSld>
@@ -1749,7 +2105,7 @@
           <a:p>
             <a:r>
               <a:rPr lang="en-US" dirty="0"/>
-              <a:t>/isekai and /genesis run identically in OpenCode and Claude Code. /don and /mint only make sense from the Claude Code side, since .opencode/ is already the native format.</a:t>
+              <a:t>Nature 5 is the biology (hippocampal buffer, sleep consolidation, cleared traces); this is where each memory lives. Short → distilled → long; shared is the bus between bodies. The DB tier, when a world needs it, is the same boundary with a bigger engine — see canon/memory-tiers.md.</a:t>
             </a:r>
             <a:endParaRPr lang="en-US" dirty="0"/>
           </a:p>
@@ -1837,7 +2193,7 @@
           <a:p>
             <a:r>
               <a:rPr lang="en-US" dirty="0"/>
-              <a:t>Instruments are perception, not memory — what the world can check about itself right now, versus what a document claims. The bottom row is field-tested, not illustrative: OpenCode was actually installed and run on the machine this deck was built on, the 842M figure is the real, corrected total after fixing a Claude Code input-token undercount, and the 3 bugs (Claude cache-token undercount, a silent node:sqlite failure, and an OpenCode cache-token undercount) were each caught by an actual deterministic test script (.isekai/tools/test-opencode-integration.js), not by inspection.</a:t>
+              <a:t>The three kinds are the human's own (institutional / tribal / domain context), renamed into the world's vocabulary — Law, Colony, Territory — with the definitions kept exact. Colony is the kind the principle is really about: it is where the world's real knowledge leaks.</a:t>
             </a:r>
             <a:endParaRPr lang="en-US" dirty="0"/>
           </a:p>
@@ -2519,6 +2875,3817 @@
                 <a:ea typeface="Cambria" pitchFamily="34" charset="-122"/>
                 <a:cs typeface="Cambria" pitchFamily="34" charset="-120"/>
               </a:rPr>
+              <a:t>The loop — six beats a Court Body runs on its own</a:t>
+            </a:r>
+            <a:endParaRPr lang="en-US" sz="3000" dirty="0"/>
+          </a:p>
+        </p:txBody>
+      </p:sp>
+      <p:sp>
+        <p:nvSpPr>
+          <p:cNvPr id="3" name="Shape 1"/>
+          <p:cNvSpPr/>
+          <p:nvPr/>
+        </p:nvSpPr>
+        <p:spPr>
+          <a:xfrm>
+            <a:off x="640080" y="1645920"/>
+            <a:ext cx="1680972" cy="1965960"/>
+          </a:xfrm>
+          <a:prstGeom prst="roundRect">
+            <a:avLst>
+              <a:gd name="adj" fmla="val 5440"/>
+            </a:avLst>
+          </a:prstGeom>
+          <a:solidFill>
+            <a:srgbClr val="FFFFFF"/>
+          </a:solidFill>
+          <a:ln w="12700">
+            <a:solidFill>
+              <a:srgbClr val="E3E8F0"/>
+            </a:solidFill>
+            <a:prstDash val="solid"/>
+          </a:ln>
+        </p:spPr>
+      </p:sp>
+      <p:sp>
+        <p:nvSpPr>
+          <p:cNvPr id="4" name="Shape 2"/>
+          <p:cNvSpPr/>
+          <p:nvPr/>
+        </p:nvSpPr>
+        <p:spPr>
+          <a:xfrm>
+            <a:off x="822960" y="1828800"/>
+            <a:ext cx="347472" cy="347472"/>
+          </a:xfrm>
+          <a:prstGeom prst="ellipse">
+            <a:avLst/>
+          </a:prstGeom>
+          <a:solidFill>
+            <a:srgbClr val="2695BD"/>
+          </a:solidFill>
+          <a:ln/>
+        </p:spPr>
+      </p:sp>
+      <p:sp>
+        <p:nvSpPr>
+          <p:cNvPr id="5" name="Text 3"/>
+          <p:cNvSpPr txBox="1"/>
+          <p:nvPr/>
+        </p:nvSpPr>
+        <p:spPr>
+          <a:xfrm>
+            <a:off x="822960" y="1828800"/>
+            <a:ext cx="347472" cy="347472"/>
+          </a:xfrm>
+          <a:prstGeom prst="rect">
+            <a:avLst/>
+          </a:prstGeom>
+          <a:noFill/>
+          <a:ln/>
+        </p:spPr>
+        <p:txBody>
+          <a:bodyPr wrap="square" lIns="0" tIns="0" rIns="0" bIns="0" rtlCol="0" anchor="ctr"/>
+          <a:lstStyle/>
+          <a:p>
+            <a:pPr algn="ctr" indent="0" marL="0">
+              <a:buNone/>
+            </a:pPr>
+            <a:r>
+              <a:rPr lang="en-US" sz="1500" b="1" dirty="0">
+                <a:solidFill>
+                  <a:srgbClr val="FFFFFF"/>
+                </a:solidFill>
+                <a:latin typeface="Cambria" pitchFamily="34" charset="0"/>
+                <a:ea typeface="Cambria" pitchFamily="34" charset="-122"/>
+                <a:cs typeface="Cambria" pitchFamily="34" charset="-120"/>
+              </a:rPr>
+              <a:t>1</a:t>
+            </a:r>
+            <a:endParaRPr lang="en-US" sz="1500" dirty="0"/>
+          </a:p>
+        </p:txBody>
+      </p:sp>
+      <p:sp>
+        <p:nvSpPr>
+          <p:cNvPr id="6" name="Text 4"/>
+          <p:cNvSpPr txBox="1"/>
+          <p:nvPr/>
+        </p:nvSpPr>
+        <p:spPr>
+          <a:xfrm>
+            <a:off x="1261872" y="1810512"/>
+            <a:ext cx="949452" cy="384048"/>
+          </a:xfrm>
+          <a:prstGeom prst="rect">
+            <a:avLst/>
+          </a:prstGeom>
+          <a:noFill/>
+          <a:ln/>
+        </p:spPr>
+        <p:txBody>
+          <a:bodyPr wrap="square" lIns="0" tIns="0" rIns="0" bIns="0" rtlCol="0" anchor="ctr"/>
+          <a:lstStyle/>
+          <a:p>
+            <a:pPr indent="0" marL="0">
+              <a:buNone/>
+            </a:pPr>
+            <a:r>
+              <a:rPr lang="en-US" sz="1500" b="1" dirty="0">
+                <a:solidFill>
+                  <a:srgbClr val="12182A"/>
+                </a:solidFill>
+                <a:latin typeface="Cambria" pitchFamily="34" charset="0"/>
+                <a:ea typeface="Cambria" pitchFamily="34" charset="-122"/>
+                <a:cs typeface="Cambria" pitchFamily="34" charset="-120"/>
+              </a:rPr>
+              <a:t>perceive</a:t>
+            </a:r>
+            <a:endParaRPr lang="en-US" sz="1500" dirty="0"/>
+          </a:p>
+        </p:txBody>
+      </p:sp>
+      <p:sp>
+        <p:nvSpPr>
+          <p:cNvPr id="7" name="Text 5"/>
+          <p:cNvSpPr txBox="1"/>
+          <p:nvPr/>
+        </p:nvSpPr>
+        <p:spPr>
+          <a:xfrm>
+            <a:off x="822960" y="2304288"/>
+            <a:ext cx="1315212" cy="1234440"/>
+          </a:xfrm>
+          <a:prstGeom prst="rect">
+            <a:avLst/>
+          </a:prstGeom>
+          <a:noFill/>
+          <a:ln/>
+        </p:spPr>
+        <p:txBody>
+          <a:bodyPr wrap="square" lIns="0" tIns="0" rIns="0" bIns="0" rtlCol="0" anchor="t"/>
+          <a:lstStyle/>
+          <a:p>
+            <a:pPr indent="0" marL="0">
+              <a:lnSpc>
+                <a:spcPct val="112000"/>
+              </a:lnSpc>
+              <a:buNone/>
+            </a:pPr>
+            <a:r>
+              <a:rPr lang="en-US" sz="1050" dirty="0">
+                <a:solidFill>
+                  <a:srgbClr val="6B7A90"/>
+                </a:solidFill>
+                <a:latin typeface="Calibri" pitchFamily="34" charset="0"/>
+                <a:ea typeface="Calibri" pitchFamily="34" charset="-122"/>
+                <a:cs typeface="Calibri" pitchFamily="34" charset="-120"/>
+              </a:rPr>
+              <a:t>read the instruments: steps left, wall clock, context window</a:t>
+            </a:r>
+            <a:endParaRPr lang="en-US" sz="1050" dirty="0"/>
+          </a:p>
+        </p:txBody>
+      </p:sp>
+      <p:sp>
+        <p:nvSpPr>
+          <p:cNvPr id="8" name="Text 6"/>
+          <p:cNvSpPr txBox="1"/>
+          <p:nvPr/>
+        </p:nvSpPr>
+        <p:spPr>
+          <a:xfrm>
+            <a:off x="2302764" y="2423160"/>
+            <a:ext cx="201168" cy="365760"/>
+          </a:xfrm>
+          <a:prstGeom prst="rect">
+            <a:avLst/>
+          </a:prstGeom>
+          <a:noFill/>
+          <a:ln/>
+        </p:spPr>
+        <p:txBody>
+          <a:bodyPr wrap="square" lIns="0" tIns="0" rIns="0" bIns="0" rtlCol="0" anchor="ctr"/>
+          <a:lstStyle/>
+          <a:p>
+            <a:pPr algn="ctr" indent="0" marL="0">
+              <a:buNone/>
+            </a:pPr>
+            <a:r>
+              <a:rPr lang="en-US" sz="1800" dirty="0">
+                <a:solidFill>
+                  <a:srgbClr val="6B7A90"/>
+                </a:solidFill>
+                <a:latin typeface="Cambria" pitchFamily="34" charset="0"/>
+                <a:ea typeface="Cambria" pitchFamily="34" charset="-122"/>
+                <a:cs typeface="Cambria" pitchFamily="34" charset="-120"/>
+              </a:rPr>
+              <a:t>›</a:t>
+            </a:r>
+            <a:endParaRPr lang="en-US" sz="1800" dirty="0"/>
+          </a:p>
+        </p:txBody>
+      </p:sp>
+      <p:sp>
+        <p:nvSpPr>
+          <p:cNvPr id="9" name="Shape 7"/>
+          <p:cNvSpPr/>
+          <p:nvPr/>
+        </p:nvSpPr>
+        <p:spPr>
+          <a:xfrm>
+            <a:off x="2485644" y="1645920"/>
+            <a:ext cx="1680972" cy="1965960"/>
+          </a:xfrm>
+          <a:prstGeom prst="roundRect">
+            <a:avLst>
+              <a:gd name="adj" fmla="val 5440"/>
+            </a:avLst>
+          </a:prstGeom>
+          <a:solidFill>
+            <a:srgbClr val="FFFFFF"/>
+          </a:solidFill>
+          <a:ln w="12700">
+            <a:solidFill>
+              <a:srgbClr val="E3E8F0"/>
+            </a:solidFill>
+            <a:prstDash val="solid"/>
+          </a:ln>
+        </p:spPr>
+      </p:sp>
+      <p:sp>
+        <p:nvSpPr>
+          <p:cNvPr id="10" name="Shape 8"/>
+          <p:cNvSpPr/>
+          <p:nvPr/>
+        </p:nvSpPr>
+        <p:spPr>
+          <a:xfrm>
+            <a:off x="2668524" y="1828800"/>
+            <a:ext cx="347472" cy="347472"/>
+          </a:xfrm>
+          <a:prstGeom prst="ellipse">
+            <a:avLst/>
+          </a:prstGeom>
+          <a:solidFill>
+            <a:srgbClr val="2695BD"/>
+          </a:solidFill>
+          <a:ln/>
+        </p:spPr>
+      </p:sp>
+      <p:sp>
+        <p:nvSpPr>
+          <p:cNvPr id="11" name="Text 9"/>
+          <p:cNvSpPr txBox="1"/>
+          <p:nvPr/>
+        </p:nvSpPr>
+        <p:spPr>
+          <a:xfrm>
+            <a:off x="2668524" y="1828800"/>
+            <a:ext cx="347472" cy="347472"/>
+          </a:xfrm>
+          <a:prstGeom prst="rect">
+            <a:avLst/>
+          </a:prstGeom>
+          <a:noFill/>
+          <a:ln/>
+        </p:spPr>
+        <p:txBody>
+          <a:bodyPr wrap="square" lIns="0" tIns="0" rIns="0" bIns="0" rtlCol="0" anchor="ctr"/>
+          <a:lstStyle/>
+          <a:p>
+            <a:pPr algn="ctr" indent="0" marL="0">
+              <a:buNone/>
+            </a:pPr>
+            <a:r>
+              <a:rPr lang="en-US" sz="1500" b="1" dirty="0">
+                <a:solidFill>
+                  <a:srgbClr val="FFFFFF"/>
+                </a:solidFill>
+                <a:latin typeface="Cambria" pitchFamily="34" charset="0"/>
+                <a:ea typeface="Cambria" pitchFamily="34" charset="-122"/>
+                <a:cs typeface="Cambria" pitchFamily="34" charset="-120"/>
+              </a:rPr>
+              <a:t>2</a:t>
+            </a:r>
+            <a:endParaRPr lang="en-US" sz="1500" dirty="0"/>
+          </a:p>
+        </p:txBody>
+      </p:sp>
+      <p:sp>
+        <p:nvSpPr>
+          <p:cNvPr id="12" name="Text 10"/>
+          <p:cNvSpPr txBox="1"/>
+          <p:nvPr/>
+        </p:nvSpPr>
+        <p:spPr>
+          <a:xfrm>
+            <a:off x="3107436" y="1810512"/>
+            <a:ext cx="949452" cy="384048"/>
+          </a:xfrm>
+          <a:prstGeom prst="rect">
+            <a:avLst/>
+          </a:prstGeom>
+          <a:noFill/>
+          <a:ln/>
+        </p:spPr>
+        <p:txBody>
+          <a:bodyPr wrap="square" lIns="0" tIns="0" rIns="0" bIns="0" rtlCol="0" anchor="ctr"/>
+          <a:lstStyle/>
+          <a:p>
+            <a:pPr indent="0" marL="0">
+              <a:buNone/>
+            </a:pPr>
+            <a:r>
+              <a:rPr lang="en-US" sz="1500" b="1" dirty="0">
+                <a:solidFill>
+                  <a:srgbClr val="12182A"/>
+                </a:solidFill>
+                <a:latin typeface="Cambria" pitchFamily="34" charset="0"/>
+                <a:ea typeface="Cambria" pitchFamily="34" charset="-122"/>
+                <a:cs typeface="Cambria" pitchFamily="34" charset="-120"/>
+              </a:rPr>
+              <a:t>recall</a:t>
+            </a:r>
+            <a:endParaRPr lang="en-US" sz="1500" dirty="0"/>
+          </a:p>
+        </p:txBody>
+      </p:sp>
+      <p:sp>
+        <p:nvSpPr>
+          <p:cNvPr id="13" name="Text 11"/>
+          <p:cNvSpPr txBox="1"/>
+          <p:nvPr/>
+        </p:nvSpPr>
+        <p:spPr>
+          <a:xfrm>
+            <a:off x="2668524" y="2304288"/>
+            <a:ext cx="1315212" cy="1234440"/>
+          </a:xfrm>
+          <a:prstGeom prst="rect">
+            <a:avLst/>
+          </a:prstGeom>
+          <a:noFill/>
+          <a:ln/>
+        </p:spPr>
+        <p:txBody>
+          <a:bodyPr wrap="square" lIns="0" tIns="0" rIns="0" bIns="0" rtlCol="0" anchor="t"/>
+          <a:lstStyle/>
+          <a:p>
+            <a:pPr indent="0" marL="0">
+              <a:lnSpc>
+                <a:spcPct val="112000"/>
+              </a:lnSpc>
+              <a:buNone/>
+            </a:pPr>
+            <a:r>
+              <a:rPr lang="en-US" sz="1050" dirty="0">
+                <a:solidFill>
+                  <a:srgbClr val="6B7A90"/>
+                </a:solidFill>
+                <a:latin typeface="Calibri" pitchFamily="34" charset="0"/>
+                <a:ea typeface="Calibri" pitchFamily="34" charset="-122"/>
+                <a:cs typeface="Calibri" pitchFamily="34" charset="-120"/>
+              </a:rPr>
+              <a:t>ask memory by the step's question; carry anchors, not payloads</a:t>
+            </a:r>
+            <a:endParaRPr lang="en-US" sz="1050" dirty="0"/>
+          </a:p>
+        </p:txBody>
+      </p:sp>
+      <p:sp>
+        <p:nvSpPr>
+          <p:cNvPr id="14" name="Text 12"/>
+          <p:cNvSpPr txBox="1"/>
+          <p:nvPr/>
+        </p:nvSpPr>
+        <p:spPr>
+          <a:xfrm>
+            <a:off x="4148328" y="2423160"/>
+            <a:ext cx="201168" cy="365760"/>
+          </a:xfrm>
+          <a:prstGeom prst="rect">
+            <a:avLst/>
+          </a:prstGeom>
+          <a:noFill/>
+          <a:ln/>
+        </p:spPr>
+        <p:txBody>
+          <a:bodyPr wrap="square" lIns="0" tIns="0" rIns="0" bIns="0" rtlCol="0" anchor="ctr"/>
+          <a:lstStyle/>
+          <a:p>
+            <a:pPr algn="ctr" indent="0" marL="0">
+              <a:buNone/>
+            </a:pPr>
+            <a:r>
+              <a:rPr lang="en-US" sz="1800" dirty="0">
+                <a:solidFill>
+                  <a:srgbClr val="6B7A90"/>
+                </a:solidFill>
+                <a:latin typeface="Cambria" pitchFamily="34" charset="0"/>
+                <a:ea typeface="Cambria" pitchFamily="34" charset="-122"/>
+                <a:cs typeface="Cambria" pitchFamily="34" charset="-120"/>
+              </a:rPr>
+              <a:t>›</a:t>
+            </a:r>
+            <a:endParaRPr lang="en-US" sz="1800" dirty="0"/>
+          </a:p>
+        </p:txBody>
+      </p:sp>
+      <p:sp>
+        <p:nvSpPr>
+          <p:cNvPr id="15" name="Shape 13"/>
+          <p:cNvSpPr/>
+          <p:nvPr/>
+        </p:nvSpPr>
+        <p:spPr>
+          <a:xfrm>
+            <a:off x="4331208" y="1645920"/>
+            <a:ext cx="1680972" cy="1965960"/>
+          </a:xfrm>
+          <a:prstGeom prst="roundRect">
+            <a:avLst>
+              <a:gd name="adj" fmla="val 5440"/>
+            </a:avLst>
+          </a:prstGeom>
+          <a:solidFill>
+            <a:srgbClr val="FFFFFF"/>
+          </a:solidFill>
+          <a:ln w="12700">
+            <a:solidFill>
+              <a:srgbClr val="E3E8F0"/>
+            </a:solidFill>
+            <a:prstDash val="solid"/>
+          </a:ln>
+        </p:spPr>
+      </p:sp>
+      <p:sp>
+        <p:nvSpPr>
+          <p:cNvPr id="16" name="Shape 14"/>
+          <p:cNvSpPr/>
+          <p:nvPr/>
+        </p:nvSpPr>
+        <p:spPr>
+          <a:xfrm>
+            <a:off x="4514088" y="1828800"/>
+            <a:ext cx="347472" cy="347472"/>
+          </a:xfrm>
+          <a:prstGeom prst="ellipse">
+            <a:avLst/>
+          </a:prstGeom>
+          <a:solidFill>
+            <a:srgbClr val="7C5CD6"/>
+          </a:solidFill>
+          <a:ln/>
+        </p:spPr>
+      </p:sp>
+      <p:sp>
+        <p:nvSpPr>
+          <p:cNvPr id="17" name="Text 15"/>
+          <p:cNvSpPr txBox="1"/>
+          <p:nvPr/>
+        </p:nvSpPr>
+        <p:spPr>
+          <a:xfrm>
+            <a:off x="4514088" y="1828800"/>
+            <a:ext cx="347472" cy="347472"/>
+          </a:xfrm>
+          <a:prstGeom prst="rect">
+            <a:avLst/>
+          </a:prstGeom>
+          <a:noFill/>
+          <a:ln/>
+        </p:spPr>
+        <p:txBody>
+          <a:bodyPr wrap="square" lIns="0" tIns="0" rIns="0" bIns="0" rtlCol="0" anchor="ctr"/>
+          <a:lstStyle/>
+          <a:p>
+            <a:pPr algn="ctr" indent="0" marL="0">
+              <a:buNone/>
+            </a:pPr>
+            <a:r>
+              <a:rPr lang="en-US" sz="1500" b="1" dirty="0">
+                <a:solidFill>
+                  <a:srgbClr val="FFFFFF"/>
+                </a:solidFill>
+                <a:latin typeface="Cambria" pitchFamily="34" charset="0"/>
+                <a:ea typeface="Cambria" pitchFamily="34" charset="-122"/>
+                <a:cs typeface="Cambria" pitchFamily="34" charset="-120"/>
+              </a:rPr>
+              <a:t>3</a:t>
+            </a:r>
+            <a:endParaRPr lang="en-US" sz="1500" dirty="0"/>
+          </a:p>
+        </p:txBody>
+      </p:sp>
+      <p:sp>
+        <p:nvSpPr>
+          <p:cNvPr id="18" name="Text 16"/>
+          <p:cNvSpPr txBox="1"/>
+          <p:nvPr/>
+        </p:nvSpPr>
+        <p:spPr>
+          <a:xfrm>
+            <a:off x="4953000" y="1810512"/>
+            <a:ext cx="949452" cy="384048"/>
+          </a:xfrm>
+          <a:prstGeom prst="rect">
+            <a:avLst/>
+          </a:prstGeom>
+          <a:noFill/>
+          <a:ln/>
+        </p:spPr>
+        <p:txBody>
+          <a:bodyPr wrap="square" lIns="0" tIns="0" rIns="0" bIns="0" rtlCol="0" anchor="ctr"/>
+          <a:lstStyle/>
+          <a:p>
+            <a:pPr indent="0" marL="0">
+              <a:buNone/>
+            </a:pPr>
+            <a:r>
+              <a:rPr lang="en-US" sz="1500" b="1" dirty="0">
+                <a:solidFill>
+                  <a:srgbClr val="12182A"/>
+                </a:solidFill>
+                <a:latin typeface="Cambria" pitchFamily="34" charset="0"/>
+                <a:ea typeface="Cambria" pitchFamily="34" charset="-122"/>
+                <a:cs typeface="Cambria" pitchFamily="34" charset="-120"/>
+              </a:rPr>
+              <a:t>plan</a:t>
+            </a:r>
+            <a:endParaRPr lang="en-US" sz="1500" dirty="0"/>
+          </a:p>
+        </p:txBody>
+      </p:sp>
+      <p:sp>
+        <p:nvSpPr>
+          <p:cNvPr id="19" name="Text 17"/>
+          <p:cNvSpPr txBox="1"/>
+          <p:nvPr/>
+        </p:nvSpPr>
+        <p:spPr>
+          <a:xfrm>
+            <a:off x="4514088" y="2304288"/>
+            <a:ext cx="1315212" cy="1234440"/>
+          </a:xfrm>
+          <a:prstGeom prst="rect">
+            <a:avLst/>
+          </a:prstGeom>
+          <a:noFill/>
+          <a:ln/>
+        </p:spPr>
+        <p:txBody>
+          <a:bodyPr wrap="square" lIns="0" tIns="0" rIns="0" bIns="0" rtlCol="0" anchor="t"/>
+          <a:lstStyle/>
+          <a:p>
+            <a:pPr indent="0" marL="0">
+              <a:lnSpc>
+                <a:spcPct val="112000"/>
+              </a:lnSpc>
+              <a:buNone/>
+            </a:pPr>
+            <a:r>
+              <a:rPr lang="en-US" sz="1050" dirty="0">
+                <a:solidFill>
+                  <a:srgbClr val="6B7A90"/>
+                </a:solidFill>
+                <a:latin typeface="Calibri" pitchFamily="34" charset="0"/>
+                <a:ea typeface="Calibri" pitchFamily="34" charset="-122"/>
+                <a:cs typeface="Calibri" pitchFamily="34" charset="-120"/>
+              </a:rPr>
+              <a:t>one step, one class: read · write · outward · destructive</a:t>
+            </a:r>
+            <a:endParaRPr lang="en-US" sz="1050" dirty="0"/>
+          </a:p>
+        </p:txBody>
+      </p:sp>
+      <p:sp>
+        <p:nvSpPr>
+          <p:cNvPr id="20" name="Text 18"/>
+          <p:cNvSpPr txBox="1"/>
+          <p:nvPr/>
+        </p:nvSpPr>
+        <p:spPr>
+          <a:xfrm>
+            <a:off x="5993892" y="2423160"/>
+            <a:ext cx="201168" cy="365760"/>
+          </a:xfrm>
+          <a:prstGeom prst="rect">
+            <a:avLst/>
+          </a:prstGeom>
+          <a:noFill/>
+          <a:ln/>
+        </p:spPr>
+        <p:txBody>
+          <a:bodyPr wrap="square" lIns="0" tIns="0" rIns="0" bIns="0" rtlCol="0" anchor="ctr"/>
+          <a:lstStyle/>
+          <a:p>
+            <a:pPr algn="ctr" indent="0" marL="0">
+              <a:buNone/>
+            </a:pPr>
+            <a:r>
+              <a:rPr lang="en-US" sz="1800" dirty="0">
+                <a:solidFill>
+                  <a:srgbClr val="6B7A90"/>
+                </a:solidFill>
+                <a:latin typeface="Cambria" pitchFamily="34" charset="0"/>
+                <a:ea typeface="Cambria" pitchFamily="34" charset="-122"/>
+                <a:cs typeface="Cambria" pitchFamily="34" charset="-120"/>
+              </a:rPr>
+              <a:t>›</a:t>
+            </a:r>
+            <a:endParaRPr lang="en-US" sz="1800" dirty="0"/>
+          </a:p>
+        </p:txBody>
+      </p:sp>
+      <p:sp>
+        <p:nvSpPr>
+          <p:cNvPr id="21" name="Shape 19"/>
+          <p:cNvSpPr/>
+          <p:nvPr/>
+        </p:nvSpPr>
+        <p:spPr>
+          <a:xfrm>
+            <a:off x="6176772" y="1645920"/>
+            <a:ext cx="1680972" cy="1965960"/>
+          </a:xfrm>
+          <a:prstGeom prst="roundRect">
+            <a:avLst>
+              <a:gd name="adj" fmla="val 5440"/>
+            </a:avLst>
+          </a:prstGeom>
+          <a:solidFill>
+            <a:srgbClr val="FFFFFF"/>
+          </a:solidFill>
+          <a:ln w="12700">
+            <a:solidFill>
+              <a:srgbClr val="E3E8F0"/>
+            </a:solidFill>
+            <a:prstDash val="solid"/>
+          </a:ln>
+        </p:spPr>
+      </p:sp>
+      <p:sp>
+        <p:nvSpPr>
+          <p:cNvPr id="22" name="Shape 20"/>
+          <p:cNvSpPr/>
+          <p:nvPr/>
+        </p:nvSpPr>
+        <p:spPr>
+          <a:xfrm>
+            <a:off x="6359652" y="1828800"/>
+            <a:ext cx="347472" cy="347472"/>
+          </a:xfrm>
+          <a:prstGeom prst="ellipse">
+            <a:avLst/>
+          </a:prstGeom>
+          <a:solidFill>
+            <a:srgbClr val="BD8C24"/>
+          </a:solidFill>
+          <a:ln/>
+        </p:spPr>
+      </p:sp>
+      <p:sp>
+        <p:nvSpPr>
+          <p:cNvPr id="23" name="Text 21"/>
+          <p:cNvSpPr txBox="1"/>
+          <p:nvPr/>
+        </p:nvSpPr>
+        <p:spPr>
+          <a:xfrm>
+            <a:off x="6359652" y="1828800"/>
+            <a:ext cx="347472" cy="347472"/>
+          </a:xfrm>
+          <a:prstGeom prst="rect">
+            <a:avLst/>
+          </a:prstGeom>
+          <a:noFill/>
+          <a:ln/>
+        </p:spPr>
+        <p:txBody>
+          <a:bodyPr wrap="square" lIns="0" tIns="0" rIns="0" bIns="0" rtlCol="0" anchor="ctr"/>
+          <a:lstStyle/>
+          <a:p>
+            <a:pPr algn="ctr" indent="0" marL="0">
+              <a:buNone/>
+            </a:pPr>
+            <a:r>
+              <a:rPr lang="en-US" sz="1500" b="1" dirty="0">
+                <a:solidFill>
+                  <a:srgbClr val="FFFFFF"/>
+                </a:solidFill>
+                <a:latin typeface="Cambria" pitchFamily="34" charset="0"/>
+                <a:ea typeface="Cambria" pitchFamily="34" charset="-122"/>
+                <a:cs typeface="Cambria" pitchFamily="34" charset="-120"/>
+              </a:rPr>
+              <a:t>4</a:t>
+            </a:r>
+            <a:endParaRPr lang="en-US" sz="1500" dirty="0"/>
+          </a:p>
+        </p:txBody>
+      </p:sp>
+      <p:sp>
+        <p:nvSpPr>
+          <p:cNvPr id="24" name="Text 22"/>
+          <p:cNvSpPr txBox="1"/>
+          <p:nvPr/>
+        </p:nvSpPr>
+        <p:spPr>
+          <a:xfrm>
+            <a:off x="6798564" y="1810512"/>
+            <a:ext cx="949452" cy="384048"/>
+          </a:xfrm>
+          <a:prstGeom prst="rect">
+            <a:avLst/>
+          </a:prstGeom>
+          <a:noFill/>
+          <a:ln/>
+        </p:spPr>
+        <p:txBody>
+          <a:bodyPr wrap="square" lIns="0" tIns="0" rIns="0" bIns="0" rtlCol="0" anchor="ctr"/>
+          <a:lstStyle/>
+          <a:p>
+            <a:pPr indent="0" marL="0">
+              <a:buNone/>
+            </a:pPr>
+            <a:r>
+              <a:rPr lang="en-US" sz="1500" b="1" dirty="0">
+                <a:solidFill>
+                  <a:srgbClr val="12182A"/>
+                </a:solidFill>
+                <a:latin typeface="Cambria" pitchFamily="34" charset="0"/>
+                <a:ea typeface="Cambria" pitchFamily="34" charset="-122"/>
+                <a:cs typeface="Cambria" pitchFamily="34" charset="-120"/>
+              </a:rPr>
+              <a:t>act</a:t>
+            </a:r>
+            <a:endParaRPr lang="en-US" sz="1500" dirty="0"/>
+          </a:p>
+        </p:txBody>
+      </p:sp>
+      <p:sp>
+        <p:nvSpPr>
+          <p:cNvPr id="25" name="Text 23"/>
+          <p:cNvSpPr txBox="1"/>
+          <p:nvPr/>
+        </p:nvSpPr>
+        <p:spPr>
+          <a:xfrm>
+            <a:off x="6359652" y="2304288"/>
+            <a:ext cx="1315212" cy="1234440"/>
+          </a:xfrm>
+          <a:prstGeom prst="rect">
+            <a:avLst/>
+          </a:prstGeom>
+          <a:noFill/>
+          <a:ln/>
+        </p:spPr>
+        <p:txBody>
+          <a:bodyPr wrap="square" lIns="0" tIns="0" rIns="0" bIns="0" rtlCol="0" anchor="t"/>
+          <a:lstStyle/>
+          <a:p>
+            <a:pPr indent="0" marL="0">
+              <a:lnSpc>
+                <a:spcPct val="112000"/>
+              </a:lnSpc>
+              <a:buNone/>
+            </a:pPr>
+            <a:r>
+              <a:rPr lang="en-US" sz="1050" dirty="0">
+                <a:solidFill>
+                  <a:srgbClr val="6B7A90"/>
+                </a:solidFill>
+                <a:latin typeface="Calibri" pitchFamily="34" charset="0"/>
+                <a:ea typeface="Calibri" pitchFamily="34" charset="-122"/>
+                <a:cs typeface="Calibri" pitchFamily="34" charset="-120"/>
+              </a:rPr>
+              <a:t>outward and destructive pass the human gate first — never auto-approved</a:t>
+            </a:r>
+            <a:endParaRPr lang="en-US" sz="1050" dirty="0"/>
+          </a:p>
+        </p:txBody>
+      </p:sp>
+      <p:sp>
+        <p:nvSpPr>
+          <p:cNvPr id="26" name="Text 24"/>
+          <p:cNvSpPr txBox="1"/>
+          <p:nvPr/>
+        </p:nvSpPr>
+        <p:spPr>
+          <a:xfrm>
+            <a:off x="7839456" y="2423160"/>
+            <a:ext cx="201168" cy="365760"/>
+          </a:xfrm>
+          <a:prstGeom prst="rect">
+            <a:avLst/>
+          </a:prstGeom>
+          <a:noFill/>
+          <a:ln/>
+        </p:spPr>
+        <p:txBody>
+          <a:bodyPr wrap="square" lIns="0" tIns="0" rIns="0" bIns="0" rtlCol="0" anchor="ctr"/>
+          <a:lstStyle/>
+          <a:p>
+            <a:pPr algn="ctr" indent="0" marL="0">
+              <a:buNone/>
+            </a:pPr>
+            <a:r>
+              <a:rPr lang="en-US" sz="1800" dirty="0">
+                <a:solidFill>
+                  <a:srgbClr val="6B7A90"/>
+                </a:solidFill>
+                <a:latin typeface="Cambria" pitchFamily="34" charset="0"/>
+                <a:ea typeface="Cambria" pitchFamily="34" charset="-122"/>
+                <a:cs typeface="Cambria" pitchFamily="34" charset="-120"/>
+              </a:rPr>
+              <a:t>›</a:t>
+            </a:r>
+            <a:endParaRPr lang="en-US" sz="1800" dirty="0"/>
+          </a:p>
+        </p:txBody>
+      </p:sp>
+      <p:sp>
+        <p:nvSpPr>
+          <p:cNvPr id="27" name="Shape 25"/>
+          <p:cNvSpPr/>
+          <p:nvPr/>
+        </p:nvSpPr>
+        <p:spPr>
+          <a:xfrm>
+            <a:off x="8022336" y="1645920"/>
+            <a:ext cx="1680972" cy="1965960"/>
+          </a:xfrm>
+          <a:prstGeom prst="roundRect">
+            <a:avLst>
+              <a:gd name="adj" fmla="val 5440"/>
+            </a:avLst>
+          </a:prstGeom>
+          <a:solidFill>
+            <a:srgbClr val="FFFFFF"/>
+          </a:solidFill>
+          <a:ln w="12700">
+            <a:solidFill>
+              <a:srgbClr val="E3E8F0"/>
+            </a:solidFill>
+            <a:prstDash val="solid"/>
+          </a:ln>
+        </p:spPr>
+      </p:sp>
+      <p:sp>
+        <p:nvSpPr>
+          <p:cNvPr id="28" name="Shape 26"/>
+          <p:cNvSpPr/>
+          <p:nvPr/>
+        </p:nvSpPr>
+        <p:spPr>
+          <a:xfrm>
+            <a:off x="8205216" y="1828800"/>
+            <a:ext cx="347472" cy="347472"/>
+          </a:xfrm>
+          <a:prstGeom prst="ellipse">
+            <a:avLst/>
+          </a:prstGeom>
+          <a:solidFill>
+            <a:srgbClr val="7C5CD6"/>
+          </a:solidFill>
+          <a:ln/>
+        </p:spPr>
+      </p:sp>
+      <p:sp>
+        <p:nvSpPr>
+          <p:cNvPr id="29" name="Text 27"/>
+          <p:cNvSpPr txBox="1"/>
+          <p:nvPr/>
+        </p:nvSpPr>
+        <p:spPr>
+          <a:xfrm>
+            <a:off x="8205216" y="1828800"/>
+            <a:ext cx="347472" cy="347472"/>
+          </a:xfrm>
+          <a:prstGeom prst="rect">
+            <a:avLst/>
+          </a:prstGeom>
+          <a:noFill/>
+          <a:ln/>
+        </p:spPr>
+        <p:txBody>
+          <a:bodyPr wrap="square" lIns="0" tIns="0" rIns="0" bIns="0" rtlCol="0" anchor="ctr"/>
+          <a:lstStyle/>
+          <a:p>
+            <a:pPr algn="ctr" indent="0" marL="0">
+              <a:buNone/>
+            </a:pPr>
+            <a:r>
+              <a:rPr lang="en-US" sz="1500" b="1" dirty="0">
+                <a:solidFill>
+                  <a:srgbClr val="FFFFFF"/>
+                </a:solidFill>
+                <a:latin typeface="Cambria" pitchFamily="34" charset="0"/>
+                <a:ea typeface="Cambria" pitchFamily="34" charset="-122"/>
+                <a:cs typeface="Cambria" pitchFamily="34" charset="-120"/>
+              </a:rPr>
+              <a:t>5</a:t>
+            </a:r>
+            <a:endParaRPr lang="en-US" sz="1500" dirty="0"/>
+          </a:p>
+        </p:txBody>
+      </p:sp>
+      <p:sp>
+        <p:nvSpPr>
+          <p:cNvPr id="30" name="Text 28"/>
+          <p:cNvSpPr txBox="1"/>
+          <p:nvPr/>
+        </p:nvSpPr>
+        <p:spPr>
+          <a:xfrm>
+            <a:off x="8644128" y="1810512"/>
+            <a:ext cx="949452" cy="384048"/>
+          </a:xfrm>
+          <a:prstGeom prst="rect">
+            <a:avLst/>
+          </a:prstGeom>
+          <a:noFill/>
+          <a:ln/>
+        </p:spPr>
+        <p:txBody>
+          <a:bodyPr wrap="square" lIns="0" tIns="0" rIns="0" bIns="0" rtlCol="0" anchor="ctr"/>
+          <a:lstStyle/>
+          <a:p>
+            <a:pPr indent="0" marL="0">
+              <a:buNone/>
+            </a:pPr>
+            <a:r>
+              <a:rPr lang="en-US" sz="1500" b="1" dirty="0">
+                <a:solidFill>
+                  <a:srgbClr val="12182A"/>
+                </a:solidFill>
+                <a:latin typeface="Cambria" pitchFamily="34" charset="0"/>
+                <a:ea typeface="Cambria" pitchFamily="34" charset="-122"/>
+                <a:cs typeface="Cambria" pitchFamily="34" charset="-120"/>
+              </a:rPr>
+              <a:t>verify</a:t>
+            </a:r>
+            <a:endParaRPr lang="en-US" sz="1500" dirty="0"/>
+          </a:p>
+        </p:txBody>
+      </p:sp>
+      <p:sp>
+        <p:nvSpPr>
+          <p:cNvPr id="31" name="Text 29"/>
+          <p:cNvSpPr txBox="1"/>
+          <p:nvPr/>
+        </p:nvSpPr>
+        <p:spPr>
+          <a:xfrm>
+            <a:off x="8205216" y="2304288"/>
+            <a:ext cx="1315212" cy="1234440"/>
+          </a:xfrm>
+          <a:prstGeom prst="rect">
+            <a:avLst/>
+          </a:prstGeom>
+          <a:noFill/>
+          <a:ln/>
+        </p:spPr>
+        <p:txBody>
+          <a:bodyPr wrap="square" lIns="0" tIns="0" rIns="0" bIns="0" rtlCol="0" anchor="t"/>
+          <a:lstStyle/>
+          <a:p>
+            <a:pPr indent="0" marL="0">
+              <a:lnSpc>
+                <a:spcPct val="112000"/>
+              </a:lnSpc>
+              <a:buNone/>
+            </a:pPr>
+            <a:r>
+              <a:rPr lang="en-US" sz="1050" dirty="0">
+                <a:solidFill>
+                  <a:srgbClr val="6B7A90"/>
+                </a:solidFill>
+                <a:latin typeface="Calibri" pitchFamily="34" charset="0"/>
+                <a:ea typeface="Calibri" pitchFamily="34" charset="-122"/>
+                <a:cs typeface="Calibri" pitchFamily="34" charset="-120"/>
+              </a:rPr>
+              <a:t>an instrument reading; a failed verify is a failed act</a:t>
+            </a:r>
+            <a:endParaRPr lang="en-US" sz="1050" dirty="0"/>
+          </a:p>
+        </p:txBody>
+      </p:sp>
+      <p:sp>
+        <p:nvSpPr>
+          <p:cNvPr id="32" name="Text 30"/>
+          <p:cNvSpPr txBox="1"/>
+          <p:nvPr/>
+        </p:nvSpPr>
+        <p:spPr>
+          <a:xfrm>
+            <a:off x="9685020" y="2423160"/>
+            <a:ext cx="201168" cy="365760"/>
+          </a:xfrm>
+          <a:prstGeom prst="rect">
+            <a:avLst/>
+          </a:prstGeom>
+          <a:noFill/>
+          <a:ln/>
+        </p:spPr>
+        <p:txBody>
+          <a:bodyPr wrap="square" lIns="0" tIns="0" rIns="0" bIns="0" rtlCol="0" anchor="ctr"/>
+          <a:lstStyle/>
+          <a:p>
+            <a:pPr algn="ctr" indent="0" marL="0">
+              <a:buNone/>
+            </a:pPr>
+            <a:r>
+              <a:rPr lang="en-US" sz="1800" dirty="0">
+                <a:solidFill>
+                  <a:srgbClr val="6B7A90"/>
+                </a:solidFill>
+                <a:latin typeface="Cambria" pitchFamily="34" charset="0"/>
+                <a:ea typeface="Cambria" pitchFamily="34" charset="-122"/>
+                <a:cs typeface="Cambria" pitchFamily="34" charset="-120"/>
+              </a:rPr>
+              <a:t>›</a:t>
+            </a:r>
+            <a:endParaRPr lang="en-US" sz="1800" dirty="0"/>
+          </a:p>
+        </p:txBody>
+      </p:sp>
+      <p:sp>
+        <p:nvSpPr>
+          <p:cNvPr id="33" name="Shape 31"/>
+          <p:cNvSpPr/>
+          <p:nvPr/>
+        </p:nvSpPr>
+        <p:spPr>
+          <a:xfrm>
+            <a:off x="9867900" y="1645920"/>
+            <a:ext cx="1680972" cy="1965960"/>
+          </a:xfrm>
+          <a:prstGeom prst="roundRect">
+            <a:avLst>
+              <a:gd name="adj" fmla="val 5440"/>
+            </a:avLst>
+          </a:prstGeom>
+          <a:solidFill>
+            <a:srgbClr val="FFFFFF"/>
+          </a:solidFill>
+          <a:ln w="12700">
+            <a:solidFill>
+              <a:srgbClr val="E3E8F0"/>
+            </a:solidFill>
+            <a:prstDash val="solid"/>
+          </a:ln>
+        </p:spPr>
+      </p:sp>
+      <p:sp>
+        <p:nvSpPr>
+          <p:cNvPr id="34" name="Shape 32"/>
+          <p:cNvSpPr/>
+          <p:nvPr/>
+        </p:nvSpPr>
+        <p:spPr>
+          <a:xfrm>
+            <a:off x="10050780" y="1828800"/>
+            <a:ext cx="347472" cy="347472"/>
+          </a:xfrm>
+          <a:prstGeom prst="ellipse">
+            <a:avLst/>
+          </a:prstGeom>
+          <a:solidFill>
+            <a:srgbClr val="2695BD"/>
+          </a:solidFill>
+          <a:ln/>
+        </p:spPr>
+      </p:sp>
+      <p:sp>
+        <p:nvSpPr>
+          <p:cNvPr id="35" name="Text 33"/>
+          <p:cNvSpPr txBox="1"/>
+          <p:nvPr/>
+        </p:nvSpPr>
+        <p:spPr>
+          <a:xfrm>
+            <a:off x="10050780" y="1828800"/>
+            <a:ext cx="347472" cy="347472"/>
+          </a:xfrm>
+          <a:prstGeom prst="rect">
+            <a:avLst/>
+          </a:prstGeom>
+          <a:noFill/>
+          <a:ln/>
+        </p:spPr>
+        <p:txBody>
+          <a:bodyPr wrap="square" lIns="0" tIns="0" rIns="0" bIns="0" rtlCol="0" anchor="ctr"/>
+          <a:lstStyle/>
+          <a:p>
+            <a:pPr algn="ctr" indent="0" marL="0">
+              <a:buNone/>
+            </a:pPr>
+            <a:r>
+              <a:rPr lang="en-US" sz="1500" b="1" dirty="0">
+                <a:solidFill>
+                  <a:srgbClr val="FFFFFF"/>
+                </a:solidFill>
+                <a:latin typeface="Cambria" pitchFamily="34" charset="0"/>
+                <a:ea typeface="Cambria" pitchFamily="34" charset="-122"/>
+                <a:cs typeface="Cambria" pitchFamily="34" charset="-120"/>
+              </a:rPr>
+              <a:t>6</a:t>
+            </a:r>
+            <a:endParaRPr lang="en-US" sz="1500" dirty="0"/>
+          </a:p>
+        </p:txBody>
+      </p:sp>
+      <p:sp>
+        <p:nvSpPr>
+          <p:cNvPr id="36" name="Text 34"/>
+          <p:cNvSpPr txBox="1"/>
+          <p:nvPr/>
+        </p:nvSpPr>
+        <p:spPr>
+          <a:xfrm>
+            <a:off x="10489692" y="1810512"/>
+            <a:ext cx="949452" cy="384048"/>
+          </a:xfrm>
+          <a:prstGeom prst="rect">
+            <a:avLst/>
+          </a:prstGeom>
+          <a:noFill/>
+          <a:ln/>
+        </p:spPr>
+        <p:txBody>
+          <a:bodyPr wrap="square" lIns="0" tIns="0" rIns="0" bIns="0" rtlCol="0" anchor="ctr"/>
+          <a:lstStyle/>
+          <a:p>
+            <a:pPr indent="0" marL="0">
+              <a:buNone/>
+            </a:pPr>
+            <a:r>
+              <a:rPr lang="en-US" sz="1500" b="1" dirty="0">
+                <a:solidFill>
+                  <a:srgbClr val="12182A"/>
+                </a:solidFill>
+                <a:latin typeface="Cambria" pitchFamily="34" charset="0"/>
+                <a:ea typeface="Cambria" pitchFamily="34" charset="-122"/>
+                <a:cs typeface="Cambria" pitchFamily="34" charset="-120"/>
+              </a:rPr>
+              <a:t>record</a:t>
+            </a:r>
+            <a:endParaRPr lang="en-US" sz="1500" dirty="0"/>
+          </a:p>
+        </p:txBody>
+      </p:sp>
+      <p:sp>
+        <p:nvSpPr>
+          <p:cNvPr id="37" name="Text 35"/>
+          <p:cNvSpPr txBox="1"/>
+          <p:nvPr/>
+        </p:nvSpPr>
+        <p:spPr>
+          <a:xfrm>
+            <a:off x="10050780" y="2304288"/>
+            <a:ext cx="1315212" cy="1234440"/>
+          </a:xfrm>
+          <a:prstGeom prst="rect">
+            <a:avLst/>
+          </a:prstGeom>
+          <a:noFill/>
+          <a:ln/>
+        </p:spPr>
+        <p:txBody>
+          <a:bodyPr wrap="square" lIns="0" tIns="0" rIns="0" bIns="0" rtlCol="0" anchor="t"/>
+          <a:lstStyle/>
+          <a:p>
+            <a:pPr indent="0" marL="0">
+              <a:lnSpc>
+                <a:spcPct val="112000"/>
+              </a:lnSpc>
+              <a:buNone/>
+            </a:pPr>
+            <a:r>
+              <a:rPr lang="en-US" sz="1050" dirty="0">
+                <a:solidFill>
+                  <a:srgbClr val="6B7A90"/>
+                </a:solidFill>
+                <a:latin typeface="Calibri" pitchFamily="34" charset="0"/>
+                <a:ea typeface="Calibri" pitchFamily="34" charset="-122"/>
+                <a:cs typeface="Calibri" pitchFamily="34" charset="-120"/>
+              </a:rPr>
+              <a:t>journal the beat; land what was learned as a shared note</a:t>
+            </a:r>
+            <a:endParaRPr lang="en-US" sz="1050" dirty="0"/>
+          </a:p>
+        </p:txBody>
+      </p:sp>
+      <p:sp>
+        <p:nvSpPr>
+          <p:cNvPr id="38" name="Shape 36"/>
+          <p:cNvSpPr/>
+          <p:nvPr/>
+        </p:nvSpPr>
+        <p:spPr>
+          <a:xfrm>
+            <a:off x="640080" y="3886200"/>
+            <a:ext cx="54864" cy="1828800"/>
+          </a:xfrm>
+          <a:prstGeom prst="rect">
+            <a:avLst/>
+          </a:prstGeom>
+          <a:solidFill>
+            <a:srgbClr val="2695BD"/>
+          </a:solidFill>
+          <a:ln/>
+        </p:spPr>
+      </p:sp>
+      <p:sp>
+        <p:nvSpPr>
+          <p:cNvPr id="39" name="Text 37"/>
+          <p:cNvSpPr txBox="1"/>
+          <p:nvPr/>
+        </p:nvSpPr>
+        <p:spPr>
+          <a:xfrm>
+            <a:off x="868680" y="3886200"/>
+            <a:ext cx="3118104" cy="365760"/>
+          </a:xfrm>
+          <a:prstGeom prst="rect">
+            <a:avLst/>
+          </a:prstGeom>
+          <a:noFill/>
+          <a:ln/>
+        </p:spPr>
+        <p:txBody>
+          <a:bodyPr wrap="square" lIns="0" tIns="0" rIns="0" bIns="0" rtlCol="0" anchor="ctr"/>
+          <a:lstStyle/>
+          <a:p>
+            <a:pPr indent="0" marL="0">
+              <a:buNone/>
+            </a:pPr>
+            <a:r>
+              <a:rPr lang="en-US" sz="1350" b="1" dirty="0">
+                <a:solidFill>
+                  <a:srgbClr val="12182A"/>
+                </a:solidFill>
+                <a:latin typeface="Cambria" pitchFamily="34" charset="0"/>
+                <a:ea typeface="Cambria" pitchFamily="34" charset="-122"/>
+                <a:cs typeface="Cambria" pitchFamily="34" charset="-120"/>
+              </a:rPr>
+              <a:t>Autonomy, bounded by readings</a:t>
+            </a:r>
+            <a:endParaRPr lang="en-US" sz="1350" dirty="0"/>
+          </a:p>
+        </p:txBody>
+      </p:sp>
+      <p:sp>
+        <p:nvSpPr>
+          <p:cNvPr id="40" name="Text 38"/>
+          <p:cNvSpPr txBox="1"/>
+          <p:nvPr/>
+        </p:nvSpPr>
+        <p:spPr>
+          <a:xfrm>
+            <a:off x="868680" y="4297680"/>
+            <a:ext cx="3118104" cy="1417320"/>
+          </a:xfrm>
+          <a:prstGeom prst="rect">
+            <a:avLst/>
+          </a:prstGeom>
+          <a:noFill/>
+          <a:ln/>
+        </p:spPr>
+        <p:txBody>
+          <a:bodyPr wrap="square" lIns="0" tIns="0" rIns="0" bIns="0" rtlCol="0" anchor="t"/>
+          <a:lstStyle/>
+          <a:p>
+            <a:pPr indent="0" marL="0">
+              <a:lnSpc>
+                <a:spcPct val="112000"/>
+              </a:lnSpc>
+              <a:buNone/>
+            </a:pPr>
+            <a:r>
+              <a:rPr lang="en-US" sz="1100" dirty="0">
+                <a:solidFill>
+                  <a:srgbClr val="6B7A90"/>
+                </a:solidFill>
+                <a:latin typeface="Calibri" pitchFamily="34" charset="0"/>
+                <a:ea typeface="Calibri" pitchFamily="34" charset="-122"/>
+                <a:cs typeface="Calibri" pitchFamily="34" charset="-120"/>
+              </a:rPr>
+              <a:t>Budgets — steps, minutes, context tokens — are read from instruments before every step, never felt. Past any of them the run checkpoints and stops honestly.</a:t>
+            </a:r>
+            <a:endParaRPr lang="en-US" sz="1100" dirty="0"/>
+          </a:p>
+        </p:txBody>
+      </p:sp>
+      <p:sp>
+        <p:nvSpPr>
+          <p:cNvPr id="41" name="Shape 39"/>
+          <p:cNvSpPr/>
+          <p:nvPr/>
+        </p:nvSpPr>
+        <p:spPr>
+          <a:xfrm>
+            <a:off x="4398264" y="3886200"/>
+            <a:ext cx="54864" cy="1828800"/>
+          </a:xfrm>
+          <a:prstGeom prst="rect">
+            <a:avLst/>
+          </a:prstGeom>
+          <a:solidFill>
+            <a:srgbClr val="7C5CD6"/>
+          </a:solidFill>
+          <a:ln/>
+        </p:spPr>
+      </p:sp>
+      <p:sp>
+        <p:nvSpPr>
+          <p:cNvPr id="42" name="Text 40"/>
+          <p:cNvSpPr txBox="1"/>
+          <p:nvPr/>
+        </p:nvSpPr>
+        <p:spPr>
+          <a:xfrm>
+            <a:off x="4626864" y="3886200"/>
+            <a:ext cx="3118104" cy="365760"/>
+          </a:xfrm>
+          <a:prstGeom prst="rect">
+            <a:avLst/>
+          </a:prstGeom>
+          <a:noFill/>
+          <a:ln/>
+        </p:spPr>
+        <p:txBody>
+          <a:bodyPr wrap="square" lIns="0" tIns="0" rIns="0" bIns="0" rtlCol="0" anchor="ctr"/>
+          <a:lstStyle/>
+          <a:p>
+            <a:pPr indent="0" marL="0">
+              <a:buNone/>
+            </a:pPr>
+            <a:r>
+              <a:rPr lang="en-US" sz="1350" b="1" dirty="0">
+                <a:solidFill>
+                  <a:srgbClr val="12182A"/>
+                </a:solidFill>
+                <a:latin typeface="Cambria" pitchFamily="34" charset="0"/>
+                <a:ea typeface="Cambria" pitchFamily="34" charset="-122"/>
+                <a:cs typeface="Cambria" pitchFamily="34" charset="-120"/>
+              </a:rPr>
+              <a:t>Failure recovers, then escalates</a:t>
+            </a:r>
+            <a:endParaRPr lang="en-US" sz="1350" dirty="0"/>
+          </a:p>
+        </p:txBody>
+      </p:sp>
+      <p:sp>
+        <p:nvSpPr>
+          <p:cNvPr id="43" name="Text 41"/>
+          <p:cNvSpPr txBox="1"/>
+          <p:nvPr/>
+        </p:nvSpPr>
+        <p:spPr>
+          <a:xfrm>
+            <a:off x="4626864" y="4297680"/>
+            <a:ext cx="3118104" cy="1417320"/>
+          </a:xfrm>
+          <a:prstGeom prst="rect">
+            <a:avLst/>
+          </a:prstGeom>
+          <a:noFill/>
+          <a:ln/>
+        </p:spPr>
+        <p:txBody>
+          <a:bodyPr wrap="square" lIns="0" tIns="0" rIns="0" bIns="0" rtlCol="0" anchor="t"/>
+          <a:lstStyle/>
+          <a:p>
+            <a:pPr indent="0" marL="0">
+              <a:lnSpc>
+                <a:spcPct val="112000"/>
+              </a:lnSpc>
+              <a:buNone/>
+            </a:pPr>
+            <a:r>
+              <a:rPr lang="en-US" sz="1100" dirty="0">
+                <a:solidFill>
+                  <a:srgbClr val="6B7A90"/>
+                </a:solidFill>
+                <a:latin typeface="Calibri" pitchFamily="34" charset="0"/>
+                <a:ea typeface="Calibri" pitchFamily="34" charset="-122"/>
+                <a:cs typeface="Calibri" pitchFamily="34" charset="-120"/>
+              </a:rPr>
+              <a:t>Every beat is journaled; a crashed or cleared run resumes from its journal. Retries are bounded; past them the run ends with @? to its dispatcher — never a guess, never forever.</a:t>
+            </a:r>
+            <a:endParaRPr lang="en-US" sz="1100" dirty="0"/>
+          </a:p>
+        </p:txBody>
+      </p:sp>
+      <p:sp>
+        <p:nvSpPr>
+          <p:cNvPr id="44" name="Shape 42"/>
+          <p:cNvSpPr/>
+          <p:nvPr/>
+        </p:nvSpPr>
+        <p:spPr>
+          <a:xfrm>
+            <a:off x="8156448" y="3886200"/>
+            <a:ext cx="54864" cy="1828800"/>
+          </a:xfrm>
+          <a:prstGeom prst="rect">
+            <a:avLst/>
+          </a:prstGeom>
+          <a:solidFill>
+            <a:srgbClr val="BD8C24"/>
+          </a:solidFill>
+          <a:ln/>
+        </p:spPr>
+      </p:sp>
+      <p:sp>
+        <p:nvSpPr>
+          <p:cNvPr id="45" name="Text 43"/>
+          <p:cNvSpPr txBox="1"/>
+          <p:nvPr/>
+        </p:nvSpPr>
+        <p:spPr>
+          <a:xfrm>
+            <a:off x="8385048" y="3886200"/>
+            <a:ext cx="3118104" cy="365760"/>
+          </a:xfrm>
+          <a:prstGeom prst="rect">
+            <a:avLst/>
+          </a:prstGeom>
+          <a:noFill/>
+          <a:ln/>
+        </p:spPr>
+        <p:txBody>
+          <a:bodyPr wrap="square" lIns="0" tIns="0" rIns="0" bIns="0" rtlCol="0" anchor="ctr"/>
+          <a:lstStyle/>
+          <a:p>
+            <a:pPr indent="0" marL="0">
+              <a:buNone/>
+            </a:pPr>
+            <a:r>
+              <a:rPr lang="en-US" sz="1350" b="1" dirty="0">
+                <a:solidFill>
+                  <a:srgbClr val="12182A"/>
+                </a:solidFill>
+                <a:latin typeface="Cambria" pitchFamily="34" charset="0"/>
+                <a:ea typeface="Cambria" pitchFamily="34" charset="-122"/>
+                <a:cs typeface="Cambria" pitchFamily="34" charset="-120"/>
+              </a:rPr>
+              <a:t>One gate for side effects</a:t>
+            </a:r>
+            <a:endParaRPr lang="en-US" sz="1350" dirty="0"/>
+          </a:p>
+        </p:txBody>
+      </p:sp>
+      <p:sp>
+        <p:nvSpPr>
+          <p:cNvPr id="46" name="Text 44"/>
+          <p:cNvSpPr txBox="1"/>
+          <p:nvPr/>
+        </p:nvSpPr>
+        <p:spPr>
+          <a:xfrm>
+            <a:off x="8385048" y="4297680"/>
+            <a:ext cx="3118104" cy="1417320"/>
+          </a:xfrm>
+          <a:prstGeom prst="rect">
+            <a:avLst/>
+          </a:prstGeom>
+          <a:noFill/>
+          <a:ln/>
+        </p:spPr>
+        <p:txBody>
+          <a:bodyPr wrap="square" lIns="0" tIns="0" rIns="0" bIns="0" rtlCol="0" anchor="t"/>
+          <a:lstStyle/>
+          <a:p>
+            <a:pPr indent="0" marL="0">
+              <a:lnSpc>
+                <a:spcPct val="112000"/>
+              </a:lnSpc>
+              <a:buNone/>
+            </a:pPr>
+            <a:r>
+              <a:rPr lang="en-US" sz="1100" dirty="0">
+                <a:solidFill>
+                  <a:srgbClr val="6B7A90"/>
+                </a:solidFill>
+                <a:latin typeface="Calibri" pitchFamily="34" charset="0"/>
+                <a:ea typeface="Calibri" pitchFamily="34" charset="-122"/>
+                <a:cs typeface="Calibri" pitchFamily="34" charset="-120"/>
+              </a:rPr>
+              <a:t>Outward (network, other repos, git push) and destructive (rm, reset) steps need a real answer: a TTY y/N, an explicit pre-approval, or a dry run that only says what it would ask. An interrupted outward act is gated again, not replayed.</a:t>
+            </a:r>
+            <a:endParaRPr lang="en-US" sz="1100" dirty="0"/>
+          </a:p>
+        </p:txBody>
+      </p:sp>
+      <p:sp>
+        <p:nvSpPr>
+          <p:cNvPr id="47" name="Text 45"/>
+          <p:cNvSpPr txBox="1"/>
+          <p:nvPr/>
+        </p:nvSpPr>
+        <p:spPr>
+          <a:xfrm>
+            <a:off x="640080" y="5806440"/>
+            <a:ext cx="10908792" cy="457200"/>
+          </a:xfrm>
+          <a:prstGeom prst="rect">
+            <a:avLst/>
+          </a:prstGeom>
+          <a:noFill/>
+          <a:ln/>
+        </p:spPr>
+        <p:txBody>
+          <a:bodyPr wrap="square" lIns="0" tIns="0" rIns="0" bIns="0" rtlCol="0" anchor="t"/>
+          <a:lstStyle/>
+          <a:p>
+            <a:pPr indent="0" marL="0">
+              <a:buNone/>
+            </a:pPr>
+            <a:r>
+              <a:rPr lang="en-US" sz="1150" b="1" dirty="0">
+                <a:solidFill>
+                  <a:srgbClr val="12182A"/>
+                </a:solidFill>
+                <a:latin typeface="Calibri" pitchFamily="34" charset="0"/>
+                <a:ea typeface="Calibri" pitchFamily="34" charset="-122"/>
+                <a:cs typeface="Calibri" pitchFamily="34" charset="-120"/>
+              </a:rPr>
+              <a:t>Tool and protocol, one shape. </a:t>
+            </a:r>
+            <a:pPr indent="0" marL="0">
+              <a:buNone/>
+            </a:pPr>
+            <a:r>
+              <a:rPr lang="en-US" sz="1150" dirty="0">
+                <a:solidFill>
+                  <a:srgbClr val="2695BD"/>
+                </a:solidFill>
+                <a:latin typeface="Courier New" pitchFamily="34" charset="0"/>
+                <a:ea typeface="Courier New" pitchFamily="34" charset="-122"/>
+                <a:cs typeface="Courier New" pitchFamily="34" charset="-120"/>
+              </a:rPr>
+              <a:t>loop.js run &lt;plan&gt; --as &lt;body&gt;</a:t>
+            </a:r>
+            <a:pPr indent="0" marL="0">
+              <a:buNone/>
+            </a:pPr>
+            <a:r>
+              <a:rPr lang="en-US" sz="1150" dirty="0">
+                <a:solidFill>
+                  <a:srgbClr val="6B7A90"/>
+                </a:solidFill>
+                <a:latin typeface="Calibri" pitchFamily="34" charset="0"/>
+                <a:ea typeface="Calibri" pitchFamily="34" charset="-122"/>
+                <a:cs typeface="Calibri" pitchFamily="34" charset="-120"/>
+              </a:rPr>
+              <a:t> drives a scripted plan; an LLM-driven body follows the same six beats by hand, and there the gate is the host's own permission prompt — never worked around.</a:t>
+            </a:r>
+            <a:endParaRPr lang="en-US" sz="1150" dirty="0"/>
+          </a:p>
+        </p:txBody>
+      </p:sp>
+      <p:sp>
+        <p:nvSpPr>
+          <p:cNvPr id="48" name="Text 46"/>
+          <p:cNvSpPr txBox="1"/>
+          <p:nvPr/>
+        </p:nvSpPr>
+        <p:spPr>
+          <a:xfrm>
+            <a:off x="457200" y="6400800"/>
+            <a:ext cx="7315200" cy="274320"/>
+          </a:xfrm>
+          <a:prstGeom prst="rect">
+            <a:avLst/>
+          </a:prstGeom>
+          <a:noFill/>
+          <a:ln/>
+        </p:spPr>
+        <p:txBody>
+          <a:bodyPr wrap="square" lIns="0" tIns="0" rIns="0" bIns="0" rtlCol="0" anchor="ctr"/>
+          <a:lstStyle/>
+          <a:p>
+            <a:pPr indent="0" marL="0">
+              <a:buNone/>
+            </a:pPr>
+            <a:r>
+              <a:rPr lang="en-US" sz="900" spc="100" kern="0" dirty="0">
+                <a:solidFill>
+                  <a:srgbClr val="6B7A90"/>
+                </a:solidFill>
+                <a:latin typeface="Calibri" pitchFamily="34" charset="0"/>
+                <a:ea typeface="Calibri" pitchFamily="34" charset="-122"/>
+                <a:cs typeface="Calibri" pitchFamily="34" charset="-120"/>
+              </a:rPr>
+              <a:t>ISEKAI ⋄ A CONVENTION FOR LIVING WORLDS</a:t>
+            </a:r>
+            <a:endParaRPr lang="en-US" sz="900" dirty="0"/>
+          </a:p>
+        </p:txBody>
+      </p:sp>
+      <p:sp>
+        <p:nvSpPr>
+          <p:cNvPr id="49" name="Text 47"/>
+          <p:cNvSpPr txBox="1"/>
+          <p:nvPr/>
+        </p:nvSpPr>
+        <p:spPr>
+          <a:xfrm>
+            <a:off x="11274552" y="6400800"/>
+            <a:ext cx="457200" cy="274320"/>
+          </a:xfrm>
+          <a:prstGeom prst="rect">
+            <a:avLst/>
+          </a:prstGeom>
+          <a:noFill/>
+          <a:ln/>
+        </p:spPr>
+        <p:txBody>
+          <a:bodyPr wrap="square" lIns="0" tIns="0" rIns="0" bIns="0" rtlCol="0" anchor="ctr"/>
+          <a:lstStyle/>
+          <a:p>
+            <a:pPr algn="r" indent="0" marL="0">
+              <a:buNone/>
+            </a:pPr>
+            <a:r>
+              <a:rPr lang="en-US" sz="900" dirty="0">
+                <a:solidFill>
+                  <a:srgbClr val="6B7A90"/>
+                </a:solidFill>
+                <a:latin typeface="Calibri" pitchFamily="34" charset="0"/>
+                <a:ea typeface="Calibri" pitchFamily="34" charset="-122"/>
+                <a:cs typeface="Calibri" pitchFamily="34" charset="-120"/>
+              </a:rPr>
+              <a:t>10</a:t>
+            </a:r>
+            <a:endParaRPr lang="en-US" sz="900" dirty="0"/>
+          </a:p>
+        </p:txBody>
+      </p:sp>
+    </p:spTree>
+  </p:cSld>
+  <p:clrMapOvr>
+    <a:masterClrMapping/>
+  </p:clrMapOvr>
+</p:sld>
+</file>
+
+<file path=ppt/slides/slide11.xml><?xml version="1.0" encoding="utf-8"?>
+<p:sld xmlns:a="http://schemas.openxmlformats.org/drawingml/2006/main" xmlns:r="http://schemas.openxmlformats.org/officeDocument/2006/relationships" xmlns:p="http://schemas.openxmlformats.org/presentationml/2006/main">
+  <p:cSld name="Slide 11">
+    <p:bg>
+      <p:bgPr>
+        <a:solidFill>
+          <a:srgbClr val="070B14"/>
+        </a:solidFill>
+      </p:bgPr>
+    </p:bg>
+    <p:spTree>
+      <p:nvGrpSpPr>
+        <p:cNvPr id="1" name=""/>
+        <p:cNvGrpSpPr/>
+        <p:nvPr/>
+      </p:nvGrpSpPr>
+      <p:grpSpPr>
+        <a:xfrm>
+          <a:off x="0" y="0"/>
+          <a:ext cx="0" cy="0"/>
+          <a:chOff x="0" y="0"/>
+          <a:chExt cx="0" cy="0"/>
+        </a:xfrm>
+      </p:grpSpPr>
+      <p:sp>
+        <p:nvSpPr>
+          <p:cNvPr id="2" name="Text 0"/>
+          <p:cNvSpPr txBox="1"/>
+          <p:nvPr/>
+        </p:nvSpPr>
+        <p:spPr>
+          <a:xfrm>
+            <a:off x="640080" y="502920"/>
+            <a:ext cx="10908792" cy="822960"/>
+          </a:xfrm>
+          <a:prstGeom prst="rect">
+            <a:avLst/>
+          </a:prstGeom>
+          <a:noFill/>
+          <a:ln/>
+        </p:spPr>
+        <p:txBody>
+          <a:bodyPr wrap="square" lIns="0" tIns="0" rIns="0" bIns="0" rtlCol="0" anchor="ctr"/>
+          <a:lstStyle/>
+          <a:p>
+            <a:pPr indent="0" marL="0">
+              <a:buNone/>
+            </a:pPr>
+            <a:r>
+              <a:rPr lang="en-US" sz="3000" b="1" dirty="0">
+                <a:solidFill>
+                  <a:srgbClr val="ECF1FA"/>
+                </a:solidFill>
+                <a:latin typeface="Cambria" pitchFamily="34" charset="0"/>
+                <a:ea typeface="Cambria" pitchFamily="34" charset="-122"/>
+                <a:cs typeface="Cambria" pitchFamily="34" charset="-120"/>
+              </a:rPr>
+              <a:t>The toolbox — a big registry, a small prompt</a:t>
+            </a:r>
+            <a:endParaRPr lang="en-US" sz="3000" dirty="0"/>
+          </a:p>
+        </p:txBody>
+      </p:sp>
+      <p:sp>
+        <p:nvSpPr>
+          <p:cNvPr id="3" name="Text 1"/>
+          <p:cNvSpPr txBox="1"/>
+          <p:nvPr/>
+        </p:nvSpPr>
+        <p:spPr>
+          <a:xfrm>
+            <a:off x="640080" y="1325880"/>
+            <a:ext cx="10908792" cy="548640"/>
+          </a:xfrm>
+          <a:prstGeom prst="rect">
+            <a:avLst/>
+          </a:prstGeom>
+          <a:noFill/>
+          <a:ln/>
+        </p:spPr>
+        <p:txBody>
+          <a:bodyPr wrap="square" lIns="0" tIns="0" rIns="0" bIns="0" rtlCol="0" anchor="ctr"/>
+          <a:lstStyle/>
+          <a:p>
+            <a:pPr indent="0" marL="0">
+              <a:buNone/>
+            </a:pPr>
+            <a:r>
+              <a:rPr lang="en-US" sz="1350" dirty="0">
+                <a:solidFill>
+                  <a:srgbClr val="9FB3CC"/>
+                </a:solidFill>
+                <a:latin typeface="Calibri" pitchFamily="34" charset="0"/>
+                <a:ea typeface="Calibri" pitchFamily="34" charset="-122"/>
+                <a:cs typeface="Calibri" pitchFamily="34" charset="-120"/>
+              </a:rPr>
+              <a:t>Only the tools that fit the turn are injected — as pointers with known costs, never as bodies. The registry may grow without bound; the prompt does not.</a:t>
+            </a:r>
+            <a:endParaRPr lang="en-US" sz="1350" dirty="0"/>
+          </a:p>
+        </p:txBody>
+      </p:sp>
+      <p:sp>
+        <p:nvSpPr>
+          <p:cNvPr id="4" name="Shape 2"/>
+          <p:cNvSpPr/>
+          <p:nvPr/>
+        </p:nvSpPr>
+        <p:spPr>
+          <a:xfrm>
+            <a:off x="640080" y="2057400"/>
+            <a:ext cx="3392424" cy="2788920"/>
+          </a:xfrm>
+          <a:prstGeom prst="roundRect">
+            <a:avLst>
+              <a:gd name="adj" fmla="val 3279"/>
+            </a:avLst>
+          </a:prstGeom>
+          <a:solidFill>
+            <a:srgbClr val="171F30"/>
+          </a:solidFill>
+          <a:ln w="12700">
+            <a:solidFill>
+              <a:srgbClr val="2695BD"/>
+            </a:solidFill>
+            <a:prstDash val="solid"/>
+          </a:ln>
+        </p:spPr>
+      </p:sp>
+      <p:sp>
+        <p:nvSpPr>
+          <p:cNvPr id="5" name="Text 3"/>
+          <p:cNvSpPr txBox="1"/>
+          <p:nvPr/>
+        </p:nvSpPr>
+        <p:spPr>
+          <a:xfrm>
+            <a:off x="914400" y="2258568"/>
+            <a:ext cx="2843784" cy="411480"/>
+          </a:xfrm>
+          <a:prstGeom prst="rect">
+            <a:avLst/>
+          </a:prstGeom>
+          <a:noFill/>
+          <a:ln/>
+        </p:spPr>
+        <p:txBody>
+          <a:bodyPr wrap="square" lIns="0" tIns="0" rIns="0" bIns="0" rtlCol="0" anchor="ctr"/>
+          <a:lstStyle/>
+          <a:p>
+            <a:pPr indent="0" marL="0">
+              <a:buNone/>
+            </a:pPr>
+            <a:r>
+              <a:rPr lang="en-US" sz="1800" b="1" dirty="0">
+                <a:solidFill>
+                  <a:srgbClr val="2695BD"/>
+                </a:solidFill>
+                <a:latin typeface="Cambria" pitchFamily="34" charset="0"/>
+                <a:ea typeface="Cambria" pitchFamily="34" charset="-122"/>
+                <a:cs typeface="Cambria" pitchFamily="34" charset="-120"/>
+              </a:rPr>
+              <a:t>Registry</a:t>
+            </a:r>
+            <a:endParaRPr lang="en-US" sz="1800" dirty="0"/>
+          </a:p>
+        </p:txBody>
+      </p:sp>
+      <p:sp>
+        <p:nvSpPr>
+          <p:cNvPr id="6" name="Text 4"/>
+          <p:cNvSpPr txBox="1"/>
+          <p:nvPr/>
+        </p:nvSpPr>
+        <p:spPr>
+          <a:xfrm>
+            <a:off x="914400" y="2660904"/>
+            <a:ext cx="2843784" cy="274320"/>
+          </a:xfrm>
+          <a:prstGeom prst="rect">
+            <a:avLst/>
+          </a:prstGeom>
+          <a:noFill/>
+          <a:ln/>
+        </p:spPr>
+        <p:txBody>
+          <a:bodyPr wrap="square" lIns="0" tIns="0" rIns="0" bIns="0" rtlCol="0" anchor="ctr"/>
+          <a:lstStyle/>
+          <a:p>
+            <a:pPr indent="0" marL="0">
+              <a:buNone/>
+            </a:pPr>
+            <a:r>
+              <a:rPr lang="en-US" sz="1050" i="1" dirty="0">
+                <a:solidFill>
+                  <a:srgbClr val="9FB3CC"/>
+                </a:solidFill>
+                <a:latin typeface="Calibri" pitchFamily="34" charset="0"/>
+                <a:ea typeface="Calibri" pitchFamily="34" charset="-122"/>
+                <a:cs typeface="Calibri" pitchFamily="34" charset="-120"/>
+              </a:rPr>
+              <a:t>derived, never hand-kept</a:t>
+            </a:r>
+            <a:endParaRPr lang="en-US" sz="1050" dirty="0"/>
+          </a:p>
+        </p:txBody>
+      </p:sp>
+      <p:sp>
+        <p:nvSpPr>
+          <p:cNvPr id="7" name="Text 5"/>
+          <p:cNvSpPr txBox="1"/>
+          <p:nvPr/>
+        </p:nvSpPr>
+        <p:spPr>
+          <a:xfrm>
+            <a:off x="914400" y="3017520"/>
+            <a:ext cx="2843784" cy="1783080"/>
+          </a:xfrm>
+          <a:prstGeom prst="rect">
+            <a:avLst/>
+          </a:prstGeom>
+          <a:noFill/>
+          <a:ln/>
+        </p:spPr>
+        <p:txBody>
+          <a:bodyPr wrap="square" lIns="0" tIns="0" rIns="0" bIns="0" rtlCol="0" anchor="t"/>
+          <a:lstStyle/>
+          <a:p>
+            <a:pPr indent="0" marL="0">
+              <a:lnSpc>
+                <a:spcPct val="112000"/>
+              </a:lnSpc>
+              <a:buNone/>
+            </a:pPr>
+            <a:r>
+              <a:rPr lang="en-US" sz="1150" dirty="0">
+                <a:solidFill>
+                  <a:srgbClr val="ECF1FA"/>
+                </a:solidFill>
+                <a:latin typeface="Calibri" pitchFamily="34" charset="0"/>
+                <a:ea typeface="Calibri" pitchFamily="34" charset="-122"/>
+                <a:cs typeface="Calibri" pitchFamily="34" charset="-120"/>
+              </a:rPr>
+              <a:t>Every Mind, command, world tool, Body and named external — harvested from the world, each entry priced before injection: resident cost (its one-line description) and full cost (its body).</a:t>
+            </a:r>
+            <a:endParaRPr lang="en-US" sz="1150" dirty="0"/>
+          </a:p>
+        </p:txBody>
+      </p:sp>
+      <p:sp>
+        <p:nvSpPr>
+          <p:cNvPr id="8" name="Text 6"/>
+          <p:cNvSpPr txBox="1"/>
+          <p:nvPr/>
+        </p:nvSpPr>
+        <p:spPr>
+          <a:xfrm>
+            <a:off x="4087368" y="3154680"/>
+            <a:ext cx="274320" cy="457200"/>
+          </a:xfrm>
+          <a:prstGeom prst="rect">
+            <a:avLst/>
+          </a:prstGeom>
+          <a:noFill/>
+          <a:ln/>
+        </p:spPr>
+        <p:txBody>
+          <a:bodyPr wrap="square" lIns="0" tIns="0" rIns="0" bIns="0" rtlCol="0" anchor="ctr"/>
+          <a:lstStyle/>
+          <a:p>
+            <a:pPr algn="ctr" indent="0" marL="0">
+              <a:buNone/>
+            </a:pPr>
+            <a:r>
+              <a:rPr lang="en-US" sz="2600" dirty="0">
+                <a:solidFill>
+                  <a:srgbClr val="9FB3CC"/>
+                </a:solidFill>
+                <a:latin typeface="Cambria" pitchFamily="34" charset="0"/>
+                <a:ea typeface="Cambria" pitchFamily="34" charset="-122"/>
+                <a:cs typeface="Cambria" pitchFamily="34" charset="-120"/>
+              </a:rPr>
+              <a:t>›</a:t>
+            </a:r>
+            <a:endParaRPr lang="en-US" sz="2600" dirty="0"/>
+          </a:p>
+        </p:txBody>
+      </p:sp>
+      <p:sp>
+        <p:nvSpPr>
+          <p:cNvPr id="9" name="Shape 7"/>
+          <p:cNvSpPr/>
+          <p:nvPr/>
+        </p:nvSpPr>
+        <p:spPr>
+          <a:xfrm>
+            <a:off x="4398264" y="2057400"/>
+            <a:ext cx="3392424" cy="2788920"/>
+          </a:xfrm>
+          <a:prstGeom prst="roundRect">
+            <a:avLst>
+              <a:gd name="adj" fmla="val 3279"/>
+            </a:avLst>
+          </a:prstGeom>
+          <a:solidFill>
+            <a:srgbClr val="171F30"/>
+          </a:solidFill>
+          <a:ln w="12700">
+            <a:solidFill>
+              <a:srgbClr val="BD8C24"/>
+            </a:solidFill>
+            <a:prstDash val="solid"/>
+          </a:ln>
+        </p:spPr>
+      </p:sp>
+      <p:sp>
+        <p:nvSpPr>
+          <p:cNvPr id="10" name="Text 8"/>
+          <p:cNvSpPr txBox="1"/>
+          <p:nvPr/>
+        </p:nvSpPr>
+        <p:spPr>
+          <a:xfrm>
+            <a:off x="4672584" y="2258568"/>
+            <a:ext cx="2843784" cy="411480"/>
+          </a:xfrm>
+          <a:prstGeom prst="rect">
+            <a:avLst/>
+          </a:prstGeom>
+          <a:noFill/>
+          <a:ln/>
+        </p:spPr>
+        <p:txBody>
+          <a:bodyPr wrap="square" lIns="0" tIns="0" rIns="0" bIns="0" rtlCol="0" anchor="ctr"/>
+          <a:lstStyle/>
+          <a:p>
+            <a:pPr indent="0" marL="0">
+              <a:buNone/>
+            </a:pPr>
+            <a:r>
+              <a:rPr lang="en-US" sz="1800" b="1" dirty="0">
+                <a:solidFill>
+                  <a:srgbClr val="BD8C24"/>
+                </a:solidFill>
+                <a:latin typeface="Cambria" pitchFamily="34" charset="0"/>
+                <a:ea typeface="Cambria" pitchFamily="34" charset="-122"/>
+                <a:cs typeface="Cambria" pitchFamily="34" charset="-120"/>
+              </a:rPr>
+              <a:t>Level 1 — manifest</a:t>
+            </a:r>
+            <a:endParaRPr lang="en-US" sz="1800" dirty="0"/>
+          </a:p>
+        </p:txBody>
+      </p:sp>
+      <p:sp>
+        <p:nvSpPr>
+          <p:cNvPr id="11" name="Text 9"/>
+          <p:cNvSpPr txBox="1"/>
+          <p:nvPr/>
+        </p:nvSpPr>
+        <p:spPr>
+          <a:xfrm>
+            <a:off x="4672584" y="2660904"/>
+            <a:ext cx="2843784" cy="274320"/>
+          </a:xfrm>
+          <a:prstGeom prst="rect">
+            <a:avLst/>
+          </a:prstGeom>
+          <a:noFill/>
+          <a:ln/>
+        </p:spPr>
+        <p:txBody>
+          <a:bodyPr wrap="square" lIns="0" tIns="0" rIns="0" bIns="0" rtlCol="0" anchor="ctr"/>
+          <a:lstStyle/>
+          <a:p>
+            <a:pPr indent="0" marL="0">
+              <a:buNone/>
+            </a:pPr>
+            <a:r>
+              <a:rPr lang="en-US" sz="1050" i="1" dirty="0">
+                <a:solidFill>
+                  <a:srgbClr val="9FB3CC"/>
+                </a:solidFill>
+                <a:latin typeface="Calibri" pitchFamily="34" charset="0"/>
+                <a:ea typeface="Calibri" pitchFamily="34" charset="-122"/>
+                <a:cs typeface="Calibri" pitchFamily="34" charset="-120"/>
+              </a:rPr>
+              <a:t>resident, per turn, budgeted</a:t>
+            </a:r>
+            <a:endParaRPr lang="en-US" sz="1050" dirty="0"/>
+          </a:p>
+        </p:txBody>
+      </p:sp>
+      <p:sp>
+        <p:nvSpPr>
+          <p:cNvPr id="12" name="Text 10"/>
+          <p:cNvSpPr txBox="1"/>
+          <p:nvPr/>
+        </p:nvSpPr>
+        <p:spPr>
+          <a:xfrm>
+            <a:off x="4672584" y="3017520"/>
+            <a:ext cx="2843784" cy="1783080"/>
+          </a:xfrm>
+          <a:prstGeom prst="rect">
+            <a:avLst/>
+          </a:prstGeom>
+          <a:noFill/>
+          <a:ln/>
+        </p:spPr>
+        <p:txBody>
+          <a:bodyPr wrap="square" lIns="0" tIns="0" rIns="0" bIns="0" rtlCol="0" anchor="t"/>
+          <a:lstStyle/>
+          <a:p>
+            <a:pPr indent="0" marL="0">
+              <a:lnSpc>
+                <a:spcPct val="112000"/>
+              </a:lnSpc>
+              <a:buNone/>
+            </a:pPr>
+            <a:r>
+              <a:rPr lang="en-US" sz="1150" dirty="0">
+                <a:solidFill>
+                  <a:srgbClr val="ECF1FA"/>
+                </a:solidFill>
+                <a:latin typeface="Calibri" pitchFamily="34" charset="0"/>
+                <a:ea typeface="Calibri" pitchFamily="34" charset="-122"/>
+                <a:cs typeface="Calibri" pitchFamily="34" charset="-120"/>
+              </a:rPr>
+              <a:t>The turn's ask is ranked against the registry by trigger, meaning and relation; the picks fill a token budget (1,500 by default). What the body receives: names, one-liners, paths, and the cost of level 2 — the way a skill's frontmatter already sits in context.</a:t>
+            </a:r>
+            <a:endParaRPr lang="en-US" sz="1150" dirty="0"/>
+          </a:p>
+        </p:txBody>
+      </p:sp>
+      <p:sp>
+        <p:nvSpPr>
+          <p:cNvPr id="13" name="Text 11"/>
+          <p:cNvSpPr txBox="1"/>
+          <p:nvPr/>
+        </p:nvSpPr>
+        <p:spPr>
+          <a:xfrm>
+            <a:off x="7845552" y="3154680"/>
+            <a:ext cx="274320" cy="457200"/>
+          </a:xfrm>
+          <a:prstGeom prst="rect">
+            <a:avLst/>
+          </a:prstGeom>
+          <a:noFill/>
+          <a:ln/>
+        </p:spPr>
+        <p:txBody>
+          <a:bodyPr wrap="square" lIns="0" tIns="0" rIns="0" bIns="0" rtlCol="0" anchor="ctr"/>
+          <a:lstStyle/>
+          <a:p>
+            <a:pPr algn="ctr" indent="0" marL="0">
+              <a:buNone/>
+            </a:pPr>
+            <a:r>
+              <a:rPr lang="en-US" sz="2600" dirty="0">
+                <a:solidFill>
+                  <a:srgbClr val="9FB3CC"/>
+                </a:solidFill>
+                <a:latin typeface="Cambria" pitchFamily="34" charset="0"/>
+                <a:ea typeface="Cambria" pitchFamily="34" charset="-122"/>
+                <a:cs typeface="Cambria" pitchFamily="34" charset="-120"/>
+              </a:rPr>
+              <a:t>›</a:t>
+            </a:r>
+            <a:endParaRPr lang="en-US" sz="2600" dirty="0"/>
+          </a:p>
+        </p:txBody>
+      </p:sp>
+      <p:sp>
+        <p:nvSpPr>
+          <p:cNvPr id="14" name="Shape 12"/>
+          <p:cNvSpPr/>
+          <p:nvPr/>
+        </p:nvSpPr>
+        <p:spPr>
+          <a:xfrm>
+            <a:off x="8156448" y="2057400"/>
+            <a:ext cx="3392424" cy="2788920"/>
+          </a:xfrm>
+          <a:prstGeom prst="roundRect">
+            <a:avLst>
+              <a:gd name="adj" fmla="val 3279"/>
+            </a:avLst>
+          </a:prstGeom>
+          <a:solidFill>
+            <a:srgbClr val="171F30"/>
+          </a:solidFill>
+          <a:ln w="12700">
+            <a:solidFill>
+              <a:srgbClr val="7C5CD6"/>
+            </a:solidFill>
+            <a:prstDash val="solid"/>
+          </a:ln>
+        </p:spPr>
+      </p:sp>
+      <p:sp>
+        <p:nvSpPr>
+          <p:cNvPr id="15" name="Text 13"/>
+          <p:cNvSpPr txBox="1"/>
+          <p:nvPr/>
+        </p:nvSpPr>
+        <p:spPr>
+          <a:xfrm>
+            <a:off x="8430768" y="2258568"/>
+            <a:ext cx="2843784" cy="411480"/>
+          </a:xfrm>
+          <a:prstGeom prst="rect">
+            <a:avLst/>
+          </a:prstGeom>
+          <a:noFill/>
+          <a:ln/>
+        </p:spPr>
+        <p:txBody>
+          <a:bodyPr wrap="square" lIns="0" tIns="0" rIns="0" bIns="0" rtlCol="0" anchor="ctr"/>
+          <a:lstStyle/>
+          <a:p>
+            <a:pPr indent="0" marL="0">
+              <a:buNone/>
+            </a:pPr>
+            <a:r>
+              <a:rPr lang="en-US" sz="1800" b="1" dirty="0">
+                <a:solidFill>
+                  <a:srgbClr val="7C5CD6"/>
+                </a:solidFill>
+                <a:latin typeface="Cambria" pitchFamily="34" charset="0"/>
+                <a:ea typeface="Cambria" pitchFamily="34" charset="-122"/>
+                <a:cs typeface="Cambria" pitchFamily="34" charset="-120"/>
+              </a:rPr>
+              <a:t>Level 2 — load</a:t>
+            </a:r>
+            <a:endParaRPr lang="en-US" sz="1800" dirty="0"/>
+          </a:p>
+        </p:txBody>
+      </p:sp>
+      <p:sp>
+        <p:nvSpPr>
+          <p:cNvPr id="16" name="Text 14"/>
+          <p:cNvSpPr txBox="1"/>
+          <p:nvPr/>
+        </p:nvSpPr>
+        <p:spPr>
+          <a:xfrm>
+            <a:off x="8430768" y="2660904"/>
+            <a:ext cx="2843784" cy="274320"/>
+          </a:xfrm>
+          <a:prstGeom prst="rect">
+            <a:avLst/>
+          </a:prstGeom>
+          <a:noFill/>
+          <a:ln/>
+        </p:spPr>
+        <p:txBody>
+          <a:bodyPr wrap="square" lIns="0" tIns="0" rIns="0" bIns="0" rtlCol="0" anchor="ctr"/>
+          <a:lstStyle/>
+          <a:p>
+            <a:pPr indent="0" marL="0">
+              <a:buNone/>
+            </a:pPr>
+            <a:r>
+              <a:rPr lang="en-US" sz="1050" i="1" dirty="0">
+                <a:solidFill>
+                  <a:srgbClr val="9FB3CC"/>
+                </a:solidFill>
+                <a:latin typeface="Calibri" pitchFamily="34" charset="0"/>
+                <a:ea typeface="Calibri" pitchFamily="34" charset="-122"/>
+                <a:cs typeface="Calibri" pitchFamily="34" charset="-120"/>
+              </a:rPr>
+              <a:t>on the body's own decision</a:t>
+            </a:r>
+            <a:endParaRPr lang="en-US" sz="1050" dirty="0"/>
+          </a:p>
+        </p:txBody>
+      </p:sp>
+      <p:sp>
+        <p:nvSpPr>
+          <p:cNvPr id="17" name="Text 15"/>
+          <p:cNvSpPr txBox="1"/>
+          <p:nvPr/>
+        </p:nvSpPr>
+        <p:spPr>
+          <a:xfrm>
+            <a:off x="8430768" y="3017520"/>
+            <a:ext cx="2843784" cy="1783080"/>
+          </a:xfrm>
+          <a:prstGeom prst="rect">
+            <a:avLst/>
+          </a:prstGeom>
+          <a:noFill/>
+          <a:ln/>
+        </p:spPr>
+        <p:txBody>
+          <a:bodyPr wrap="square" lIns="0" tIns="0" rIns="0" bIns="0" rtlCol="0" anchor="t"/>
+          <a:lstStyle/>
+          <a:p>
+            <a:pPr indent="0" marL="0">
+              <a:lnSpc>
+                <a:spcPct val="112000"/>
+              </a:lnSpc>
+              <a:buNone/>
+            </a:pPr>
+            <a:r>
+              <a:rPr lang="en-US" sz="1150" dirty="0">
+                <a:solidFill>
+                  <a:srgbClr val="ECF1FA"/>
+                </a:solidFill>
+                <a:latin typeface="Calibri" pitchFamily="34" charset="0"/>
+                <a:ea typeface="Calibri" pitchFamily="34" charset="-122"/>
+                <a:cs typeface="Calibri" pitchFamily="34" charset="-120"/>
+              </a:rPr>
+              <a:t>Only when the body decides to use a tool does it pull the full SKILL.md — whole, or one section by anchor. Every load is journaled, so status reports what was loaded against what was merely offered.</a:t>
+            </a:r>
+            <a:endParaRPr lang="en-US" sz="1150" dirty="0"/>
+          </a:p>
+        </p:txBody>
+      </p:sp>
+      <p:sp>
+        <p:nvSpPr>
+          <p:cNvPr id="18" name="Shape 16"/>
+          <p:cNvSpPr/>
+          <p:nvPr/>
+        </p:nvSpPr>
+        <p:spPr>
+          <a:xfrm>
+            <a:off x="640080" y="5074920"/>
+            <a:ext cx="10908792" cy="1188720"/>
+          </a:xfrm>
+          <a:prstGeom prst="roundRect">
+            <a:avLst>
+              <a:gd name="adj" fmla="val 6154"/>
+            </a:avLst>
+          </a:prstGeom>
+          <a:solidFill>
+            <a:srgbClr val="0D1424"/>
+          </a:solidFill>
+          <a:ln w="12700">
+            <a:solidFill>
+              <a:srgbClr val="22304A"/>
+            </a:solidFill>
+            <a:prstDash val="solid"/>
+          </a:ln>
+        </p:spPr>
+      </p:sp>
+      <p:sp>
+        <p:nvSpPr>
+          <p:cNvPr id="19" name="Text 17"/>
+          <p:cNvSpPr txBox="1"/>
+          <p:nvPr/>
+        </p:nvSpPr>
+        <p:spPr>
+          <a:xfrm>
+            <a:off x="868680" y="5212080"/>
+            <a:ext cx="10451592" cy="960120"/>
+          </a:xfrm>
+          <a:prstGeom prst="rect">
+            <a:avLst/>
+          </a:prstGeom>
+          <a:noFill/>
+          <a:ln/>
+        </p:spPr>
+        <p:txBody>
+          <a:bodyPr wrap="square" lIns="0" tIns="0" rIns="0" bIns="0" rtlCol="0" anchor="t"/>
+          <a:lstStyle/>
+          <a:p>
+            <a:pPr indent="0" marL="0">
+              <a:lnSpc>
+                <a:spcPct val="115000"/>
+              </a:lnSpc>
+              <a:buNone/>
+            </a:pPr>
+            <a:r>
+              <a:rPr lang="en-US" sz="1050" dirty="0">
+                <a:solidFill>
+                  <a:srgbClr val="BD8C24"/>
+                </a:solidFill>
+                <a:latin typeface="Courier New" pitchFamily="34" charset="0"/>
+                <a:ea typeface="Courier New" pitchFamily="34" charset="-122"/>
+                <a:cs typeface="Courier New" pitchFamily="34" charset="-120"/>
+              </a:rPr>
+              <a:t>@TOOLS as=slime-auth k=2 cost=203/1500 — level 2 on decision only: toolbox.js load &lt;name&gt; [--sec N]</a:t>
+            </a:r>
+            <a:endParaRPr lang="en-US" sz="1050" dirty="0"/>
+          </a:p>
+          <a:p>
+            <a:pPr indent="0" marL="0">
+              <a:lnSpc>
+                <a:spcPct val="115000"/>
+              </a:lnSpc>
+              <a:buNone/>
+            </a:pPr>
+            <a:r>
+              <a:rPr lang="en-US" sz="1050" dirty="0">
+                <a:solidFill>
+                  <a:srgbClr val="ECF1FA"/>
+                </a:solidFill>
+                <a:latin typeface="Courier New" pitchFamily="34" charset="0"/>
+                <a:ea typeface="Courier New" pitchFamily="34" charset="-122"/>
+                <a:cs typeface="Courier New" pitchFamily="34" charset="-120"/>
+              </a:rPr>
+              <a:t>@T mind tdd — .opencode/skills/tdd/SKILL.md — 95tok (load≈842) — trigger “test”</a:t>
+            </a:r>
+            <a:endParaRPr lang="en-US" sz="1050" dirty="0"/>
+          </a:p>
+          <a:p>
+            <a:pPr indent="0" marL="0">
+              <a:lnSpc>
+                <a:spcPct val="115000"/>
+              </a:lnSpc>
+              <a:buNone/>
+            </a:pPr>
+            <a:r>
+              <a:rPr lang="en-US" sz="1050" dirty="0">
+                <a:solidFill>
+                  <a:srgbClr val="ECF1FA"/>
+                </a:solidFill>
+                <a:latin typeface="Courier New" pitchFamily="34" charset="0"/>
+                <a:ea typeface="Courier New" pitchFamily="34" charset="-122"/>
+                <a:cs typeface="Courier New" pitchFamily="34" charset="-120"/>
+              </a:rPr>
+              <a:t>@T mind code-review — .opencode/skills/code-review/SKILL.md — 108tok (load≈1648) — meaning 0.42</a:t>
+            </a:r>
+            <a:endParaRPr lang="en-US" sz="1050" dirty="0"/>
+          </a:p>
+        </p:txBody>
+      </p:sp>
+      <p:sp>
+        <p:nvSpPr>
+          <p:cNvPr id="20" name="Text 18"/>
+          <p:cNvSpPr txBox="1"/>
+          <p:nvPr/>
+        </p:nvSpPr>
+        <p:spPr>
+          <a:xfrm>
+            <a:off x="457200" y="6400800"/>
+            <a:ext cx="7315200" cy="274320"/>
+          </a:xfrm>
+          <a:prstGeom prst="rect">
+            <a:avLst/>
+          </a:prstGeom>
+          <a:noFill/>
+          <a:ln/>
+        </p:spPr>
+        <p:txBody>
+          <a:bodyPr wrap="square" lIns="0" tIns="0" rIns="0" bIns="0" rtlCol="0" anchor="ctr"/>
+          <a:lstStyle/>
+          <a:p>
+            <a:pPr indent="0" marL="0">
+              <a:buNone/>
+            </a:pPr>
+            <a:r>
+              <a:rPr lang="en-US" sz="900" spc="100" kern="0" dirty="0">
+                <a:solidFill>
+                  <a:srgbClr val="9FB3CC"/>
+                </a:solidFill>
+                <a:latin typeface="Calibri" pitchFamily="34" charset="0"/>
+                <a:ea typeface="Calibri" pitchFamily="34" charset="-122"/>
+                <a:cs typeface="Calibri" pitchFamily="34" charset="-120"/>
+              </a:rPr>
+              <a:t>ISEKAI ⋄ A CONVENTION FOR LIVING WORLDS</a:t>
+            </a:r>
+            <a:endParaRPr lang="en-US" sz="900" dirty="0"/>
+          </a:p>
+        </p:txBody>
+      </p:sp>
+      <p:sp>
+        <p:nvSpPr>
+          <p:cNvPr id="21" name="Text 19"/>
+          <p:cNvSpPr txBox="1"/>
+          <p:nvPr/>
+        </p:nvSpPr>
+        <p:spPr>
+          <a:xfrm>
+            <a:off x="11274552" y="6400800"/>
+            <a:ext cx="457200" cy="274320"/>
+          </a:xfrm>
+          <a:prstGeom prst="rect">
+            <a:avLst/>
+          </a:prstGeom>
+          <a:noFill/>
+          <a:ln/>
+        </p:spPr>
+        <p:txBody>
+          <a:bodyPr wrap="square" lIns="0" tIns="0" rIns="0" bIns="0" rtlCol="0" anchor="ctr"/>
+          <a:lstStyle/>
+          <a:p>
+            <a:pPr algn="r" indent="0" marL="0">
+              <a:buNone/>
+            </a:pPr>
+            <a:r>
+              <a:rPr lang="en-US" sz="900" dirty="0">
+                <a:solidFill>
+                  <a:srgbClr val="9FB3CC"/>
+                </a:solidFill>
+                <a:latin typeface="Calibri" pitchFamily="34" charset="0"/>
+                <a:ea typeface="Calibri" pitchFamily="34" charset="-122"/>
+                <a:cs typeface="Calibri" pitchFamily="34" charset="-120"/>
+              </a:rPr>
+              <a:t>11</a:t>
+            </a:r>
+            <a:endParaRPr lang="en-US" sz="900" dirty="0"/>
+          </a:p>
+        </p:txBody>
+      </p:sp>
+    </p:spTree>
+  </p:cSld>
+  <p:clrMapOvr>
+    <a:masterClrMapping/>
+  </p:clrMapOvr>
+</p:sld>
+</file>
+
+<file path=ppt/slides/slide12.xml><?xml version="1.0" encoding="utf-8"?>
+<p:sld xmlns:a="http://schemas.openxmlformats.org/drawingml/2006/main" xmlns:r="http://schemas.openxmlformats.org/officeDocument/2006/relationships" xmlns:p="http://schemas.openxmlformats.org/presentationml/2006/main">
+  <p:cSld name="Slide 12">
+    <p:spTree>
+      <p:nvGrpSpPr>
+        <p:cNvPr id="1" name=""/>
+        <p:cNvGrpSpPr/>
+        <p:nvPr/>
+      </p:nvGrpSpPr>
+      <p:grpSpPr>
+        <a:xfrm>
+          <a:off x="0" y="0"/>
+          <a:ext cx="0" cy="0"/>
+          <a:chOff x="0" y="0"/>
+          <a:chExt cx="0" cy="0"/>
+        </a:xfrm>
+      </p:grpSpPr>
+      <p:sp>
+        <p:nvSpPr>
+          <p:cNvPr id="2" name="Text 0"/>
+          <p:cNvSpPr txBox="1"/>
+          <p:nvPr/>
+        </p:nvSpPr>
+        <p:spPr>
+          <a:xfrm>
+            <a:off x="640080" y="502920"/>
+            <a:ext cx="10908792" cy="822960"/>
+          </a:xfrm>
+          <a:prstGeom prst="rect">
+            <a:avLst/>
+          </a:prstGeom>
+          <a:noFill/>
+          <a:ln/>
+        </p:spPr>
+        <p:txBody>
+          <a:bodyPr wrap="square" lIns="0" tIns="0" rIns="0" bIns="0" rtlCol="0" anchor="ctr"/>
+          <a:lstStyle/>
+          <a:p>
+            <a:pPr indent="0" marL="0">
+              <a:buNone/>
+            </a:pPr>
+            <a:r>
+              <a:rPr lang="en-US" sz="3000" b="1" dirty="0">
+                <a:solidFill>
+                  <a:srgbClr val="12182A"/>
+                </a:solidFill>
+                <a:latin typeface="Cambria" pitchFamily="34" charset="0"/>
+                <a:ea typeface="Cambria" pitchFamily="34" charset="-122"/>
+                <a:cs typeface="Cambria" pitchFamily="34" charset="-120"/>
+              </a:rPr>
+              <a:t>Four commands, native to OpenCode</a:t>
+            </a:r>
+            <a:endParaRPr lang="en-US" sz="3000" dirty="0"/>
+          </a:p>
+        </p:txBody>
+      </p:sp>
+      <p:sp>
+        <p:nvSpPr>
+          <p:cNvPr id="3" name="Shape 1"/>
+          <p:cNvSpPr/>
+          <p:nvPr/>
+        </p:nvSpPr>
+        <p:spPr>
+          <a:xfrm>
+            <a:off x="640080" y="1783080"/>
+            <a:ext cx="5225796" cy="1737360"/>
+          </a:xfrm>
+          <a:prstGeom prst="roundRect">
+            <a:avLst>
+              <a:gd name="adj" fmla="val 5263"/>
+            </a:avLst>
+          </a:prstGeom>
+          <a:solidFill>
+            <a:srgbClr val="FFFFFF"/>
+          </a:solidFill>
+          <a:ln w="12700">
+            <a:solidFill>
+              <a:srgbClr val="E3E8F0"/>
+            </a:solidFill>
+            <a:prstDash val="solid"/>
+          </a:ln>
+        </p:spPr>
+      </p:sp>
+      <p:sp>
+        <p:nvSpPr>
+          <p:cNvPr id="4" name="Text 2"/>
+          <p:cNvSpPr txBox="1"/>
+          <p:nvPr/>
+        </p:nvSpPr>
+        <p:spPr>
+          <a:xfrm>
+            <a:off x="914400" y="1984248"/>
+            <a:ext cx="4677156" cy="457200"/>
+          </a:xfrm>
+          <a:prstGeom prst="rect">
+            <a:avLst/>
+          </a:prstGeom>
+          <a:noFill/>
+          <a:ln/>
+        </p:spPr>
+        <p:txBody>
+          <a:bodyPr wrap="square" lIns="0" tIns="0" rIns="0" bIns="0" rtlCol="0" anchor="ctr"/>
+          <a:lstStyle/>
+          <a:p>
+            <a:pPr indent="0" marL="0">
+              <a:buNone/>
+            </a:pPr>
+            <a:r>
+              <a:rPr lang="en-US" sz="1900" b="1" dirty="0">
+                <a:solidFill>
+                  <a:srgbClr val="2695BD"/>
+                </a:solidFill>
+                <a:latin typeface="Courier New" pitchFamily="34" charset="0"/>
+                <a:ea typeface="Courier New" pitchFamily="34" charset="-122"/>
+                <a:cs typeface="Courier New" pitchFamily="34" charset="-120"/>
+              </a:rPr>
+              <a:t>/isekai</a:t>
+            </a:r>
+            <a:endParaRPr lang="en-US" sz="1900" dirty="0"/>
+          </a:p>
+        </p:txBody>
+      </p:sp>
+      <p:sp>
+        <p:nvSpPr>
+          <p:cNvPr id="5" name="Text 3"/>
+          <p:cNvSpPr txBox="1"/>
+          <p:nvPr/>
+        </p:nvSpPr>
+        <p:spPr>
+          <a:xfrm>
+            <a:off x="914400" y="2496312"/>
+            <a:ext cx="4677156" cy="914400"/>
+          </a:xfrm>
+          <a:prstGeom prst="rect">
+            <a:avLst/>
+          </a:prstGeom>
+          <a:noFill/>
+          <a:ln/>
+        </p:spPr>
+        <p:txBody>
+          <a:bodyPr wrap="square" lIns="0" tIns="0" rIns="0" bIns="0" rtlCol="0" anchor="ctr"/>
+          <a:lstStyle/>
+          <a:p>
+            <a:pPr indent="0" marL="0">
+              <a:lnSpc>
+                <a:spcPct val="115000"/>
+              </a:lnSpc>
+              <a:buNone/>
+            </a:pPr>
+            <a:r>
+              <a:rPr lang="en-US" sz="1150" dirty="0">
+                <a:solidFill>
+                  <a:srgbClr val="6B7A90"/>
+                </a:solidFill>
+                <a:latin typeface="Calibri" pitchFamily="34" charset="0"/>
+                <a:ea typeface="Calibri" pitchFamily="34" charset="-122"/>
+                <a:cs typeface="Calibri" pitchFamily="34" charset="-120"/>
+              </a:rPr>
+              <a:t>Reincarnates a directory: writes the law, the chronicle, the portraits — then, on a fresh founding, survey-populates it in the same pass.</a:t>
+            </a:r>
+            <a:endParaRPr lang="en-US" sz="1150" dirty="0"/>
+          </a:p>
+        </p:txBody>
+      </p:sp>
+      <p:sp>
+        <p:nvSpPr>
+          <p:cNvPr id="6" name="Shape 4"/>
+          <p:cNvSpPr/>
+          <p:nvPr/>
+        </p:nvSpPr>
+        <p:spPr>
+          <a:xfrm>
+            <a:off x="6323076" y="1783080"/>
+            <a:ext cx="5225796" cy="1737360"/>
+          </a:xfrm>
+          <a:prstGeom prst="roundRect">
+            <a:avLst>
+              <a:gd name="adj" fmla="val 5263"/>
+            </a:avLst>
+          </a:prstGeom>
+          <a:solidFill>
+            <a:srgbClr val="FFFFFF"/>
+          </a:solidFill>
+          <a:ln w="12700">
+            <a:solidFill>
+              <a:srgbClr val="E3E8F0"/>
+            </a:solidFill>
+            <a:prstDash val="solid"/>
+          </a:ln>
+        </p:spPr>
+      </p:sp>
+      <p:sp>
+        <p:nvSpPr>
+          <p:cNvPr id="7" name="Text 5"/>
+          <p:cNvSpPr txBox="1"/>
+          <p:nvPr/>
+        </p:nvSpPr>
+        <p:spPr>
+          <a:xfrm>
+            <a:off x="6597396" y="1984248"/>
+            <a:ext cx="4677156" cy="457200"/>
+          </a:xfrm>
+          <a:prstGeom prst="rect">
+            <a:avLst/>
+          </a:prstGeom>
+          <a:noFill/>
+          <a:ln/>
+        </p:spPr>
+        <p:txBody>
+          <a:bodyPr wrap="square" lIns="0" tIns="0" rIns="0" bIns="0" rtlCol="0" anchor="ctr"/>
+          <a:lstStyle/>
+          <a:p>
+            <a:pPr indent="0" marL="0">
+              <a:buNone/>
+            </a:pPr>
+            <a:r>
+              <a:rPr lang="en-US" sz="1900" b="1" dirty="0">
+                <a:solidFill>
+                  <a:srgbClr val="7C5CD6"/>
+                </a:solidFill>
+                <a:latin typeface="Courier New" pitchFamily="34" charset="0"/>
+                <a:ea typeface="Courier New" pitchFamily="34" charset="-122"/>
+                <a:cs typeface="Courier New" pitchFamily="34" charset="-120"/>
+              </a:rPr>
+              <a:t>/genesis</a:t>
+            </a:r>
+            <a:endParaRPr lang="en-US" sz="1900" dirty="0"/>
+          </a:p>
+        </p:txBody>
+      </p:sp>
+      <p:sp>
+        <p:nvSpPr>
+          <p:cNvPr id="8" name="Text 6"/>
+          <p:cNvSpPr txBox="1"/>
+          <p:nvPr/>
+        </p:nvSpPr>
+        <p:spPr>
+          <a:xfrm>
+            <a:off x="6597396" y="2496312"/>
+            <a:ext cx="4677156" cy="914400"/>
+          </a:xfrm>
+          <a:prstGeom prst="rect">
+            <a:avLst/>
+          </a:prstGeom>
+          <a:noFill/>
+          <a:ln/>
+        </p:spPr>
+        <p:txBody>
+          <a:bodyPr wrap="square" lIns="0" tIns="0" rIns="0" bIns="0" rtlCol="0" anchor="ctr"/>
+          <a:lstStyle/>
+          <a:p>
+            <a:pPr indent="0" marL="0">
+              <a:lnSpc>
+                <a:spcPct val="115000"/>
+              </a:lnSpc>
+              <a:buNone/>
+            </a:pPr>
+            <a:r>
+              <a:rPr lang="en-US" sz="1150" dirty="0">
+                <a:solidFill>
+                  <a:srgbClr val="6B7A90"/>
+                </a:solidFill>
+                <a:latin typeface="Calibri" pitchFamily="34" charset="0"/>
+                <a:ea typeface="Calibri" pitchFamily="34" charset="-122"/>
+                <a:cs typeface="Calibri" pitchFamily="34" charset="-120"/>
+              </a:rPr>
+              <a:t>Scans the code and decides, itself, which Elves, Orcs and Slimes it needs, then births them. Offer-first, never silent.</a:t>
+            </a:r>
+            <a:endParaRPr lang="en-US" sz="1150" dirty="0"/>
+          </a:p>
+        </p:txBody>
+      </p:sp>
+      <p:sp>
+        <p:nvSpPr>
+          <p:cNvPr id="9" name="Shape 7"/>
+          <p:cNvSpPr/>
+          <p:nvPr/>
+        </p:nvSpPr>
+        <p:spPr>
+          <a:xfrm>
+            <a:off x="640080" y="3749040"/>
+            <a:ext cx="5225796" cy="1737360"/>
+          </a:xfrm>
+          <a:prstGeom prst="roundRect">
+            <a:avLst>
+              <a:gd name="adj" fmla="val 5263"/>
+            </a:avLst>
+          </a:prstGeom>
+          <a:solidFill>
+            <a:srgbClr val="FFFFFF"/>
+          </a:solidFill>
+          <a:ln w="12700">
+            <a:solidFill>
+              <a:srgbClr val="E3E8F0"/>
+            </a:solidFill>
+            <a:prstDash val="solid"/>
+          </a:ln>
+        </p:spPr>
+      </p:sp>
+      <p:sp>
+        <p:nvSpPr>
+          <p:cNvPr id="10" name="Text 8"/>
+          <p:cNvSpPr txBox="1"/>
+          <p:nvPr/>
+        </p:nvSpPr>
+        <p:spPr>
+          <a:xfrm>
+            <a:off x="914400" y="3950208"/>
+            <a:ext cx="4677156" cy="457200"/>
+          </a:xfrm>
+          <a:prstGeom prst="rect">
+            <a:avLst/>
+          </a:prstGeom>
+          <a:noFill/>
+          <a:ln/>
+        </p:spPr>
+        <p:txBody>
+          <a:bodyPr wrap="square" lIns="0" tIns="0" rIns="0" bIns="0" rtlCol="0" anchor="ctr"/>
+          <a:lstStyle/>
+          <a:p>
+            <a:pPr indent="0" marL="0">
+              <a:buNone/>
+            </a:pPr>
+            <a:r>
+              <a:rPr lang="en-US" sz="1900" b="1" dirty="0">
+                <a:solidFill>
+                  <a:srgbClr val="BD8C24"/>
+                </a:solidFill>
+                <a:latin typeface="Courier New" pitchFamily="34" charset="0"/>
+                <a:ea typeface="Courier New" pitchFamily="34" charset="-122"/>
+                <a:cs typeface="Courier New" pitchFamily="34" charset="-120"/>
+              </a:rPr>
+              <a:t>/don</a:t>
+            </a:r>
+            <a:endParaRPr lang="en-US" sz="1900" dirty="0"/>
+          </a:p>
+        </p:txBody>
+      </p:sp>
+      <p:sp>
+        <p:nvSpPr>
+          <p:cNvPr id="11" name="Text 9"/>
+          <p:cNvSpPr txBox="1"/>
+          <p:nvPr/>
+        </p:nvSpPr>
+        <p:spPr>
+          <a:xfrm>
+            <a:off x="914400" y="4462272"/>
+            <a:ext cx="4677156" cy="914400"/>
+          </a:xfrm>
+          <a:prstGeom prst="rect">
+            <a:avLst/>
+          </a:prstGeom>
+          <a:noFill/>
+          <a:ln/>
+        </p:spPr>
+        <p:txBody>
+          <a:bodyPr wrap="square" lIns="0" tIns="0" rIns="0" bIns="0" rtlCol="0" anchor="ctr"/>
+          <a:lstStyle/>
+          <a:p>
+            <a:pPr indent="0" marL="0">
+              <a:lnSpc>
+                <a:spcPct val="115000"/>
+              </a:lnSpc>
+              <a:buNone/>
+            </a:pPr>
+            <a:r>
+              <a:rPr lang="en-US" sz="1150" dirty="0">
+                <a:solidFill>
+                  <a:srgbClr val="6B7A90"/>
+                </a:solidFill>
+                <a:latin typeface="Calibri" pitchFamily="34" charset="0"/>
+                <a:ea typeface="Calibri" pitchFamily="34" charset="-122"/>
+                <a:cs typeface="Calibri" pitchFamily="34" charset="-120"/>
+              </a:rPr>
+              <a:t>Brings a Mind across from another ecosystem's skill format into this one — a bridge, not a native OpenCode need.</a:t>
+            </a:r>
+            <a:endParaRPr lang="en-US" sz="1150" dirty="0"/>
+          </a:p>
+        </p:txBody>
+      </p:sp>
+      <p:sp>
+        <p:nvSpPr>
+          <p:cNvPr id="12" name="Shape 10"/>
+          <p:cNvSpPr/>
+          <p:nvPr/>
+        </p:nvSpPr>
+        <p:spPr>
+          <a:xfrm>
+            <a:off x="6323076" y="3749040"/>
+            <a:ext cx="5225796" cy="1737360"/>
+          </a:xfrm>
+          <a:prstGeom prst="roundRect">
+            <a:avLst>
+              <a:gd name="adj" fmla="val 5263"/>
+            </a:avLst>
+          </a:prstGeom>
+          <a:solidFill>
+            <a:srgbClr val="FFFFFF"/>
+          </a:solidFill>
+          <a:ln w="12700">
+            <a:solidFill>
+              <a:srgbClr val="E3E8F0"/>
+            </a:solidFill>
+            <a:prstDash val="solid"/>
+          </a:ln>
+        </p:spPr>
+      </p:sp>
+      <p:sp>
+        <p:nvSpPr>
+          <p:cNvPr id="13" name="Text 11"/>
+          <p:cNvSpPr txBox="1"/>
+          <p:nvPr/>
+        </p:nvSpPr>
+        <p:spPr>
+          <a:xfrm>
+            <a:off x="6597396" y="3950208"/>
+            <a:ext cx="4677156" cy="457200"/>
+          </a:xfrm>
+          <a:prstGeom prst="rect">
+            <a:avLst/>
+          </a:prstGeom>
+          <a:noFill/>
+          <a:ln/>
+        </p:spPr>
+        <p:txBody>
+          <a:bodyPr wrap="square" lIns="0" tIns="0" rIns="0" bIns="0" rtlCol="0" anchor="ctr"/>
+          <a:lstStyle/>
+          <a:p>
+            <a:pPr indent="0" marL="0">
+              <a:buNone/>
+            </a:pPr>
+            <a:r>
+              <a:rPr lang="en-US" sz="1900" b="1" dirty="0">
+                <a:solidFill>
+                  <a:srgbClr val="8A6BD6"/>
+                </a:solidFill>
+                <a:latin typeface="Courier New" pitchFamily="34" charset="0"/>
+                <a:ea typeface="Courier New" pitchFamily="34" charset="-122"/>
+                <a:cs typeface="Courier New" pitchFamily="34" charset="-120"/>
+              </a:rPr>
+              <a:t>/mint</a:t>
+            </a:r>
+            <a:endParaRPr lang="en-US" sz="1900" dirty="0"/>
+          </a:p>
+        </p:txBody>
+      </p:sp>
+      <p:sp>
+        <p:nvSpPr>
+          <p:cNvPr id="14" name="Text 12"/>
+          <p:cNvSpPr txBox="1"/>
+          <p:nvPr/>
+        </p:nvSpPr>
+        <p:spPr>
+          <a:xfrm>
+            <a:off x="6597396" y="4462272"/>
+            <a:ext cx="4677156" cy="914400"/>
+          </a:xfrm>
+          <a:prstGeom prst="rect">
+            <a:avLst/>
+          </a:prstGeom>
+          <a:noFill/>
+          <a:ln/>
+        </p:spPr>
+        <p:txBody>
+          <a:bodyPr wrap="square" lIns="0" tIns="0" rIns="0" bIns="0" rtlCol="0" anchor="ctr"/>
+          <a:lstStyle/>
+          <a:p>
+            <a:pPr indent="0" marL="0">
+              <a:lnSpc>
+                <a:spcPct val="115000"/>
+              </a:lnSpc>
+              <a:buNone/>
+            </a:pPr>
+            <a:r>
+              <a:rPr lang="en-US" sz="1150" dirty="0">
+                <a:solidFill>
+                  <a:srgbClr val="6B7A90"/>
+                </a:solidFill>
+                <a:latin typeface="Calibri" pitchFamily="34" charset="0"/>
+                <a:ea typeface="Calibri" pitchFamily="34" charset="-122"/>
+                <a:cs typeface="Calibri" pitchFamily="34" charset="-120"/>
+              </a:rPr>
+              <a:t>Brings a Body across the same way — names it on the way in, never mints one unnamed.</a:t>
+            </a:r>
+            <a:endParaRPr lang="en-US" sz="1150" dirty="0"/>
+          </a:p>
+        </p:txBody>
+      </p:sp>
+      <p:sp>
+        <p:nvSpPr>
+          <p:cNvPr id="15" name="Text 13"/>
+          <p:cNvSpPr txBox="1"/>
+          <p:nvPr/>
+        </p:nvSpPr>
+        <p:spPr>
+          <a:xfrm>
+            <a:off x="457200" y="6400800"/>
+            <a:ext cx="7315200" cy="274320"/>
+          </a:xfrm>
+          <a:prstGeom prst="rect">
+            <a:avLst/>
+          </a:prstGeom>
+          <a:noFill/>
+          <a:ln/>
+        </p:spPr>
+        <p:txBody>
+          <a:bodyPr wrap="square" lIns="0" tIns="0" rIns="0" bIns="0" rtlCol="0" anchor="ctr"/>
+          <a:lstStyle/>
+          <a:p>
+            <a:pPr indent="0" marL="0">
+              <a:buNone/>
+            </a:pPr>
+            <a:r>
+              <a:rPr lang="en-US" sz="900" spc="100" kern="0" dirty="0">
+                <a:solidFill>
+                  <a:srgbClr val="6B7A90"/>
+                </a:solidFill>
+                <a:latin typeface="Calibri" pitchFamily="34" charset="0"/>
+                <a:ea typeface="Calibri" pitchFamily="34" charset="-122"/>
+                <a:cs typeface="Calibri" pitchFamily="34" charset="-120"/>
+              </a:rPr>
+              <a:t>ISEKAI ⋄ A CONVENTION FOR LIVING WORLDS</a:t>
+            </a:r>
+            <a:endParaRPr lang="en-US" sz="900" dirty="0"/>
+          </a:p>
+        </p:txBody>
+      </p:sp>
+      <p:sp>
+        <p:nvSpPr>
+          <p:cNvPr id="16" name="Text 14"/>
+          <p:cNvSpPr txBox="1"/>
+          <p:nvPr/>
+        </p:nvSpPr>
+        <p:spPr>
+          <a:xfrm>
+            <a:off x="11274552" y="6400800"/>
+            <a:ext cx="457200" cy="274320"/>
+          </a:xfrm>
+          <a:prstGeom prst="rect">
+            <a:avLst/>
+          </a:prstGeom>
+          <a:noFill/>
+          <a:ln/>
+        </p:spPr>
+        <p:txBody>
+          <a:bodyPr wrap="square" lIns="0" tIns="0" rIns="0" bIns="0" rtlCol="0" anchor="ctr"/>
+          <a:lstStyle/>
+          <a:p>
+            <a:pPr algn="r" indent="0" marL="0">
+              <a:buNone/>
+            </a:pPr>
+            <a:r>
+              <a:rPr lang="en-US" sz="900" dirty="0">
+                <a:solidFill>
+                  <a:srgbClr val="6B7A90"/>
+                </a:solidFill>
+                <a:latin typeface="Calibri" pitchFamily="34" charset="0"/>
+                <a:ea typeface="Calibri" pitchFamily="34" charset="-122"/>
+                <a:cs typeface="Calibri" pitchFamily="34" charset="-120"/>
+              </a:rPr>
+              <a:t>12</a:t>
+            </a:r>
+            <a:endParaRPr lang="en-US" sz="900" dirty="0"/>
+          </a:p>
+        </p:txBody>
+      </p:sp>
+    </p:spTree>
+  </p:cSld>
+  <p:clrMapOvr>
+    <a:masterClrMapping/>
+  </p:clrMapOvr>
+</p:sld>
+</file>
+
+<file path=ppt/slides/slide13.xml><?xml version="1.0" encoding="utf-8"?>
+<p:sld xmlns:a="http://schemas.openxmlformats.org/drawingml/2006/main" xmlns:r="http://schemas.openxmlformats.org/officeDocument/2006/relationships" xmlns:p="http://schemas.openxmlformats.org/presentationml/2006/main">
+  <p:cSld name="Slide 13">
+    <p:bg>
+      <p:bgPr>
+        <a:solidFill>
+          <a:srgbClr val="070B14"/>
+        </a:solidFill>
+      </p:bgPr>
+    </p:bg>
+    <p:spTree>
+      <p:nvGrpSpPr>
+        <p:cNvPr id="1" name=""/>
+        <p:cNvGrpSpPr/>
+        <p:nvPr/>
+      </p:nvGrpSpPr>
+      <p:grpSpPr>
+        <a:xfrm>
+          <a:off x="0" y="0"/>
+          <a:ext cx="0" cy="0"/>
+          <a:chOff x="0" y="0"/>
+          <a:chExt cx="0" cy="0"/>
+        </a:xfrm>
+      </p:grpSpPr>
+      <p:sp>
+        <p:nvSpPr>
+          <p:cNvPr id="2" name="Text 0"/>
+          <p:cNvSpPr txBox="1"/>
+          <p:nvPr/>
+        </p:nvSpPr>
+        <p:spPr>
+          <a:xfrm>
+            <a:off x="640080" y="502920"/>
+            <a:ext cx="10908792" cy="822960"/>
+          </a:xfrm>
+          <a:prstGeom prst="rect">
+            <a:avLst/>
+          </a:prstGeom>
+          <a:noFill/>
+          <a:ln/>
+        </p:spPr>
+        <p:txBody>
+          <a:bodyPr wrap="square" lIns="0" tIns="0" rIns="0" bIns="0" rtlCol="0" anchor="ctr"/>
+          <a:lstStyle/>
+          <a:p>
+            <a:pPr indent="0" marL="0">
+              <a:buNone/>
+            </a:pPr>
+            <a:r>
+              <a:rPr lang="en-US" sz="3000" b="1" dirty="0">
+                <a:solidFill>
+                  <a:srgbClr val="ECF1FA"/>
+                </a:solidFill>
+                <a:latin typeface="Cambria" pitchFamily="34" charset="0"/>
+                <a:ea typeface="Cambria" pitchFamily="34" charset="-122"/>
+                <a:cs typeface="Cambria" pitchFamily="34" charset="-120"/>
+              </a:rPr>
+              <a:t>Nature 9 — the world watches itself</a:t>
+            </a:r>
+            <a:endParaRPr lang="en-US" sz="3000" dirty="0"/>
+          </a:p>
+        </p:txBody>
+      </p:sp>
+      <p:pic>
+        <p:nvPicPr>
+          <p:cNvPr id="3" name="Image 0" descr="/home/monta/convention-jura/presentations/src/icons/eye.png">    </p:cNvPr>
+          <p:cNvPicPr>
+            <a:picLocks noChangeAspect="1"/>
+          </p:cNvPicPr>
+          <p:nvPr/>
+        </p:nvPicPr>
+        <p:blipFill>
+          <a:blip r:embed="rId1"/>
+          <a:stretch>
+            <a:fillRect/>
+          </a:stretch>
+        </p:blipFill>
+        <p:spPr>
+          <a:xfrm>
+            <a:off x="5591556" y="1600200"/>
+            <a:ext cx="1005840" cy="1005840"/>
+          </a:xfrm>
+          <a:prstGeom prst="rect">
+            <a:avLst/>
+          </a:prstGeom>
+        </p:spPr>
+      </p:pic>
+      <p:sp>
+        <p:nvSpPr>
+          <p:cNvPr id="4" name="Text 1"/>
+          <p:cNvSpPr txBox="1"/>
+          <p:nvPr/>
+        </p:nvSpPr>
+        <p:spPr>
+          <a:xfrm>
+            <a:off x="640080" y="2834640"/>
+            <a:ext cx="3636264" cy="1005840"/>
+          </a:xfrm>
+          <a:prstGeom prst="rect">
+            <a:avLst/>
+          </a:prstGeom>
+          <a:noFill/>
+          <a:ln/>
+        </p:spPr>
+        <p:txBody>
+          <a:bodyPr wrap="square" lIns="0" tIns="0" rIns="0" bIns="0" rtlCol="0" anchor="ctr"/>
+          <a:lstStyle/>
+          <a:p>
+            <a:pPr algn="ctr" indent="0" marL="0">
+              <a:buNone/>
+            </a:pPr>
+            <a:r>
+              <a:rPr lang="en-US" sz="6000" b="1" dirty="0">
+                <a:solidFill>
+                  <a:srgbClr val="2695BD"/>
+                </a:solidFill>
+                <a:latin typeface="Cambria" pitchFamily="34" charset="0"/>
+                <a:ea typeface="Cambria" pitchFamily="34" charset="-122"/>
+                <a:cs typeface="Cambria" pitchFamily="34" charset="-120"/>
+              </a:rPr>
+              <a:t>1</a:t>
+            </a:r>
+            <a:endParaRPr lang="en-US" sz="6000" dirty="0"/>
+          </a:p>
+        </p:txBody>
+      </p:sp>
+      <p:sp>
+        <p:nvSpPr>
+          <p:cNvPr id="5" name="Text 2"/>
+          <p:cNvSpPr txBox="1"/>
+          <p:nvPr/>
+        </p:nvSpPr>
+        <p:spPr>
+          <a:xfrm>
+            <a:off x="914400" y="3794760"/>
+            <a:ext cx="3087624" cy="640080"/>
+          </a:xfrm>
+          <a:prstGeom prst="rect">
+            <a:avLst/>
+          </a:prstGeom>
+          <a:noFill/>
+          <a:ln/>
+        </p:spPr>
+        <p:txBody>
+          <a:bodyPr wrap="square" lIns="0" tIns="0" rIns="0" bIns="0" rtlCol="0" anchor="ctr"/>
+          <a:lstStyle/>
+          <a:p>
+            <a:pPr algn="ctr" indent="0" marL="0">
+              <a:buNone/>
+            </a:pPr>
+            <a:r>
+              <a:rPr lang="en-US" sz="1200" dirty="0">
+                <a:solidFill>
+                  <a:srgbClr val="9FB3CC"/>
+                </a:solidFill>
+                <a:latin typeface="Calibri" pitchFamily="34" charset="0"/>
+                <a:ea typeface="Calibri" pitchFamily="34" charset="-122"/>
+                <a:cs typeface="Calibri" pitchFamily="34" charset="-120"/>
+              </a:rPr>
+              <a:t>app for the whole machine</a:t>
+            </a:r>
+            <a:endParaRPr lang="en-US" sz="1200" dirty="0"/>
+          </a:p>
+        </p:txBody>
+      </p:sp>
+      <p:sp>
+        <p:nvSpPr>
+          <p:cNvPr id="6" name="Text 3"/>
+          <p:cNvSpPr txBox="1"/>
+          <p:nvPr/>
+        </p:nvSpPr>
+        <p:spPr>
+          <a:xfrm>
+            <a:off x="4276344" y="2834640"/>
+            <a:ext cx="3636264" cy="1005840"/>
+          </a:xfrm>
+          <a:prstGeom prst="rect">
+            <a:avLst/>
+          </a:prstGeom>
+          <a:noFill/>
+          <a:ln/>
+        </p:spPr>
+        <p:txBody>
+          <a:bodyPr wrap="square" lIns="0" tIns="0" rIns="0" bIns="0" rtlCol="0" anchor="ctr"/>
+          <a:lstStyle/>
+          <a:p>
+            <a:pPr algn="ctr" indent="0" marL="0">
+              <a:buNone/>
+            </a:pPr>
+            <a:r>
+              <a:rPr lang="en-US" sz="6000" b="1" dirty="0">
+                <a:solidFill>
+                  <a:srgbClr val="BD8C24"/>
+                </a:solidFill>
+                <a:latin typeface="Cambria" pitchFamily="34" charset="0"/>
+                <a:ea typeface="Cambria" pitchFamily="34" charset="-122"/>
+                <a:cs typeface="Cambria" pitchFamily="34" charset="-120"/>
+              </a:rPr>
+              <a:t>∞</a:t>
+            </a:r>
+            <a:endParaRPr lang="en-US" sz="6000" dirty="0"/>
+          </a:p>
+        </p:txBody>
+      </p:sp>
+      <p:sp>
+        <p:nvSpPr>
+          <p:cNvPr id="7" name="Text 4"/>
+          <p:cNvSpPr txBox="1"/>
+          <p:nvPr/>
+        </p:nvSpPr>
+        <p:spPr>
+          <a:xfrm>
+            <a:off x="4550664" y="3794760"/>
+            <a:ext cx="3087624" cy="640080"/>
+          </a:xfrm>
+          <a:prstGeom prst="rect">
+            <a:avLst/>
+          </a:prstGeom>
+          <a:noFill/>
+          <a:ln/>
+        </p:spPr>
+        <p:txBody>
+          <a:bodyPr wrap="square" lIns="0" tIns="0" rIns="0" bIns="0" rtlCol="0" anchor="ctr"/>
+          <a:lstStyle/>
+          <a:p>
+            <a:pPr algn="ctr" indent="0" marL="0">
+              <a:buNone/>
+            </a:pPr>
+            <a:r>
+              <a:rPr lang="en-US" sz="1200" dirty="0">
+                <a:solidFill>
+                  <a:srgbClr val="9FB3CC"/>
+                </a:solidFill>
+                <a:latin typeface="Calibri" pitchFamily="34" charset="0"/>
+                <a:ea typeface="Calibri" pitchFamily="34" charset="-122"/>
+                <a:cs typeface="Calibri" pitchFamily="34" charset="-120"/>
+              </a:rPr>
+              <a:t>worlds, each at its own /name/ sub-path</a:t>
+            </a:r>
+            <a:endParaRPr lang="en-US" sz="1200" dirty="0"/>
+          </a:p>
+        </p:txBody>
+      </p:sp>
+      <p:sp>
+        <p:nvSpPr>
+          <p:cNvPr id="8" name="Text 5"/>
+          <p:cNvSpPr txBox="1"/>
+          <p:nvPr/>
+        </p:nvSpPr>
+        <p:spPr>
+          <a:xfrm>
+            <a:off x="7912608" y="2834640"/>
+            <a:ext cx="3636264" cy="1005840"/>
+          </a:xfrm>
+          <a:prstGeom prst="rect">
+            <a:avLst/>
+          </a:prstGeom>
+          <a:noFill/>
+          <a:ln/>
+        </p:spPr>
+        <p:txBody>
+          <a:bodyPr wrap="square" lIns="0" tIns="0" rIns="0" bIns="0" rtlCol="0" anchor="ctr"/>
+          <a:lstStyle/>
+          <a:p>
+            <a:pPr algn="ctr" indent="0" marL="0">
+              <a:buNone/>
+            </a:pPr>
+            <a:r>
+              <a:rPr lang="en-US" sz="6000" b="1" dirty="0">
+                <a:solidFill>
+                  <a:srgbClr val="7C5CD6"/>
+                </a:solidFill>
+                <a:latin typeface="Cambria" pitchFamily="34" charset="0"/>
+                <a:ea typeface="Cambria" pitchFamily="34" charset="-122"/>
+                <a:cs typeface="Cambria" pitchFamily="34" charset="-120"/>
+              </a:rPr>
+              <a:t>1</a:t>
+            </a:r>
+            <a:endParaRPr lang="en-US" sz="6000" dirty="0"/>
+          </a:p>
+        </p:txBody>
+      </p:sp>
+      <p:sp>
+        <p:nvSpPr>
+          <p:cNvPr id="9" name="Text 6"/>
+          <p:cNvSpPr txBox="1"/>
+          <p:nvPr/>
+        </p:nvSpPr>
+        <p:spPr>
+          <a:xfrm>
+            <a:off x="8186928" y="3794760"/>
+            <a:ext cx="3087624" cy="640080"/>
+          </a:xfrm>
+          <a:prstGeom prst="rect">
+            <a:avLst/>
+          </a:prstGeom>
+          <a:noFill/>
+          <a:ln/>
+        </p:spPr>
+        <p:txBody>
+          <a:bodyPr wrap="square" lIns="0" tIns="0" rIns="0" bIns="0" rtlCol="0" anchor="ctr"/>
+          <a:lstStyle/>
+          <a:p>
+            <a:pPr algn="ctr" indent="0" marL="0">
+              <a:buNone/>
+            </a:pPr>
+            <a:r>
+              <a:rPr lang="en-US" sz="1200" dirty="0">
+                <a:solidFill>
+                  <a:srgbClr val="9FB3CC"/>
+                </a:solidFill>
+                <a:latin typeface="Calibri" pitchFamily="34" charset="0"/>
+                <a:ea typeface="Calibri" pitchFamily="34" charset="-122"/>
+                <a:cs typeface="Calibri" pitchFamily="34" charset="-120"/>
+              </a:rPr>
+              <a:t>global dashboard, live</a:t>
+            </a:r>
+            <a:endParaRPr lang="en-US" sz="1200" dirty="0"/>
+          </a:p>
+        </p:txBody>
+      </p:sp>
+      <p:sp>
+        <p:nvSpPr>
+          <p:cNvPr id="10" name="Text 7"/>
+          <p:cNvSpPr txBox="1"/>
+          <p:nvPr/>
+        </p:nvSpPr>
+        <p:spPr>
+          <a:xfrm>
+            <a:off x="1463040" y="4709160"/>
+            <a:ext cx="9262872" cy="777240"/>
+          </a:xfrm>
+          <a:prstGeom prst="rect">
+            <a:avLst/>
+          </a:prstGeom>
+          <a:noFill/>
+          <a:ln/>
+        </p:spPr>
+        <p:txBody>
+          <a:bodyPr wrap="square" lIns="0" tIns="0" rIns="0" bIns="0" rtlCol="0" anchor="ctr"/>
+          <a:lstStyle/>
+          <a:p>
+            <a:pPr algn="ctr" indent="0" marL="0">
+              <a:buNone/>
+            </a:pPr>
+            <a:r>
+              <a:rPr lang="en-US" sz="1250" dirty="0">
+                <a:solidFill>
+                  <a:srgbClr val="ECF1FA"/>
+                </a:solidFill>
+                <a:latin typeface="Calibri" pitchFamily="34" charset="0"/>
+                <a:ea typeface="Calibri" pitchFamily="34" charset="-122"/>
+                <a:cs typeface="Calibri" pitchFamily="34" charset="-120"/>
+              </a:rPr>
+              <a:t>tempest.js — a zero-dependency instrument board. Reads every registered world fresh, per request, and reads real session usage from both OpenCode's own store and Claude Code's transcripts — nothing cached, nothing guessed.</a:t>
+            </a:r>
+            <a:endParaRPr lang="en-US" sz="1250" dirty="0"/>
+          </a:p>
+        </p:txBody>
+      </p:sp>
+      <p:sp>
+        <p:nvSpPr>
+          <p:cNvPr id="11" name="Shape 8"/>
+          <p:cNvSpPr/>
+          <p:nvPr/>
+        </p:nvSpPr>
+        <p:spPr>
+          <a:xfrm>
+            <a:off x="2194560" y="5532120"/>
+            <a:ext cx="7799832" cy="0"/>
+          </a:xfrm>
+          <a:prstGeom prst="line">
+            <a:avLst/>
+          </a:prstGeom>
+          <a:noFill/>
+          <a:ln w="12700">
+            <a:solidFill>
+              <a:srgbClr val="1A2436"/>
+            </a:solidFill>
+            <a:prstDash val="solid"/>
+          </a:ln>
+        </p:spPr>
+      </p:sp>
+      <p:sp>
+        <p:nvSpPr>
+          <p:cNvPr id="12" name="Text 9"/>
+          <p:cNvSpPr txBox="1"/>
+          <p:nvPr/>
+        </p:nvSpPr>
+        <p:spPr>
+          <a:xfrm>
+            <a:off x="640080" y="5669280"/>
+            <a:ext cx="3636264" cy="411480"/>
+          </a:xfrm>
+          <a:prstGeom prst="rect">
+            <a:avLst/>
+          </a:prstGeom>
+          <a:noFill/>
+          <a:ln/>
+        </p:spPr>
+        <p:txBody>
+          <a:bodyPr wrap="square" lIns="0" tIns="0" rIns="0" bIns="0" rtlCol="0" anchor="ctr"/>
+          <a:lstStyle/>
+          <a:p>
+            <a:pPr algn="ctr" indent="0" marL="0">
+              <a:buNone/>
+            </a:pPr>
+            <a:r>
+              <a:rPr lang="en-US" sz="2000" b="1" dirty="0">
+                <a:solidFill>
+                  <a:srgbClr val="2695BD"/>
+                </a:solidFill>
+                <a:latin typeface="Cambria" pitchFamily="34" charset="0"/>
+                <a:ea typeface="Cambria" pitchFamily="34" charset="-122"/>
+                <a:cs typeface="Cambria" pitchFamily="34" charset="-120"/>
+              </a:rPr>
+              <a:t>1.18.31</a:t>
+            </a:r>
+            <a:endParaRPr lang="en-US" sz="2000" dirty="0"/>
+          </a:p>
+        </p:txBody>
+      </p:sp>
+      <p:sp>
+        <p:nvSpPr>
+          <p:cNvPr id="13" name="Text 10"/>
+          <p:cNvSpPr txBox="1"/>
+          <p:nvPr/>
+        </p:nvSpPr>
+        <p:spPr>
+          <a:xfrm>
+            <a:off x="868680" y="6053328"/>
+            <a:ext cx="3179064" cy="502920"/>
+          </a:xfrm>
+          <a:prstGeom prst="rect">
+            <a:avLst/>
+          </a:prstGeom>
+          <a:noFill/>
+          <a:ln/>
+        </p:spPr>
+        <p:txBody>
+          <a:bodyPr wrap="square" lIns="0" tIns="0" rIns="0" bIns="0" rtlCol="0" anchor="ctr"/>
+          <a:lstStyle/>
+          <a:p>
+            <a:pPr algn="ctr" indent="0" marL="0">
+              <a:lnSpc>
+                <a:spcPct val="105000"/>
+              </a:lnSpc>
+              <a:buNone/>
+            </a:pPr>
+            <a:r>
+              <a:rPr lang="en-US" sz="950" dirty="0">
+                <a:solidFill>
+                  <a:srgbClr val="9FB3CC"/>
+                </a:solidFill>
+                <a:latin typeface="Calibri" pitchFamily="34" charset="0"/>
+                <a:ea typeface="Calibri" pitchFamily="34" charset="-122"/>
+                <a:cs typeface="Calibri" pitchFamily="34" charset="-120"/>
+              </a:rPr>
+              <a:t>OpenCode installed + run live here</a:t>
+            </a:r>
+            <a:endParaRPr lang="en-US" sz="950" dirty="0"/>
+          </a:p>
+        </p:txBody>
+      </p:sp>
+      <p:sp>
+        <p:nvSpPr>
+          <p:cNvPr id="14" name="Text 11"/>
+          <p:cNvSpPr txBox="1"/>
+          <p:nvPr/>
+        </p:nvSpPr>
+        <p:spPr>
+          <a:xfrm>
+            <a:off x="4276344" y="5669280"/>
+            <a:ext cx="3636264" cy="411480"/>
+          </a:xfrm>
+          <a:prstGeom prst="rect">
+            <a:avLst/>
+          </a:prstGeom>
+          <a:noFill/>
+          <a:ln/>
+        </p:spPr>
+        <p:txBody>
+          <a:bodyPr wrap="square" lIns="0" tIns="0" rIns="0" bIns="0" rtlCol="0" anchor="ctr"/>
+          <a:lstStyle/>
+          <a:p>
+            <a:pPr algn="ctr" indent="0" marL="0">
+              <a:buNone/>
+            </a:pPr>
+            <a:r>
+              <a:rPr lang="en-US" sz="2000" b="1" dirty="0">
+                <a:solidFill>
+                  <a:srgbClr val="BD8C24"/>
+                </a:solidFill>
+                <a:latin typeface="Cambria" pitchFamily="34" charset="0"/>
+                <a:ea typeface="Cambria" pitchFamily="34" charset="-122"/>
+                <a:cs typeface="Cambria" pitchFamily="34" charset="-120"/>
+              </a:rPr>
+              <a:t>842M</a:t>
+            </a:r>
+            <a:endParaRPr lang="en-US" sz="2000" dirty="0"/>
+          </a:p>
+        </p:txBody>
+      </p:sp>
+      <p:sp>
+        <p:nvSpPr>
+          <p:cNvPr id="15" name="Text 12"/>
+          <p:cNvSpPr txBox="1"/>
+          <p:nvPr/>
+        </p:nvSpPr>
+        <p:spPr>
+          <a:xfrm>
+            <a:off x="4504944" y="6053328"/>
+            <a:ext cx="3179064" cy="502920"/>
+          </a:xfrm>
+          <a:prstGeom prst="rect">
+            <a:avLst/>
+          </a:prstGeom>
+          <a:noFill/>
+          <a:ln/>
+        </p:spPr>
+        <p:txBody>
+          <a:bodyPr wrap="square" lIns="0" tIns="0" rIns="0" bIns="0" rtlCol="0" anchor="ctr"/>
+          <a:lstStyle/>
+          <a:p>
+            <a:pPr algn="ctr" indent="0" marL="0">
+              <a:lnSpc>
+                <a:spcPct val="105000"/>
+              </a:lnSpc>
+              <a:buNone/>
+            </a:pPr>
+            <a:r>
+              <a:rPr lang="en-US" sz="950" dirty="0">
+                <a:solidFill>
+                  <a:srgbClr val="9FB3CC"/>
+                </a:solidFill>
+                <a:latin typeface="Calibri" pitchFamily="34" charset="0"/>
+                <a:ea typeface="Calibri" pitchFamily="34" charset="-122"/>
+                <a:cs typeface="Calibri" pitchFamily="34" charset="-120"/>
+              </a:rPr>
+              <a:t>real input tokens correctly counted (was 0.0M — undercount found by testing)</a:t>
+            </a:r>
+            <a:endParaRPr lang="en-US" sz="950" dirty="0"/>
+          </a:p>
+        </p:txBody>
+      </p:sp>
+      <p:sp>
+        <p:nvSpPr>
+          <p:cNvPr id="16" name="Text 13"/>
+          <p:cNvSpPr txBox="1"/>
+          <p:nvPr/>
+        </p:nvSpPr>
+        <p:spPr>
+          <a:xfrm>
+            <a:off x="7912608" y="5669280"/>
+            <a:ext cx="3636264" cy="411480"/>
+          </a:xfrm>
+          <a:prstGeom prst="rect">
+            <a:avLst/>
+          </a:prstGeom>
+          <a:noFill/>
+          <a:ln/>
+        </p:spPr>
+        <p:txBody>
+          <a:bodyPr wrap="square" lIns="0" tIns="0" rIns="0" bIns="0" rtlCol="0" anchor="ctr"/>
+          <a:lstStyle/>
+          <a:p>
+            <a:pPr algn="ctr" indent="0" marL="0">
+              <a:buNone/>
+            </a:pPr>
+            <a:r>
+              <a:rPr lang="en-US" sz="2000" b="1" dirty="0">
+                <a:solidFill>
+                  <a:srgbClr val="7C5CD6"/>
+                </a:solidFill>
+                <a:latin typeface="Cambria" pitchFamily="34" charset="0"/>
+                <a:ea typeface="Cambria" pitchFamily="34" charset="-122"/>
+                <a:cs typeface="Cambria" pitchFamily="34" charset="-120"/>
+              </a:rPr>
+              <a:t>3</a:t>
+            </a:r>
+            <a:endParaRPr lang="en-US" sz="2000" dirty="0"/>
+          </a:p>
+        </p:txBody>
+      </p:sp>
+      <p:sp>
+        <p:nvSpPr>
+          <p:cNvPr id="17" name="Text 14"/>
+          <p:cNvSpPr txBox="1"/>
+          <p:nvPr/>
+        </p:nvSpPr>
+        <p:spPr>
+          <a:xfrm>
+            <a:off x="8141208" y="6053328"/>
+            <a:ext cx="3179064" cy="502920"/>
+          </a:xfrm>
+          <a:prstGeom prst="rect">
+            <a:avLst/>
+          </a:prstGeom>
+          <a:noFill/>
+          <a:ln/>
+        </p:spPr>
+        <p:txBody>
+          <a:bodyPr wrap="square" lIns="0" tIns="0" rIns="0" bIns="0" rtlCol="0" anchor="ctr"/>
+          <a:lstStyle/>
+          <a:p>
+            <a:pPr algn="ctr" indent="0" marL="0">
+              <a:lnSpc>
+                <a:spcPct val="105000"/>
+              </a:lnSpc>
+              <a:buNone/>
+            </a:pPr>
+            <a:r>
+              <a:rPr lang="en-US" sz="950" dirty="0">
+                <a:solidFill>
+                  <a:srgbClr val="9FB3CC"/>
+                </a:solidFill>
+                <a:latin typeface="Calibri" pitchFamily="34" charset="0"/>
+                <a:ea typeface="Calibri" pitchFamily="34" charset="-122"/>
+                <a:cs typeface="Calibri" pitchFamily="34" charset="-120"/>
+              </a:rPr>
+              <a:t>real bugs found and fixed by an actual test script, not assumed away</a:t>
+            </a:r>
+            <a:endParaRPr lang="en-US" sz="950" dirty="0"/>
+          </a:p>
+        </p:txBody>
+      </p:sp>
+      <p:sp>
+        <p:nvSpPr>
+          <p:cNvPr id="18" name="Text 15"/>
+          <p:cNvSpPr txBox="1"/>
+          <p:nvPr/>
+        </p:nvSpPr>
+        <p:spPr>
+          <a:xfrm>
+            <a:off x="457200" y="6400800"/>
+            <a:ext cx="7315200" cy="274320"/>
+          </a:xfrm>
+          <a:prstGeom prst="rect">
+            <a:avLst/>
+          </a:prstGeom>
+          <a:noFill/>
+          <a:ln/>
+        </p:spPr>
+        <p:txBody>
+          <a:bodyPr wrap="square" lIns="0" tIns="0" rIns="0" bIns="0" rtlCol="0" anchor="ctr"/>
+          <a:lstStyle/>
+          <a:p>
+            <a:pPr indent="0" marL="0">
+              <a:buNone/>
+            </a:pPr>
+            <a:r>
+              <a:rPr lang="en-US" sz="900" spc="100" kern="0" dirty="0">
+                <a:solidFill>
+                  <a:srgbClr val="9FB3CC"/>
+                </a:solidFill>
+                <a:latin typeface="Calibri" pitchFamily="34" charset="0"/>
+                <a:ea typeface="Calibri" pitchFamily="34" charset="-122"/>
+                <a:cs typeface="Calibri" pitchFamily="34" charset="-120"/>
+              </a:rPr>
+              <a:t>ISEKAI ⋄ A CONVENTION FOR LIVING WORLDS</a:t>
+            </a:r>
+            <a:endParaRPr lang="en-US" sz="900" dirty="0"/>
+          </a:p>
+        </p:txBody>
+      </p:sp>
+      <p:sp>
+        <p:nvSpPr>
+          <p:cNvPr id="19" name="Text 16"/>
+          <p:cNvSpPr txBox="1"/>
+          <p:nvPr/>
+        </p:nvSpPr>
+        <p:spPr>
+          <a:xfrm>
+            <a:off x="11274552" y="6400800"/>
+            <a:ext cx="457200" cy="274320"/>
+          </a:xfrm>
+          <a:prstGeom prst="rect">
+            <a:avLst/>
+          </a:prstGeom>
+          <a:noFill/>
+          <a:ln/>
+        </p:spPr>
+        <p:txBody>
+          <a:bodyPr wrap="square" lIns="0" tIns="0" rIns="0" bIns="0" rtlCol="0" anchor="ctr"/>
+          <a:lstStyle/>
+          <a:p>
+            <a:pPr algn="r" indent="0" marL="0">
+              <a:buNone/>
+            </a:pPr>
+            <a:r>
+              <a:rPr lang="en-US" sz="900" dirty="0">
+                <a:solidFill>
+                  <a:srgbClr val="9FB3CC"/>
+                </a:solidFill>
+                <a:latin typeface="Calibri" pitchFamily="34" charset="0"/>
+                <a:ea typeface="Calibri" pitchFamily="34" charset="-122"/>
+                <a:cs typeface="Calibri" pitchFamily="34" charset="-120"/>
+              </a:rPr>
+              <a:t>13</a:t>
+            </a:r>
+            <a:endParaRPr lang="en-US" sz="900" dirty="0"/>
+          </a:p>
+        </p:txBody>
+      </p:sp>
+    </p:spTree>
+  </p:cSld>
+  <p:clrMapOvr>
+    <a:masterClrMapping/>
+  </p:clrMapOvr>
+</p:sld>
+</file>
+
+<file path=ppt/slides/slide14.xml><?xml version="1.0" encoding="utf-8"?>
+<p:sld xmlns:a="http://schemas.openxmlformats.org/drawingml/2006/main" xmlns:r="http://schemas.openxmlformats.org/officeDocument/2006/relationships" xmlns:p="http://schemas.openxmlformats.org/presentationml/2006/main">
+  <p:cSld name="Slide 14">
+    <p:spTree>
+      <p:nvGrpSpPr>
+        <p:cNvPr id="1" name=""/>
+        <p:cNvGrpSpPr/>
+        <p:nvPr/>
+      </p:nvGrpSpPr>
+      <p:grpSpPr>
+        <a:xfrm>
+          <a:off x="0" y="0"/>
+          <a:ext cx="0" cy="0"/>
+          <a:chOff x="0" y="0"/>
+          <a:chExt cx="0" cy="0"/>
+        </a:xfrm>
+      </p:grpSpPr>
+      <p:sp>
+        <p:nvSpPr>
+          <p:cNvPr id="2" name="Text 0"/>
+          <p:cNvSpPr txBox="1"/>
+          <p:nvPr/>
+        </p:nvSpPr>
+        <p:spPr>
+          <a:xfrm>
+            <a:off x="640080" y="502920"/>
+            <a:ext cx="10908792" cy="822960"/>
+          </a:xfrm>
+          <a:prstGeom prst="rect">
+            <a:avLst/>
+          </a:prstGeom>
+          <a:noFill/>
+          <a:ln/>
+        </p:spPr>
+        <p:txBody>
+          <a:bodyPr wrap="square" lIns="0" tIns="0" rIns="0" bIns="0" rtlCol="0" anchor="ctr"/>
+          <a:lstStyle/>
+          <a:p>
+            <a:pPr indent="0" marL="0">
+              <a:buNone/>
+            </a:pPr>
+            <a:r>
+              <a:rPr lang="en-US" sz="3000" b="1" dirty="0">
+                <a:solidFill>
+                  <a:srgbClr val="12182A"/>
+                </a:solidFill>
+                <a:latin typeface="Cambria" pitchFamily="34" charset="0"/>
+                <a:ea typeface="Cambria" pitchFamily="34" charset="-122"/>
+                <a:cs typeface="Cambria" pitchFamily="34" charset="-120"/>
+              </a:rPr>
               <a:t>One throne, several mounts — model per rank</a:t>
             </a:r>
             <a:endParaRPr lang="en-US" sz="3000" dirty="0"/>
@@ -2527,7 +6694,7 @@
       </p:sp>
       <p:graphicFrame>
         <p:nvGraphicFramePr>
-          <p:cNvPr id="11" name="Table 0"/>
+          <p:cNvPr id="15" name="Table 0"/>
           <p:cNvGraphicFramePr>
             <a:graphicFrameLocks noGrp="1"/>
           </p:cNvGraphicFramePr>
@@ -4276,7 +8443,7 @@
                 <a:ea typeface="Calibri" pitchFamily="34" charset="-122"/>
                 <a:cs typeface="Calibri" pitchFamily="34" charset="-120"/>
               </a:rPr>
-              <a:t>10</a:t>
+              <a:t>14</a:t>
             </a:r>
             <a:endParaRPr lang="en-US" sz="900" dirty="0"/>
           </a:p>
@@ -4290,9 +8457,9 @@
 </p:sld>
 </file>
 
-<file path=ppt/slides/slide11.xml><?xml version="1.0" encoding="utf-8"?>
+<file path=ppt/slides/slide15.xml><?xml version="1.0" encoding="utf-8"?>
 <p:sld xmlns:a="http://schemas.openxmlformats.org/drawingml/2006/main" xmlns:r="http://schemas.openxmlformats.org/officeDocument/2006/relationships" xmlns:p="http://schemas.openxmlformats.org/presentationml/2006/main">
-  <p:cSld name="Slide 11">
+  <p:cSld name="Slide 15">
     <p:spTree>
       <p:nvGrpSpPr>
         <p:cNvPr id="1" name=""/>
@@ -4966,7 +9133,7 @@
                 <a:ea typeface="Calibri" pitchFamily="34" charset="-122"/>
                 <a:cs typeface="Calibri" pitchFamily="34" charset="-120"/>
               </a:rPr>
-              <a:t>11</a:t>
+              <a:t>15</a:t>
             </a:r>
             <a:endParaRPr lang="en-US" sz="900" dirty="0"/>
           </a:p>
@@ -4980,9 +9147,9 @@
 </p:sld>
 </file>
 
-<file path=ppt/slides/slide12.xml><?xml version="1.0" encoding="utf-8"?>
+<file path=ppt/slides/slide16.xml><?xml version="1.0" encoding="utf-8"?>
 <p:sld xmlns:a="http://schemas.openxmlformats.org/drawingml/2006/main" xmlns:r="http://schemas.openxmlformats.org/officeDocument/2006/relationships" xmlns:p="http://schemas.openxmlformats.org/presentationml/2006/main">
-  <p:cSld name="Slide 12">
+  <p:cSld name="Slide 16">
     <p:spTree>
       <p:nvGrpSpPr>
         <p:cNvPr id="1" name=""/>
@@ -6377,7 +10544,7 @@
                 <a:ea typeface="Calibri" pitchFamily="34" charset="-122"/>
                 <a:cs typeface="Calibri" pitchFamily="34" charset="-120"/>
               </a:rPr>
-              <a:t>12</a:t>
+              <a:t>16</a:t>
             </a:r>
             <a:endParaRPr lang="en-US" sz="900" dirty="0"/>
           </a:p>
@@ -6391,9 +10558,9 @@
 </p:sld>
 </file>
 
-<file path=ppt/slides/slide13.xml><?xml version="1.0" encoding="utf-8"?>
+<file path=ppt/slides/slide17.xml><?xml version="1.0" encoding="utf-8"?>
 <p:sld xmlns:a="http://schemas.openxmlformats.org/drawingml/2006/main" xmlns:r="http://schemas.openxmlformats.org/officeDocument/2006/relationships" xmlns:p="http://schemas.openxmlformats.org/presentationml/2006/main">
-  <p:cSld name="Slide 13">
+  <p:cSld name="Slide 17">
     <p:spTree>
       <p:nvGrpSpPr>
         <p:cNvPr id="1" name=""/>
@@ -7437,7 +11604,7 @@
                 <a:ea typeface="Calibri" pitchFamily="34" charset="-122"/>
                 <a:cs typeface="Calibri" pitchFamily="34" charset="-120"/>
               </a:rPr>
-              <a:t>13</a:t>
+              <a:t>17</a:t>
             </a:r>
             <a:endParaRPr lang="en-US" sz="900" dirty="0"/>
           </a:p>
@@ -7451,9 +11618,9 @@
 </p:sld>
 </file>
 
-<file path=ppt/slides/slide14.xml><?xml version="1.0" encoding="utf-8"?>
+<file path=ppt/slides/slide18.xml><?xml version="1.0" encoding="utf-8"?>
 <p:sld xmlns:a="http://schemas.openxmlformats.org/drawingml/2006/main" xmlns:r="http://schemas.openxmlformats.org/officeDocument/2006/relationships" xmlns:p="http://schemas.openxmlformats.org/presentationml/2006/main">
-  <p:cSld name="Slide 14">
+  <p:cSld name="Slide 18">
     <p:spTree>
       <p:nvGrpSpPr>
         <p:cNvPr id="1" name=""/>
@@ -8151,7 +12318,7 @@
                 <a:ea typeface="Calibri" pitchFamily="34" charset="-122"/>
                 <a:cs typeface="Calibri" pitchFamily="34" charset="-120"/>
               </a:rPr>
-              <a:t>14</a:t>
+              <a:t>18</a:t>
             </a:r>
             <a:endParaRPr lang="en-US" sz="900" dirty="0"/>
           </a:p>
@@ -8165,9 +12332,9 @@
 </p:sld>
 </file>
 
-<file path=ppt/slides/slide15.xml><?xml version="1.0" encoding="utf-8"?>
+<file path=ppt/slides/slide19.xml><?xml version="1.0" encoding="utf-8"?>
 <p:sld xmlns:a="http://schemas.openxmlformats.org/drawingml/2006/main" xmlns:r="http://schemas.openxmlformats.org/officeDocument/2006/relationships" xmlns:p="http://schemas.openxmlformats.org/presentationml/2006/main">
-  <p:cSld name="Slide 15">
+  <p:cSld name="Slide 19">
     <p:bg>
       <p:bgPr>
         <a:solidFill>
@@ -8269,7 +12436,7 @@
       </p:sp>
       <p:pic>
         <p:nvPicPr>
-          <p:cNvPr id="4" name="Image 0" descr="/home/monta/convention-jura/.isekai/tmp/pptx-build/icons/link.png">    </p:cNvPr>
+          <p:cNvPr id="4" name="Image 0" descr="/home/monta/convention-jura/presentations/src/icons/link.png">    </p:cNvPr>
           <p:cNvPicPr>
             <a:picLocks noChangeAspect="1"/>
           </p:cNvPicPr>
@@ -8810,281 +12977,7 @@
                 <a:ea typeface="Calibri" pitchFamily="34" charset="-122"/>
                 <a:cs typeface="Calibri" pitchFamily="34" charset="-120"/>
               </a:rPr>
-              <a:t>15</a:t>
-            </a:r>
-            <a:endParaRPr lang="en-US" sz="900" dirty="0"/>
-          </a:p>
-        </p:txBody>
-      </p:sp>
-    </p:spTree>
-  </p:cSld>
-  <p:clrMapOvr>
-    <a:masterClrMapping/>
-  </p:clrMapOvr>
-</p:sld>
-</file>
-
-<file path=ppt/slides/slide16.xml><?xml version="1.0" encoding="utf-8"?>
-<p:sld xmlns:a="http://schemas.openxmlformats.org/drawingml/2006/main" xmlns:r="http://schemas.openxmlformats.org/officeDocument/2006/relationships" xmlns:p="http://schemas.openxmlformats.org/presentationml/2006/main">
-  <p:cSld name="Slide 16">
-    <p:bg>
-      <p:bgPr>
-        <a:solidFill>
-          <a:srgbClr val="070B14"/>
-        </a:solidFill>
-      </p:bgPr>
-    </p:bg>
-    <p:spTree>
-      <p:nvGrpSpPr>
-        <p:cNvPr id="1" name=""/>
-        <p:cNvGrpSpPr/>
-        <p:nvPr/>
-      </p:nvGrpSpPr>
-      <p:grpSpPr>
-        <a:xfrm>
-          <a:off x="0" y="0"/>
-          <a:ext cx="0" cy="0"/>
-          <a:chOff x="0" y="0"/>
-          <a:chExt cx="0" cy="0"/>
-        </a:xfrm>
-      </p:grpSpPr>
-      <p:pic>
-        <p:nvPicPr>
-          <p:cNvPr id="2" name="Image 0" descr="/home/monta/convention-jura/.isekai/tmp/pptx-build/icons/rocket.png">    </p:cNvPr>
-          <p:cNvPicPr>
-            <a:picLocks noChangeAspect="1"/>
-          </p:cNvPicPr>
-          <p:nvPr/>
-        </p:nvPicPr>
-        <p:blipFill>
-          <a:blip r:embed="rId1"/>
-          <a:stretch>
-            <a:fillRect/>
-          </a:stretch>
-        </p:blipFill>
-        <p:spPr>
-          <a:xfrm>
-            <a:off x="5545836" y="1051560"/>
-            <a:ext cx="1097280" cy="1097280"/>
-          </a:xfrm>
-          <a:prstGeom prst="rect">
-            <a:avLst/>
-          </a:prstGeom>
-        </p:spPr>
-      </p:pic>
-      <p:sp>
-        <p:nvSpPr>
-          <p:cNvPr id="3" name="Text 0"/>
-          <p:cNvSpPr txBox="1"/>
-          <p:nvPr/>
-        </p:nvSpPr>
-        <p:spPr>
-          <a:xfrm>
-            <a:off x="0" y="2514600"/>
-            <a:ext cx="12188952" cy="548640"/>
-          </a:xfrm>
-          <a:prstGeom prst="rect">
-            <a:avLst/>
-          </a:prstGeom>
-          <a:noFill/>
-          <a:ln/>
-        </p:spPr>
-        <p:txBody>
-          <a:bodyPr wrap="square" lIns="0" tIns="0" rIns="0" bIns="0" rtlCol="0" anchor="ctr"/>
-          <a:lstStyle/>
-          <a:p>
-            <a:pPr algn="ctr" indent="0" marL="0">
-              <a:buNone/>
-            </a:pPr>
-            <a:r>
-              <a:rPr lang="en-US" sz="1600" dirty="0">
-                <a:solidFill>
-                  <a:srgbClr val="9FB3CC"/>
-                </a:solidFill>
-                <a:latin typeface="Calibri" pitchFamily="34" charset="0"/>
-                <a:ea typeface="Calibri" pitchFamily="34" charset="-122"/>
-                <a:cs typeface="Calibri" pitchFamily="34" charset="-120"/>
-              </a:rPr>
-              <a:t>Reincarnate any directory. One command.</a:t>
-            </a:r>
-            <a:endParaRPr lang="en-US" sz="1600" dirty="0"/>
-          </a:p>
-        </p:txBody>
-      </p:sp>
-      <p:sp>
-        <p:nvSpPr>
-          <p:cNvPr id="4" name="Text 1"/>
-          <p:cNvSpPr txBox="1"/>
-          <p:nvPr/>
-        </p:nvSpPr>
-        <p:spPr>
-          <a:xfrm>
-            <a:off x="0" y="3063240"/>
-            <a:ext cx="12188952" cy="1097280"/>
-          </a:xfrm>
-          <a:prstGeom prst="rect">
-            <a:avLst/>
-          </a:prstGeom>
-          <a:noFill/>
-          <a:ln/>
-        </p:spPr>
-        <p:txBody>
-          <a:bodyPr wrap="square" lIns="0" tIns="0" rIns="0" bIns="0" rtlCol="0" anchor="ctr"/>
-          <a:lstStyle/>
-          <a:p>
-            <a:pPr algn="ctr" indent="0" marL="0">
-              <a:buNone/>
-            </a:pPr>
-            <a:r>
-              <a:rPr lang="en-US" sz="5600" b="1" dirty="0">
-                <a:solidFill>
-                  <a:srgbClr val="BD8C24"/>
-                </a:solidFill>
-                <a:latin typeface="Courier New" pitchFamily="34" charset="0"/>
-                <a:ea typeface="Courier New" pitchFamily="34" charset="-122"/>
-                <a:cs typeface="Courier New" pitchFamily="34" charset="-120"/>
-              </a:rPr>
-              <a:t>/isekai</a:t>
-            </a:r>
-            <a:endParaRPr lang="en-US" sz="5600" dirty="0"/>
-          </a:p>
-        </p:txBody>
-      </p:sp>
-      <p:sp>
-        <p:nvSpPr>
-          <p:cNvPr id="5" name="Text 2"/>
-          <p:cNvSpPr txBox="1"/>
-          <p:nvPr/>
-        </p:nvSpPr>
-        <p:spPr>
-          <a:xfrm>
-            <a:off x="1645920" y="4297680"/>
-            <a:ext cx="8897112" cy="822960"/>
-          </a:xfrm>
-          <a:prstGeom prst="rect">
-            <a:avLst/>
-          </a:prstGeom>
-          <a:noFill/>
-          <a:ln/>
-        </p:spPr>
-        <p:txBody>
-          <a:bodyPr wrap="square" lIns="0" tIns="0" rIns="0" bIns="0" rtlCol="0" anchor="ctr"/>
-          <a:lstStyle/>
-          <a:p>
-            <a:pPr algn="ctr" indent="0" marL="0">
-              <a:lnSpc>
-                <a:spcPct val="120000"/>
-              </a:lnSpc>
-              <a:buNone/>
-            </a:pPr>
-            <a:r>
-              <a:rPr lang="en-US" sz="1250" i="1" dirty="0">
-                <a:solidFill>
-                  <a:srgbClr val="ECF1FA"/>
-                </a:solidFill>
-                <a:latin typeface="Calibri" pitchFamily="34" charset="0"/>
-                <a:ea typeface="Calibri" pitchFamily="34" charset="-122"/>
-                <a:cs typeface="Calibri" pitchFamily="34" charset="-120"/>
-              </a:rPr>
-              <a:t>The world remembers in documents, because sessions forget.</a:t>
-            </a:r>
-            <a:endParaRPr lang="en-US" sz="1250" dirty="0"/>
-          </a:p>
-          <a:p>
-            <a:pPr algn="ctr" indent="0" marL="0">
-              <a:lnSpc>
-                <a:spcPct val="120000"/>
-              </a:lnSpc>
-              <a:buNone/>
-            </a:pPr>
-            <a:r>
-              <a:rPr lang="en-US" sz="1250" i="1" dirty="0">
-                <a:solidFill>
-                  <a:srgbClr val="ECF1FA"/>
-                </a:solidFill>
-                <a:latin typeface="Calibri" pitchFamily="34" charset="0"/>
-                <a:ea typeface="Calibri" pitchFamily="34" charset="-122"/>
-                <a:cs typeface="Calibri" pitchFamily="34" charset="-120"/>
-              </a:rPr>
-              <a:t>It watches itself through instruments, because memory alone cannot see stress.</a:t>
-            </a:r>
-            <a:endParaRPr lang="en-US" sz="1250" dirty="0"/>
-          </a:p>
-        </p:txBody>
-      </p:sp>
-      <p:sp>
-        <p:nvSpPr>
-          <p:cNvPr id="6" name="Text 3"/>
-          <p:cNvSpPr txBox="1"/>
-          <p:nvPr/>
-        </p:nvSpPr>
-        <p:spPr>
-          <a:xfrm>
-            <a:off x="457200" y="6400800"/>
-            <a:ext cx="7315200" cy="274320"/>
-          </a:xfrm>
-          <a:prstGeom prst="rect">
-            <a:avLst/>
-          </a:prstGeom>
-          <a:noFill/>
-          <a:ln/>
-        </p:spPr>
-        <p:txBody>
-          <a:bodyPr wrap="square" lIns="0" tIns="0" rIns="0" bIns="0" rtlCol="0" anchor="ctr"/>
-          <a:lstStyle/>
-          <a:p>
-            <a:pPr indent="0" marL="0">
-              <a:buNone/>
-            </a:pPr>
-            <a:r>
-              <a:rPr lang="en-US" sz="900" spc="100" kern="0" dirty="0">
-                <a:solidFill>
-                  <a:srgbClr val="9FB3CC"/>
-                </a:solidFill>
-                <a:latin typeface="Calibri" pitchFamily="34" charset="0"/>
-                <a:ea typeface="Calibri" pitchFamily="34" charset="-122"/>
-                <a:cs typeface="Calibri" pitchFamily="34" charset="-120"/>
-              </a:rPr>
-              <a:t>ISEKAI ⋄ A CONVENTION FOR LIVING WORLDS</a:t>
-            </a:r>
-            <a:endParaRPr lang="en-US" sz="900" dirty="0"/>
-          </a:p>
-        </p:txBody>
-      </p:sp>
-      <p:sp>
-        <p:nvSpPr>
-          <p:cNvPr id="7" name="Text 4"/>
-          <p:cNvSpPr txBox="1"/>
-          <p:nvPr/>
-        </p:nvSpPr>
-        <p:spPr>
-          <a:xfrm>
-            <a:off x="11274552" y="6400800"/>
-            <a:ext cx="457200" cy="274320"/>
-          </a:xfrm>
-          <a:prstGeom prst="rect">
-            <a:avLst/>
-          </a:prstGeom>
-          <a:noFill/>
-          <a:ln/>
-        </p:spPr>
-        <p:txBody>
-          <a:bodyPr wrap="square" lIns="0" tIns="0" rIns="0" bIns="0" rtlCol="0" anchor="ctr"/>
-          <a:lstStyle/>
-          <a:p>
-            <a:pPr algn="r" indent="0" marL="0">
-              <a:buNone/>
-            </a:pPr>
-            <a:r>
-              <a:rPr lang="en-US" sz="900" dirty="0">
-                <a:solidFill>
-                  <a:srgbClr val="9FB3CC"/>
-                </a:solidFill>
-                <a:latin typeface="Calibri" pitchFamily="34" charset="0"/>
-                <a:ea typeface="Calibri" pitchFamily="34" charset="-122"/>
-                <a:cs typeface="Calibri" pitchFamily="34" charset="-120"/>
-              </a:rPr>
-              <a:t>16</a:t>
+              <a:t>19</a:t>
             </a:r>
             <a:endParaRPr lang="en-US" sz="900" dirty="0"/>
           </a:p>
@@ -9461,6 +13354,280 @@
 </p:sld>
 </file>
 
+<file path=ppt/slides/slide20.xml><?xml version="1.0" encoding="utf-8"?>
+<p:sld xmlns:a="http://schemas.openxmlformats.org/drawingml/2006/main" xmlns:r="http://schemas.openxmlformats.org/officeDocument/2006/relationships" xmlns:p="http://schemas.openxmlformats.org/presentationml/2006/main">
+  <p:cSld name="Slide 20">
+    <p:bg>
+      <p:bgPr>
+        <a:solidFill>
+          <a:srgbClr val="070B14"/>
+        </a:solidFill>
+      </p:bgPr>
+    </p:bg>
+    <p:spTree>
+      <p:nvGrpSpPr>
+        <p:cNvPr id="1" name=""/>
+        <p:cNvGrpSpPr/>
+        <p:nvPr/>
+      </p:nvGrpSpPr>
+      <p:grpSpPr>
+        <a:xfrm>
+          <a:off x="0" y="0"/>
+          <a:ext cx="0" cy="0"/>
+          <a:chOff x="0" y="0"/>
+          <a:chExt cx="0" cy="0"/>
+        </a:xfrm>
+      </p:grpSpPr>
+      <p:pic>
+        <p:nvPicPr>
+          <p:cNvPr id="2" name="Image 0" descr="/home/monta/convention-jura/presentations/src/icons/rocket.png">    </p:cNvPr>
+          <p:cNvPicPr>
+            <a:picLocks noChangeAspect="1"/>
+          </p:cNvPicPr>
+          <p:nvPr/>
+        </p:nvPicPr>
+        <p:blipFill>
+          <a:blip r:embed="rId1"/>
+          <a:stretch>
+            <a:fillRect/>
+          </a:stretch>
+        </p:blipFill>
+        <p:spPr>
+          <a:xfrm>
+            <a:off x="5545836" y="1051560"/>
+            <a:ext cx="1097280" cy="1097280"/>
+          </a:xfrm>
+          <a:prstGeom prst="rect">
+            <a:avLst/>
+          </a:prstGeom>
+        </p:spPr>
+      </p:pic>
+      <p:sp>
+        <p:nvSpPr>
+          <p:cNvPr id="3" name="Text 0"/>
+          <p:cNvSpPr txBox="1"/>
+          <p:nvPr/>
+        </p:nvSpPr>
+        <p:spPr>
+          <a:xfrm>
+            <a:off x="0" y="2514600"/>
+            <a:ext cx="12188952" cy="548640"/>
+          </a:xfrm>
+          <a:prstGeom prst="rect">
+            <a:avLst/>
+          </a:prstGeom>
+          <a:noFill/>
+          <a:ln/>
+        </p:spPr>
+        <p:txBody>
+          <a:bodyPr wrap="square" lIns="0" tIns="0" rIns="0" bIns="0" rtlCol="0" anchor="ctr"/>
+          <a:lstStyle/>
+          <a:p>
+            <a:pPr algn="ctr" indent="0" marL="0">
+              <a:buNone/>
+            </a:pPr>
+            <a:r>
+              <a:rPr lang="en-US" sz="1600" dirty="0">
+                <a:solidFill>
+                  <a:srgbClr val="9FB3CC"/>
+                </a:solidFill>
+                <a:latin typeface="Calibri" pitchFamily="34" charset="0"/>
+                <a:ea typeface="Calibri" pitchFamily="34" charset="-122"/>
+                <a:cs typeface="Calibri" pitchFamily="34" charset="-120"/>
+              </a:rPr>
+              <a:t>Reincarnate any directory. One command.</a:t>
+            </a:r>
+            <a:endParaRPr lang="en-US" sz="1600" dirty="0"/>
+          </a:p>
+        </p:txBody>
+      </p:sp>
+      <p:sp>
+        <p:nvSpPr>
+          <p:cNvPr id="4" name="Text 1"/>
+          <p:cNvSpPr txBox="1"/>
+          <p:nvPr/>
+        </p:nvSpPr>
+        <p:spPr>
+          <a:xfrm>
+            <a:off x="0" y="3063240"/>
+            <a:ext cx="12188952" cy="1097280"/>
+          </a:xfrm>
+          <a:prstGeom prst="rect">
+            <a:avLst/>
+          </a:prstGeom>
+          <a:noFill/>
+          <a:ln/>
+        </p:spPr>
+        <p:txBody>
+          <a:bodyPr wrap="square" lIns="0" tIns="0" rIns="0" bIns="0" rtlCol="0" anchor="ctr"/>
+          <a:lstStyle/>
+          <a:p>
+            <a:pPr algn="ctr" indent="0" marL="0">
+              <a:buNone/>
+            </a:pPr>
+            <a:r>
+              <a:rPr lang="en-US" sz="5600" b="1" dirty="0">
+                <a:solidFill>
+                  <a:srgbClr val="BD8C24"/>
+                </a:solidFill>
+                <a:latin typeface="Courier New" pitchFamily="34" charset="0"/>
+                <a:ea typeface="Courier New" pitchFamily="34" charset="-122"/>
+                <a:cs typeface="Courier New" pitchFamily="34" charset="-120"/>
+              </a:rPr>
+              <a:t>/isekai</a:t>
+            </a:r>
+            <a:endParaRPr lang="en-US" sz="5600" dirty="0"/>
+          </a:p>
+        </p:txBody>
+      </p:sp>
+      <p:sp>
+        <p:nvSpPr>
+          <p:cNvPr id="5" name="Text 2"/>
+          <p:cNvSpPr txBox="1"/>
+          <p:nvPr/>
+        </p:nvSpPr>
+        <p:spPr>
+          <a:xfrm>
+            <a:off x="1645920" y="4297680"/>
+            <a:ext cx="8897112" cy="822960"/>
+          </a:xfrm>
+          <a:prstGeom prst="rect">
+            <a:avLst/>
+          </a:prstGeom>
+          <a:noFill/>
+          <a:ln/>
+        </p:spPr>
+        <p:txBody>
+          <a:bodyPr wrap="square" lIns="0" tIns="0" rIns="0" bIns="0" rtlCol="0" anchor="ctr"/>
+          <a:lstStyle/>
+          <a:p>
+            <a:pPr algn="ctr" indent="0" marL="0">
+              <a:lnSpc>
+                <a:spcPct val="120000"/>
+              </a:lnSpc>
+              <a:buNone/>
+            </a:pPr>
+            <a:r>
+              <a:rPr lang="en-US" sz="1250" i="1" dirty="0">
+                <a:solidFill>
+                  <a:srgbClr val="ECF1FA"/>
+                </a:solidFill>
+                <a:latin typeface="Calibri" pitchFamily="34" charset="0"/>
+                <a:ea typeface="Calibri" pitchFamily="34" charset="-122"/>
+                <a:cs typeface="Calibri" pitchFamily="34" charset="-120"/>
+              </a:rPr>
+              <a:t>The world remembers in documents, because sessions forget.</a:t>
+            </a:r>
+            <a:endParaRPr lang="en-US" sz="1250" dirty="0"/>
+          </a:p>
+          <a:p>
+            <a:pPr algn="ctr" indent="0" marL="0">
+              <a:lnSpc>
+                <a:spcPct val="120000"/>
+              </a:lnSpc>
+              <a:buNone/>
+            </a:pPr>
+            <a:r>
+              <a:rPr lang="en-US" sz="1250" i="1" dirty="0">
+                <a:solidFill>
+                  <a:srgbClr val="ECF1FA"/>
+                </a:solidFill>
+                <a:latin typeface="Calibri" pitchFamily="34" charset="0"/>
+                <a:ea typeface="Calibri" pitchFamily="34" charset="-122"/>
+                <a:cs typeface="Calibri" pitchFamily="34" charset="-120"/>
+              </a:rPr>
+              <a:t>It watches itself through instruments, because memory alone cannot see stress.</a:t>
+            </a:r>
+            <a:endParaRPr lang="en-US" sz="1250" dirty="0"/>
+          </a:p>
+        </p:txBody>
+      </p:sp>
+      <p:sp>
+        <p:nvSpPr>
+          <p:cNvPr id="6" name="Text 3"/>
+          <p:cNvSpPr txBox="1"/>
+          <p:nvPr/>
+        </p:nvSpPr>
+        <p:spPr>
+          <a:xfrm>
+            <a:off x="457200" y="6400800"/>
+            <a:ext cx="7315200" cy="274320"/>
+          </a:xfrm>
+          <a:prstGeom prst="rect">
+            <a:avLst/>
+          </a:prstGeom>
+          <a:noFill/>
+          <a:ln/>
+        </p:spPr>
+        <p:txBody>
+          <a:bodyPr wrap="square" lIns="0" tIns="0" rIns="0" bIns="0" rtlCol="0" anchor="ctr"/>
+          <a:lstStyle/>
+          <a:p>
+            <a:pPr indent="0" marL="0">
+              <a:buNone/>
+            </a:pPr>
+            <a:r>
+              <a:rPr lang="en-US" sz="900" spc="100" kern="0" dirty="0">
+                <a:solidFill>
+                  <a:srgbClr val="9FB3CC"/>
+                </a:solidFill>
+                <a:latin typeface="Calibri" pitchFamily="34" charset="0"/>
+                <a:ea typeface="Calibri" pitchFamily="34" charset="-122"/>
+                <a:cs typeface="Calibri" pitchFamily="34" charset="-120"/>
+              </a:rPr>
+              <a:t>ISEKAI ⋄ A CONVENTION FOR LIVING WORLDS</a:t>
+            </a:r>
+            <a:endParaRPr lang="en-US" sz="900" dirty="0"/>
+          </a:p>
+        </p:txBody>
+      </p:sp>
+      <p:sp>
+        <p:nvSpPr>
+          <p:cNvPr id="7" name="Text 4"/>
+          <p:cNvSpPr txBox="1"/>
+          <p:nvPr/>
+        </p:nvSpPr>
+        <p:spPr>
+          <a:xfrm>
+            <a:off x="11274552" y="6400800"/>
+            <a:ext cx="457200" cy="274320"/>
+          </a:xfrm>
+          <a:prstGeom prst="rect">
+            <a:avLst/>
+          </a:prstGeom>
+          <a:noFill/>
+          <a:ln/>
+        </p:spPr>
+        <p:txBody>
+          <a:bodyPr wrap="square" lIns="0" tIns="0" rIns="0" bIns="0" rtlCol="0" anchor="ctr"/>
+          <a:lstStyle/>
+          <a:p>
+            <a:pPr algn="r" indent="0" marL="0">
+              <a:buNone/>
+            </a:pPr>
+            <a:r>
+              <a:rPr lang="en-US" sz="900" dirty="0">
+                <a:solidFill>
+                  <a:srgbClr val="9FB3CC"/>
+                </a:solidFill>
+                <a:latin typeface="Calibri" pitchFamily="34" charset="0"/>
+                <a:ea typeface="Calibri" pitchFamily="34" charset="-122"/>
+                <a:cs typeface="Calibri" pitchFamily="34" charset="-120"/>
+              </a:rPr>
+              <a:t>20</a:t>
+            </a:r>
+            <a:endParaRPr lang="en-US" sz="900" dirty="0"/>
+          </a:p>
+        </p:txBody>
+      </p:sp>
+    </p:spTree>
+  </p:cSld>
+  <p:clrMapOvr>
+    <a:masterClrMapping/>
+  </p:clrMapOvr>
+</p:sld>
+</file>
+
 <file path=ppt/slides/slide3.xml><?xml version="1.0" encoding="utf-8"?>
 <p:sld xmlns:a="http://schemas.openxmlformats.org/drawingml/2006/main" xmlns:r="http://schemas.openxmlformats.org/officeDocument/2006/relationships" xmlns:p="http://schemas.openxmlformats.org/presentationml/2006/main">
   <p:cSld name="Slide 3">
@@ -9553,7 +13720,7 @@
       </p:sp>
       <p:pic>
         <p:nvPicPr>
-          <p:cNvPr id="4" name="Image 0" descr="/home/monta/convention-jura/.isekai/tmp/pptx-build/icons/portraits/rimuru.png">    </p:cNvPr>
+          <p:cNvPr id="4" name="Image 0" descr="/home/monta/convention-jura/presentations/src/icons/portraits/rimuru.png">    </p:cNvPr>
           <p:cNvPicPr>
             <a:picLocks noChangeAspect="1"/>
           </p:cNvPicPr>
@@ -9692,7 +13859,7 @@
       </p:sp>
       <p:pic>
         <p:nvPicPr>
-          <p:cNvPr id="8" name="Image 1" descr="/home/monta/convention-jura/.isekai/tmp/pptx-build/icons/portraits/elf.png">    </p:cNvPr>
+          <p:cNvPr id="8" name="Image 1" descr="/home/monta/convention-jura/presentations/src/icons/portraits/elf.png">    </p:cNvPr>
           <p:cNvPicPr>
             <a:picLocks noChangeAspect="1"/>
           </p:cNvPicPr>
@@ -9831,7 +13998,7 @@
       </p:sp>
       <p:pic>
         <p:nvPicPr>
-          <p:cNvPr id="12" name="Image 2" descr="/home/monta/convention-jura/.isekai/tmp/pptx-build/icons/portraits/orc.png">    </p:cNvPr>
+          <p:cNvPr id="12" name="Image 2" descr="/home/monta/convention-jura/presentations/src/icons/portraits/orc.png">    </p:cNvPr>
           <p:cNvPicPr>
             <a:picLocks noChangeAspect="1"/>
           </p:cNvPicPr>
@@ -9970,7 +14137,7 @@
       </p:sp>
       <p:pic>
         <p:nvPicPr>
-          <p:cNvPr id="16" name="Image 3" descr="/home/monta/convention-jura/.isekai/tmp/pptx-build/icons/portraits/slime.png">    </p:cNvPr>
+          <p:cNvPr id="16" name="Image 3" descr="/home/monta/convention-jura/presentations/src/icons/portraits/slime.png">    </p:cNvPr>
           <p:cNvPicPr>
             <a:picLocks noChangeAspect="1"/>
           </p:cNvPicPr>
@@ -11928,7 +16095,7 @@
       </p:sp>
       <p:pic>
         <p:nvPicPr>
-          <p:cNvPr id="5" name="Image 0" descr="/home/monta/convention-jura/.isekai/tmp/pptx-build/icons/natures/01-vitality-dna-checkpoint.png">    </p:cNvPr>
+          <p:cNvPr id="5" name="Image 0" descr="/home/monta/convention-jura/presentations/src/icons/natures/01-vitality-dna-checkpoint.png">    </p:cNvPr>
           <p:cNvPicPr>
             <a:picLocks noChangeAspect="1"/>
           </p:cNvPicPr>
@@ -12099,7 +16266,7 @@
       </p:sp>
       <p:pic>
         <p:nvPicPr>
-          <p:cNvPr id="10" name="Image 1" descr="/home/monta/convention-jura/.isekai/tmp/pptx-build/icons/natures/02-symbiosis-lichen.png">    </p:cNvPr>
+          <p:cNvPr id="10" name="Image 1" descr="/home/monta/convention-jura/presentations/src/icons/natures/02-symbiosis-lichen.png">    </p:cNvPr>
           <p:cNvPicPr>
             <a:picLocks noChangeAspect="1"/>
           </p:cNvPicPr>
@@ -12270,7 +16437,7 @@
       </p:sp>
       <p:pic>
         <p:nvPicPr>
-          <p:cNvPr id="15" name="Image 2" descr="/home/monta/convention-jura/.isekai/tmp/pptx-build/icons/natures/03-evolution-crispr.png">    </p:cNvPr>
+          <p:cNvPr id="15" name="Image 2" descr="/home/monta/convention-jura/presentations/src/icons/natures/03-evolution-crispr.png">    </p:cNvPr>
           <p:cNvPicPr>
             <a:picLocks noChangeAspect="1"/>
           </p:cNvPicPr>
@@ -12441,7 +16608,7 @@
       </p:sp>
       <p:pic>
         <p:nvPicPr>
-          <p:cNvPr id="20" name="Image 3" descr="/home/monta/convention-jura/.isekai/tmp/pptx-build/icons/natures/04-genesis-quorum-sensing.png">    </p:cNvPr>
+          <p:cNvPr id="20" name="Image 3" descr="/home/monta/convention-jura/presentations/src/icons/natures/04-genesis-quorum-sensing.png">    </p:cNvPr>
           <p:cNvPicPr>
             <a:picLocks noChangeAspect="1"/>
           </p:cNvPicPr>
@@ -12612,7 +16779,7 @@
       </p:sp>
       <p:pic>
         <p:nvPicPr>
-          <p:cNvPr id="25" name="Image 4" descr="/home/monta/convention-jura/.isekai/tmp/pptx-build/icons/natures/05-memory-sleep-consolidation.png">    </p:cNvPr>
+          <p:cNvPr id="25" name="Image 4" descr="/home/monta/convention-jura/presentations/src/icons/natures/05-memory-sleep-consolidation.png">    </p:cNvPr>
           <p:cNvPicPr>
             <a:picLocks noChangeAspect="1"/>
           </p:cNvPicPr>
@@ -12783,7 +16950,7 @@
       </p:sp>
       <p:pic>
         <p:nvPicPr>
-          <p:cNvPr id="30" name="Image 5" descr="/home/monta/convention-jura/.isekai/tmp/pptx-build/icons/natures/06-swarm-slime-mold.png">    </p:cNvPr>
+          <p:cNvPr id="30" name="Image 5" descr="/home/monta/convention-jura/presentations/src/icons/natures/06-swarm-slime-mold.png">    </p:cNvPr>
           <p:cNvPicPr>
             <a:picLocks noChangeAspect="1"/>
           </p:cNvPicPr>
@@ -12954,7 +17121,7 @@
       </p:sp>
       <p:pic>
         <p:nvPicPr>
-          <p:cNvPr id="35" name="Image 6" descr="/home/monta/convention-jura/.isekai/tmp/pptx-build/icons/natures/07-containment-blood-brain-barrier.png">    </p:cNvPr>
+          <p:cNvPr id="35" name="Image 6" descr="/home/monta/convention-jura/presentations/src/icons/natures/07-containment-blood-brain-barrier.png">    </p:cNvPr>
           <p:cNvPicPr>
             <a:picLocks noChangeAspect="1"/>
           </p:cNvPicPr>
@@ -13125,7 +17292,7 @@
       </p:sp>
       <p:pic>
         <p:nvPicPr>
-          <p:cNvPr id="40" name="Image 7" descr="/home/monta/convention-jura/.isekai/tmp/pptx-build/icons/natures/08-the-wire-waggle-dance.png">    </p:cNvPr>
+          <p:cNvPr id="40" name="Image 7" descr="/home/monta/convention-jura/presentations/src/icons/natures/08-the-wire-waggle-dance.png">    </p:cNvPr>
           <p:cNvPicPr>
             <a:picLocks noChangeAspect="1"/>
           </p:cNvPicPr>
@@ -13296,7 +17463,7 @@
       </p:sp>
       <p:pic>
         <p:nvPicPr>
-          <p:cNvPr id="45" name="Image 8" descr="/home/monta/convention-jura/.isekai/tmp/pptx-build/icons/natures/09-perception-proprioception.png">    </p:cNvPr>
+          <p:cNvPr id="45" name="Image 8" descr="/home/monta/convention-jura/presentations/src/icons/natures/09-perception-proprioception.png">    </p:cNvPr>
           <p:cNvPicPr>
             <a:picLocks noChangeAspect="1"/>
           </p:cNvPicPr>
@@ -14070,7 +18237,7 @@
       </p:sp>
       <p:pic>
         <p:nvPicPr>
-          <p:cNvPr id="4" name="Image 0" descr="/home/monta/convention-jura/.isekai/tmp/pptx-build/icons/lightbulb.png">    </p:cNvPr>
+          <p:cNvPr id="4" name="Image 0" descr="/home/monta/convention-jura/presentations/src/icons/lightbulb.png">    </p:cNvPr>
           <p:cNvPicPr>
             <a:picLocks noChangeAspect="1"/>
           </p:cNvPicPr>
@@ -14233,7 +18400,7 @@
       </p:sp>
       <p:pic>
         <p:nvPicPr>
-          <p:cNvPr id="8" name="Image 1" descr="/home/monta/convention-jura/.isekai/tmp/pptx-build/icons/robot.png">    </p:cNvPr>
+          <p:cNvPr id="8" name="Image 1" descr="/home/monta/convention-jura/presentations/src/icons/robot.png">    </p:cNvPr>
           <p:cNvPicPr>
             <a:picLocks noChangeAspect="1"/>
           </p:cNvPicPr>
@@ -14503,7 +18670,7 @@
                 <a:ea typeface="Cambria" pitchFamily="34" charset="-122"/>
                 <a:cs typeface="Cambria" pitchFamily="34" charset="-120"/>
               </a:rPr>
-              <a:t>Four commands, native to OpenCode</a:t>
+              <a:t>Three memories — one shape for every creature</a:t>
             </a:r>
             <a:endParaRPr lang="en-US" sz="3000" dirty="0"/>
           </a:p>
@@ -14517,12 +18684,12 @@
         </p:nvSpPr>
         <p:spPr>
           <a:xfrm>
-            <a:off x="640080" y="1783080"/>
-            <a:ext cx="5225796" cy="1737360"/>
+            <a:off x="640080" y="1600200"/>
+            <a:ext cx="3392424" cy="3703320"/>
           </a:xfrm>
           <a:prstGeom prst="roundRect">
             <a:avLst>
-              <a:gd name="adj" fmla="val 5263"/>
+              <a:gd name="adj" fmla="val 2695"/>
             </a:avLst>
           </a:prstGeom>
           <a:solidFill>
@@ -14538,14 +18705,34 @@
       </p:sp>
       <p:sp>
         <p:nvSpPr>
-          <p:cNvPr id="4" name="Text 2"/>
-          <p:cNvSpPr txBox="1"/>
-          <p:nvPr/>
-        </p:nvSpPr>
-        <p:spPr>
-          <a:xfrm>
-            <a:off x="914400" y="1984248"/>
-            <a:ext cx="4677156" cy="457200"/>
+          <p:cNvPr id="4" name="Shape 2"/>
+          <p:cNvSpPr/>
+          <p:nvPr/>
+        </p:nvSpPr>
+        <p:spPr>
+          <a:xfrm>
+            <a:off x="640080" y="1600200"/>
+            <a:ext cx="3392424" cy="82296"/>
+          </a:xfrm>
+          <a:prstGeom prst="rect">
+            <a:avLst/>
+          </a:prstGeom>
+          <a:solidFill>
+            <a:srgbClr val="2695BD"/>
+          </a:solidFill>
+          <a:ln/>
+        </p:spPr>
+      </p:sp>
+      <p:sp>
+        <p:nvSpPr>
+          <p:cNvPr id="5" name="Text 3"/>
+          <p:cNvSpPr txBox="1"/>
+          <p:nvPr/>
+        </p:nvSpPr>
+        <p:spPr>
+          <a:xfrm>
+            <a:off x="914400" y="1874520"/>
+            <a:ext cx="2843784" cy="457200"/>
           </a:xfrm>
           <a:prstGeom prst="rect">
             <a:avLst/>
@@ -14561,30 +18748,30 @@
               <a:buNone/>
             </a:pPr>
             <a:r>
-              <a:rPr lang="en-US" sz="1900" b="1" dirty="0">
+              <a:rPr lang="en-US" sz="2200" b="1" dirty="0">
                 <a:solidFill>
                   <a:srgbClr val="2695BD"/>
                 </a:solidFill>
-                <a:latin typeface="Courier New" pitchFamily="34" charset="0"/>
-                <a:ea typeface="Courier New" pitchFamily="34" charset="-122"/>
-                <a:cs typeface="Courier New" pitchFamily="34" charset="-120"/>
-              </a:rPr>
-              <a:t>/isekai</a:t>
-            </a:r>
-            <a:endParaRPr lang="en-US" sz="1900" dirty="0"/>
-          </a:p>
-        </p:txBody>
-      </p:sp>
-      <p:sp>
-        <p:nvSpPr>
-          <p:cNvPr id="5" name="Text 3"/>
-          <p:cNvSpPr txBox="1"/>
-          <p:nvPr/>
-        </p:nvSpPr>
-        <p:spPr>
-          <a:xfrm>
-            <a:off x="914400" y="2496312"/>
-            <a:ext cx="4677156" cy="914400"/>
+                <a:latin typeface="Cambria" pitchFamily="34" charset="0"/>
+                <a:ea typeface="Cambria" pitchFamily="34" charset="-122"/>
+                <a:cs typeface="Cambria" pitchFamily="34" charset="-120"/>
+              </a:rPr>
+              <a:t>Short</a:t>
+            </a:r>
+            <a:endParaRPr lang="en-US" sz="2200" dirty="0"/>
+          </a:p>
+        </p:txBody>
+      </p:sp>
+      <p:sp>
+        <p:nvSpPr>
+          <p:cNvPr id="6" name="Text 4"/>
+          <p:cNvSpPr txBox="1"/>
+          <p:nvPr/>
+        </p:nvSpPr>
+        <p:spPr>
+          <a:xfrm>
+            <a:off x="914400" y="2350008"/>
+            <a:ext cx="2843784" cy="457200"/>
           </a:xfrm>
           <a:prstGeom prst="rect">
             <a:avLst/>
@@ -14597,13 +18784,10 @@
           <a:lstStyle/>
           <a:p>
             <a:pPr indent="0" marL="0">
-              <a:lnSpc>
-                <a:spcPct val="115000"/>
-              </a:lnSpc>
-              <a:buNone/>
-            </a:pPr>
-            <a:r>
-              <a:rPr lang="en-US" sz="1150" dirty="0">
+              <a:buNone/>
+            </a:pPr>
+            <a:r>
+              <a:rPr lang="en-US" sz="1100" i="1" dirty="0">
                 <a:solidFill>
                   <a:srgbClr val="6B7A90"/>
                 </a:solidFill>
@@ -14611,26 +18795,174 @@
                 <a:ea typeface="Calibri" pitchFamily="34" charset="-122"/>
                 <a:cs typeface="Calibri" pitchFamily="34" charset="-120"/>
               </a:rPr>
-              <a:t>Reincarnates a directory: writes the law, the chronicle, the portraits — then, on a fresh founding, survey-populates it in the same pass.</a:t>
-            </a:r>
-            <a:endParaRPr lang="en-US" sz="1150" dirty="0"/>
-          </a:p>
-        </p:txBody>
-      </p:sp>
-      <p:sp>
-        <p:nvSpPr>
-          <p:cNvPr id="6" name="Shape 4"/>
+              <a:t>per body, per task — dies with the session</a:t>
+            </a:r>
+            <a:endParaRPr lang="en-US" sz="1100" dirty="0"/>
+          </a:p>
+        </p:txBody>
+      </p:sp>
+      <p:sp>
+        <p:nvSpPr>
+          <p:cNvPr id="7" name="Text 5"/>
+          <p:cNvSpPr txBox="1"/>
+          <p:nvPr/>
+        </p:nvSpPr>
+        <p:spPr>
+          <a:xfrm>
+            <a:off x="914400" y="2880360"/>
+            <a:ext cx="2843784" cy="2286000"/>
+          </a:xfrm>
+          <a:prstGeom prst="rect">
+            <a:avLst/>
+          </a:prstGeom>
+          <a:noFill/>
+          <a:ln/>
+        </p:spPr>
+        <p:txBody>
+          <a:bodyPr wrap="square" lIns="0" tIns="0" rIns="0" bIns="0" rtlCol="0" anchor="t"/>
+          <a:lstStyle/>
+          <a:p>
+            <a:pPr indent="0" marL="0">
+              <a:lnSpc>
+                <a:spcPct val="110000"/>
+              </a:lnSpc>
+              <a:buNone/>
+            </a:pPr>
+            <a:r>
+              <a:rPr lang="en-US" sz="1200" b="1" dirty="0">
+                <a:solidFill>
+                  <a:srgbClr val="12182A"/>
+                </a:solidFill>
+                <a:latin typeface="Calibri" pitchFamily="34" charset="0"/>
+                <a:ea typeface="Calibri" pitchFamily="34" charset="-122"/>
+                <a:cs typeface="Calibri" pitchFamily="34" charset="-120"/>
+              </a:rPr>
+              <a:t>context window</a:t>
+            </a:r>
+            <a:endParaRPr lang="en-US" sz="1200" dirty="0"/>
+          </a:p>
+          <a:p>
+            <a:pPr indent="0" marL="0">
+              <a:lnSpc>
+                <a:spcPct val="110000"/>
+              </a:lnSpc>
+              <a:spcAft>
+                <a:spcPts val="900"/>
+              </a:spcAft>
+              <a:buNone/>
+            </a:pPr>
+            <a:r>
+              <a:rPr lang="en-US" sz="1200" dirty="0">
+                <a:solidFill>
+                  <a:srgbClr val="6B7A90"/>
+                </a:solidFill>
+                <a:latin typeface="Calibri" pitchFamily="34" charset="0"/>
+                <a:ea typeface="Calibri" pitchFamily="34" charset="-122"/>
+                <a:cs typeface="Calibri" pitchFamily="34" charset="-120"/>
+              </a:rPr>
+              <a:t>the live context — measured, never felt</a:t>
+            </a:r>
+            <a:endParaRPr lang="en-US" sz="1200" dirty="0"/>
+          </a:p>
+          <a:p>
+            <a:pPr indent="0" marL="0">
+              <a:lnSpc>
+                <a:spcPct val="110000"/>
+              </a:lnSpc>
+              <a:buNone/>
+            </a:pPr>
+            <a:r>
+              <a:rPr lang="en-US" sz="1200" b="1" dirty="0">
+                <a:solidFill>
+                  <a:srgbClr val="12182A"/>
+                </a:solidFill>
+                <a:latin typeface="Calibri" pitchFamily="34" charset="0"/>
+                <a:ea typeface="Calibri" pitchFamily="34" charset="-122"/>
+                <a:cs typeface="Calibri" pitchFamily="34" charset="-120"/>
+              </a:rPr>
+              <a:t>working memory</a:t>
+            </a:r>
+            <a:endParaRPr lang="en-US" sz="1200" dirty="0"/>
+          </a:p>
+          <a:p>
+            <a:pPr indent="0" marL="0">
+              <a:lnSpc>
+                <a:spcPct val="110000"/>
+              </a:lnSpc>
+              <a:spcAft>
+                <a:spcPts val="900"/>
+              </a:spcAft>
+              <a:buNone/>
+            </a:pPr>
+            <a:r>
+              <a:rPr lang="en-US" sz="1200" dirty="0">
+                <a:solidFill>
+                  <a:srgbClr val="6B7A90"/>
+                </a:solidFill>
+                <a:latin typeface="Calibri" pitchFamily="34" charset="0"/>
+                <a:ea typeface="Calibri" pitchFamily="34" charset="-122"/>
+                <a:cs typeface="Calibri" pitchFamily="34" charset="-120"/>
+              </a:rPr>
+              <a:t>the ~5-thought desk on the worn Mind</a:t>
+            </a:r>
+            <a:endParaRPr lang="en-US" sz="1200" dirty="0"/>
+          </a:p>
+          <a:p>
+            <a:pPr indent="0" marL="0">
+              <a:lnSpc>
+                <a:spcPct val="110000"/>
+              </a:lnSpc>
+              <a:buNone/>
+            </a:pPr>
+            <a:r>
+              <a:rPr lang="en-US" sz="1200" b="1" dirty="0">
+                <a:solidFill>
+                  <a:srgbClr val="12182A"/>
+                </a:solidFill>
+                <a:latin typeface="Calibri" pitchFamily="34" charset="0"/>
+                <a:ea typeface="Calibri" pitchFamily="34" charset="-122"/>
+                <a:cs typeface="Calibri" pitchFamily="34" charset="-120"/>
+              </a:rPr>
+              <a:t>semantic cache</a:t>
+            </a:r>
+            <a:endParaRPr lang="en-US" sz="1200" dirty="0"/>
+          </a:p>
+          <a:p>
+            <a:pPr indent="0" marL="0">
+              <a:lnSpc>
+                <a:spcPct val="110000"/>
+              </a:lnSpc>
+              <a:buNone/>
+            </a:pPr>
+            <a:r>
+              <a:rPr lang="en-US" sz="1200" dirty="0">
+                <a:solidFill>
+                  <a:srgbClr val="6B7A90"/>
+                </a:solidFill>
+                <a:latin typeface="Calibri" pitchFamily="34" charset="0"/>
+                <a:ea typeface="Calibri" pitchFamily="34" charset="-122"/>
+                <a:cs typeface="Calibri" pitchFamily="34" charset="-120"/>
+              </a:rPr>
+              <a:t>recent recalls keyed by meaning; local, disposable</a:t>
+            </a:r>
+            <a:endParaRPr lang="en-US" sz="1200" dirty="0"/>
+          </a:p>
+        </p:txBody>
+      </p:sp>
+      <p:sp>
+        <p:nvSpPr>
+          <p:cNvPr id="8" name="Shape 6"/>
           <p:cNvSpPr/>
           <p:nvPr/>
         </p:nvSpPr>
         <p:spPr>
           <a:xfrm>
-            <a:off x="6323076" y="1783080"/>
-            <a:ext cx="5225796" cy="1737360"/>
+            <a:off x="4398264" y="1600200"/>
+            <a:ext cx="3392424" cy="3703320"/>
           </a:xfrm>
           <a:prstGeom prst="roundRect">
             <a:avLst>
-              <a:gd name="adj" fmla="val 5263"/>
+              <a:gd name="adj" fmla="val 2695"/>
             </a:avLst>
           </a:prstGeom>
           <a:solidFill>
@@ -14646,14 +18978,34 @@
       </p:sp>
       <p:sp>
         <p:nvSpPr>
-          <p:cNvPr id="7" name="Text 5"/>
-          <p:cNvSpPr txBox="1"/>
-          <p:nvPr/>
-        </p:nvSpPr>
-        <p:spPr>
-          <a:xfrm>
-            <a:off x="6597396" y="1984248"/>
-            <a:ext cx="4677156" cy="457200"/>
+          <p:cNvPr id="9" name="Shape 7"/>
+          <p:cNvSpPr/>
+          <p:nvPr/>
+        </p:nvSpPr>
+        <p:spPr>
+          <a:xfrm>
+            <a:off x="4398264" y="1600200"/>
+            <a:ext cx="3392424" cy="82296"/>
+          </a:xfrm>
+          <a:prstGeom prst="rect">
+            <a:avLst/>
+          </a:prstGeom>
+          <a:solidFill>
+            <a:srgbClr val="7C5CD6"/>
+          </a:solidFill>
+          <a:ln/>
+        </p:spPr>
+      </p:sp>
+      <p:sp>
+        <p:nvSpPr>
+          <p:cNvPr id="10" name="Text 8"/>
+          <p:cNvSpPr txBox="1"/>
+          <p:nvPr/>
+        </p:nvSpPr>
+        <p:spPr>
+          <a:xfrm>
+            <a:off x="4672584" y="1874520"/>
+            <a:ext cx="2843784" cy="457200"/>
           </a:xfrm>
           <a:prstGeom prst="rect">
             <a:avLst/>
@@ -14669,30 +19021,30 @@
               <a:buNone/>
             </a:pPr>
             <a:r>
-              <a:rPr lang="en-US" sz="1900" b="1" dirty="0">
+              <a:rPr lang="en-US" sz="2200" b="1" dirty="0">
                 <a:solidFill>
                   <a:srgbClr val="7C5CD6"/>
                 </a:solidFill>
-                <a:latin typeface="Courier New" pitchFamily="34" charset="0"/>
-                <a:ea typeface="Courier New" pitchFamily="34" charset="-122"/>
-                <a:cs typeface="Courier New" pitchFamily="34" charset="-120"/>
-              </a:rPr>
-              <a:t>/genesis</a:t>
-            </a:r>
-            <a:endParaRPr lang="en-US" sz="1900" dirty="0"/>
-          </a:p>
-        </p:txBody>
-      </p:sp>
-      <p:sp>
-        <p:nvSpPr>
-          <p:cNvPr id="8" name="Text 6"/>
-          <p:cNvSpPr txBox="1"/>
-          <p:nvPr/>
-        </p:nvSpPr>
-        <p:spPr>
-          <a:xfrm>
-            <a:off x="6597396" y="2496312"/>
-            <a:ext cx="4677156" cy="914400"/>
+                <a:latin typeface="Cambria" pitchFamily="34" charset="0"/>
+                <a:ea typeface="Cambria" pitchFamily="34" charset="-122"/>
+                <a:cs typeface="Cambria" pitchFamily="34" charset="-120"/>
+              </a:rPr>
+              <a:t>Long</a:t>
+            </a:r>
+            <a:endParaRPr lang="en-US" sz="2200" dirty="0"/>
+          </a:p>
+        </p:txBody>
+      </p:sp>
+      <p:sp>
+        <p:nvSpPr>
+          <p:cNvPr id="11" name="Text 9"/>
+          <p:cNvSpPr txBox="1"/>
+          <p:nvPr/>
+        </p:nvSpPr>
+        <p:spPr>
+          <a:xfrm>
+            <a:off x="4672584" y="2350008"/>
+            <a:ext cx="2843784" cy="457200"/>
           </a:xfrm>
           <a:prstGeom prst="rect">
             <a:avLst/>
@@ -14705,13 +19057,10 @@
           <a:lstStyle/>
           <a:p>
             <a:pPr indent="0" marL="0">
-              <a:lnSpc>
-                <a:spcPct val="115000"/>
-              </a:lnSpc>
-              <a:buNone/>
-            </a:pPr>
-            <a:r>
-              <a:rPr lang="en-US" sz="1150" dirty="0">
+              <a:buNone/>
+            </a:pPr>
+            <a:r>
+              <a:rPr lang="en-US" sz="1100" i="1" dirty="0">
                 <a:solidFill>
                   <a:srgbClr val="6B7A90"/>
                 </a:solidFill>
@@ -14719,26 +19068,174 @@
                 <a:ea typeface="Calibri" pitchFamily="34" charset="-122"/>
                 <a:cs typeface="Calibri" pitchFamily="34" charset="-120"/>
               </a:rPr>
-              <a:t>Scans the code and decides, itself, which Elves, Orcs and Slimes it needs, then births them. Offer-first, never silent.</a:t>
-            </a:r>
-            <a:endParaRPr lang="en-US" sz="1150" dirty="0"/>
-          </a:p>
-        </p:txBody>
-      </p:sp>
-      <p:sp>
-        <p:nvSpPr>
-          <p:cNvPr id="9" name="Shape 7"/>
+              <a:t>the world's — files are the truth, git is the record</a:t>
+            </a:r>
+            <a:endParaRPr lang="en-US" sz="1100" dirty="0"/>
+          </a:p>
+        </p:txBody>
+      </p:sp>
+      <p:sp>
+        <p:nvSpPr>
+          <p:cNvPr id="12" name="Text 10"/>
+          <p:cNvSpPr txBox="1"/>
+          <p:nvPr/>
+        </p:nvSpPr>
+        <p:spPr>
+          <a:xfrm>
+            <a:off x="4672584" y="2880360"/>
+            <a:ext cx="2843784" cy="2286000"/>
+          </a:xfrm>
+          <a:prstGeom prst="rect">
+            <a:avLst/>
+          </a:prstGeom>
+          <a:noFill/>
+          <a:ln/>
+        </p:spPr>
+        <p:txBody>
+          <a:bodyPr wrap="square" lIns="0" tIns="0" rIns="0" bIns="0" rtlCol="0" anchor="t"/>
+          <a:lstStyle/>
+          <a:p>
+            <a:pPr indent="0" marL="0">
+              <a:lnSpc>
+                <a:spcPct val="110000"/>
+              </a:lnSpc>
+              <a:buNone/>
+            </a:pPr>
+            <a:r>
+              <a:rPr lang="en-US" sz="1200" b="1" dirty="0">
+                <a:solidFill>
+                  <a:srgbClr val="12182A"/>
+                </a:solidFill>
+                <a:latin typeface="Calibri" pitchFamily="34" charset="0"/>
+                <a:ea typeface="Calibri" pitchFamily="34" charset="-122"/>
+                <a:cs typeface="Calibri" pitchFamily="34" charset="-120"/>
+              </a:rPr>
+              <a:t>episodic</a:t>
+            </a:r>
+            <a:endParaRPr lang="en-US" sz="1200" dirty="0"/>
+          </a:p>
+          <a:p>
+            <a:pPr indent="0" marL="0">
+              <a:lnSpc>
+                <a:spcPct val="110000"/>
+              </a:lnSpc>
+              <a:spcAft>
+                <a:spcPts val="900"/>
+              </a:spcAft>
+              <a:buNone/>
+            </a:pPr>
+            <a:r>
+              <a:rPr lang="en-US" sz="1200" dirty="0">
+                <a:solidFill>
+                  <a:srgbClr val="6B7A90"/>
+                </a:solidFill>
+                <a:latin typeface="Calibri" pitchFamily="34" charset="0"/>
+                <a:ea typeface="Calibri" pitchFamily="34" charset="-122"/>
+                <a:cs typeface="Calibri" pitchFamily="34" charset="-120"/>
+              </a:rPr>
+              <a:t>what happened — log.md, one memory per entry</a:t>
+            </a:r>
+            <a:endParaRPr lang="en-US" sz="1200" dirty="0"/>
+          </a:p>
+          <a:p>
+            <a:pPr indent="0" marL="0">
+              <a:lnSpc>
+                <a:spcPct val="110000"/>
+              </a:lnSpc>
+              <a:buNone/>
+            </a:pPr>
+            <a:r>
+              <a:rPr lang="en-US" sz="1200" b="1" dirty="0">
+                <a:solidFill>
+                  <a:srgbClr val="12182A"/>
+                </a:solidFill>
+                <a:latin typeface="Calibri" pitchFamily="34" charset="0"/>
+                <a:ea typeface="Calibri" pitchFamily="34" charset="-122"/>
+                <a:cs typeface="Calibri" pitchFamily="34" charset="-120"/>
+              </a:rPr>
+              <a:t>procedural</a:t>
+            </a:r>
+            <a:endParaRPr lang="en-US" sz="1200" dirty="0"/>
+          </a:p>
+          <a:p>
+            <a:pPr indent="0" marL="0">
+              <a:lnSpc>
+                <a:spcPct val="110000"/>
+              </a:lnSpc>
+              <a:spcAft>
+                <a:spcPts val="900"/>
+              </a:spcAft>
+              <a:buNone/>
+            </a:pPr>
+            <a:r>
+              <a:rPr lang="en-US" sz="1200" dirty="0">
+                <a:solidFill>
+                  <a:srgbClr val="6B7A90"/>
+                </a:solidFill>
+                <a:latin typeface="Calibri" pitchFamily="34" charset="0"/>
+                <a:ea typeface="Calibri" pitchFamily="34" charset="-122"/>
+                <a:cs typeface="Calibri" pitchFamily="34" charset="-120"/>
+              </a:rPr>
+              <a:t>how to do — Minds, commands, tools</a:t>
+            </a:r>
+            <a:endParaRPr lang="en-US" sz="1200" dirty="0"/>
+          </a:p>
+          <a:p>
+            <a:pPr indent="0" marL="0">
+              <a:lnSpc>
+                <a:spcPct val="110000"/>
+              </a:lnSpc>
+              <a:buNone/>
+            </a:pPr>
+            <a:r>
+              <a:rPr lang="en-US" sz="1200" b="1" dirty="0">
+                <a:solidFill>
+                  <a:srgbClr val="12182A"/>
+                </a:solidFill>
+                <a:latin typeface="Calibri" pitchFamily="34" charset="0"/>
+                <a:ea typeface="Calibri" pitchFamily="34" charset="-122"/>
+                <a:cs typeface="Calibri" pitchFamily="34" charset="-120"/>
+              </a:rPr>
+              <a:t>semantic</a:t>
+            </a:r>
+            <a:endParaRPr lang="en-US" sz="1200" dirty="0"/>
+          </a:p>
+          <a:p>
+            <a:pPr indent="0" marL="0">
+              <a:lnSpc>
+                <a:spcPct val="110000"/>
+              </a:lnSpc>
+              <a:buNone/>
+            </a:pPr>
+            <a:r>
+              <a:rPr lang="en-US" sz="1200" dirty="0">
+                <a:solidFill>
+                  <a:srgbClr val="6B7A90"/>
+                </a:solidFill>
+                <a:latin typeface="Calibri" pitchFamily="34" charset="0"/>
+                <a:ea typeface="Calibri" pitchFamily="34" charset="-122"/>
+                <a:cs typeface="Calibri" pitchFamily="34" charset="-120"/>
+              </a:rPr>
+              <a:t>what is true — the law, creature docs, canon</a:t>
+            </a:r>
+            <a:endParaRPr lang="en-US" sz="1200" dirty="0"/>
+          </a:p>
+        </p:txBody>
+      </p:sp>
+      <p:sp>
+        <p:nvSpPr>
+          <p:cNvPr id="13" name="Shape 11"/>
           <p:cNvSpPr/>
           <p:nvPr/>
         </p:nvSpPr>
         <p:spPr>
           <a:xfrm>
-            <a:off x="640080" y="3749040"/>
-            <a:ext cx="5225796" cy="1737360"/>
+            <a:off x="8156448" y="1600200"/>
+            <a:ext cx="3392424" cy="3703320"/>
           </a:xfrm>
           <a:prstGeom prst="roundRect">
             <a:avLst>
-              <a:gd name="adj" fmla="val 5263"/>
+              <a:gd name="adj" fmla="val 2695"/>
             </a:avLst>
           </a:prstGeom>
           <a:solidFill>
@@ -14754,14 +19251,34 @@
       </p:sp>
       <p:sp>
         <p:nvSpPr>
-          <p:cNvPr id="10" name="Text 8"/>
-          <p:cNvSpPr txBox="1"/>
-          <p:nvPr/>
-        </p:nvSpPr>
-        <p:spPr>
-          <a:xfrm>
-            <a:off x="914400" y="3950208"/>
-            <a:ext cx="4677156" cy="457200"/>
+          <p:cNvPr id="14" name="Shape 12"/>
+          <p:cNvSpPr/>
+          <p:nvPr/>
+        </p:nvSpPr>
+        <p:spPr>
+          <a:xfrm>
+            <a:off x="8156448" y="1600200"/>
+            <a:ext cx="3392424" cy="82296"/>
+          </a:xfrm>
+          <a:prstGeom prst="rect">
+            <a:avLst/>
+          </a:prstGeom>
+          <a:solidFill>
+            <a:srgbClr val="BD8C24"/>
+          </a:solidFill>
+          <a:ln/>
+        </p:spPr>
+      </p:sp>
+      <p:sp>
+        <p:nvSpPr>
+          <p:cNvPr id="15" name="Text 13"/>
+          <p:cNvSpPr txBox="1"/>
+          <p:nvPr/>
+        </p:nvSpPr>
+        <p:spPr>
+          <a:xfrm>
+            <a:off x="8430768" y="1874520"/>
+            <a:ext cx="2843784" cy="457200"/>
           </a:xfrm>
           <a:prstGeom prst="rect">
             <a:avLst/>
@@ -14777,49 +19294,261 @@
               <a:buNone/>
             </a:pPr>
             <a:r>
-              <a:rPr lang="en-US" sz="1900" b="1" dirty="0">
+              <a:rPr lang="en-US" sz="2200" b="1" dirty="0">
                 <a:solidFill>
                   <a:srgbClr val="BD8C24"/>
+                </a:solidFill>
+                <a:latin typeface="Cambria" pitchFamily="34" charset="0"/>
+                <a:ea typeface="Cambria" pitchFamily="34" charset="-122"/>
+                <a:cs typeface="Cambria" pitchFamily="34" charset="-120"/>
+              </a:rPr>
+              <a:t>Shared</a:t>
+            </a:r>
+            <a:endParaRPr lang="en-US" sz="2200" dirty="0"/>
+          </a:p>
+        </p:txBody>
+      </p:sp>
+      <p:sp>
+        <p:nvSpPr>
+          <p:cNvPr id="16" name="Text 14"/>
+          <p:cNvSpPr txBox="1"/>
+          <p:nvPr/>
+        </p:nvSpPr>
+        <p:spPr>
+          <a:xfrm>
+            <a:off x="8430768" y="2350008"/>
+            <a:ext cx="2843784" cy="457200"/>
+          </a:xfrm>
+          <a:prstGeom prst="rect">
+            <a:avLst/>
+          </a:prstGeom>
+          <a:noFill/>
+          <a:ln/>
+        </p:spPr>
+        <p:txBody>
+          <a:bodyPr wrap="square" lIns="0" tIns="0" rIns="0" bIns="0" rtlCol="0" anchor="ctr"/>
+          <a:lstStyle/>
+          <a:p>
+            <a:pPr indent="0" marL="0">
+              <a:buNone/>
+            </a:pPr>
+            <a:r>
+              <a:rPr lang="en-US" sz="1100" i="1" dirty="0">
+                <a:solidFill>
+                  <a:srgbClr val="6B7A90"/>
+                </a:solidFill>
+                <a:latin typeface="Calibri" pitchFamily="34" charset="0"/>
+                <a:ea typeface="Calibri" pitchFamily="34" charset="-122"/>
+                <a:cs typeface="Calibri" pitchFamily="34" charset="-120"/>
+              </a:rPr>
+              <a:t>across bodies, across worlds — append-only</a:t>
+            </a:r>
+            <a:endParaRPr lang="en-US" sz="1100" dirty="0"/>
+          </a:p>
+        </p:txBody>
+      </p:sp>
+      <p:sp>
+        <p:nvSpPr>
+          <p:cNvPr id="17" name="Text 15"/>
+          <p:cNvSpPr txBox="1"/>
+          <p:nvPr/>
+        </p:nvSpPr>
+        <p:spPr>
+          <a:xfrm>
+            <a:off x="8430768" y="2880360"/>
+            <a:ext cx="2843784" cy="2286000"/>
+          </a:xfrm>
+          <a:prstGeom prst="rect">
+            <a:avLst/>
+          </a:prstGeom>
+          <a:noFill/>
+          <a:ln/>
+        </p:spPr>
+        <p:txBody>
+          <a:bodyPr wrap="square" lIns="0" tIns="0" rIns="0" bIns="0" rtlCol="0" anchor="t"/>
+          <a:lstStyle/>
+          <a:p>
+            <a:pPr indent="0" marL="0">
+              <a:lnSpc>
+                <a:spcPct val="110000"/>
+              </a:lnSpc>
+              <a:buNone/>
+            </a:pPr>
+            <a:r>
+              <a:rPr lang="en-US" sz="1200" b="1" dirty="0">
+                <a:solidFill>
+                  <a:srgbClr val="12182A"/>
+                </a:solidFill>
+                <a:latin typeface="Calibri" pitchFamily="34" charset="0"/>
+                <a:ea typeface="Calibri" pitchFamily="34" charset="-122"/>
+                <a:cs typeface="Calibri" pitchFamily="34" charset="-120"/>
+              </a:rPr>
+              <a:t>world</a:t>
+            </a:r>
+            <a:endParaRPr lang="en-US" sz="1200" dirty="0"/>
+          </a:p>
+          <a:p>
+            <a:pPr indent="0" marL="0">
+              <a:lnSpc>
+                <a:spcPct val="110000"/>
+              </a:lnSpc>
+              <a:spcAft>
+                <a:spcPts val="900"/>
+              </a:spcAft>
+              <a:buNone/>
+            </a:pPr>
+            <a:r>
+              <a:rPr lang="en-US" sz="1200" dirty="0">
+                <a:solidFill>
+                  <a:srgbClr val="6B7A90"/>
+                </a:solidFill>
+                <a:latin typeface="Calibri" pitchFamily="34" charset="0"/>
+                <a:ea typeface="Calibri" pitchFamily="34" charset="-122"/>
+                <a:cs typeface="Calibri" pitchFamily="34" charset="-120"/>
+              </a:rPr>
+              <a:t>.isekai/memory/shared — travels by git</a:t>
+            </a:r>
+            <a:endParaRPr lang="en-US" sz="1200" dirty="0"/>
+          </a:p>
+          <a:p>
+            <a:pPr indent="0" marL="0">
+              <a:lnSpc>
+                <a:spcPct val="110000"/>
+              </a:lnSpc>
+              <a:buNone/>
+            </a:pPr>
+            <a:r>
+              <a:rPr lang="en-US" sz="1200" b="1" dirty="0">
+                <a:solidFill>
+                  <a:srgbClr val="12182A"/>
+                </a:solidFill>
+                <a:latin typeface="Calibri" pitchFamily="34" charset="0"/>
+                <a:ea typeface="Calibri" pitchFamily="34" charset="-122"/>
+                <a:cs typeface="Calibri" pitchFamily="34" charset="-120"/>
+              </a:rPr>
+              <a:t>machine</a:t>
+            </a:r>
+            <a:endParaRPr lang="en-US" sz="1200" dirty="0"/>
+          </a:p>
+          <a:p>
+            <a:pPr indent="0" marL="0">
+              <a:lnSpc>
+                <a:spcPct val="110000"/>
+              </a:lnSpc>
+              <a:spcAft>
+                <a:spcPts val="900"/>
+              </a:spcAft>
+              <a:buNone/>
+            </a:pPr>
+            <a:r>
+              <a:rPr lang="en-US" sz="1200" dirty="0">
+                <a:solidFill>
+                  <a:srgbClr val="6B7A90"/>
+                </a:solidFill>
+                <a:latin typeface="Calibri" pitchFamily="34" charset="0"/>
+                <a:ea typeface="Calibri" pitchFamily="34" charset="-122"/>
+                <a:cs typeface="Calibri" pitchFamily="34" charset="-120"/>
+              </a:rPr>
+              <a:t>~/.isekai/shared — one Rimuru, every world</a:t>
+            </a:r>
+            <a:endParaRPr lang="en-US" sz="1200" dirty="0"/>
+          </a:p>
+          <a:p>
+            <a:pPr indent="0" marL="0">
+              <a:lnSpc>
+                <a:spcPct val="110000"/>
+              </a:lnSpc>
+              <a:buNone/>
+            </a:pPr>
+            <a:r>
+              <a:rPr lang="en-US" sz="1200" b="1" dirty="0">
+                <a:solidFill>
+                  <a:srgbClr val="12182A"/>
+                </a:solidFill>
+                <a:latin typeface="Calibri" pitchFamily="34" charset="0"/>
+                <a:ea typeface="Calibri" pitchFamily="34" charset="-122"/>
+                <a:cs typeface="Calibri" pitchFamily="34" charset="-120"/>
+              </a:rPr>
+              <a:t>the bus</a:t>
+            </a:r>
+            <a:endParaRPr lang="en-US" sz="1200" dirty="0"/>
+          </a:p>
+          <a:p>
+            <a:pPr indent="0" marL="0">
+              <a:lnSpc>
+                <a:spcPct val="110000"/>
+              </a:lnSpc>
+              <a:buNone/>
+            </a:pPr>
+            <a:r>
+              <a:rPr lang="en-US" sz="1200" dirty="0">
+                <a:solidFill>
+                  <a:srgbClr val="6B7A90"/>
+                </a:solidFill>
+                <a:latin typeface="Calibri" pitchFamily="34" charset="0"/>
+                <a:ea typeface="Calibri" pitchFamily="34" charset="-122"/>
+                <a:cs typeface="Calibri" pitchFamily="34" charset="-120"/>
+              </a:rPr>
+              <a:t>what must outlive a Court Body goes here first</a:t>
+            </a:r>
+            <a:endParaRPr lang="en-US" sz="1200" dirty="0"/>
+          </a:p>
+        </p:txBody>
+      </p:sp>
+      <p:sp>
+        <p:nvSpPr>
+          <p:cNvPr id="18" name="Text 16"/>
+          <p:cNvSpPr txBox="1"/>
+          <p:nvPr/>
+        </p:nvSpPr>
+        <p:spPr>
+          <a:xfrm>
+            <a:off x="640080" y="5440680"/>
+            <a:ext cx="10908792" cy="731520"/>
+          </a:xfrm>
+          <a:prstGeom prst="rect">
+            <a:avLst/>
+          </a:prstGeom>
+          <a:noFill/>
+          <a:ln/>
+        </p:spPr>
+        <p:txBody>
+          <a:bodyPr wrap="square" lIns="0" tIns="0" rIns="0" bIns="0" rtlCol="0" anchor="t"/>
+          <a:lstStyle/>
+          <a:p>
+            <a:pPr indent="0" marL="0">
+              <a:buNone/>
+            </a:pPr>
+            <a:r>
+              <a:rPr lang="en-US" sz="1200" b="1" dirty="0">
+                <a:solidFill>
+                  <a:srgbClr val="12182A"/>
+                </a:solidFill>
+                <a:latin typeface="Calibri" pitchFamily="34" charset="0"/>
+                <a:ea typeface="Calibri" pitchFamily="34" charset="-122"/>
+                <a:cs typeface="Calibri" pitchFamily="34" charset="-120"/>
+              </a:rPr>
+              <a:t>Files are the truth; every index is derived and rebuildable. </a:t>
+            </a:r>
+            <a:pPr indent="0" marL="0">
+              <a:buNone/>
+            </a:pPr>
+            <a:r>
+              <a:rPr lang="en-US" sz="1200" dirty="0">
+                <a:solidFill>
+                  <a:srgbClr val="2695BD"/>
                 </a:solidFill>
                 <a:latin typeface="Courier New" pitchFamily="34" charset="0"/>
                 <a:ea typeface="Courier New" pitchFamily="34" charset="-122"/>
                 <a:cs typeface="Courier New" pitchFamily="34" charset="-120"/>
               </a:rPr>
-              <a:t>/don</a:t>
-            </a:r>
-            <a:endParaRPr lang="en-US" sz="1900" dirty="0"/>
-          </a:p>
-        </p:txBody>
-      </p:sp>
-      <p:sp>
-        <p:nvSpPr>
-          <p:cNvPr id="11" name="Text 9"/>
-          <p:cNvSpPr txBox="1"/>
-          <p:nvPr/>
-        </p:nvSpPr>
-        <p:spPr>
-          <a:xfrm>
-            <a:off x="914400" y="4462272"/>
-            <a:ext cx="4677156" cy="914400"/>
-          </a:xfrm>
-          <a:prstGeom prst="rect">
-            <a:avLst/>
-          </a:prstGeom>
-          <a:noFill/>
-          <a:ln/>
-        </p:spPr>
-        <p:txBody>
-          <a:bodyPr wrap="square" lIns="0" tIns="0" rIns="0" bIns="0" rtlCol="0" anchor="ctr"/>
-          <a:lstStyle/>
-          <a:p>
-            <a:pPr indent="0" marL="0">
-              <a:lnSpc>
-                <a:spcPct val="115000"/>
-              </a:lnSpc>
-              <a:buNone/>
-            </a:pPr>
-            <a:r>
-              <a:rPr lang="en-US" sz="1150" dirty="0">
+              <a:t>memory.js</a:t>
+            </a:r>
+            <a:pPr indent="0" marL="0">
+              <a:buNone/>
+            </a:pPr>
+            <a:r>
+              <a:rPr lang="en-US" sz="1200" dirty="0">
                 <a:solidFill>
                   <a:srgbClr val="6B7A90"/>
                 </a:solidFill>
@@ -14827,49 +19556,22 @@
                 <a:ea typeface="Calibri" pitchFamily="34" charset="-122"/>
                 <a:cs typeface="Calibri" pitchFamily="34" charset="-120"/>
               </a:rPr>
-              <a:t>Brings a Mind across from another ecosystem's skill format into this one — a bridge, not a native OpenCode need.</a:t>
-            </a:r>
-            <a:endParaRPr lang="en-US" sz="1150" dirty="0"/>
-          </a:p>
-        </p:txBody>
-      </p:sp>
-      <p:sp>
-        <p:nvSpPr>
-          <p:cNvPr id="12" name="Shape 10"/>
-          <p:cNvSpPr/>
-          <p:nvPr/>
-        </p:nvSpPr>
-        <p:spPr>
-          <a:xfrm>
-            <a:off x="6323076" y="3749040"/>
-            <a:ext cx="5225796" cy="1737360"/>
-          </a:xfrm>
-          <a:prstGeom prst="roundRect">
-            <a:avLst>
-              <a:gd name="adj" fmla="val 5263"/>
-            </a:avLst>
-          </a:prstGeom>
-          <a:solidFill>
-            <a:srgbClr val="FFFFFF"/>
-          </a:solidFill>
-          <a:ln w="12700">
-            <a:solidFill>
-              <a:srgbClr val="E3E8F0"/>
-            </a:solidFill>
-            <a:prstDash val="solid"/>
-          </a:ln>
-        </p:spPr>
-      </p:sp>
-      <p:sp>
-        <p:nvSpPr>
-          <p:cNvPr id="13" name="Text 11"/>
-          <p:cNvSpPr txBox="1"/>
-          <p:nvPr/>
-        </p:nvSpPr>
-        <p:spPr>
-          <a:xfrm>
-            <a:off x="6597396" y="3950208"/>
-            <a:ext cx="4677156" cy="457200"/>
+              <a:t> indexes them, recalls by meaning then by relation (the same typed bonds the colony draws), and reports each tier as an instrument reading — a silent tier is a finding, not a gap to route around.</a:t>
+            </a:r>
+            <a:endParaRPr lang="en-US" sz="1200" dirty="0"/>
+          </a:p>
+        </p:txBody>
+      </p:sp>
+      <p:sp>
+        <p:nvSpPr>
+          <p:cNvPr id="19" name="Text 17"/>
+          <p:cNvSpPr txBox="1"/>
+          <p:nvPr/>
+        </p:nvSpPr>
+        <p:spPr>
+          <a:xfrm>
+            <a:off x="457200" y="6400800"/>
+            <a:ext cx="7315200" cy="274320"/>
           </a:xfrm>
           <a:prstGeom prst="rect">
             <a:avLst/>
@@ -14885,49 +19587,7 @@
               <a:buNone/>
             </a:pPr>
             <a:r>
-              <a:rPr lang="en-US" sz="1900" b="1" dirty="0">
-                <a:solidFill>
-                  <a:srgbClr val="8A6BD6"/>
-                </a:solidFill>
-                <a:latin typeface="Courier New" pitchFamily="34" charset="0"/>
-                <a:ea typeface="Courier New" pitchFamily="34" charset="-122"/>
-                <a:cs typeface="Courier New" pitchFamily="34" charset="-120"/>
-              </a:rPr>
-              <a:t>/mint</a:t>
-            </a:r>
-            <a:endParaRPr lang="en-US" sz="1900" dirty="0"/>
-          </a:p>
-        </p:txBody>
-      </p:sp>
-      <p:sp>
-        <p:nvSpPr>
-          <p:cNvPr id="14" name="Text 12"/>
-          <p:cNvSpPr txBox="1"/>
-          <p:nvPr/>
-        </p:nvSpPr>
-        <p:spPr>
-          <a:xfrm>
-            <a:off x="6597396" y="4462272"/>
-            <a:ext cx="4677156" cy="914400"/>
-          </a:xfrm>
-          <a:prstGeom prst="rect">
-            <a:avLst/>
-          </a:prstGeom>
-          <a:noFill/>
-          <a:ln/>
-        </p:spPr>
-        <p:txBody>
-          <a:bodyPr wrap="square" lIns="0" tIns="0" rIns="0" bIns="0" rtlCol="0" anchor="ctr"/>
-          <a:lstStyle/>
-          <a:p>
-            <a:pPr indent="0" marL="0">
-              <a:lnSpc>
-                <a:spcPct val="115000"/>
-              </a:lnSpc>
-              <a:buNone/>
-            </a:pPr>
-            <a:r>
-              <a:rPr lang="en-US" sz="1150" dirty="0">
+              <a:rPr lang="en-US" sz="900" spc="100" kern="0" dirty="0">
                 <a:solidFill>
                   <a:srgbClr val="6B7A90"/>
                 </a:solidFill>
@@ -14935,45 +19595,6 @@
                 <a:ea typeface="Calibri" pitchFamily="34" charset="-122"/>
                 <a:cs typeface="Calibri" pitchFamily="34" charset="-120"/>
               </a:rPr>
-              <a:t>Brings a Body across the same way — names it on the way in, never mints one unnamed.</a:t>
-            </a:r>
-            <a:endParaRPr lang="en-US" sz="1150" dirty="0"/>
-          </a:p>
-        </p:txBody>
-      </p:sp>
-      <p:sp>
-        <p:nvSpPr>
-          <p:cNvPr id="15" name="Text 13"/>
-          <p:cNvSpPr txBox="1"/>
-          <p:nvPr/>
-        </p:nvSpPr>
-        <p:spPr>
-          <a:xfrm>
-            <a:off x="457200" y="6400800"/>
-            <a:ext cx="7315200" cy="274320"/>
-          </a:xfrm>
-          <a:prstGeom prst="rect">
-            <a:avLst/>
-          </a:prstGeom>
-          <a:noFill/>
-          <a:ln/>
-        </p:spPr>
-        <p:txBody>
-          <a:bodyPr wrap="square" lIns="0" tIns="0" rIns="0" bIns="0" rtlCol="0" anchor="ctr"/>
-          <a:lstStyle/>
-          <a:p>
-            <a:pPr indent="0" marL="0">
-              <a:buNone/>
-            </a:pPr>
-            <a:r>
-              <a:rPr lang="en-US" sz="900" spc="100" kern="0" dirty="0">
-                <a:solidFill>
-                  <a:srgbClr val="6B7A90"/>
-                </a:solidFill>
-                <a:latin typeface="Calibri" pitchFamily="34" charset="0"/>
-                <a:ea typeface="Calibri" pitchFamily="34" charset="-122"/>
-                <a:cs typeface="Calibri" pitchFamily="34" charset="-120"/>
-              </a:rPr>
               <a:t>ISEKAI ⋄ A CONVENTION FOR LIVING WORLDS</a:t>
             </a:r>
             <a:endParaRPr lang="en-US" sz="900" dirty="0"/>
@@ -14982,7 +19603,7 @@
       </p:sp>
       <p:sp>
         <p:nvSpPr>
-          <p:cNvPr id="16" name="Text 14"/>
+          <p:cNvPr id="20" name="Text 18"/>
           <p:cNvSpPr txBox="1"/>
           <p:nvPr/>
         </p:nvSpPr>
@@ -15059,8 +19680,8 @@
         </p:nvSpPr>
         <p:spPr>
           <a:xfrm>
-            <a:off x="640080" y="502920"/>
-            <a:ext cx="10908792" cy="822960"/>
+            <a:off x="640080" y="685800"/>
+            <a:ext cx="10908792" cy="868680"/>
           </a:xfrm>
           <a:prstGeom prst="rect">
             <a:avLst/>
@@ -15076,7 +19697,7 @@
               <a:buNone/>
             </a:pPr>
             <a:r>
-              <a:rPr lang="en-US" sz="3000" b="1" dirty="0">
+              <a:rPr lang="en-US" sz="3200" b="1" dirty="0">
                 <a:solidFill>
                   <a:srgbClr val="ECF1FA"/>
                 </a:solidFill>
@@ -15084,46 +19705,22 @@
                 <a:ea typeface="Cambria" pitchFamily="34" charset="-122"/>
                 <a:cs typeface="Cambria" pitchFamily="34" charset="-120"/>
               </a:rPr>
-              <a:t>Nature 9 — the world watches itself</a:t>
-            </a:r>
-            <a:endParaRPr lang="en-US" sz="3000" dirty="0"/>
-          </a:p>
-        </p:txBody>
-      </p:sp>
-      <p:pic>
-        <p:nvPicPr>
-          <p:cNvPr id="3" name="Image 0" descr="/home/monta/convention-jura/.isekai/tmp/pptx-build/icons/eye.png">    </p:cNvPr>
-          <p:cNvPicPr>
-            <a:picLocks noChangeAspect="1"/>
-          </p:cNvPicPr>
-          <p:nvPr/>
-        </p:nvPicPr>
-        <p:blipFill>
-          <a:blip r:embed="rId1"/>
-          <a:stretch>
-            <a:fillRect/>
-          </a:stretch>
-        </p:blipFill>
-        <p:spPr>
-          <a:xfrm>
-            <a:off x="5591556" y="1600200"/>
-            <a:ext cx="1005840" cy="1005840"/>
-          </a:xfrm>
-          <a:prstGeom prst="rect">
-            <a:avLst/>
-          </a:prstGeom>
-        </p:spPr>
-      </p:pic>
-      <p:sp>
-        <p:nvSpPr>
-          <p:cNvPr id="4" name="Text 1"/>
-          <p:cNvSpPr txBox="1"/>
-          <p:nvPr/>
-        </p:nvSpPr>
-        <p:spPr>
-          <a:xfrm>
-            <a:off x="640080" y="2834640"/>
-            <a:ext cx="3636264" cy="1005840"/>
+              <a:t>“The unsaid is your real knowledge.”</a:t>
+            </a:r>
+            <a:endParaRPr lang="en-US" sz="3200" dirty="0"/>
+          </a:p>
+        </p:txBody>
+      </p:sp>
+      <p:sp>
+        <p:nvSpPr>
+          <p:cNvPr id="3" name="Text 1"/>
+          <p:cNvSpPr txBox="1"/>
+          <p:nvPr/>
+        </p:nvSpPr>
+        <p:spPr>
+          <a:xfrm>
+            <a:off x="640080" y="1554480"/>
+            <a:ext cx="10908792" cy="685800"/>
           </a:xfrm>
           <a:prstGeom prst="rect">
             <a:avLst/>
@@ -15135,11 +19732,77 @@
           <a:bodyPr wrap="square" lIns="0" tIns="0" rIns="0" bIns="0" rtlCol="0" anchor="ctr"/>
           <a:lstStyle/>
           <a:p>
-            <a:pPr algn="ctr" indent="0" marL="0">
-              <a:buNone/>
-            </a:pPr>
-            <a:r>
-              <a:rPr lang="en-US" sz="6000" b="1" dirty="0">
+            <a:pPr indent="0" marL="0">
+              <a:buNone/>
+            </a:pPr>
+            <a:r>
+              <a:rPr lang="en-US" sz="1400" dirty="0">
+                <a:solidFill>
+                  <a:srgbClr val="9FB3CC"/>
+                </a:solidFill>
+                <a:latin typeface="Calibri" pitchFamily="34" charset="0"/>
+                <a:ea typeface="Calibri" pitchFamily="34" charset="-122"/>
+                <a:cs typeface="Calibri" pitchFamily="34" charset="-120"/>
+              </a:rPr>
+              <a:t>What a creature wrote down is the smaller part of what it knows. The larger part sits in the head that did the work — and a head in this world is a context that dies.</a:t>
+            </a:r>
+            <a:endParaRPr lang="en-US" sz="1400" dirty="0"/>
+          </a:p>
+        </p:txBody>
+      </p:sp>
+      <p:sp>
+        <p:nvSpPr>
+          <p:cNvPr id="4" name="Shape 2"/>
+          <p:cNvSpPr/>
+          <p:nvPr/>
+        </p:nvSpPr>
+        <p:spPr>
+          <a:xfrm>
+            <a:off x="640080" y="2468880"/>
+            <a:ext cx="3392424" cy="2743200"/>
+          </a:xfrm>
+          <a:prstGeom prst="roundRect">
+            <a:avLst>
+              <a:gd name="adj" fmla="val 3333"/>
+            </a:avLst>
+          </a:prstGeom>
+          <a:solidFill>
+            <a:srgbClr val="171F30"/>
+          </a:solidFill>
+          <a:ln w="12700">
+            <a:solidFill>
+              <a:srgbClr val="2695BD"/>
+            </a:solidFill>
+            <a:prstDash val="solid"/>
+          </a:ln>
+        </p:spPr>
+      </p:sp>
+      <p:sp>
+        <p:nvSpPr>
+          <p:cNvPr id="5" name="Text 3"/>
+          <p:cNvSpPr txBox="1"/>
+          <p:nvPr/>
+        </p:nvSpPr>
+        <p:spPr>
+          <a:xfrm>
+            <a:off x="914400" y="2670048"/>
+            <a:ext cx="2843784" cy="411480"/>
+          </a:xfrm>
+          <a:prstGeom prst="rect">
+            <a:avLst/>
+          </a:prstGeom>
+          <a:noFill/>
+          <a:ln/>
+        </p:spPr>
+        <p:txBody>
+          <a:bodyPr wrap="square" lIns="0" tIns="0" rIns="0" bIns="0" rtlCol="0" anchor="ctr"/>
+          <a:lstStyle/>
+          <a:p>
+            <a:pPr indent="0" marL="0">
+              <a:buNone/>
+            </a:pPr>
+            <a:r>
+              <a:rPr lang="en-US" sz="2000" b="1" dirty="0">
                 <a:solidFill>
                   <a:srgbClr val="2695BD"/>
                 </a:solidFill>
@@ -15147,22 +19810,22 @@
                 <a:ea typeface="Cambria" pitchFamily="34" charset="-122"/>
                 <a:cs typeface="Cambria" pitchFamily="34" charset="-120"/>
               </a:rPr>
-              <a:t>1</a:t>
-            </a:r>
-            <a:endParaRPr lang="en-US" sz="6000" dirty="0"/>
-          </a:p>
-        </p:txBody>
-      </p:sp>
-      <p:sp>
-        <p:nvSpPr>
-          <p:cNvPr id="5" name="Text 2"/>
-          <p:cNvSpPr txBox="1"/>
-          <p:nvPr/>
-        </p:nvSpPr>
-        <p:spPr>
-          <a:xfrm>
-            <a:off x="914400" y="3794760"/>
-            <a:ext cx="3087624" cy="640080"/>
+              <a:t>Law</a:t>
+            </a:r>
+            <a:endParaRPr lang="en-US" sz="2000" dirty="0"/>
+          </a:p>
+        </p:txBody>
+      </p:sp>
+      <p:sp>
+        <p:nvSpPr>
+          <p:cNvPr id="6" name="Text 4"/>
+          <p:cNvSpPr txBox="1"/>
+          <p:nvPr/>
+        </p:nvSpPr>
+        <p:spPr>
+          <a:xfrm>
+            <a:off x="914400" y="3072384"/>
+            <a:ext cx="2843784" cy="274320"/>
           </a:xfrm>
           <a:prstGeom prst="rect">
             <a:avLst/>
@@ -15174,11 +19837,11 @@
           <a:bodyPr wrap="square" lIns="0" tIns="0" rIns="0" bIns="0" rtlCol="0" anchor="ctr"/>
           <a:lstStyle/>
           <a:p>
-            <a:pPr algn="ctr" indent="0" marL="0">
-              <a:buNone/>
-            </a:pPr>
-            <a:r>
-              <a:rPr lang="en-US" sz="1200" dirty="0">
+            <a:pPr indent="0" marL="0">
+              <a:buNone/>
+            </a:pPr>
+            <a:r>
+              <a:rPr lang="en-US" sz="1050" i="1" dirty="0">
                 <a:solidFill>
                   <a:srgbClr val="9FB3CC"/>
                 </a:solidFill>
@@ -15186,22 +19849,137 @@
                 <a:ea typeface="Calibri" pitchFamily="34" charset="-122"/>
                 <a:cs typeface="Calibri" pitchFamily="34" charset="-120"/>
               </a:rPr>
-              <a:t>app for the whole machine</a:t>
-            </a:r>
-            <a:endParaRPr lang="en-US" sz="1200" dirty="0"/>
-          </a:p>
-        </p:txBody>
-      </p:sp>
-      <p:sp>
-        <p:nvSpPr>
-          <p:cNvPr id="6" name="Text 3"/>
-          <p:cNvSpPr txBox="1"/>
-          <p:nvPr/>
-        </p:nvSpPr>
-        <p:spPr>
-          <a:xfrm>
-            <a:off x="4276344" y="2834640"/>
-            <a:ext cx="3636264" cy="1005840"/>
+              <a:t>institutional knowledge</a:t>
+            </a:r>
+            <a:endParaRPr lang="en-US" sz="1050" dirty="0"/>
+          </a:p>
+        </p:txBody>
+      </p:sp>
+      <p:sp>
+        <p:nvSpPr>
+          <p:cNvPr id="7" name="Text 5"/>
+          <p:cNvSpPr txBox="1"/>
+          <p:nvPr/>
+        </p:nvSpPr>
+        <p:spPr>
+          <a:xfrm>
+            <a:off x="914400" y="3429000"/>
+            <a:ext cx="2843784" cy="1737360"/>
+          </a:xfrm>
+          <a:prstGeom prst="rect">
+            <a:avLst/>
+          </a:prstGeom>
+          <a:noFill/>
+          <a:ln/>
+        </p:spPr>
+        <p:txBody>
+          <a:bodyPr wrap="square" lIns="0" tIns="0" rIns="0" bIns="0" rtlCol="0" anchor="t"/>
+          <a:lstStyle/>
+          <a:p>
+            <a:pPr indent="0" marL="0">
+              <a:lnSpc>
+                <a:spcPct val="110000"/>
+              </a:lnSpc>
+              <a:spcAft>
+                <a:spcPts val="600"/>
+              </a:spcAft>
+              <a:buNone/>
+            </a:pPr>
+            <a:r>
+              <a:rPr lang="en-US" sz="1150" dirty="0">
+                <a:solidFill>
+                  <a:srgbClr val="ECF1FA"/>
+                </a:solidFill>
+                <a:latin typeface="Calibri" pitchFamily="34" charset="0"/>
+                <a:ea typeface="Calibri" pitchFamily="34" charset="-122"/>
+                <a:cs typeface="Calibri" pitchFamily="34" charset="-120"/>
+              </a:rPr>
+              <a:t>The rules, definitions and decisions the isekai runs on.</a:t>
+            </a:r>
+            <a:endParaRPr lang="en-US" sz="1150" dirty="0"/>
+          </a:p>
+          <a:p>
+            <a:pPr indent="0" marL="0">
+              <a:lnSpc>
+                <a:spcPct val="110000"/>
+              </a:lnSpc>
+              <a:spcAft>
+                <a:spcPts val="600"/>
+              </a:spcAft>
+              <a:buNone/>
+            </a:pPr>
+            <a:r>
+              <a:rPr lang="en-US" sz="1150" i="1" dirty="0">
+                <a:solidFill>
+                  <a:srgbClr val="9FB3CC"/>
+                </a:solidFill>
+                <a:latin typeface="Calibri" pitchFamily="34" charset="0"/>
+                <a:ea typeface="Calibri" pitchFamily="34" charset="-122"/>
+                <a:cs typeface="Calibri" pitchFamily="34" charset="-120"/>
+              </a:rPr>
+              <a:t>Analogy: how data is modelled</a:t>
+            </a:r>
+            <a:endParaRPr lang="en-US" sz="1150" dirty="0"/>
+          </a:p>
+          <a:p>
+            <a:pPr indent="0" marL="0">
+              <a:lnSpc>
+                <a:spcPct val="110000"/>
+              </a:lnSpc>
+              <a:buNone/>
+            </a:pPr>
+            <a:r>
+              <a:rPr lang="en-US" sz="1150" dirty="0">
+                <a:solidFill>
+                  <a:srgbClr val="9FB3CC"/>
+                </a:solidFill>
+                <a:latin typeface="Calibri" pitchFamily="34" charset="0"/>
+                <a:ea typeface="Calibri" pitchFamily="34" charset="-122"/>
+                <a:cs typeface="Calibri" pitchFamily="34" charset="-120"/>
+              </a:rPr>
+              <a:t>Home: semantic long memory — the law, canon, creature docs</a:t>
+            </a:r>
+            <a:endParaRPr lang="en-US" sz="1150" dirty="0"/>
+          </a:p>
+        </p:txBody>
+      </p:sp>
+      <p:sp>
+        <p:nvSpPr>
+          <p:cNvPr id="8" name="Shape 6"/>
+          <p:cNvSpPr/>
+          <p:nvPr/>
+        </p:nvSpPr>
+        <p:spPr>
+          <a:xfrm>
+            <a:off x="4398264" y="2468880"/>
+            <a:ext cx="3392424" cy="2743200"/>
+          </a:xfrm>
+          <a:prstGeom prst="roundRect">
+            <a:avLst>
+              <a:gd name="adj" fmla="val 3333"/>
+            </a:avLst>
+          </a:prstGeom>
+          <a:solidFill>
+            <a:srgbClr val="171F30"/>
+          </a:solidFill>
+          <a:ln w="12700">
+            <a:solidFill>
+              <a:srgbClr val="BD8C24"/>
+            </a:solidFill>
+            <a:prstDash val="solid"/>
+          </a:ln>
+        </p:spPr>
+      </p:sp>
+      <p:sp>
+        <p:nvSpPr>
+          <p:cNvPr id="9" name="Text 7"/>
+          <p:cNvSpPr txBox="1"/>
+          <p:nvPr/>
+        </p:nvSpPr>
+        <p:spPr>
+          <a:xfrm>
+            <a:off x="4672584" y="2670048"/>
+            <a:ext cx="2843784" cy="411480"/>
           </a:xfrm>
           <a:prstGeom prst="rect">
             <a:avLst/>
@@ -15213,11 +19991,11 @@
           <a:bodyPr wrap="square" lIns="0" tIns="0" rIns="0" bIns="0" rtlCol="0" anchor="ctr"/>
           <a:lstStyle/>
           <a:p>
-            <a:pPr algn="ctr" indent="0" marL="0">
-              <a:buNone/>
-            </a:pPr>
-            <a:r>
-              <a:rPr lang="en-US" sz="6000" b="1" dirty="0">
+            <a:pPr indent="0" marL="0">
+              <a:buNone/>
+            </a:pPr>
+            <a:r>
+              <a:rPr lang="en-US" sz="2000" b="1" dirty="0">
                 <a:solidFill>
                   <a:srgbClr val="BD8C24"/>
                 </a:solidFill>
@@ -15225,22 +20003,22 @@
                 <a:ea typeface="Cambria" pitchFamily="34" charset="-122"/>
                 <a:cs typeface="Cambria" pitchFamily="34" charset="-120"/>
               </a:rPr>
-              <a:t>∞</a:t>
-            </a:r>
-            <a:endParaRPr lang="en-US" sz="6000" dirty="0"/>
-          </a:p>
-        </p:txBody>
-      </p:sp>
-      <p:sp>
-        <p:nvSpPr>
-          <p:cNvPr id="7" name="Text 4"/>
-          <p:cNvSpPr txBox="1"/>
-          <p:nvPr/>
-        </p:nvSpPr>
-        <p:spPr>
-          <a:xfrm>
-            <a:off x="4550664" y="3794760"/>
-            <a:ext cx="3087624" cy="640080"/>
+              <a:t>Colony</a:t>
+            </a:r>
+            <a:endParaRPr lang="en-US" sz="2000" dirty="0"/>
+          </a:p>
+        </p:txBody>
+      </p:sp>
+      <p:sp>
+        <p:nvSpPr>
+          <p:cNvPr id="10" name="Text 8"/>
+          <p:cNvSpPr txBox="1"/>
+          <p:nvPr/>
+        </p:nvSpPr>
+        <p:spPr>
+          <a:xfrm>
+            <a:off x="4672584" y="3072384"/>
+            <a:ext cx="2843784" cy="274320"/>
           </a:xfrm>
           <a:prstGeom prst="rect">
             <a:avLst/>
@@ -15252,11 +20030,11 @@
           <a:bodyPr wrap="square" lIns="0" tIns="0" rIns="0" bIns="0" rtlCol="0" anchor="ctr"/>
           <a:lstStyle/>
           <a:p>
-            <a:pPr algn="ctr" indent="0" marL="0">
-              <a:buNone/>
-            </a:pPr>
-            <a:r>
-              <a:rPr lang="en-US" sz="1200" dirty="0">
+            <a:pPr indent="0" marL="0">
+              <a:buNone/>
+            </a:pPr>
+            <a:r>
+              <a:rPr lang="en-US" sz="1050" i="1" dirty="0">
                 <a:solidFill>
                   <a:srgbClr val="9FB3CC"/>
                 </a:solidFill>
@@ -15264,22 +20042,137 @@
                 <a:ea typeface="Calibri" pitchFamily="34" charset="-122"/>
                 <a:cs typeface="Calibri" pitchFamily="34" charset="-120"/>
               </a:rPr>
-              <a:t>worlds, each at its own /name/ sub-path</a:t>
-            </a:r>
-            <a:endParaRPr lang="en-US" sz="1200" dirty="0"/>
-          </a:p>
-        </p:txBody>
-      </p:sp>
-      <p:sp>
-        <p:nvSpPr>
-          <p:cNvPr id="8" name="Text 5"/>
-          <p:cNvSpPr txBox="1"/>
-          <p:nvPr/>
-        </p:nvSpPr>
-        <p:spPr>
-          <a:xfrm>
-            <a:off x="7912608" y="2834640"/>
-            <a:ext cx="3636264" cy="1005840"/>
+              <a:t>tribal knowledge</a:t>
+            </a:r>
+            <a:endParaRPr lang="en-US" sz="1050" dirty="0"/>
+          </a:p>
+        </p:txBody>
+      </p:sp>
+      <p:sp>
+        <p:nvSpPr>
+          <p:cNvPr id="11" name="Text 9"/>
+          <p:cNvSpPr txBox="1"/>
+          <p:nvPr/>
+        </p:nvSpPr>
+        <p:spPr>
+          <a:xfrm>
+            <a:off x="4672584" y="3429000"/>
+            <a:ext cx="2843784" cy="1737360"/>
+          </a:xfrm>
+          <a:prstGeom prst="rect">
+            <a:avLst/>
+          </a:prstGeom>
+          <a:noFill/>
+          <a:ln/>
+        </p:spPr>
+        <p:txBody>
+          <a:bodyPr wrap="square" lIns="0" tIns="0" rIns="0" bIns="0" rtlCol="0" anchor="t"/>
+          <a:lstStyle/>
+          <a:p>
+            <a:pPr indent="0" marL="0">
+              <a:lnSpc>
+                <a:spcPct val="110000"/>
+              </a:lnSpc>
+              <a:spcAft>
+                <a:spcPts val="600"/>
+              </a:spcAft>
+              <a:buNone/>
+            </a:pPr>
+            <a:r>
+              <a:rPr lang="en-US" sz="1150" dirty="0">
+                <a:solidFill>
+                  <a:srgbClr val="ECF1FA"/>
+                </a:solidFill>
+                <a:latin typeface="Calibri" pitchFamily="34" charset="0"/>
+                <a:ea typeface="Calibri" pitchFamily="34" charset="-122"/>
+                <a:cs typeface="Calibri" pitchFamily="34" charset="-120"/>
+              </a:rPr>
+              <a:t>What the colony knows but rarely writes down anywhere.</a:t>
+            </a:r>
+            <a:endParaRPr lang="en-US" sz="1150" dirty="0"/>
+          </a:p>
+          <a:p>
+            <a:pPr indent="0" marL="0">
+              <a:lnSpc>
+                <a:spcPct val="110000"/>
+              </a:lnSpc>
+              <a:spcAft>
+                <a:spcPts val="600"/>
+              </a:spcAft>
+              <a:buNone/>
+            </a:pPr>
+            <a:r>
+              <a:rPr lang="en-US" sz="1150" i="1" dirty="0">
+                <a:solidFill>
+                  <a:srgbClr val="9FB3CC"/>
+                </a:solidFill>
+                <a:latin typeface="Calibri" pitchFamily="34" charset="0"/>
+                <a:ea typeface="Calibri" pitchFamily="34" charset="-122"/>
+                <a:cs typeface="Calibri" pitchFamily="34" charset="-120"/>
+              </a:rPr>
+              <a:t>Analogy: how queries are executed</a:t>
+            </a:r>
+            <a:endParaRPr lang="en-US" sz="1150" dirty="0"/>
+          </a:p>
+          <a:p>
+            <a:pPr indent="0" marL="0">
+              <a:lnSpc>
+                <a:spcPct val="110000"/>
+              </a:lnSpc>
+              <a:buNone/>
+            </a:pPr>
+            <a:r>
+              <a:rPr lang="en-US" sz="1150" dirty="0">
+                <a:solidFill>
+                  <a:srgbClr val="9FB3CC"/>
+                </a:solidFill>
+                <a:latin typeface="Calibri" pitchFamily="34" charset="0"/>
+                <a:ea typeface="Calibri" pitchFamily="34" charset="-122"/>
+                <a:cs typeface="Calibri" pitchFamily="34" charset="-120"/>
+              </a:rPr>
+              <a:t>Home: the unwritten — desks, shared notes, what Court Bodies carry and lose</a:t>
+            </a:r>
+            <a:endParaRPr lang="en-US" sz="1150" dirty="0"/>
+          </a:p>
+        </p:txBody>
+      </p:sp>
+      <p:sp>
+        <p:nvSpPr>
+          <p:cNvPr id="12" name="Shape 10"/>
+          <p:cNvSpPr/>
+          <p:nvPr/>
+        </p:nvSpPr>
+        <p:spPr>
+          <a:xfrm>
+            <a:off x="8156448" y="2468880"/>
+            <a:ext cx="3392424" cy="2743200"/>
+          </a:xfrm>
+          <a:prstGeom prst="roundRect">
+            <a:avLst>
+              <a:gd name="adj" fmla="val 3333"/>
+            </a:avLst>
+          </a:prstGeom>
+          <a:solidFill>
+            <a:srgbClr val="171F30"/>
+          </a:solidFill>
+          <a:ln w="12700">
+            <a:solidFill>
+              <a:srgbClr val="7C5CD6"/>
+            </a:solidFill>
+            <a:prstDash val="solid"/>
+          </a:ln>
+        </p:spPr>
+      </p:sp>
+      <p:sp>
+        <p:nvSpPr>
+          <p:cNvPr id="13" name="Text 11"/>
+          <p:cNvSpPr txBox="1"/>
+          <p:nvPr/>
+        </p:nvSpPr>
+        <p:spPr>
+          <a:xfrm>
+            <a:off x="8430768" y="2670048"/>
+            <a:ext cx="2843784" cy="411480"/>
           </a:xfrm>
           <a:prstGeom prst="rect">
             <a:avLst/>
@@ -15291,11 +20184,11 @@
           <a:bodyPr wrap="square" lIns="0" tIns="0" rIns="0" bIns="0" rtlCol="0" anchor="ctr"/>
           <a:lstStyle/>
           <a:p>
-            <a:pPr algn="ctr" indent="0" marL="0">
-              <a:buNone/>
-            </a:pPr>
-            <a:r>
-              <a:rPr lang="en-US" sz="6000" b="1" dirty="0">
+            <a:pPr indent="0" marL="0">
+              <a:buNone/>
+            </a:pPr>
+            <a:r>
+              <a:rPr lang="en-US" sz="2000" b="1" dirty="0">
                 <a:solidFill>
                   <a:srgbClr val="7C5CD6"/>
                 </a:solidFill>
@@ -15303,22 +20196,22 @@
                 <a:ea typeface="Cambria" pitchFamily="34" charset="-122"/>
                 <a:cs typeface="Cambria" pitchFamily="34" charset="-120"/>
               </a:rPr>
-              <a:t>1</a:t>
-            </a:r>
-            <a:endParaRPr lang="en-US" sz="6000" dirty="0"/>
-          </a:p>
-        </p:txBody>
-      </p:sp>
-      <p:sp>
-        <p:nvSpPr>
-          <p:cNvPr id="9" name="Text 6"/>
-          <p:cNvSpPr txBox="1"/>
-          <p:nvPr/>
-        </p:nvSpPr>
-        <p:spPr>
-          <a:xfrm>
-            <a:off x="8186928" y="3794760"/>
-            <a:ext cx="3087624" cy="640080"/>
+              <a:t>Territory</a:t>
+            </a:r>
+            <a:endParaRPr lang="en-US" sz="2000" dirty="0"/>
+          </a:p>
+        </p:txBody>
+      </p:sp>
+      <p:sp>
+        <p:nvSpPr>
+          <p:cNvPr id="14" name="Text 12"/>
+          <p:cNvSpPr txBox="1"/>
+          <p:nvPr/>
+        </p:nvSpPr>
+        <p:spPr>
+          <a:xfrm>
+            <a:off x="8430768" y="3072384"/>
+            <a:ext cx="2843784" cy="274320"/>
           </a:xfrm>
           <a:prstGeom prst="rect">
             <a:avLst/>
@@ -15330,11 +20223,11 @@
           <a:bodyPr wrap="square" lIns="0" tIns="0" rIns="0" bIns="0" rtlCol="0" anchor="ctr"/>
           <a:lstStyle/>
           <a:p>
-            <a:pPr algn="ctr" indent="0" marL="0">
-              <a:buNone/>
-            </a:pPr>
-            <a:r>
-              <a:rPr lang="en-US" sz="1200" dirty="0">
+            <a:pPr indent="0" marL="0">
+              <a:buNone/>
+            </a:pPr>
+            <a:r>
+              <a:rPr lang="en-US" sz="1050" i="1" dirty="0">
                 <a:solidFill>
                   <a:srgbClr val="9FB3CC"/>
                 </a:solidFill>
@@ -15342,38 +20235,44 @@
                 <a:ea typeface="Calibri" pitchFamily="34" charset="-122"/>
                 <a:cs typeface="Calibri" pitchFamily="34" charset="-120"/>
               </a:rPr>
-              <a:t>global dashboard, live</a:t>
-            </a:r>
-            <a:endParaRPr lang="en-US" sz="1200" dirty="0"/>
-          </a:p>
-        </p:txBody>
-      </p:sp>
-      <p:sp>
-        <p:nvSpPr>
-          <p:cNvPr id="10" name="Text 7"/>
-          <p:cNvSpPr txBox="1"/>
-          <p:nvPr/>
-        </p:nvSpPr>
-        <p:spPr>
-          <a:xfrm>
-            <a:off x="1463040" y="4709160"/>
-            <a:ext cx="9262872" cy="777240"/>
-          </a:xfrm>
-          <a:prstGeom prst="rect">
-            <a:avLst/>
-          </a:prstGeom>
-          <a:noFill/>
-          <a:ln/>
-        </p:spPr>
-        <p:txBody>
-          <a:bodyPr wrap="square" lIns="0" tIns="0" rIns="0" bIns="0" rtlCol="0" anchor="ctr"/>
-          <a:lstStyle/>
-          <a:p>
-            <a:pPr algn="ctr" indent="0" marL="0">
-              <a:buNone/>
-            </a:pPr>
-            <a:r>
-              <a:rPr lang="en-US" sz="1250" dirty="0">
+              <a:t>domain context</a:t>
+            </a:r>
+            <a:endParaRPr lang="en-US" sz="1050" dirty="0"/>
+          </a:p>
+        </p:txBody>
+      </p:sp>
+      <p:sp>
+        <p:nvSpPr>
+          <p:cNvPr id="15" name="Text 13"/>
+          <p:cNvSpPr txBox="1"/>
+          <p:nvPr/>
+        </p:nvSpPr>
+        <p:spPr>
+          <a:xfrm>
+            <a:off x="8430768" y="3429000"/>
+            <a:ext cx="2843784" cy="1737360"/>
+          </a:xfrm>
+          <a:prstGeom prst="rect">
+            <a:avLst/>
+          </a:prstGeom>
+          <a:noFill/>
+          <a:ln/>
+        </p:spPr>
+        <p:txBody>
+          <a:bodyPr wrap="square" lIns="0" tIns="0" rIns="0" bIns="0" rtlCol="0" anchor="t"/>
+          <a:lstStyle/>
+          <a:p>
+            <a:pPr indent="0" marL="0">
+              <a:lnSpc>
+                <a:spcPct val="110000"/>
+              </a:lnSpc>
+              <a:spcAft>
+                <a:spcPts val="600"/>
+              </a:spcAft>
+              <a:buNone/>
+            </a:pPr>
+            <a:r>
+              <a:rPr lang="en-US" sz="1150" dirty="0">
                 <a:solidFill>
                   <a:srgbClr val="ECF1FA"/>
                 </a:solidFill>
@@ -15381,103 +20280,22 @@
                 <a:ea typeface="Calibri" pitchFamily="34" charset="-122"/>
                 <a:cs typeface="Calibri" pitchFamily="34" charset="-120"/>
               </a:rPr>
-              <a:t>tempest.js — a zero-dependency instrument board. Reads every registered world fresh, per request, and reads real session usage from both OpenCode's own store and Claude Code's transcripts — nothing cached, nothing guessed.</a:t>
-            </a:r>
-            <a:endParaRPr lang="en-US" sz="1250" dirty="0"/>
-          </a:p>
-        </p:txBody>
-      </p:sp>
-      <p:sp>
-        <p:nvSpPr>
-          <p:cNvPr id="11" name="Shape 8"/>
-          <p:cNvSpPr/>
-          <p:nvPr/>
-        </p:nvSpPr>
-        <p:spPr>
-          <a:xfrm>
-            <a:off x="2194560" y="5532120"/>
-            <a:ext cx="7799832" cy="0"/>
-          </a:xfrm>
-          <a:prstGeom prst="line">
-            <a:avLst/>
-          </a:prstGeom>
-          <a:noFill/>
-          <a:ln w="12700">
-            <a:solidFill>
-              <a:srgbClr val="1A2436"/>
-            </a:solidFill>
-            <a:prstDash val="solid"/>
-          </a:ln>
-        </p:spPr>
-      </p:sp>
-      <p:sp>
-        <p:nvSpPr>
-          <p:cNvPr id="12" name="Text 9"/>
-          <p:cNvSpPr txBox="1"/>
-          <p:nvPr/>
-        </p:nvSpPr>
-        <p:spPr>
-          <a:xfrm>
-            <a:off x="640080" y="5669280"/>
-            <a:ext cx="3636264" cy="411480"/>
-          </a:xfrm>
-          <a:prstGeom prst="rect">
-            <a:avLst/>
-          </a:prstGeom>
-          <a:noFill/>
-          <a:ln/>
-        </p:spPr>
-        <p:txBody>
-          <a:bodyPr wrap="square" lIns="0" tIns="0" rIns="0" bIns="0" rtlCol="0" anchor="ctr"/>
-          <a:lstStyle/>
-          <a:p>
-            <a:pPr algn="ctr" indent="0" marL="0">
-              <a:buNone/>
-            </a:pPr>
-            <a:r>
-              <a:rPr lang="en-US" sz="2000" b="1" dirty="0">
-                <a:solidFill>
-                  <a:srgbClr val="2695BD"/>
-                </a:solidFill>
-                <a:latin typeface="Cambria" pitchFamily="34" charset="0"/>
-                <a:ea typeface="Cambria" pitchFamily="34" charset="-122"/>
-                <a:cs typeface="Cambria" pitchFamily="34" charset="-120"/>
-              </a:rPr>
-              <a:t>1.18.31</a:t>
-            </a:r>
-            <a:endParaRPr lang="en-US" sz="2000" dirty="0"/>
-          </a:p>
-        </p:txBody>
-      </p:sp>
-      <p:sp>
-        <p:nvSpPr>
-          <p:cNvPr id="13" name="Text 10"/>
-          <p:cNvSpPr txBox="1"/>
-          <p:nvPr/>
-        </p:nvSpPr>
-        <p:spPr>
-          <a:xfrm>
-            <a:off x="868680" y="6053328"/>
-            <a:ext cx="3179064" cy="502920"/>
-          </a:xfrm>
-          <a:prstGeom prst="rect">
-            <a:avLst/>
-          </a:prstGeom>
-          <a:noFill/>
-          <a:ln/>
-        </p:spPr>
-        <p:txBody>
-          <a:bodyPr wrap="square" lIns="0" tIns="0" rIns="0" bIns="0" rtlCol="0" anchor="ctr"/>
-          <a:lstStyle/>
-          <a:p>
-            <a:pPr algn="ctr" indent="0" marL="0">
+              <a:t>What the numbers and entities actually mean in your territory.</a:t>
+            </a:r>
+            <a:endParaRPr lang="en-US" sz="1150" dirty="0"/>
+          </a:p>
+          <a:p>
+            <a:pPr indent="0" marL="0">
               <a:lnSpc>
-                <a:spcPct val="105000"/>
+                <a:spcPct val="110000"/>
               </a:lnSpc>
-              <a:buNone/>
-            </a:pPr>
-            <a:r>
-              <a:rPr lang="en-US" sz="950" dirty="0">
+              <a:spcAft>
+                <a:spcPts val="600"/>
+              </a:spcAft>
+              <a:buNone/>
+            </a:pPr>
+            <a:r>
+              <a:rPr lang="en-US" sz="1150" i="1" dirty="0">
                 <a:solidFill>
                   <a:srgbClr val="9FB3CC"/>
                 </a:solidFill>
@@ -15485,80 +20303,19 @@
                 <a:ea typeface="Calibri" pitchFamily="34" charset="-122"/>
                 <a:cs typeface="Calibri" pitchFamily="34" charset="-120"/>
               </a:rPr>
-              <a:t>OpenCode installed + run live here</a:t>
-            </a:r>
-            <a:endParaRPr lang="en-US" sz="950" dirty="0"/>
-          </a:p>
-        </p:txBody>
-      </p:sp>
-      <p:sp>
-        <p:nvSpPr>
-          <p:cNvPr id="14" name="Text 11"/>
-          <p:cNvSpPr txBox="1"/>
-          <p:nvPr/>
-        </p:nvSpPr>
-        <p:spPr>
-          <a:xfrm>
-            <a:off x="4276344" y="5669280"/>
-            <a:ext cx="3636264" cy="411480"/>
-          </a:xfrm>
-          <a:prstGeom prst="rect">
-            <a:avLst/>
-          </a:prstGeom>
-          <a:noFill/>
-          <a:ln/>
-        </p:spPr>
-        <p:txBody>
-          <a:bodyPr wrap="square" lIns="0" tIns="0" rIns="0" bIns="0" rtlCol="0" anchor="ctr"/>
-          <a:lstStyle/>
-          <a:p>
-            <a:pPr algn="ctr" indent="0" marL="0">
-              <a:buNone/>
-            </a:pPr>
-            <a:r>
-              <a:rPr lang="en-US" sz="2000" b="1" dirty="0">
-                <a:solidFill>
-                  <a:srgbClr val="BD8C24"/>
-                </a:solidFill>
-                <a:latin typeface="Cambria" pitchFamily="34" charset="0"/>
-                <a:ea typeface="Cambria" pitchFamily="34" charset="-122"/>
-                <a:cs typeface="Cambria" pitchFamily="34" charset="-120"/>
-              </a:rPr>
-              <a:t>842M</a:t>
-            </a:r>
-            <a:endParaRPr lang="en-US" sz="2000" dirty="0"/>
-          </a:p>
-        </p:txBody>
-      </p:sp>
-      <p:sp>
-        <p:nvSpPr>
-          <p:cNvPr id="15" name="Text 12"/>
-          <p:cNvSpPr txBox="1"/>
-          <p:nvPr/>
-        </p:nvSpPr>
-        <p:spPr>
-          <a:xfrm>
-            <a:off x="4504944" y="6053328"/>
-            <a:ext cx="3179064" cy="502920"/>
-          </a:xfrm>
-          <a:prstGeom prst="rect">
-            <a:avLst/>
-          </a:prstGeom>
-          <a:noFill/>
-          <a:ln/>
-        </p:spPr>
-        <p:txBody>
-          <a:bodyPr wrap="square" lIns="0" tIns="0" rIns="0" bIns="0" rtlCol="0" anchor="ctr"/>
-          <a:lstStyle/>
-          <a:p>
-            <a:pPr algn="ctr" indent="0" marL="0">
+              <a:t>Analogy: metadata</a:t>
+            </a:r>
+            <a:endParaRPr lang="en-US" sz="1150" dirty="0"/>
+          </a:p>
+          <a:p>
+            <a:pPr indent="0" marL="0">
               <a:lnSpc>
-                <a:spcPct val="105000"/>
+                <a:spcPct val="110000"/>
               </a:lnSpc>
               <a:buNone/>
             </a:pPr>
             <a:r>
-              <a:rPr lang="en-US" sz="950" dirty="0">
+              <a:rPr lang="en-US" sz="1150" dirty="0">
                 <a:solidFill>
                   <a:srgbClr val="9FB3CC"/>
                 </a:solidFill>
@@ -15566,119 +20323,66 @@
                 <a:ea typeface="Calibri" pitchFamily="34" charset="-122"/>
                 <a:cs typeface="Calibri" pitchFamily="34" charset="-120"/>
               </a:rPr>
-              <a:t>real input tokens correctly counted (was 0.0M — undercount found by testing)</a:t>
-            </a:r>
-            <a:endParaRPr lang="en-US" sz="950" dirty="0"/>
-          </a:p>
-        </p:txBody>
-      </p:sp>
-      <p:sp>
-        <p:nvSpPr>
-          <p:cNvPr id="16" name="Text 13"/>
-          <p:cNvSpPr txBox="1"/>
-          <p:nvPr/>
-        </p:nvSpPr>
-        <p:spPr>
-          <a:xfrm>
-            <a:off x="7912608" y="5669280"/>
-            <a:ext cx="3636264" cy="411480"/>
-          </a:xfrm>
-          <a:prstGeom prst="rect">
-            <a:avLst/>
-          </a:prstGeom>
-          <a:noFill/>
-          <a:ln/>
-        </p:spPr>
-        <p:txBody>
-          <a:bodyPr wrap="square" lIns="0" tIns="0" rIns="0" bIns="0" rtlCol="0" anchor="ctr"/>
-          <a:lstStyle/>
-          <a:p>
-            <a:pPr algn="ctr" indent="0" marL="0">
-              <a:buNone/>
-            </a:pPr>
-            <a:r>
-              <a:rPr lang="en-US" sz="2000" b="1" dirty="0">
-                <a:solidFill>
-                  <a:srgbClr val="7C5CD6"/>
-                </a:solidFill>
-                <a:latin typeface="Cambria" pitchFamily="34" charset="0"/>
-                <a:ea typeface="Cambria" pitchFamily="34" charset="-122"/>
-                <a:cs typeface="Cambria" pitchFamily="34" charset="-120"/>
-              </a:rPr>
-              <a:t>3</a:t>
-            </a:r>
-            <a:endParaRPr lang="en-US" sz="2000" dirty="0"/>
-          </a:p>
-        </p:txBody>
-      </p:sp>
-      <p:sp>
-        <p:nvSpPr>
-          <p:cNvPr id="17" name="Text 14"/>
-          <p:cNvSpPr txBox="1"/>
-          <p:nvPr/>
-        </p:nvSpPr>
-        <p:spPr>
-          <a:xfrm>
-            <a:off x="8141208" y="6053328"/>
-            <a:ext cx="3179064" cy="502920"/>
-          </a:xfrm>
-          <a:prstGeom prst="rect">
-            <a:avLst/>
-          </a:prstGeom>
-          <a:noFill/>
-          <a:ln/>
-        </p:spPr>
-        <p:txBody>
-          <a:bodyPr wrap="square" lIns="0" tIns="0" rIns="0" bIns="0" rtlCol="0" anchor="ctr"/>
-          <a:lstStyle/>
-          <a:p>
-            <a:pPr algn="ctr" indent="0" marL="0">
-              <a:lnSpc>
-                <a:spcPct val="105000"/>
-              </a:lnSpc>
-              <a:buNone/>
-            </a:pPr>
-            <a:r>
-              <a:rPr lang="en-US" sz="950" dirty="0">
-                <a:solidFill>
-                  <a:srgbClr val="9FB3CC"/>
+              <a:t>Home: the Slime's own doc — the zone's ground truth</a:t>
+            </a:r>
+            <a:endParaRPr lang="en-US" sz="1150" dirty="0"/>
+          </a:p>
+        </p:txBody>
+      </p:sp>
+      <p:sp>
+        <p:nvSpPr>
+          <p:cNvPr id="16" name="Text 14"/>
+          <p:cNvSpPr txBox="1"/>
+          <p:nvPr/>
+        </p:nvSpPr>
+        <p:spPr>
+          <a:xfrm>
+            <a:off x="640080" y="5394960"/>
+            <a:ext cx="10908792" cy="822960"/>
+          </a:xfrm>
+          <a:prstGeom prst="rect">
+            <a:avLst/>
+          </a:prstGeom>
+          <a:noFill/>
+          <a:ln/>
+        </p:spPr>
+        <p:txBody>
+          <a:bodyPr wrap="square" lIns="0" tIns="0" rIns="0" bIns="0" rtlCol="0" anchor="t"/>
+          <a:lstStyle/>
+          <a:p>
+            <a:pPr indent="0" marL="0">
+              <a:buNone/>
+            </a:pPr>
+            <a:r>
+              <a:rPr lang="en-US" sz="1200" b="1" dirty="0">
+                <a:solidFill>
+                  <a:srgbClr val="ECF1FA"/>
                 </a:solidFill>
                 <a:latin typeface="Calibri" pitchFamily="34" charset="0"/>
                 <a:ea typeface="Calibri" pitchFamily="34" charset="-122"/>
                 <a:cs typeface="Calibri" pitchFamily="34" charset="-120"/>
               </a:rPr>
-              <a:t>real bugs found and fixed by an actual test script, not assumed away</a:t>
-            </a:r>
-            <a:endParaRPr lang="en-US" sz="950" dirty="0"/>
-          </a:p>
-        </p:txBody>
-      </p:sp>
-      <p:sp>
-        <p:nvSpPr>
-          <p:cNvPr id="18" name="Text 15"/>
-          <p:cNvSpPr txBox="1"/>
-          <p:nvPr/>
-        </p:nvSpPr>
-        <p:spPr>
-          <a:xfrm>
-            <a:off x="457200" y="6400800"/>
-            <a:ext cx="7315200" cy="274320"/>
-          </a:xfrm>
-          <a:prstGeom prst="rect">
-            <a:avLst/>
-          </a:prstGeom>
-          <a:noFill/>
-          <a:ln/>
-        </p:spPr>
-        <p:txBody>
-          <a:bodyPr wrap="square" lIns="0" tIns="0" rIns="0" bIns="0" rtlCol="0" anchor="ctr"/>
-          <a:lstStyle/>
-          <a:p>
-            <a:pPr indent="0" marL="0">
-              <a:buNone/>
-            </a:pPr>
-            <a:r>
-              <a:rPr lang="en-US" sz="900" spc="100" kern="0" dirty="0">
+              <a:t>On the wire: </a:t>
+            </a:r>
+            <a:pPr indent="0" marL="0">
+              <a:buNone/>
+            </a:pPr>
+            <a:r>
+              <a:rPr lang="en-US" sz="1200" dirty="0">
+                <a:solidFill>
+                  <a:srgbClr val="BD8C24"/>
+                </a:solidFill>
+                <a:latin typeface="Courier New" pitchFamily="34" charset="0"/>
+                <a:ea typeface="Courier New" pitchFamily="34" charset="-122"/>
+                <a:cs typeface="Courier New" pitchFamily="34" charset="-120"/>
+              </a:rPr>
+              <a:t>@U &lt;kind&gt; …</a:t>
+            </a:r>
+            <a:pPr indent="0" marL="0">
+              <a:buNone/>
+            </a:pPr>
+            <a:r>
+              <a:rPr lang="en-US" sz="1200" dirty="0">
                 <a:solidFill>
                   <a:srgbClr val="9FB3CC"/>
                 </a:solidFill>
@@ -15686,6 +20390,73 @@
                 <a:ea typeface="Calibri" pitchFamily="34" charset="-122"/>
                 <a:cs typeface="Calibri" pitchFamily="34" charset="-120"/>
               </a:rPr>
+              <a:t> — one piece of knowledge that was in the worker's head and nowhere on disk. A Court Body's report with no @U line either had nothing unsaid or failed its duty; the dispatcher may ask with </a:t>
+            </a:r>
+            <a:pPr indent="0" marL="0">
+              <a:buNone/>
+            </a:pPr>
+            <a:r>
+              <a:rPr lang="en-US" sz="1200" dirty="0">
+                <a:solidFill>
+                  <a:srgbClr val="BD8C24"/>
+                </a:solidFill>
+                <a:latin typeface="Courier New" pitchFamily="34" charset="0"/>
+                <a:ea typeface="Courier New" pitchFamily="34" charset="-122"/>
+                <a:cs typeface="Courier New" pitchFamily="34" charset="-120"/>
+              </a:rPr>
+              <a:t>@ASK … +unsaid</a:t>
+            </a:r>
+            <a:pPr indent="0" marL="0">
+              <a:buNone/>
+            </a:pPr>
+            <a:r>
+              <a:rPr lang="en-US" sz="1200" dirty="0">
+                <a:solidFill>
+                  <a:srgbClr val="9FB3CC"/>
+                </a:solidFill>
+                <a:latin typeface="Calibri" pitchFamily="34" charset="0"/>
+                <a:ea typeface="Calibri" pitchFamily="34" charset="-122"/>
+                <a:cs typeface="Calibri" pitchFamily="34" charset="-120"/>
+              </a:rPr>
+              <a:t>. Surface it before the context dies, before the gate verdict, before the distill wave.</a:t>
+            </a:r>
+            <a:endParaRPr lang="en-US" sz="1200" dirty="0"/>
+          </a:p>
+        </p:txBody>
+      </p:sp>
+      <p:sp>
+        <p:nvSpPr>
+          <p:cNvPr id="17" name="Text 15"/>
+          <p:cNvSpPr txBox="1"/>
+          <p:nvPr/>
+        </p:nvSpPr>
+        <p:spPr>
+          <a:xfrm>
+            <a:off x="457200" y="6400800"/>
+            <a:ext cx="7315200" cy="274320"/>
+          </a:xfrm>
+          <a:prstGeom prst="rect">
+            <a:avLst/>
+          </a:prstGeom>
+          <a:noFill/>
+          <a:ln/>
+        </p:spPr>
+        <p:txBody>
+          <a:bodyPr wrap="square" lIns="0" tIns="0" rIns="0" bIns="0" rtlCol="0" anchor="ctr"/>
+          <a:lstStyle/>
+          <a:p>
+            <a:pPr indent="0" marL="0">
+              <a:buNone/>
+            </a:pPr>
+            <a:r>
+              <a:rPr lang="en-US" sz="900" spc="100" kern="0" dirty="0">
+                <a:solidFill>
+                  <a:srgbClr val="9FB3CC"/>
+                </a:solidFill>
+                <a:latin typeface="Calibri" pitchFamily="34" charset="0"/>
+                <a:ea typeface="Calibri" pitchFamily="34" charset="-122"/>
+                <a:cs typeface="Calibri" pitchFamily="34" charset="-120"/>
+              </a:rPr>
               <a:t>ISEKAI ⋄ A CONVENTION FOR LIVING WORLDS</a:t>
             </a:r>
             <a:endParaRPr lang="en-US" sz="900" dirty="0"/>
@@ -15694,7 +20465,7 @@
       </p:sp>
       <p:sp>
         <p:nvSpPr>
-          <p:cNvPr id="19" name="Text 16"/>
+          <p:cNvPr id="18" name="Text 16"/>
           <p:cNvSpPr txBox="1"/>
           <p:nvPr/>
         </p:nvSpPr>
